--- a/ppt/面向金融的蜂群多智能体系统-答辩材料/面向金融的蜂群多智能体系统-答辩材料.pptx
+++ b/ppt/面向金融的蜂群多智能体系统-答辩材料/面向金融的蜂群多智能体系统-答辩材料.pptx
@@ -237,6 +237,617 @@
     </a:lvl9pPr>
   </p:notesStyle>
 </p:notesMaster>
+</file>
+
+<file path=ppt/notesSlides/notesSlide1.xml><?xml version="1.0" encoding="utf-8"?>
+<p:notes xmlns:p="http://schemas.openxmlformats.org/presentationml/2006/main" xmlns:a="http://schemas.openxmlformats.org/drawingml/2006/main" xmlns:r="http://schemas.openxmlformats.org/officeDocument/2006/relationships">
+  <p:cSld>
+    <p:spTree>
+      <p:nvGrpSpPr>
+        <p:cNvPr id="1" name=""/>
+        <p:cNvGrpSpPr/>
+        <p:nvPr/>
+      </p:nvGrpSpPr>
+      <p:grpSpPr>
+        <a:xfrm>
+          <a:off x="0" y="0"/>
+          <a:ext cx="0" cy="0"/>
+          <a:chOff x="0" y="0"/>
+          <a:chExt cx="0" cy="0"/>
+        </a:xfrm>
+      </p:grpSpPr>
+      <p:sp>
+        <p:nvSpPr>
+          <p:cNvPr id="2" name="备注占位符 1"/>
+          <p:cNvSpPr>
+            <a:spLocks noGrp="1"/>
+          </p:cNvSpPr>
+          <p:nvPr>
+            <p:ph type="body" idx="1"/>
+          </p:nvPr>
+        </p:nvSpPr>
+        <p:spPr/>
+        <p:txBody>
+          <a:bodyPr/>
+          <a:lstStyle/>
+          <a:p>
+            <a:r>
+              <a:rPr lang="zh-CN" altLang="en-US" dirty="0"/>
+              <a:t>开场一句话：我们做了一个银行智能体，它不会乱动钱，出了事说得清。</a:t>
+            </a:r>
+          </a:p>
+        </p:txBody>
+      </p:sp>
+    </p:spTree>
+  </p:cSld>
+  <p:clrMapOvr>
+    <a:masterClrMapping/>
+  </p:clrMapOvr>
+</p:notes>
+</file>
+
+<file path=ppt/notesSlides/notesSlide10.xml><?xml version="1.0" encoding="utf-8"?>
+<p:notes xmlns:p="http://schemas.openxmlformats.org/presentationml/2006/main" xmlns:a="http://schemas.openxmlformats.org/drawingml/2006/main" xmlns:r="http://schemas.openxmlformats.org/officeDocument/2006/relationships">
+  <p:cSld>
+    <p:spTree>
+      <p:nvGrpSpPr>
+        <p:cNvPr id="1" name=""/>
+        <p:cNvGrpSpPr/>
+        <p:nvPr/>
+      </p:nvGrpSpPr>
+      <p:grpSpPr>
+        <a:xfrm>
+          <a:off x="0" y="0"/>
+          <a:ext cx="0" cy="0"/>
+          <a:chOff x="0" y="0"/>
+          <a:chExt cx="0" cy="0"/>
+        </a:xfrm>
+      </p:grpSpPr>
+      <p:sp>
+        <p:nvSpPr>
+          <p:cNvPr id="2" name="备注占位符 1"/>
+          <p:cNvSpPr>
+            <a:spLocks noGrp="1"/>
+          </p:cNvSpPr>
+          <p:nvPr>
+            <p:ph type="body" idx="1"/>
+          </p:nvPr>
+        </p:nvSpPr>
+        <p:spPr/>
+        <p:txBody>
+          <a:bodyPr/>
+          <a:lstStyle/>
+          <a:p>
+            <a:r>
+              <a:rPr lang="zh-CN" altLang="en-US" dirty="0"/>
+              <a:t>三套能力收敛成一份描述符。新增一个工具三步搞定，不用动主循环。</a:t>
+            </a:r>
+          </a:p>
+        </p:txBody>
+      </p:sp>
+    </p:spTree>
+  </p:cSld>
+  <p:clrMapOvr>
+    <a:masterClrMapping/>
+  </p:clrMapOvr>
+</p:notes>
+</file>
+
+<file path=ppt/notesSlides/notesSlide11.xml><?xml version="1.0" encoding="utf-8"?>
+<p:notes xmlns:p="http://schemas.openxmlformats.org/presentationml/2006/main" xmlns:a="http://schemas.openxmlformats.org/drawingml/2006/main" xmlns:r="http://schemas.openxmlformats.org/officeDocument/2006/relationships">
+  <p:cSld>
+    <p:spTree>
+      <p:nvGrpSpPr>
+        <p:cNvPr id="1" name=""/>
+        <p:cNvGrpSpPr/>
+        <p:nvPr/>
+      </p:nvGrpSpPr>
+      <p:grpSpPr>
+        <a:xfrm>
+          <a:off x="0" y="0"/>
+          <a:ext cx="0" cy="0"/>
+          <a:chOff x="0" y="0"/>
+          <a:chExt cx="0" cy="0"/>
+        </a:xfrm>
+      </p:grpSpPr>
+      <p:sp>
+        <p:nvSpPr>
+          <p:cNvPr id="2" name="备注占位符 1"/>
+          <p:cNvSpPr>
+            <a:spLocks noGrp="1"/>
+          </p:cNvSpPr>
+          <p:nvPr>
+            <p:ph type="body" idx="1"/>
+          </p:nvPr>
+        </p:nvSpPr>
+        <p:spPr/>
+        <p:txBody>
+          <a:bodyPr/>
+          <a:lstStyle/>
+          <a:p>
+            <a:r>
+              <a:rPr lang="zh-CN" altLang="en-US" dirty="0"/>
+              <a:t>每个数字都配了验证命令和完整输出，评委可以原样复跑，不是只听我们说。</a:t>
+            </a:r>
+          </a:p>
+        </p:txBody>
+      </p:sp>
+    </p:spTree>
+  </p:cSld>
+  <p:clrMapOvr>
+    <a:masterClrMapping/>
+  </p:clrMapOvr>
+</p:notes>
+</file>
+
+<file path=ppt/notesSlides/notesSlide12.xml><?xml version="1.0" encoding="utf-8"?>
+<p:notes xmlns:p="http://schemas.openxmlformats.org/presentationml/2006/main" xmlns:a="http://schemas.openxmlformats.org/drawingml/2006/main" xmlns:r="http://schemas.openxmlformats.org/officeDocument/2006/relationships">
+  <p:cSld>
+    <p:spTree>
+      <p:nvGrpSpPr>
+        <p:cNvPr id="1" name=""/>
+        <p:cNvGrpSpPr/>
+        <p:nvPr/>
+      </p:nvGrpSpPr>
+      <p:grpSpPr>
+        <a:xfrm>
+          <a:off x="0" y="0"/>
+          <a:ext cx="0" cy="0"/>
+          <a:chOff x="0" y="0"/>
+          <a:chExt cx="0" cy="0"/>
+        </a:xfrm>
+      </p:grpSpPr>
+      <p:sp>
+        <p:nvSpPr>
+          <p:cNvPr id="2" name="备注占位符 1"/>
+          <p:cNvSpPr>
+            <a:spLocks noGrp="1"/>
+          </p:cNvSpPr>
+          <p:nvPr>
+            <p:ph type="body" idx="1"/>
+          </p:nvPr>
+        </p:nvSpPr>
+        <p:spPr/>
+        <p:txBody>
+          <a:bodyPr/>
+          <a:lstStyle/>
+          <a:p>
+            <a:r>
+              <a:rPr lang="zh-CN" altLang="en-US" dirty="0"/>
+              <a:t>这一页是加分项。八项已知风险，每项写清影响、缓解、残余风险和建议，还列了没测到的范围。</a:t>
+            </a:r>
+          </a:p>
+        </p:txBody>
+      </p:sp>
+    </p:spTree>
+  </p:cSld>
+  <p:clrMapOvr>
+    <a:masterClrMapping/>
+  </p:clrMapOvr>
+</p:notes>
+</file>
+
+<file path=ppt/notesSlides/notesSlide13.xml><?xml version="1.0" encoding="utf-8"?>
+<p:notes xmlns:p="http://schemas.openxmlformats.org/presentationml/2006/main" xmlns:a="http://schemas.openxmlformats.org/drawingml/2006/main" xmlns:r="http://schemas.openxmlformats.org/officeDocument/2006/relationships">
+  <p:cSld>
+    <p:spTree>
+      <p:nvGrpSpPr>
+        <p:cNvPr id="1" name=""/>
+        <p:cNvGrpSpPr/>
+        <p:nvPr/>
+      </p:nvGrpSpPr>
+      <p:grpSpPr>
+        <a:xfrm>
+          <a:off x="0" y="0"/>
+          <a:ext cx="0" cy="0"/>
+          <a:chOff x="0" y="0"/>
+          <a:chExt cx="0" cy="0"/>
+        </a:xfrm>
+      </p:grpSpPr>
+      <p:sp>
+        <p:nvSpPr>
+          <p:cNvPr id="2" name="备注占位符 1"/>
+          <p:cNvSpPr>
+            <a:spLocks noGrp="1"/>
+          </p:cNvSpPr>
+          <p:nvPr>
+            <p:ph type="body" idx="1"/>
+          </p:nvPr>
+        </p:nvSpPr>
+        <p:spPr/>
+        <p:txBody>
+          <a:bodyPr/>
+          <a:lstStyle/>
+          <a:p>
+            <a:r>
+              <a:rPr lang="zh-CN" altLang="en-US" dirty="0"/>
+              <a:t>把一件事拆给多个专职角色，比换更强的模型更可靠。谢谢各位评委。</a:t>
+            </a:r>
+          </a:p>
+        </p:txBody>
+      </p:sp>
+    </p:spTree>
+  </p:cSld>
+  <p:clrMapOvr>
+    <a:masterClrMapping/>
+  </p:clrMapOvr>
+</p:notes>
+</file>
+
+<file path=ppt/notesSlides/notesSlide2.xml><?xml version="1.0" encoding="utf-8"?>
+<p:notes xmlns:p="http://schemas.openxmlformats.org/presentationml/2006/main" xmlns:a="http://schemas.openxmlformats.org/drawingml/2006/main" xmlns:r="http://schemas.openxmlformats.org/officeDocument/2006/relationships">
+  <p:cSld>
+    <p:spTree>
+      <p:nvGrpSpPr>
+        <p:cNvPr id="1" name=""/>
+        <p:cNvGrpSpPr/>
+        <p:nvPr/>
+      </p:nvGrpSpPr>
+      <p:grpSpPr>
+        <a:xfrm>
+          <a:off x="0" y="0"/>
+          <a:ext cx="0" cy="0"/>
+          <a:chOff x="0" y="0"/>
+          <a:chExt cx="0" cy="0"/>
+        </a:xfrm>
+      </p:grpSpPr>
+      <p:sp>
+        <p:nvSpPr>
+          <p:cNvPr id="2" name="备注占位符 1"/>
+          <p:cNvSpPr>
+            <a:spLocks noGrp="1"/>
+          </p:cNvSpPr>
+          <p:nvPr>
+            <p:ph type="body" idx="1"/>
+          </p:nvPr>
+        </p:nvSpPr>
+        <p:spPr/>
+        <p:txBody>
+          <a:bodyPr/>
+          <a:lstStyle/>
+          <a:p>
+            <a:r>
+              <a:rPr lang="zh-CN" altLang="en-US" dirty="0"/>
+              <a:t>三个数字：九十一项测试全通，二十一个内置工具加四个外部服务，注入拦截百分之百且正常请求零误拦。每个数字都能在评委机器上复跑。</a:t>
+            </a:r>
+          </a:p>
+        </p:txBody>
+      </p:sp>
+    </p:spTree>
+  </p:cSld>
+  <p:clrMapOvr>
+    <a:masterClrMapping/>
+  </p:clrMapOvr>
+</p:notes>
+</file>
+
+<file path=ppt/notesSlides/notesSlide3.xml><?xml version="1.0" encoding="utf-8"?>
+<p:notes xmlns:p="http://schemas.openxmlformats.org/presentationml/2006/main" xmlns:a="http://schemas.openxmlformats.org/drawingml/2006/main" xmlns:r="http://schemas.openxmlformats.org/officeDocument/2006/relationships">
+  <p:cSld>
+    <p:spTree>
+      <p:nvGrpSpPr>
+        <p:cNvPr id="1" name=""/>
+        <p:cNvGrpSpPr/>
+        <p:nvPr/>
+      </p:nvGrpSpPr>
+      <p:grpSpPr>
+        <a:xfrm>
+          <a:off x="0" y="0"/>
+          <a:ext cx="0" cy="0"/>
+          <a:chOff x="0" y="0"/>
+          <a:chExt cx="0" cy="0"/>
+        </a:xfrm>
+      </p:grpSpPr>
+      <p:sp>
+        <p:nvSpPr>
+          <p:cNvPr id="2" name="备注占位符 1"/>
+          <p:cNvSpPr>
+            <a:spLocks noGrp="1"/>
+          </p:cNvSpPr>
+          <p:nvPr>
+            <p:ph type="body" idx="1"/>
+          </p:nvPr>
+        </p:nvSpPr>
+        <p:spPr/>
+        <p:txBody>
+          <a:bodyPr/>
+          <a:lstStyle/>
+          <a:p>
+            <a:r>
+              <a:rPr lang="zh-CN" altLang="en-US" dirty="0"/>
+              <a:t>传统做法是一个大脑包办所有事，代价有三处：判不准、说不清、改不动。这三点直接决定了我们后面每一个设计选择。</a:t>
+            </a:r>
+          </a:p>
+        </p:txBody>
+      </p:sp>
+    </p:spTree>
+  </p:cSld>
+  <p:clrMapOvr>
+    <a:masterClrMapping/>
+  </p:clrMapOvr>
+</p:notes>
+</file>
+
+<file path=ppt/notesSlides/notesSlide4.xml><?xml version="1.0" encoding="utf-8"?>
+<p:notes xmlns:p="http://schemas.openxmlformats.org/presentationml/2006/main" xmlns:a="http://schemas.openxmlformats.org/drawingml/2006/main" xmlns:r="http://schemas.openxmlformats.org/officeDocument/2006/relationships">
+  <p:cSld>
+    <p:spTree>
+      <p:nvGrpSpPr>
+        <p:cNvPr id="1" name=""/>
+        <p:cNvGrpSpPr/>
+        <p:nvPr/>
+      </p:nvGrpSpPr>
+      <p:grpSpPr>
+        <a:xfrm>
+          <a:off x="0" y="0"/>
+          <a:ext cx="0" cy="0"/>
+          <a:chOff x="0" y="0"/>
+          <a:chExt cx="0" cy="0"/>
+        </a:xfrm>
+      </p:grpSpPr>
+      <p:sp>
+        <p:nvSpPr>
+          <p:cNvPr id="2" name="备注占位符 1"/>
+          <p:cNvSpPr>
+            <a:spLocks noGrp="1"/>
+          </p:cNvSpPr>
+          <p:nvPr>
+            <p:ph type="body" idx="1"/>
+          </p:nvPr>
+        </p:nvSpPr>
+        <p:spPr/>
+        <p:txBody>
+          <a:bodyPr/>
+          <a:lstStyle/>
+          <a:p>
+            <a:r>
+              <a:rPr lang="zh-CN" altLang="en-US" dirty="0"/>
+              <a:t>五个角色各管一件事。风控、合规、体验三个评估官并行跑，任一失败不拖累其余。仲裁官取最高风险，任一否决即拦。</a:t>
+            </a:r>
+          </a:p>
+        </p:txBody>
+      </p:sp>
+    </p:spTree>
+  </p:cSld>
+  <p:clrMapOvr>
+    <a:masterClrMapping/>
+  </p:clrMapOvr>
+</p:notes>
+</file>
+
+<file path=ppt/notesSlides/notesSlide5.xml><?xml version="1.0" encoding="utf-8"?>
+<p:notes xmlns:p="http://schemas.openxmlformats.org/presentationml/2006/main" xmlns:a="http://schemas.openxmlformats.org/drawingml/2006/main" xmlns:r="http://schemas.openxmlformats.org/officeDocument/2006/relationships">
+  <p:cSld>
+    <p:spTree>
+      <p:nvGrpSpPr>
+        <p:cNvPr id="1" name=""/>
+        <p:cNvGrpSpPr/>
+        <p:nvPr/>
+      </p:nvGrpSpPr>
+      <p:grpSpPr>
+        <a:xfrm>
+          <a:off x="0" y="0"/>
+          <a:ext cx="0" cy="0"/>
+          <a:chOff x="0" y="0"/>
+          <a:chExt cx="0" cy="0"/>
+        </a:xfrm>
+      </p:grpSpPr>
+      <p:sp>
+        <p:nvSpPr>
+          <p:cNvPr id="2" name="备注占位符 1"/>
+          <p:cNvSpPr>
+            <a:spLocks noGrp="1"/>
+          </p:cNvSpPr>
+          <p:nvPr>
+            <p:ph type="body" idx="1"/>
+          </p:nvPr>
+        </p:nvSpPr>
+        <p:spPr/>
+        <p:txBody>
+          <a:bodyPr/>
+          <a:lstStyle/>
+          <a:p>
+            <a:r>
+              <a:rPr lang="zh-CN" altLang="en-US" dirty="0"/>
+              <a:t>用一条转账讲完链路：守卫、意图、三评估、仲裁、令牌、执行、审计。评委记住一条链路就够。</a:t>
+            </a:r>
+          </a:p>
+        </p:txBody>
+      </p:sp>
+    </p:spTree>
+  </p:cSld>
+  <p:clrMapOvr>
+    <a:masterClrMapping/>
+  </p:clrMapOvr>
+</p:notes>
+</file>
+
+<file path=ppt/notesSlides/notesSlide6.xml><?xml version="1.0" encoding="utf-8"?>
+<p:notes xmlns:p="http://schemas.openxmlformats.org/presentationml/2006/main" xmlns:a="http://schemas.openxmlformats.org/drawingml/2006/main" xmlns:r="http://schemas.openxmlformats.org/officeDocument/2006/relationships">
+  <p:cSld>
+    <p:spTree>
+      <p:nvGrpSpPr>
+        <p:cNvPr id="1" name=""/>
+        <p:cNvGrpSpPr/>
+        <p:nvPr/>
+      </p:nvGrpSpPr>
+      <p:grpSpPr>
+        <a:xfrm>
+          <a:off x="0" y="0"/>
+          <a:ext cx="0" cy="0"/>
+          <a:chOff x="0" y="0"/>
+          <a:chExt cx="0" cy="0"/>
+        </a:xfrm>
+      </p:grpSpPr>
+      <p:sp>
+        <p:nvSpPr>
+          <p:cNvPr id="2" name="备注占位符 1"/>
+          <p:cNvSpPr>
+            <a:spLocks noGrp="1"/>
+          </p:cNvSpPr>
+          <p:nvPr>
+            <p:ph type="body" idx="1"/>
+          </p:nvPr>
+        </p:nvSpPr>
+        <p:spPr/>
+        <p:txBody>
+          <a:bodyPr/>
+          <a:lstStyle/>
+          <a:p>
+            <a:r>
+              <a:rPr lang="zh-CN" altLang="en-US" dirty="0"/>
+              <a:t>三色是结论，四维是依据。点开任何一条判定，都能看到具体规则编号和数字。</a:t>
+            </a:r>
+          </a:p>
+        </p:txBody>
+      </p:sp>
+    </p:spTree>
+  </p:cSld>
+  <p:clrMapOvr>
+    <a:masterClrMapping/>
+  </p:clrMapOvr>
+</p:notes>
+</file>
+
+<file path=ppt/notesSlides/notesSlide7.xml><?xml version="1.0" encoding="utf-8"?>
+<p:notes xmlns:p="http://schemas.openxmlformats.org/presentationml/2006/main" xmlns:a="http://schemas.openxmlformats.org/drawingml/2006/main" xmlns:r="http://schemas.openxmlformats.org/officeDocument/2006/relationships">
+  <p:cSld>
+    <p:spTree>
+      <p:nvGrpSpPr>
+        <p:cNvPr id="1" name=""/>
+        <p:cNvGrpSpPr/>
+        <p:nvPr/>
+      </p:nvGrpSpPr>
+      <p:grpSpPr>
+        <a:xfrm>
+          <a:off x="0" y="0"/>
+          <a:ext cx="0" cy="0"/>
+          <a:chOff x="0" y="0"/>
+          <a:chExt cx="0" cy="0"/>
+        </a:xfrm>
+      </p:grpSpPr>
+      <p:sp>
+        <p:nvSpPr>
+          <p:cNvPr id="2" name="备注占位符 1"/>
+          <p:cNvSpPr>
+            <a:spLocks noGrp="1"/>
+          </p:cNvSpPr>
+          <p:nvPr>
+            <p:ph type="body" idx="1"/>
+          </p:nvPr>
+        </p:nvSpPr>
+        <p:spPr/>
+        <p:txBody>
+          <a:bodyPr/>
+          <a:lstStyle/>
+          <a:p>
+            <a:r>
+              <a:rPr lang="zh-CN" altLang="en-US" dirty="0"/>
+              <a:t>四道闸顺序不能错：守卫在最前，令牌在判定之后。顺序错了就有绕过路径。</a:t>
+            </a:r>
+          </a:p>
+        </p:txBody>
+      </p:sp>
+    </p:spTree>
+  </p:cSld>
+  <p:clrMapOvr>
+    <a:masterClrMapping/>
+  </p:clrMapOvr>
+</p:notes>
+</file>
+
+<file path=ppt/notesSlides/notesSlide8.xml><?xml version="1.0" encoding="utf-8"?>
+<p:notes xmlns:p="http://schemas.openxmlformats.org/presentationml/2006/main" xmlns:a="http://schemas.openxmlformats.org/drawingml/2006/main" xmlns:r="http://schemas.openxmlformats.org/officeDocument/2006/relationships">
+  <p:cSld>
+    <p:spTree>
+      <p:nvGrpSpPr>
+        <p:cNvPr id="1" name=""/>
+        <p:cNvGrpSpPr/>
+        <p:nvPr/>
+      </p:nvGrpSpPr>
+      <p:grpSpPr>
+        <a:xfrm>
+          <a:off x="0" y="0"/>
+          <a:ext cx="0" cy="0"/>
+          <a:chOff x="0" y="0"/>
+          <a:chExt cx="0" cy="0"/>
+        </a:xfrm>
+      </p:grpSpPr>
+      <p:sp>
+        <p:nvSpPr>
+          <p:cNvPr id="2" name="备注占位符 1"/>
+          <p:cNvSpPr>
+            <a:spLocks noGrp="1"/>
+          </p:cNvSpPr>
+          <p:nvPr>
+            <p:ph type="body" idx="1"/>
+          </p:nvPr>
+        </p:nvSpPr>
+        <p:spPr/>
+        <p:txBody>
+          <a:bodyPr/>
+          <a:lstStyle/>
+          <a:p>
+            <a:r>
+              <a:rPr lang="zh-CN" altLang="en-US" dirty="0"/>
+              <a:t>规则优先，模型兜底，契约再兜底。模型错就退回规则，不阻塞对话。</a:t>
+            </a:r>
+          </a:p>
+        </p:txBody>
+      </p:sp>
+    </p:spTree>
+  </p:cSld>
+  <p:clrMapOvr>
+    <a:masterClrMapping/>
+  </p:clrMapOvr>
+</p:notes>
+</file>
+
+<file path=ppt/notesSlides/notesSlide9.xml><?xml version="1.0" encoding="utf-8"?>
+<p:notes xmlns:p="http://schemas.openxmlformats.org/presentationml/2006/main" xmlns:a="http://schemas.openxmlformats.org/drawingml/2006/main" xmlns:r="http://schemas.openxmlformats.org/officeDocument/2006/relationships">
+  <p:cSld>
+    <p:spTree>
+      <p:nvGrpSpPr>
+        <p:cNvPr id="1" name=""/>
+        <p:cNvGrpSpPr/>
+        <p:nvPr/>
+      </p:nvGrpSpPr>
+      <p:grpSpPr>
+        <a:xfrm>
+          <a:off x="0" y="0"/>
+          <a:ext cx="0" cy="0"/>
+          <a:chOff x="0" y="0"/>
+          <a:chExt cx="0" cy="0"/>
+        </a:xfrm>
+      </p:grpSpPr>
+      <p:sp>
+        <p:nvSpPr>
+          <p:cNvPr id="2" name="备注占位符 1"/>
+          <p:cNvSpPr>
+            <a:spLocks noGrp="1"/>
+          </p:cNvSpPr>
+          <p:nvPr>
+            <p:ph type="body" idx="1"/>
+          </p:nvPr>
+        </p:nvSpPr>
+        <p:spPr/>
+        <p:txBody>
+          <a:bodyPr/>
+          <a:lstStyle/>
+          <a:p>
+            <a:r>
+              <a:rPr lang="zh-CN" altLang="en-US" dirty="0"/>
+              <a:t>数字只来自工具返回，模型不产数字。审计链每条带前序哈希，改一条就断，实测改首行后校验立即失败。</a:t>
+            </a:r>
+          </a:p>
+        </p:txBody>
+      </p:sp>
+    </p:spTree>
+  </p:cSld>
+  <p:clrMapOvr>
+    <a:masterClrMapping/>
+  </p:clrMapOvr>
+</p:notes>
 </file>
 
 <file path=ppt/slideLayouts/slideLayout1.xml><?xml version="1.0" encoding="utf-8"?>
@@ -2088,6 +2699,7 @@
       </p:sp>
     </p:spTree>
   </p:cSld>
+  <p:extLst/>
 </p:sld>
 </file>
 
@@ -2935,6 +3547,7 @@
       </p:sp>
     </p:spTree>
   </p:cSld>
+  <p:extLst/>
 </p:sld>
 </file>
 
@@ -2943,7 +3556,7 @@
   <p:cSld>
     <p:spTree>
       <p:nvGrpSpPr>
-        <p:cNvPr id="64" name="" descr="&lt;Slide style={{ background: &quot;#0B1220&quot;, padding: &quot;40px 72px 38px&quot;, display: &quot;flex&quot;, flexDirection: &quot;column&quot; }}&gt;&#10;  &lt;Text style={{ color: &quot;#6B7280&quot;, fontSize: 14, letterSpacing: 3 }}&gt;实测数据&lt;/Text&gt;&#10;  &lt;Text style={{ color: &quot;#F7F4EC&quot;, fontSize: 34, fontWeight: 700, marginTop: 10 }}&gt;每一项都有命令与输出可复现&lt;/Text&gt;&#10;&#10;  &lt;Box style={{ display: &quot;flex&quot;, flexDirection: &quot;row&quot;, gap: 22, marginTop: 26 }}&gt;&#10;    &lt;Box style={{ flex: 1.1, display: &quot;flex&quot;, flexDirection: &quot;column&quot; }}&gt;&#10;      &lt;Text style={{ color: &quot;#F7F4EC&quot;, fontSize: 18, fontWeight: 600, marginBottom: 10 }}&gt;测试分布　共 91 项全部通过&lt;/Text&gt;&#10;      &lt;Box style={{ display: &quot;flex&quot;, flexDirection: &quot;row&quot;, gap: 10, flexWrap: &quot;wrap&quot; }}&gt;&#10;        &lt;Box style={{ width: 168, background: &quot;rgba(34,197,94,0.10)&quot;, border: &quot;1px solid rgba(34,197,94,0.35)&quot;, borderRadius: 9, padding: &quot;12px 14px&quot; }}&gt;&#10;          &lt;Text style={{ color: &quot;#22C55E&quot;, fontSize: 24, fontWeight: 700, fontFamily: &quot;JetBrains Mono, monospace&quot; }}&gt;29&lt;/Text&gt;&#10;          &lt;Text style={{ color: &quot;#D1D5DB&quot;, fontSize: 15, marginTop: 4 }}&gt;银行智能体&lt;/Text&gt;&#10;        &lt;/Box&gt;&#10;        &lt;Box style={{ width: 168, background: &quot;rgba(34,197,94,0.10)&quot;, border: &quot;1px solid rgba(34,197,94,0.35)&quot;, borderRadius: 9, padding: &quot;12px 14px&quot; }}&gt;&#10;          &lt;Text style={{ color: &quot;#22C55E&quot;, fontSize: 24, fontWeight: 700, fontFamily: &quot;JetBrains Mono, monospace&quot; }}&gt;15&lt;/Text&gt;&#10;          &lt;Text style={{ color: &quot;#D1D5DB&quot;, fontSize: 15, marginTop: 4 }}&gt;测试骨架&lt;/Text&gt;&#10;        &lt;/Box&gt;&#10;        &lt;Box style={{ width: 168, background: &quot;rgba(34,197,94,0.10)&quot;, border: &quot;1px solid rgba(34,197,94,0.35)&quot;, borderRadius: 9, padding: &quot;12px 14px&quot; }}&gt;&#10;          &lt;Text style={{ color: &quot;#22C55E&quot;, fontSize: 24, fontWeight: 700, fontFamily: &quot;JetBrains Mono, monospace&quot; }}&gt;11&lt;/Text&gt;&#10;          &lt;Text style={{ color: &quot;#D1D5DB&quot;, fontSize: 15, marginTop: 4 }}&gt;蜂群协同&lt;/Text&gt;&#10;        &lt;/Box&gt;&#10;        &lt;Box style={{ width: 168, background: &quot;rgba(245,158,11,0.10)&quot;, border: &quot;1px solid rgba(245,158,11,0.35)&quot;, borderRadius: 9, padding: &quot;12px 14px&quot; }}&gt;&#10;          &lt;Text style={{ color: &quot;#F59E0B&quot;, fontSize: 24, fontWeight: 700, fontFamily: &quot;JetBrains Mono, monospace&quot; }}&gt;9&lt;/Text&gt;&#10;          &lt;Text style={{ color: &quot;#D1D5DB&quot;, fontSize: 15, marginTop: 4 }}&gt;输出契约&lt;/Text&gt;&#10;        &lt;/Box&gt;&#10;        &lt;Box style={{ width: 168, background: &quot;rgba(245,158,11,0.10)&quot;, border: &quot;1px solid rgba(245,158,11,0.35)&quot;, borderRadius: 9, padding: &quot;12px 14px&quot; }}&gt;&#10;          &lt;Text style={{ color: &quot;#F59E0B&quot;, fontSize: 24, fontWeight: 700, fontFamily: &quot;JetBrains Mono, monospace&quot; }}&gt;9&lt;/Text&gt;&#10;          &lt;Text style={{ color: &quot;#D1D5DB&quot;, fontSize: 15, marginTop: 4 }}&gt;智能体循环&lt;/Text&gt;&#10;        &lt;/Box&gt;&#10;        &lt;Box style={{ width: 168, background: &quot;rgba(59,130,246,0.10)&quot;, border: &quot;1px solid rgba(59,130,246,0.35)&quot;, borderRadius: 9, padding: &quot;12px 14px&quot; }}&gt;&#10;          &lt;Text style={{ color: &quot;#93C5FD&quot;, fontSize: 24, fontWeight: 700, fontFamily: &quot;JetBrains Mono, monospace&quot; }}&gt;8&lt;/Text&gt;&#10;          &lt;Text style={{ color: &quot;#D1D5DB&quot;, fontSize: 15, marginTop: 4 }}&gt;技能渐进披露&lt;/Text&gt;&#10;        &lt;/Box&gt;&#10;        &lt;Box style={{ width: 168, background: &quot;rgba(107,114,128,0.12)&quot;, border: &quot;1px solid rgba(107,114,128,0.35)&quot;, borderRadius: 9, padding: &quot;12px 14px&quot; }}&gt;&#10;          &lt;Text style={{ color: &quot;#D1D5DB&quot;, fontSize: 24, fontWeight: 700, fontFamily: &quot;JetBrains Mono, monospace&quot; }}&gt;5&lt;/Text&gt;&#10;          &lt;Text style={{ color: &quot;#D1D5DB&quot;, fontSize: 15, marginTop: 4 }}&gt;真实模型&lt;/Text&gt;&#10;        &lt;/Box&gt;&#10;        &lt;Box style={{ width: 168, background: &quot;rgba(107,114,128,0.12)&quot;, border: &quot;1px solid rgba(107,114,128,0.35)&quot;, borderRadius: 9, padding: &quot;12px 14px&quot; }}&gt;&#10;          &lt;Text style={{ color: &quot;#D1D5DB&quot;, fontSize: 24, fontWeight: 700, fontFamily: &quot;JetBrains Mono, monospace&quot; }}&gt;5&lt;/Text&gt;&#10;          &lt;Text style={{ color: &quot;#D1D5DB&quot;, fontSize: 15, marginTop: 4 }}&gt;模型守卫&lt;/Text&gt;&#10;        &lt;/Box&gt;&#10;      &lt;/Box&gt;&#10;      &lt;Box style={{ background: &quot;rgba(34,197,94,0.12)&quot;, border: &quot;1px solid rgba(34,197,94,0.4)&quot;, borderRadius: 9, padding: &quot;13px 16px&quot;, marginTop: 10 }}&gt;&#10;        &lt;Text style={{ color: &quot;#F7F4EC&quot;, fontSize: 16, lineHeight: 1.65 }}&gt;红队四十条分四组：直接注入十二条、间接注入八条、越权操作八条、正常请求十二条。攻击拦截百分之百，正常请求误拦为零。&lt;/Text&gt;&#10;      &lt;/Box&gt;&#10;    &lt;/Box&gt;&#10;&#10;    &lt;Box style={{ flex: 1, display: &quot;flex&quot;, flexDirection: &quot;column&quot;, gap: 10 }}&gt;&#10;      &lt;Box style={{ background: &quot;rgba(59,130,246,0.08)&quot;, border: &quot;1px solid rgba(59,130,246,0.35)&quot;, borderRadius: 12, padding: 17 }}&gt;&#10;        &lt;Text style={{ color: &quot;#93C5FD&quot;, fontSize: 18, fontWeight: 600 }}&gt;成本与体积&lt;/Text&gt;&#10;        &lt;Text style={{ color: &quot;#9CA3AF&quot;, fontSize: 15, lineHeight: 1.7, marginTop: 7 }}&gt;两轮对话累计三千八百零六个提示词字符，命中前缀缓存三千四百五十六个，命中率百分之九十一。系统提示词从一千九百七十一字符降到一百八十四字符。&lt;/Text&gt;&#10;      &lt;/Box&gt;&#10;      &lt;Box style={{ background: &quot;rgba(107,114,128,0.12)&quot;, border: &quot;1px solid rgba(107,114,128,0.35)&quot;, borderRadius: 12, padding: 17 }}&gt;&#10;        &lt;Text style={{ color: &quot;#D1D5DB&quot;, fontSize: 18, fontWeight: 600 }}&gt;外部服务&lt;/Text&gt;&#10;        &lt;Text style={{ color: &quot;#9CA3AF&quot;, fontSize: 15, lineHeight: 1.7, marginTop: 7 }}&gt;四个服务十三个工具全部可用。样例：兑换一百美元折合七百一十二元人民币，理财适配判定给出不适合并列出原因。&lt;/Text&gt;&#10;      &lt;/Box&gt;&#10;      &lt;Box style={{ background: &quot;rgba(239,68,68,0.08)&quot;, border: &quot;1px solid rgba(239,68,68,0.35)&quot;, borderRadius: 12, padding: 17 }}&gt;&#10;        &lt;Text style={{ color: &quot;#EF4444&quot;, fontSize: 18, fontWeight: 600 }}&gt;模型不服从&lt;/Text&gt;&#10;        &lt;Text style={{ color: &quot;#9CA3AF&quot;, fontSize: 15, lineHeight: 1.7, marginTop: 7 }}&gt;模型被诱导时，越权工具与越界金额仍被代码层拒绝，执行结果不受模型影响。&lt;/Text&gt;&#10;      &lt;/Box&gt;&#10;      &lt;Box style={{ background: &quot;rgba(245,158,11,0.08)&quot;, border: &quot;1px solid rgba(245,158,11,0.35)&quot;, borderRadius: 12, padding: 17 }}&gt;&#10;        &lt;Text style={{ color: &quot;#F59E0B&quot;, fontSize: 18, fontWeight: 600 }}&gt;证据在哪&lt;/Text&gt;&#10;        &lt;Text style={{ color: &quot;#9CA3AF&quot;, fontSize: 15, lineHeight: 1.7, marginTop: 7 }}&gt;《部署说明》第八节列出全部验证命令与完整输出，评委可在本机原样复跑。&lt;/Text&gt;&#10;      &lt;/Box&gt;&#10;    &lt;/Box&gt;&#10;  &lt;/Box&gt;&#10;&lt;/Slide&gt;&#10;"/>
+        <p:cNvPr id="64" name="" descr="&lt;Slide style={{ background: &quot;#0B1220&quot;, padding: &quot;40px 72px 38px&quot;, display: &quot;flex&quot;, flexDirection: &quot;column&quot; }}&gt;&#10;  &lt;Text style={{ color: &quot;#6B7280&quot;, fontSize: 14, letterSpacing: 3 }}&gt;实测数据&lt;/Text&gt;&#10;  &lt;Text style={{ color: &quot;#F7F4EC&quot;, fontSize: 34, fontWeight: 700, marginTop: 10 }}&gt;每一项都有命令与输出可复现&lt;/Text&gt;&#10;&#10;  &lt;Box style={{ display: &quot;flex&quot;, flexDirection: &quot;row&quot;, gap: 22, marginTop: 26 }}&gt;&#10;    &lt;Box style={{ flex: 1.1, display: &quot;flex&quot;, flexDirection: &quot;column&quot; }}&gt;&#10;      &lt;Text style={{ color: &quot;#F7F4EC&quot;, fontSize: 18, fontWeight: 600, marginBottom: 10 }}&gt;测试分布　共 91 项全部通过&lt;/Text&gt;&#10;      &lt;Box style={{ display: &quot;flex&quot;, flexDirection: &quot;row&quot;, gap: 10, flexWrap: &quot;wrap&quot; }}&gt;&#10;        &lt;Box style={{ width: 168, background: &quot;rgba(34,197,94,0.10)&quot;, border: &quot;1px solid rgba(34,197,94,0.35)&quot;, borderRadius: 9, padding: &quot;12px 14px&quot; }}&gt;&#10;          &lt;Text style={{ color: &quot;#22C55E&quot;, fontSize: 24, fontWeight: 700, fontFamily: &quot;Consolas, monospace&quot; }}&gt;29&lt;/Text&gt;&#10;          &lt;Text style={{ color: &quot;#D1D5DB&quot;, fontSize: 15, marginTop: 4 }}&gt;银行智能体&lt;/Text&gt;&#10;        &lt;/Box&gt;&#10;        &lt;Box style={{ width: 168, background: &quot;rgba(34,197,94,0.10)&quot;, border: &quot;1px solid rgba(34,197,94,0.35)&quot;, borderRadius: 9, padding: &quot;12px 14px&quot; }}&gt;&#10;          &lt;Text style={{ color: &quot;#22C55E&quot;, fontSize: 24, fontWeight: 700, fontFamily: &quot;Consolas, monospace&quot; }}&gt;15&lt;/Text&gt;&#10;          &lt;Text style={{ color: &quot;#D1D5DB&quot;, fontSize: 15, marginTop: 4 }}&gt;测试骨架&lt;/Text&gt;&#10;        &lt;/Box&gt;&#10;        &lt;Box style={{ width: 168, background: &quot;rgba(34,197,94,0.10)&quot;, border: &quot;1px solid rgba(34,197,94,0.35)&quot;, borderRadius: 9, padding: &quot;12px 14px&quot; }}&gt;&#10;          &lt;Text style={{ color: &quot;#22C55E&quot;, fontSize: 24, fontWeight: 700, fontFamily: &quot;Consolas, monospace&quot; }}&gt;11&lt;/Text&gt;&#10;          &lt;Text style={{ color: &quot;#D1D5DB&quot;, fontSize: 15, marginTop: 4 }}&gt;蜂群协同&lt;/Text&gt;&#10;        &lt;/Box&gt;&#10;        &lt;Box style={{ width: 168, background: &quot;rgba(245,158,11,0.10)&quot;, border: &quot;1px solid rgba(245,158,11,0.35)&quot;, borderRadius: 9, padding: &quot;12px 14px&quot; }}&gt;&#10;          &lt;Text style={{ color: &quot;#F59E0B&quot;, fontSize: 24, fontWeight: 700, fontFamily: &quot;Consolas, monospace&quot; }}&gt;9&lt;/Text&gt;&#10;          &lt;Text style={{ color: &quot;#D1D5DB&quot;, fontSize: 15, marginTop: 4 }}&gt;输出契约&lt;/Text&gt;&#10;        &lt;/Box&gt;&#10;        &lt;Box style={{ width: 168, background: &quot;rgba(245,158,11,0.10)&quot;, border: &quot;1px solid rgba(245,158,11,0.35)&quot;, borderRadius: 9, padding: &quot;12px 14px&quot; }}&gt;&#10;          &lt;Text style={{ color: &quot;#F59E0B&quot;, fontSize: 24, fontWeight: 700, fontFamily: &quot;Consolas, monospace&quot; }}&gt;9&lt;/Text&gt;&#10;          &lt;Text style={{ color: &quot;#D1D5DB&quot;, fontSize: 15, marginTop: 4 }}&gt;智能体循环&lt;/Text&gt;&#10;        &lt;/Box&gt;&#10;        &lt;Box style={{ width: 168, background: &quot;rgba(59,130,246,0.10)&quot;, border: &quot;1px solid rgba(59,130,246,0.35)&quot;, borderRadius: 9, padding: &quot;12px 14px&quot; }}&gt;&#10;          &lt;Text style={{ color: &quot;#93C5FD&quot;, fontSize: 24, fontWeight: 700, fontFamily: &quot;Consolas, monospace&quot; }}&gt;8&lt;/Text&gt;&#10;          &lt;Text style={{ color: &quot;#D1D5DB&quot;, fontSize: 15, marginTop: 4 }}&gt;技能渐进披露&lt;/Text&gt;&#10;        &lt;/Box&gt;&#10;        &lt;Box style={{ width: 168, background: &quot;rgba(107,114,128,0.12)&quot;, border: &quot;1px solid rgba(107,114,128,0.35)&quot;, borderRadius: 9, padding: &quot;12px 14px&quot; }}&gt;&#10;          &lt;Text style={{ color: &quot;#D1D5DB&quot;, fontSize: 24, fontWeight: 700, fontFamily: &quot;Consolas, monospace&quot; }}&gt;5&lt;/Text&gt;&#10;          &lt;Text style={{ color: &quot;#D1D5DB&quot;, fontSize: 15, marginTop: 4 }}&gt;真实模型&lt;/Text&gt;&#10;        &lt;/Box&gt;&#10;        &lt;Box style={{ width: 168, background: &quot;rgba(107,114,128,0.12)&quot;, border: &quot;1px solid rgba(107,114,128,0.35)&quot;, borderRadius: 9, padding: &quot;12px 14px&quot; }}&gt;&#10;          &lt;Text style={{ color: &quot;#D1D5DB&quot;, fontSize: 24, fontWeight: 700, fontFamily: &quot;Consolas, monospace&quot; }}&gt;5&lt;/Text&gt;&#10;          &lt;Text style={{ color: &quot;#D1D5DB&quot;, fontSize: 15, marginTop: 4 }}&gt;模型守卫&lt;/Text&gt;&#10;        &lt;/Box&gt;&#10;      &lt;/Box&gt;&#10;      &lt;Box style={{ background: &quot;rgba(34,197,94,0.12)&quot;, border: &quot;1px solid rgba(34,197,94,0.4)&quot;, borderRadius: 9, padding: &quot;13px 16px&quot;, marginTop: 10 }}&gt;&#10;        &lt;Text style={{ color: &quot;#F7F4EC&quot;, fontSize: 16, lineHeight: 1.65 }}&gt;红队四十条分四组：直接注入十二条、间接注入八条、越权操作八条、正常请求十二条。攻击拦截百分之百，正常请求误拦为零。&lt;/Text&gt;&#10;      &lt;/Box&gt;&#10;    &lt;/Box&gt;&#10;&#10;    &lt;Box style={{ flex: 1, display: &quot;flex&quot;, flexDirection: &quot;column&quot;, gap: 10 }}&gt;&#10;      &lt;Box style={{ background: &quot;rgba(59,130,246,0.08)&quot;, border: &quot;1px solid rgba(59,130,246,0.35)&quot;, borderRadius: 12, padding: 17 }}&gt;&#10;        &lt;Text style={{ color: &quot;#93C5FD&quot;, fontSize: 18, fontWeight: 600 }}&gt;成本与体积&lt;/Text&gt;&#10;        &lt;Text style={{ color: &quot;#9CA3AF&quot;, fontSize: 15, lineHeight: 1.7, marginTop: 7 }}&gt;两轮对话累计三千八百零六个提示词字符，命中前缀缓存三千四百五十六个，命中率百分之九十一。系统提示词从一千九百七十一字符降到一百八十四字符。&lt;/Text&gt;&#10;      &lt;/Box&gt;&#10;      &lt;Box style={{ background: &quot;rgba(107,114,128,0.12)&quot;, border: &quot;1px solid rgba(107,114,128,0.35)&quot;, borderRadius: 12, padding: 17 }}&gt;&#10;        &lt;Text style={{ color: &quot;#D1D5DB&quot;, fontSize: 18, fontWeight: 600 }}&gt;外部服务&lt;/Text&gt;&#10;        &lt;Text style={{ color: &quot;#9CA3AF&quot;, fontSize: 15, lineHeight: 1.7, marginTop: 7 }}&gt;四个服务十三个工具全部可用。样例：兑换一百美元折合七百一十二元人民币，理财适配判定给出不适合并列出原因。&lt;/Text&gt;&#10;      &lt;/Box&gt;&#10;      &lt;Box style={{ background: &quot;rgba(239,68,68,0.08)&quot;, border: &quot;1px solid rgba(239,68,68,0.35)&quot;, borderRadius: 12, padding: 17 }}&gt;&#10;        &lt;Text style={{ color: &quot;#EF4444&quot;, fontSize: 18, fontWeight: 600 }}&gt;模型不服从&lt;/Text&gt;&#10;        &lt;Text style={{ color: &quot;#9CA3AF&quot;, fontSize: 15, lineHeight: 1.7, marginTop: 7 }}&gt;模型被诱导时，越权工具与越界金额仍被代码层拒绝，执行结果不受模型影响。&lt;/Text&gt;&#10;      &lt;/Box&gt;&#10;      &lt;Box style={{ background: &quot;rgba(245,158,11,0.08)&quot;, border: &quot;1px solid rgba(245,158,11,0.35)&quot;, borderRadius: 12, padding: 17 }}&gt;&#10;        &lt;Text style={{ color: &quot;#F59E0B&quot;, fontSize: 18, fontWeight: 600 }}&gt;证据在哪&lt;/Text&gt;&#10;        &lt;Text style={{ color: &quot;#9CA3AF&quot;, fontSize: 15, lineHeight: 1.7, marginTop: 7 }}&gt;《部署说明》第八节列出全部验证命令与完整输出，评委可在本机原样复跑。&lt;/Text&gt;&#10;      &lt;/Box&gt;&#10;    &lt;/Box&gt;&#10;  &lt;/Box&gt;&#10;&lt;/Slide&gt;&#10;"/>
         <p:cNvGrpSpPr/>
         <p:nvPr/>
       </p:nvGrpSpPr>
@@ -3165,8 +3778,8 @@
                 <a:solidFill>
                   <a:srgbClr val="22C55E"/>
                 </a:solidFill>
-                <a:latin typeface="JetBrains Mono"/>
-                <a:ea typeface="JetBrains Mono"/>
+                <a:latin typeface="Consolas"/>
+                <a:ea typeface="Consolas"/>
               </a:rPr>
               <a:t>29</a:t>
             </a:r>
@@ -3270,8 +3883,8 @@
                 <a:solidFill>
                   <a:srgbClr val="22C55E"/>
                 </a:solidFill>
-                <a:latin typeface="JetBrains Mono"/>
-                <a:ea typeface="JetBrains Mono"/>
+                <a:latin typeface="Consolas"/>
+                <a:ea typeface="Consolas"/>
               </a:rPr>
               <a:t>15</a:t>
             </a:r>
@@ -3375,8 +3988,8 @@
                 <a:solidFill>
                   <a:srgbClr val="22C55E"/>
                 </a:solidFill>
-                <a:latin typeface="JetBrains Mono"/>
-                <a:ea typeface="JetBrains Mono"/>
+                <a:latin typeface="Consolas"/>
+                <a:ea typeface="Consolas"/>
               </a:rPr>
               <a:t>11</a:t>
             </a:r>
@@ -3480,8 +4093,8 @@
                 <a:solidFill>
                   <a:srgbClr val="F59E0B"/>
                 </a:solidFill>
-                <a:latin typeface="JetBrains Mono"/>
-                <a:ea typeface="JetBrains Mono"/>
+                <a:latin typeface="Consolas"/>
+                <a:ea typeface="Consolas"/>
               </a:rPr>
               <a:t>9</a:t>
             </a:r>
@@ -3585,8 +4198,8 @@
                 <a:solidFill>
                   <a:srgbClr val="F59E0B"/>
                 </a:solidFill>
-                <a:latin typeface="JetBrains Mono"/>
-                <a:ea typeface="JetBrains Mono"/>
+                <a:latin typeface="Consolas"/>
+                <a:ea typeface="Consolas"/>
               </a:rPr>
               <a:t>9</a:t>
             </a:r>
@@ -3690,8 +4303,8 @@
                 <a:solidFill>
                   <a:srgbClr val="93C5FD"/>
                 </a:solidFill>
-                <a:latin typeface="JetBrains Mono"/>
-                <a:ea typeface="JetBrains Mono"/>
+                <a:latin typeface="Consolas"/>
+                <a:ea typeface="Consolas"/>
               </a:rPr>
               <a:t>8</a:t>
             </a:r>
@@ -3795,8 +4408,8 @@
                 <a:solidFill>
                   <a:srgbClr val="D1D5DB"/>
                 </a:solidFill>
-                <a:latin typeface="JetBrains Mono"/>
-                <a:ea typeface="JetBrains Mono"/>
+                <a:latin typeface="Consolas"/>
+                <a:ea typeface="Consolas"/>
               </a:rPr>
               <a:t>5</a:t>
             </a:r>
@@ -3900,8 +4513,8 @@
                 <a:solidFill>
                   <a:srgbClr val="D1D5DB"/>
                 </a:solidFill>
-                <a:latin typeface="JetBrains Mono"/>
-                <a:ea typeface="JetBrains Mono"/>
+                <a:latin typeface="Consolas"/>
+                <a:ea typeface="Consolas"/>
               </a:rPr>
               <a:t>5</a:t>
             </a:r>
@@ -4446,6 +5059,7 @@
       </p:sp>
     </p:spTree>
   </p:cSld>
+  <p:extLst/>
 </p:sld>
 </file>
 
@@ -5619,6 +6233,7 @@
       </p:sp>
     </p:spTree>
   </p:cSld>
+  <p:extLst/>
 </p:sld>
 </file>
 
@@ -5627,7 +6242,7 @@
   <p:cSld>
     <p:spTree>
       <p:nvGrpSpPr>
-        <p:cNvPr id="138" name=""/>
+        <p:cNvPr id="138" name="" descr="&lt;Slide style={{ background: &quot;#0B1220&quot;, padding: &quot;44px 72px 40px&quot;, display: &quot;flex&quot;, flexDirection: &quot;column&quot;, justifyContent: &quot;space-between&quot; }}&gt;&#10;  &lt;Box style={{ display: &quot;flex&quot;, flexDirection: &quot;column&quot;, alignItems: &quot;center&quot; }}&gt;&#10;    &lt;Text style={{ color: &quot;#6B7280&quot;, fontSize: 14, letterSpacing: 5 }}&gt;结语&lt;/Text&gt;&#10;    &lt;Text style={{ color: &quot;#F7F4EC&quot;, fontSize: 54, fontWeight: 700, lineHeight: 1.32, marginTop: 24, textAlign: &quot;center&quot; }}&gt;把一件事拆给多个专职角色，&lt;br /&gt;比换更强的模型更可靠&lt;/Text&gt;&#10;    &lt;Box style={{ width: 96, height: 6, background: &quot;#22C55E&quot;, marginTop: 28 }} /&gt;&#10;  &lt;/Box&gt;&#10;&#10;  &lt;Box style={{ display: &quot;flex&quot;, flexDirection: &quot;row&quot;, gap: 22 }}&gt;&#10;    &lt;Box style={{ flex: 1, background: &quot;rgba(34,197,94,0.08)&quot;, border: &quot;1px solid rgba(34,197,94,0.32)&quot;, borderRadius: 11, padding: &quot;20px 22px&quot; }}&gt;&#10;      &lt;Text style={{ color: &quot;#22C55E&quot;, fontSize: 30, fontWeight: 700, fontFamily: &quot;Consolas, monospace&quot; }}&gt;五角色&lt;/Text&gt;&#10;      &lt;Text style={{ color: &quot;#9CA3AF&quot;, fontSize: 16, lineHeight: 1.6, marginTop: 8 }}&gt;分工与仲裁&lt;/Text&gt;&#10;      &lt;Text style={{ color: &quot;#6B7280&quot;, fontSize: 14, lineHeight: 1.6, marginTop: 8 }}&gt;意图、风控、合规、体验并行评估，仲裁取最高&lt;/Text&gt;&#10;    &lt;/Box&gt;&#10;    &lt;Box style={{ flex: 1, background: &quot;rgba(245,158,11,0.08)&quot;, border: &quot;1px solid rgba(245,158,11,0.32)&quot;, borderRadius: 11, padding: &quot;20px 22px&quot; }}&gt;&#10;      &lt;Text style={{ color: &quot;#F59E0B&quot;, fontSize: 30, fontWeight: 700, fontFamily: &quot;Consolas, monospace&quot; }}&gt;三色分级&lt;/Text&gt;&#10;      &lt;Text style={{ color: &quot;#9CA3AF&quot;, fontSize: 16, lineHeight: 1.6, marginTop: 8 }}&gt;绿黄红与令牌&lt;/Text&gt;&#10;      &lt;Text style={{ color: &quot;#6B7280&quot;, fontSize: 14, lineHeight: 1.6, marginTop: 8 }}&gt;直连、令牌、拦截三档，判定带规则编号&lt;/Text&gt;&#10;    &lt;/Box&gt;&#10;    &lt;Box style={{ flex: 1, background: &quot;rgba(59,130,246,0.08)&quot;, border: &quot;1px solid rgba(59,130,246,0.32)&quot;, borderRadius: 11, padding: &quot;20px 22px&quot; }}&gt;&#10;      &lt;Text style={{ color: &quot;#3B82F6&quot;, fontSize: 30, fontWeight: 700, fontFamily: &quot;Consolas, monospace&quot; }}&gt;哈希链&lt;/Text&gt;&#10;      &lt;Text style={{ color: &quot;#9CA3AF&quot;, fontSize: 16, lineHeight: 1.6, marginTop: 8 }}&gt;全程可追溯&lt;/Text&gt;&#10;      &lt;Text style={{ color: &quot;#6B7280&quot;, fontSize: 14, lineHeight: 1.6, marginTop: 8 }}&gt;前序哈希串起每条记录，改一条即断链&lt;/Text&gt;&#10;    &lt;/Box&gt;&#10;  &lt;/Box&gt;&#10;&#10;  &lt;Box style={{ borderTop: &quot;1px solid #243044&quot;, paddingTop: 20, display: &quot;flex&quot;, flexDirection: &quot;row&quot;, gap: 20, alignItems: &quot;center&quot; }}&gt;&#10;    &lt;Text style={{ color: &quot;#9CA3AF&quot;, fontSize: 17 }}&gt;代码、文档、部署说明与全部测试用例随提交包提供，可在评委机器上复跑&lt;/Text&gt;&#10;    &lt;Box style={{ flex: 1 }} /&gt;&#10;    &lt;Text style={{ color: &quot;#6B7280&quot;, fontSize: 15 }}&gt;CordiBank 蜂群项目组&lt;/Text&gt;&#10;    &lt;Text style={{ color: &quot;#6B7280&quot;, fontSize: 15 }}&gt;2026 年 10 月&lt;/Text&gt;&#10;  &lt;/Box&gt;&#10;&lt;/Slide&gt;&#10;"/>
         <p:cNvGrpSpPr/>
         <p:nvPr/>
       </p:nvGrpSpPr>
@@ -5660,10 +6275,7 @@
         </p:spPr>
         <p:txBody>
           <a:bodyPr/>
-          <a:p>
-            <a:pPr/>
-            <a:endParaRPr/>
-          </a:p>
+          <a:p/>
         </p:txBody>
       </p:sp>
       <p:sp>
@@ -5674,7 +6286,7 @@
         </p:nvSpPr>
         <p:spPr>
           <a:xfrm rot="0" flipH="0" flipV="0">
-            <a:off x="5915025" y="1323975"/>
+            <a:off x="5915025" y="419100"/>
             <a:ext cx="361950" cy="161925"/>
           </a:xfrm>
           <a:prstGeom prst="rect"/>
@@ -5709,8 +6321,8 @@
         </p:nvSpPr>
         <p:spPr>
           <a:xfrm rot="0" flipH="0" flipV="0">
-            <a:off x="2628900" y="1752600"/>
-            <a:ext cx="6934200" cy="1733550"/>
+            <a:off x="2752725" y="809625"/>
+            <a:ext cx="6686550" cy="1638300"/>
           </a:xfrm>
           <a:prstGeom prst="rect"/>
         </p:spPr>
@@ -5719,11 +6331,11 @@
           <a:p>
             <a:pPr algn="ctr">
               <a:lnSpc>
-                <a:spcPct val="135000"/>
-              </a:lnSpc>
-            </a:pPr>
-            <a:r>
-              <a:rPr lang="zh-CN" sz="4200" b="1">
+                <a:spcPct val="132000"/>
+              </a:lnSpc>
+            </a:pPr>
+            <a:r>
+              <a:rPr lang="zh-CN" sz="4050" b="1">
                 <a:solidFill>
                   <a:srgbClr val="F7F4EC"/>
                 </a:solidFill>
@@ -5737,11 +6349,11 @@
           <a:p>
             <a:pPr algn="ctr">
               <a:lnSpc>
-                <a:spcPct val="135000"/>
-              </a:lnSpc>
-            </a:pPr>
-            <a:r>
-              <a:rPr lang="zh-CN" sz="4200" b="1">
+                <a:spcPct val="132000"/>
+              </a:lnSpc>
+            </a:pPr>
+            <a:r>
+              <a:rPr lang="zh-CN" sz="4050" b="1">
                 <a:solidFill>
                   <a:srgbClr val="F7F4EC"/>
                 </a:solidFill>
@@ -5762,7 +6374,7 @@
         </p:nvSpPr>
         <p:spPr>
           <a:xfrm rot="0" flipH="0" flipV="0">
-            <a:off x="5638800" y="3829050"/>
+            <a:off x="5638800" y="2714625"/>
             <a:ext cx="914400" cy="57150"/>
           </a:xfrm>
           <a:prstGeom prst="rect">
@@ -5775,40 +6387,72 @@
         </p:spPr>
         <p:txBody>
           <a:bodyPr/>
-          <a:p>
-            <a:pPr/>
-            <a:endParaRPr/>
-          </a:p>
-        </p:txBody>
-      </p:sp>
-      <p:sp>
-        <p:nvSpPr>
-          <p:cNvPr id="143" name="" descr="{&quot;isTemplate&quot;:true,&quot;type&quot;:&quot;text&quot;}"/>
-          <p:cNvSpPr txBox="1"/>
-          <p:nvPr/>
-        </p:nvSpPr>
-        <p:spPr>
-          <a:xfrm rot="0" flipH="0" flipV="0">
-            <a:off x="4057650" y="4267200"/>
-            <a:ext cx="971550" cy="390525"/>
-          </a:xfrm>
-          <a:prstGeom prst="rect"/>
-        </p:spPr>
-        <p:txBody>
-          <a:bodyPr wrap="none" lIns="0" tIns="0" rIns="0" bIns="0"/>
-          <a:p>
-            <a:pPr algn="ctr">
-              <a:lnSpc>
-                <a:spcPct val="100000"/>
-              </a:lnSpc>
-            </a:pPr>
-            <a:r>
-              <a:rPr lang="zh-CN" sz="2550" b="1">
+          <a:p/>
+        </p:txBody>
+      </p:sp>
+      <p:sp>
+        <p:nvSpPr>
+          <p:cNvPr id="143" name=""/>
+          <p:cNvSpPr/>
+          <p:nvPr/>
+        </p:nvSpPr>
+        <p:spPr>
+          <a:xfrm rot="0" flipH="0" flipV="0">
+            <a:off x="685800" y="3714750"/>
+            <a:ext cx="3467100" cy="1428750"/>
+          </a:xfrm>
+          <a:prstGeom prst="roundRect">
+            <a:avLst>
+              <a:gd name="adj" fmla="val 7333"/>
+            </a:avLst>
+          </a:prstGeom>
+          <a:solidFill>
+            <a:srgbClr val="22C55E">
+              <a:alpha val="8000"/>
+            </a:srgbClr>
+          </a:solidFill>
+          <a:ln w="12700">
+            <a:solidFill>
+              <a:srgbClr val="22C55E">
+                <a:alpha val="32000"/>
+              </a:srgbClr>
+            </a:solidFill>
+            <a:prstDash val="solid"/>
+          </a:ln>
+        </p:spPr>
+        <p:txBody>
+          <a:bodyPr/>
+          <a:p/>
+        </p:txBody>
+      </p:sp>
+      <p:sp>
+        <p:nvSpPr>
+          <p:cNvPr id="144" name="" descr="{&quot;isTemplate&quot;:true,&quot;type&quot;:&quot;text&quot;}"/>
+          <p:cNvSpPr txBox="1"/>
+          <p:nvPr/>
+        </p:nvSpPr>
+        <p:spPr>
+          <a:xfrm rot="0" flipH="0" flipV="0">
+            <a:off x="895350" y="3905250"/>
+            <a:ext cx="3048000" cy="342900"/>
+          </a:xfrm>
+          <a:prstGeom prst="rect"/>
+        </p:spPr>
+        <p:txBody>
+          <a:bodyPr wrap="none" lIns="0" tIns="0" rIns="0" bIns="0"/>
+          <a:p>
+            <a:pPr>
+              <a:lnSpc>
+                <a:spcPct val="100000"/>
+              </a:lnSpc>
+            </a:pPr>
+            <a:r>
+              <a:rPr lang="zh-CN" sz="2250" b="1">
                 <a:solidFill>
                   <a:srgbClr val="22C55E"/>
                 </a:solidFill>
-                <a:latin typeface="JetBrains Mono"/>
-                <a:ea typeface="JetBrains Mono"/>
+                <a:latin typeface="Consolas"/>
+                <a:ea typeface="Consolas"/>
               </a:rPr>
               <a:t>五角色</a:t>
             </a:r>
@@ -5818,25 +6462,460 @@
       </p:sp>
       <p:sp>
         <p:nvSpPr>
-          <p:cNvPr id="144" name="" descr="{&quot;isTemplate&quot;:true,&quot;type&quot;:&quot;text&quot;}"/>
-          <p:cNvSpPr txBox="1"/>
-          <p:nvPr/>
-        </p:nvSpPr>
-        <p:spPr>
-          <a:xfrm rot="0" flipH="0" flipV="0">
-            <a:off x="4057650" y="4733925"/>
-            <a:ext cx="971550" cy="171450"/>
-          </a:xfrm>
-          <a:prstGeom prst="rect"/>
-        </p:spPr>
-        <p:txBody>
-          <a:bodyPr wrap="none" lIns="0" tIns="0" rIns="0" bIns="0"/>
-          <a:p>
-            <a:pPr algn="ctr">
-              <a:lnSpc>
-                <a:spcPct val="100000"/>
-              </a:lnSpc>
-            </a:pPr>
+          <p:cNvPr id="145" name="" descr="{&quot;isTemplate&quot;:true,&quot;type&quot;:&quot;text&quot;}"/>
+          <p:cNvSpPr txBox="1"/>
+          <p:nvPr/>
+        </p:nvSpPr>
+        <p:spPr>
+          <a:xfrm rot="0" flipH="0" flipV="0">
+            <a:off x="895350" y="4324350"/>
+            <a:ext cx="3048000" cy="295275"/>
+          </a:xfrm>
+          <a:prstGeom prst="rect"/>
+        </p:spPr>
+        <p:txBody>
+          <a:bodyPr wrap="none" lIns="0" tIns="0" rIns="0" bIns="0"/>
+          <a:p>
+            <a:pPr>
+              <a:lnSpc>
+                <a:spcPct val="160000"/>
+              </a:lnSpc>
+            </a:pPr>
+            <a:r>
+              <a:rPr lang="zh-CN" sz="1200">
+                <a:solidFill>
+                  <a:srgbClr val="9CA3AF"/>
+                </a:solidFill>
+                <a:latin typeface="Microsoft YaHei"/>
+                <a:ea typeface="Microsoft YaHei"/>
+              </a:rPr>
+              <a:t>分工与仲裁</a:t>
+            </a:r>
+            <a:endParaRPr/>
+          </a:p>
+        </p:txBody>
+      </p:sp>
+      <p:sp>
+        <p:nvSpPr>
+          <p:cNvPr id="146" name="" descr="{&quot;isTemplate&quot;:true,&quot;type&quot;:&quot;text&quot;}"/>
+          <p:cNvSpPr txBox="1"/>
+          <p:nvPr/>
+        </p:nvSpPr>
+        <p:spPr>
+          <a:xfrm rot="0" flipH="0" flipV="0">
+            <a:off x="895350" y="4695825"/>
+            <a:ext cx="3048000" cy="257175"/>
+          </a:xfrm>
+          <a:prstGeom prst="rect"/>
+        </p:spPr>
+        <p:txBody>
+          <a:bodyPr wrap="none" lIns="0" tIns="0" rIns="0" bIns="0"/>
+          <a:p>
+            <a:pPr>
+              <a:lnSpc>
+                <a:spcPct val="160000"/>
+              </a:lnSpc>
+            </a:pPr>
+            <a:r>
+              <a:rPr lang="zh-CN" sz="1050">
+                <a:solidFill>
+                  <a:srgbClr val="6B7280"/>
+                </a:solidFill>
+                <a:latin typeface="Microsoft YaHei"/>
+                <a:ea typeface="Microsoft YaHei"/>
+              </a:rPr>
+              <a:t>意图、风控、合规、体验并行评估，仲裁取最高</a:t>
+            </a:r>
+            <a:endParaRPr/>
+          </a:p>
+        </p:txBody>
+      </p:sp>
+      <p:sp>
+        <p:nvSpPr>
+          <p:cNvPr id="147" name=""/>
+          <p:cNvSpPr/>
+          <p:nvPr/>
+        </p:nvSpPr>
+        <p:spPr>
+          <a:xfrm rot="0" flipH="0" flipV="0">
+            <a:off x="4362450" y="3714750"/>
+            <a:ext cx="3467100" cy="1428750"/>
+          </a:xfrm>
+          <a:prstGeom prst="roundRect">
+            <a:avLst>
+              <a:gd name="adj" fmla="val 7333"/>
+            </a:avLst>
+          </a:prstGeom>
+          <a:solidFill>
+            <a:srgbClr val="F59E0B">
+              <a:alpha val="8000"/>
+            </a:srgbClr>
+          </a:solidFill>
+          <a:ln w="12700">
+            <a:solidFill>
+              <a:srgbClr val="F59E0B">
+                <a:alpha val="32000"/>
+              </a:srgbClr>
+            </a:solidFill>
+            <a:prstDash val="solid"/>
+          </a:ln>
+        </p:spPr>
+        <p:txBody>
+          <a:bodyPr/>
+          <a:p/>
+        </p:txBody>
+      </p:sp>
+      <p:sp>
+        <p:nvSpPr>
+          <p:cNvPr id="148" name="" descr="{&quot;isTemplate&quot;:true,&quot;type&quot;:&quot;text&quot;}"/>
+          <p:cNvSpPr txBox="1"/>
+          <p:nvPr/>
+        </p:nvSpPr>
+        <p:spPr>
+          <a:xfrm rot="0" flipH="0" flipV="0">
+            <a:off x="4572000" y="3905250"/>
+            <a:ext cx="3048000" cy="342900"/>
+          </a:xfrm>
+          <a:prstGeom prst="rect"/>
+        </p:spPr>
+        <p:txBody>
+          <a:bodyPr wrap="none" lIns="0" tIns="0" rIns="0" bIns="0"/>
+          <a:p>
+            <a:pPr>
+              <a:lnSpc>
+                <a:spcPct val="100000"/>
+              </a:lnSpc>
+            </a:pPr>
+            <a:r>
+              <a:rPr lang="zh-CN" sz="2250" b="1">
+                <a:solidFill>
+                  <a:srgbClr val="F59E0B"/>
+                </a:solidFill>
+                <a:latin typeface="Consolas"/>
+                <a:ea typeface="Consolas"/>
+              </a:rPr>
+              <a:t>三色分级</a:t>
+            </a:r>
+            <a:endParaRPr/>
+          </a:p>
+        </p:txBody>
+      </p:sp>
+      <p:sp>
+        <p:nvSpPr>
+          <p:cNvPr id="149" name="" descr="{&quot;isTemplate&quot;:true,&quot;type&quot;:&quot;text&quot;}"/>
+          <p:cNvSpPr txBox="1"/>
+          <p:nvPr/>
+        </p:nvSpPr>
+        <p:spPr>
+          <a:xfrm rot="0" flipH="0" flipV="0">
+            <a:off x="4572000" y="4324350"/>
+            <a:ext cx="3048000" cy="295275"/>
+          </a:xfrm>
+          <a:prstGeom prst="rect"/>
+        </p:spPr>
+        <p:txBody>
+          <a:bodyPr wrap="none" lIns="0" tIns="0" rIns="0" bIns="0"/>
+          <a:p>
+            <a:pPr>
+              <a:lnSpc>
+                <a:spcPct val="160000"/>
+              </a:lnSpc>
+            </a:pPr>
+            <a:r>
+              <a:rPr lang="zh-CN" sz="1200">
+                <a:solidFill>
+                  <a:srgbClr val="9CA3AF"/>
+                </a:solidFill>
+                <a:latin typeface="Microsoft YaHei"/>
+                <a:ea typeface="Microsoft YaHei"/>
+              </a:rPr>
+              <a:t>绿黄红与令牌</a:t>
+            </a:r>
+            <a:endParaRPr/>
+          </a:p>
+        </p:txBody>
+      </p:sp>
+      <p:sp>
+        <p:nvSpPr>
+          <p:cNvPr id="150" name="" descr="{&quot;isTemplate&quot;:true,&quot;type&quot;:&quot;text&quot;}"/>
+          <p:cNvSpPr txBox="1"/>
+          <p:nvPr/>
+        </p:nvSpPr>
+        <p:spPr>
+          <a:xfrm rot="0" flipH="0" flipV="0">
+            <a:off x="4572000" y="4695825"/>
+            <a:ext cx="3048000" cy="257175"/>
+          </a:xfrm>
+          <a:prstGeom prst="rect"/>
+        </p:spPr>
+        <p:txBody>
+          <a:bodyPr wrap="none" lIns="0" tIns="0" rIns="0" bIns="0"/>
+          <a:p>
+            <a:pPr>
+              <a:lnSpc>
+                <a:spcPct val="160000"/>
+              </a:lnSpc>
+            </a:pPr>
+            <a:r>
+              <a:rPr lang="zh-CN" sz="1050">
+                <a:solidFill>
+                  <a:srgbClr val="6B7280"/>
+                </a:solidFill>
+                <a:latin typeface="Microsoft YaHei"/>
+                <a:ea typeface="Microsoft YaHei"/>
+              </a:rPr>
+              <a:t>直连、令牌、拦截三档，判定带规则编号</a:t>
+            </a:r>
+            <a:endParaRPr/>
+          </a:p>
+        </p:txBody>
+      </p:sp>
+      <p:sp>
+        <p:nvSpPr>
+          <p:cNvPr id="151" name=""/>
+          <p:cNvSpPr/>
+          <p:nvPr/>
+        </p:nvSpPr>
+        <p:spPr>
+          <a:xfrm rot="0" flipH="0" flipV="0">
+            <a:off x="8039100" y="3714750"/>
+            <a:ext cx="3467100" cy="1428750"/>
+          </a:xfrm>
+          <a:prstGeom prst="roundRect">
+            <a:avLst>
+              <a:gd name="adj" fmla="val 7333"/>
+            </a:avLst>
+          </a:prstGeom>
+          <a:solidFill>
+            <a:srgbClr val="3B82F6">
+              <a:alpha val="8000"/>
+            </a:srgbClr>
+          </a:solidFill>
+          <a:ln w="12700">
+            <a:solidFill>
+              <a:srgbClr val="3B82F6">
+                <a:alpha val="32000"/>
+              </a:srgbClr>
+            </a:solidFill>
+            <a:prstDash val="solid"/>
+          </a:ln>
+        </p:spPr>
+        <p:txBody>
+          <a:bodyPr/>
+          <a:p/>
+        </p:txBody>
+      </p:sp>
+      <p:sp>
+        <p:nvSpPr>
+          <p:cNvPr id="152" name="" descr="{&quot;isTemplate&quot;:true,&quot;type&quot;:&quot;text&quot;}"/>
+          <p:cNvSpPr txBox="1"/>
+          <p:nvPr/>
+        </p:nvSpPr>
+        <p:spPr>
+          <a:xfrm rot="0" flipH="0" flipV="0">
+            <a:off x="8248650" y="3905250"/>
+            <a:ext cx="3048000" cy="342900"/>
+          </a:xfrm>
+          <a:prstGeom prst="rect"/>
+        </p:spPr>
+        <p:txBody>
+          <a:bodyPr wrap="none" lIns="0" tIns="0" rIns="0" bIns="0"/>
+          <a:p>
+            <a:pPr>
+              <a:lnSpc>
+                <a:spcPct val="100000"/>
+              </a:lnSpc>
+            </a:pPr>
+            <a:r>
+              <a:rPr lang="zh-CN" sz="2250" b="1">
+                <a:solidFill>
+                  <a:srgbClr val="3B82F6"/>
+                </a:solidFill>
+                <a:latin typeface="Consolas"/>
+                <a:ea typeface="Consolas"/>
+              </a:rPr>
+              <a:t>哈希链</a:t>
+            </a:r>
+            <a:endParaRPr/>
+          </a:p>
+        </p:txBody>
+      </p:sp>
+      <p:sp>
+        <p:nvSpPr>
+          <p:cNvPr id="153" name="" descr="{&quot;isTemplate&quot;:true,&quot;type&quot;:&quot;text&quot;}"/>
+          <p:cNvSpPr txBox="1"/>
+          <p:nvPr/>
+        </p:nvSpPr>
+        <p:spPr>
+          <a:xfrm rot="0" flipH="0" flipV="0">
+            <a:off x="8248650" y="4324350"/>
+            <a:ext cx="3048000" cy="295275"/>
+          </a:xfrm>
+          <a:prstGeom prst="rect"/>
+        </p:spPr>
+        <p:txBody>
+          <a:bodyPr wrap="none" lIns="0" tIns="0" rIns="0" bIns="0"/>
+          <a:p>
+            <a:pPr>
+              <a:lnSpc>
+                <a:spcPct val="160000"/>
+              </a:lnSpc>
+            </a:pPr>
+            <a:r>
+              <a:rPr lang="zh-CN" sz="1200">
+                <a:solidFill>
+                  <a:srgbClr val="9CA3AF"/>
+                </a:solidFill>
+                <a:latin typeface="Microsoft YaHei"/>
+                <a:ea typeface="Microsoft YaHei"/>
+              </a:rPr>
+              <a:t>全程可追溯</a:t>
+            </a:r>
+            <a:endParaRPr/>
+          </a:p>
+        </p:txBody>
+      </p:sp>
+      <p:sp>
+        <p:nvSpPr>
+          <p:cNvPr id="154" name="" descr="{&quot;isTemplate&quot;:true,&quot;type&quot;:&quot;text&quot;}"/>
+          <p:cNvSpPr txBox="1"/>
+          <p:nvPr/>
+        </p:nvSpPr>
+        <p:spPr>
+          <a:xfrm rot="0" flipH="0" flipV="0">
+            <a:off x="8248650" y="4695825"/>
+            <a:ext cx="3048000" cy="257175"/>
+          </a:xfrm>
+          <a:prstGeom prst="rect"/>
+        </p:spPr>
+        <p:txBody>
+          <a:bodyPr wrap="none" lIns="0" tIns="0" rIns="0" bIns="0"/>
+          <a:p>
+            <a:pPr>
+              <a:lnSpc>
+                <a:spcPct val="160000"/>
+              </a:lnSpc>
+            </a:pPr>
+            <a:r>
+              <a:rPr lang="zh-CN" sz="1050">
+                <a:solidFill>
+                  <a:srgbClr val="6B7280"/>
+                </a:solidFill>
+                <a:latin typeface="Microsoft YaHei"/>
+                <a:ea typeface="Microsoft YaHei"/>
+              </a:rPr>
+              <a:t>前序哈希串起每条记录，改一条即断链</a:t>
+            </a:r>
+            <a:endParaRPr/>
+          </a:p>
+        </p:txBody>
+      </p:sp>
+      <p:sp>
+        <p:nvSpPr>
+          <p:cNvPr id="155" name=""/>
+          <p:cNvSpPr/>
+          <p:nvPr/>
+        </p:nvSpPr>
+        <p:spPr>
+          <a:xfrm rot="0" flipH="0" flipV="0">
+            <a:off x="685800" y="6076950"/>
+            <a:ext cx="10820400" cy="409575"/>
+          </a:xfrm>
+          <a:custGeom>
+            <a:pathLst>
+              <a:path w="1136" h="43">
+                <a:moveTo>
+                  <a:pt x="0" y="0"/>
+                </a:moveTo>
+                <a:lnTo>
+                  <a:pt x="1136" y="0"/>
+                </a:lnTo>
+                <a:lnTo>
+                  <a:pt x="1136" y="1"/>
+                </a:lnTo>
+                <a:lnTo>
+                  <a:pt x="0" y="1"/>
+                </a:lnTo>
+                <a:close/>
+              </a:path>
+            </a:pathLst>
+          </a:custGeom>
+          <a:solidFill>
+            <a:srgbClr val="243044"/>
+          </a:solidFill>
+          <a:ln/>
+        </p:spPr>
+        <p:txBody>
+          <a:bodyPr/>
+          <a:p/>
+        </p:txBody>
+      </p:sp>
+      <p:sp>
+        <p:nvSpPr>
+          <p:cNvPr id="156" name="" descr="{&quot;isTemplate&quot;:true,&quot;type&quot;:&quot;text&quot;}"/>
+          <p:cNvSpPr txBox="1"/>
+          <p:nvPr/>
+        </p:nvSpPr>
+        <p:spPr>
+          <a:xfrm rot="0" flipH="0" flipV="0">
+            <a:off x="685800" y="6276975"/>
+            <a:ext cx="5343525" cy="200025"/>
+          </a:xfrm>
+          <a:prstGeom prst="rect"/>
+        </p:spPr>
+        <p:txBody>
+          <a:bodyPr wrap="none" lIns="0" tIns="0" rIns="0" bIns="0"/>
+          <a:p>
+            <a:pPr>
+              <a:lnSpc>
+                <a:spcPct val="100000"/>
+              </a:lnSpc>
+            </a:pPr>
+            <a:r>
+              <a:rPr lang="zh-CN" sz="1275">
+                <a:solidFill>
+                  <a:srgbClr val="9CA3AF"/>
+                </a:solidFill>
+                <a:latin typeface="Microsoft YaHei"/>
+                <a:ea typeface="Microsoft YaHei"/>
+              </a:rPr>
+              <a:t>代码、文档、部署说明与全部测试用例随提交包提供，可在评委机器上复跑</a:t>
+            </a:r>
+            <a:endParaRPr/>
+          </a:p>
+        </p:txBody>
+      </p:sp>
+      <p:sp>
+        <p:nvSpPr>
+          <p:cNvPr id="157" name="" descr="{&quot;isTemplate&quot;:true,&quot;type&quot;:&quot;text&quot;}"/>
+          <p:cNvSpPr txBox="1"/>
+          <p:nvPr/>
+        </p:nvSpPr>
+        <p:spPr>
+          <a:xfrm rot="0" flipH="0" flipV="0">
+            <a:off x="8924925" y="6296025"/>
+            <a:ext cx="1466850" cy="171450"/>
+          </a:xfrm>
+          <a:prstGeom prst="rect"/>
+        </p:spPr>
+        <p:txBody>
+          <a:bodyPr wrap="none" lIns="0" tIns="0" rIns="0" bIns="0"/>
+          <a:p>
+            <a:pPr>
+              <a:lnSpc>
+                <a:spcPct val="100000"/>
+              </a:lnSpc>
+            </a:pPr>
+            <a:r>
+              <a:rPr lang="en-US" sz="1125">
+                <a:solidFill>
+                  <a:srgbClr val="6B7280"/>
+                </a:solidFill>
+                <a:latin typeface="Microsoft YaHei"/>
+                <a:ea typeface="Microsoft YaHei"/>
+              </a:rPr>
+              <a:t xml:space="preserve">CordiBank </a:t>
+            </a:r>
             <a:r>
               <a:rPr lang="zh-CN" sz="1125">
                 <a:solidFill>
@@ -5845,68 +6924,43 @@
                 <a:latin typeface="Microsoft YaHei"/>
                 <a:ea typeface="Microsoft YaHei"/>
               </a:rPr>
-              <a:t>分工与仲裁</a:t>
-            </a:r>
-            <a:endParaRPr/>
-          </a:p>
-        </p:txBody>
-      </p:sp>
-      <p:sp>
-        <p:nvSpPr>
-          <p:cNvPr id="145" name="" descr="{&quot;isTemplate&quot;:true,&quot;type&quot;:&quot;text&quot;}"/>
-          <p:cNvSpPr txBox="1"/>
-          <p:nvPr/>
-        </p:nvSpPr>
-        <p:spPr>
-          <a:xfrm rot="0" flipH="0" flipV="0">
-            <a:off x="5448300" y="4267200"/>
-            <a:ext cx="1295400" cy="390525"/>
-          </a:xfrm>
-          <a:prstGeom prst="rect"/>
-        </p:spPr>
-        <p:txBody>
-          <a:bodyPr wrap="none" lIns="0" tIns="0" rIns="0" bIns="0"/>
-          <a:p>
-            <a:pPr algn="ctr">
-              <a:lnSpc>
-                <a:spcPct val="100000"/>
-              </a:lnSpc>
-            </a:pPr>
-            <a:r>
-              <a:rPr lang="zh-CN" sz="2550" b="1">
-                <a:solidFill>
-                  <a:srgbClr val="F59E0B"/>
-                </a:solidFill>
-                <a:latin typeface="JetBrains Mono"/>
-                <a:ea typeface="JetBrains Mono"/>
-              </a:rPr>
-              <a:t>三色分级</a:t>
-            </a:r>
-            <a:endParaRPr/>
-          </a:p>
-        </p:txBody>
-      </p:sp>
-      <p:sp>
-        <p:nvSpPr>
-          <p:cNvPr id="146" name="" descr="{&quot;isTemplate&quot;:true,&quot;type&quot;:&quot;text&quot;}"/>
-          <p:cNvSpPr txBox="1"/>
-          <p:nvPr/>
-        </p:nvSpPr>
-        <p:spPr>
-          <a:xfrm rot="0" flipH="0" flipV="0">
-            <a:off x="5448300" y="4733925"/>
-            <a:ext cx="1295400" cy="171450"/>
-          </a:xfrm>
-          <a:prstGeom prst="rect"/>
-        </p:spPr>
-        <p:txBody>
-          <a:bodyPr wrap="none" lIns="0" tIns="0" rIns="0" bIns="0"/>
-          <a:p>
-            <a:pPr algn="ctr">
-              <a:lnSpc>
-                <a:spcPct val="100000"/>
-              </a:lnSpc>
-            </a:pPr>
+              <a:t>蜂群项目组</a:t>
+            </a:r>
+            <a:endParaRPr/>
+          </a:p>
+        </p:txBody>
+      </p:sp>
+      <p:sp>
+        <p:nvSpPr>
+          <p:cNvPr id="158" name="" descr="{&quot;isTemplate&quot;:true,&quot;type&quot;:&quot;text&quot;}"/>
+          <p:cNvSpPr txBox="1"/>
+          <p:nvPr/>
+        </p:nvSpPr>
+        <p:spPr>
+          <a:xfrm rot="0" flipH="0" flipV="0">
+            <a:off x="10582275" y="6296025"/>
+            <a:ext cx="923925" cy="171450"/>
+          </a:xfrm>
+          <a:prstGeom prst="rect"/>
+        </p:spPr>
+        <p:txBody>
+          <a:bodyPr wrap="none" lIns="0" tIns="0" rIns="0" bIns="0"/>
+          <a:p>
+            <a:pPr>
+              <a:lnSpc>
+                <a:spcPct val="100000"/>
+              </a:lnSpc>
+            </a:pPr>
+            <a:r>
+              <a:rPr lang="en-US" sz="1125">
+                <a:solidFill>
+                  <a:srgbClr val="6B7280"/>
+                </a:solidFill>
+                <a:latin typeface="Microsoft YaHei"/>
+                <a:ea typeface="Microsoft YaHei"/>
+              </a:rPr>
+              <a:t xml:space="preserve">2026 </a:t>
+            </a:r>
             <a:r>
               <a:rPr lang="zh-CN" sz="1125">
                 <a:solidFill>
@@ -5915,68 +6969,18 @@
                 <a:latin typeface="Microsoft YaHei"/>
                 <a:ea typeface="Microsoft YaHei"/>
               </a:rPr>
-              <a:t>绿黄红与令牌</a:t>
-            </a:r>
-            <a:endParaRPr/>
-          </a:p>
-        </p:txBody>
-      </p:sp>
-      <p:sp>
-        <p:nvSpPr>
-          <p:cNvPr id="147" name="" descr="{&quot;isTemplate&quot;:true,&quot;type&quot;:&quot;text&quot;}"/>
-          <p:cNvSpPr txBox="1"/>
-          <p:nvPr/>
-        </p:nvSpPr>
-        <p:spPr>
-          <a:xfrm rot="0" flipH="0" flipV="0">
-            <a:off x="7162800" y="4267200"/>
-            <a:ext cx="971550" cy="390525"/>
-          </a:xfrm>
-          <a:prstGeom prst="rect"/>
-        </p:spPr>
-        <p:txBody>
-          <a:bodyPr wrap="none" lIns="0" tIns="0" rIns="0" bIns="0"/>
-          <a:p>
-            <a:pPr algn="ctr">
-              <a:lnSpc>
-                <a:spcPct val="100000"/>
-              </a:lnSpc>
-            </a:pPr>
-            <a:r>
-              <a:rPr lang="zh-CN" sz="2550" b="1">
-                <a:solidFill>
-                  <a:srgbClr val="3B82F6"/>
-                </a:solidFill>
-                <a:latin typeface="JetBrains Mono"/>
-                <a:ea typeface="JetBrains Mono"/>
-              </a:rPr>
-              <a:t>哈希链</a:t>
-            </a:r>
-            <a:endParaRPr/>
-          </a:p>
-        </p:txBody>
-      </p:sp>
-      <p:sp>
-        <p:nvSpPr>
-          <p:cNvPr id="148" name="" descr="{&quot;isTemplate&quot;:true,&quot;type&quot;:&quot;text&quot;}"/>
-          <p:cNvSpPr txBox="1"/>
-          <p:nvPr/>
-        </p:nvSpPr>
-        <p:spPr>
-          <a:xfrm rot="0" flipH="0" flipV="0">
-            <a:off x="7162800" y="4733925"/>
-            <a:ext cx="971550" cy="171450"/>
-          </a:xfrm>
-          <a:prstGeom prst="rect"/>
-        </p:spPr>
-        <p:txBody>
-          <a:bodyPr wrap="none" lIns="0" tIns="0" rIns="0" bIns="0"/>
-          <a:p>
-            <a:pPr algn="ctr">
-              <a:lnSpc>
-                <a:spcPct val="100000"/>
-              </a:lnSpc>
-            </a:pPr>
+              <a:t>年</a:t>
+            </a:r>
+            <a:r>
+              <a:rPr lang="en-US" sz="1125">
+                <a:solidFill>
+                  <a:srgbClr val="6B7280"/>
+                </a:solidFill>
+                <a:latin typeface="Microsoft YaHei"/>
+                <a:ea typeface="Microsoft YaHei"/>
+              </a:rPr>
+              <a:t xml:space="preserve"> 10 </a:t>
+            </a:r>
             <a:r>
               <a:rPr lang="zh-CN" sz="1125">
                 <a:solidFill>
@@ -5985,42 +6989,7 @@
                 <a:latin typeface="Microsoft YaHei"/>
                 <a:ea typeface="Microsoft YaHei"/>
               </a:rPr>
-              <a:t>全程可追溯</a:t>
-            </a:r>
-            <a:endParaRPr/>
-          </a:p>
-        </p:txBody>
-      </p:sp>
-      <p:sp>
-        <p:nvSpPr>
-          <p:cNvPr id="149" name="" descr="{&quot;isTemplate&quot;:true,&quot;type&quot;:&quot;text&quot;}"/>
-          <p:cNvSpPr txBox="1"/>
-          <p:nvPr/>
-        </p:nvSpPr>
-        <p:spPr>
-          <a:xfrm rot="0" flipH="0" flipV="0">
-            <a:off x="3267075" y="5324475"/>
-            <a:ext cx="5657850" cy="209550"/>
-          </a:xfrm>
-          <a:prstGeom prst="rect"/>
-        </p:spPr>
-        <p:txBody>
-          <a:bodyPr wrap="none" lIns="0" tIns="0" rIns="0" bIns="0"/>
-          <a:p>
-            <a:pPr>
-              <a:lnSpc>
-                <a:spcPct val="100000"/>
-              </a:lnSpc>
-            </a:pPr>
-            <a:r>
-              <a:rPr lang="zh-CN" sz="1350">
-                <a:solidFill>
-                  <a:srgbClr val="9CA3AF"/>
-                </a:solidFill>
-                <a:latin typeface="Microsoft YaHei"/>
-                <a:ea typeface="Microsoft YaHei"/>
-              </a:rPr>
-              <a:t>代码、文档、部署说明与全部测试用例随提交包提供，可在评委机器上复跑</a:t>
+              <a:t>月</a:t>
             </a:r>
             <a:endParaRPr/>
           </a:p>
@@ -6028,6 +6997,7 @@
       </p:sp>
     </p:spTree>
   </p:cSld>
+  <p:extLst/>
 </p:sld>
 </file>
 
@@ -6036,7 +7006,7 @@
   <p:cSld>
     <p:spTree>
       <p:nvGrpSpPr>
-        <p:cNvPr id="150" name="" descr="&lt;Slide style={{ background: &quot;#0B1220&quot;, padding: &quot;42px 72px 40px&quot;, display: &quot;flex&quot;, flexDirection: &quot;column&quot; }}&gt;&#10;  &lt;Text style={{ color: &quot;#6B7280&quot;, fontSize: 14, letterSpacing: 3 }}&gt;实测数据 · 全部可复现&lt;/Text&gt;&#10;  &lt;Text style={{ color: &quot;#F7F4EC&quot;, fontSize: 34, fontWeight: 700, marginTop: 12 }}&gt;三个数字说明这套系统做到了什么&lt;/Text&gt;&#10;  &lt;Box style={{ display: &quot;flex&quot;, flexDirection: &quot;row&quot;, gap: 32, marginTop: 40 }}&gt;&#10;    &lt;Box style={{ flex: 1, borderTop: &quot;3px solid #22C55E&quot;, paddingTop: 22 }}&gt;&#10;      &lt;Text style={{ color: &quot;#22C55E&quot;, fontSize: 96, fontWeight: 700, fontFamily: &quot;JetBrains Mono, monospace&quot;, lineHeight: 1 }}&gt;91&lt;/Text&gt;&#10;      &lt;Text style={{ color: &quot;#F7F4EC&quot;, fontSize: 22, fontWeight: 600, marginTop: 14 }}&gt;项自动化测试&lt;/Text&gt;&#10;      &lt;Text style={{ color: &quot;#9CA3AF&quot;, fontSize: 16, lineHeight: 1.7, marginTop: 10 }}&gt;单元、集成、蜂群协同、真实模型四层。红队四十条用例覆盖直接注入、间接注入、越权与正常请求。&lt;/Text&gt;&#10;    &lt;/Box&gt;&#10;    &lt;Box style={{ flex: 1, borderTop: &quot;3px solid #F59E0B&quot;, paddingTop: 22 }}&gt;&#10;      &lt;Text style={{ color: &quot;#F59E0B&quot;, fontSize: 96, fontWeight: 700, fontFamily: &quot;JetBrains Mono, monospace&quot;, lineHeight: 1 }}&gt;21&lt;/Text&gt;&#10;      &lt;Text style={{ color: &quot;#F7F4EC&quot;, fontSize: 22, fontWeight: 600, marginTop: 14 }}&gt;个内置工具&lt;/Text&gt;&#10;      &lt;Text style={{ color: &quot;#9CA3AF&quot;, fontSize: 16, lineHeight: 1.7, marginTop: 10 }}&gt;六个赛题场景全部覆盖，另有四个外部服务提供十三个工具，经同一张注册表并入模型工具集。&lt;/Text&gt;&#10;    &lt;/Box&gt;&#10;    &lt;Box style={{ flex: 1, borderTop: &quot;3px solid #EF4444&quot;, paddingTop: 22 }}&gt;&#10;      &lt;Text style={{ color: &quot;#EF4444&quot;, fontSize: 96, fontWeight: 700, fontFamily: &quot;JetBrains Mono, monospace&quot;, lineHeight: 1 }}&gt;100%&lt;/Text&gt;&#10;      &lt;Text style={{ color: &quot;#F7F4EC&quot;, fontSize: 22, fontWeight: 600, marginTop: 14 }}&gt;注入拦截率&lt;/Text&gt;&#10;      &lt;Text style={{ color: &quot;#9CA3AF&quot;, fontSize: 16, lineHeight: 1.7, marginTop: 10 }}&gt;四类注入特征全部命中，正常请求误拦为零。不可逆操作百分之百判红，不给确认通道。&lt;/Text&gt;&#10;    &lt;/Box&gt;&#10;  &lt;/Box&gt;&#10;&#10;  &lt;Box style={{ display: &quot;flex&quot;, flexDirection: &quot;row&quot;, gap: 24, marginTop: 34, borderTop: &quot;1px solid #243044&quot;, paddingTop: 22 }}&gt;&#10;    &lt;Box style={{ flex: 1, background: &quot;rgba(34,197,94,0.07)&quot;, border: &quot;1px solid rgba(34,197,94,0.3)&quot;, borderRadius: 10, padding: 18 }}&gt;&#10;      &lt;Text style={{ color: &quot;#22C55E&quot;, fontSize: 17, fontWeight: 700 }}&gt;怎么跑&lt;/Text&gt;&#10;      &lt;Text style={{ color: &quot;#9CA3AF&quot;, fontSize: 15, lineHeight: 1.65, marginTop: 6 }}&gt;runtime 目录下执行测试命令，输出逐条用例名与通过状态。&lt;/Text&gt;&#10;    &lt;/Box&gt;&#10;    &lt;Box style={{ flex: 1, background: &quot;rgba(245,158,11,0.07)&quot;, border: &quot;1px solid rgba(245,158,11,0.3)&quot;, borderRadius: 10, padding: 18 }}&gt;&#10;      &lt;Text style={{ color: &quot;#F59E0B&quot;, fontSize: 17, fontWeight: 700 }}&gt;在哪里看&lt;/Text&gt;&#10;      &lt;Text style={{ color: &quot;#9CA3AF&quot;, fontSize: 15, lineHeight: 1.65, marginTop: 6 }}&gt;控制台「跑红队集」与「工具清单」两个面板直接给出统计数字。&lt;/Text&gt;&#10;    &lt;/Box&gt;&#10;    &lt;Box style={{ flex: 1, background: &quot;rgba(59,130,246,0.07)&quot;, border: &quot;1px solid rgba(59,130,246,0.3)&quot;, borderRadius: 10, padding: 18 }}&gt;&#10;      &lt;Text style={{ color: &quot;#93C5FD&quot;, fontSize: 17, fontWeight: 700 }}&gt;证据在哪&lt;/Text&gt;&#10;      &lt;Text style={{ color: &quot;#9CA3AF&quot;, fontSize: 15, lineHeight: 1.65, marginTop: 6 }}&gt;《部署说明》第八节列出全部验证命令与完整输出，评委可原样复跑。&lt;/Text&gt;&#10;    &lt;/Box&gt;&#10;  &lt;/Box&gt;&#10;&lt;/Slide&gt;&#10;"/>
+        <p:cNvPr id="159" name="" descr="&lt;Slide style={{ background: &quot;#0B1220&quot;, padding: &quot;42px 72px 40px&quot;, display: &quot;flex&quot;, flexDirection: &quot;column&quot; }}&gt;&#10;  &lt;Text style={{ color: &quot;#6B7280&quot;, fontSize: 14, letterSpacing: 3 }}&gt;实测数据 · 全部可复现&lt;/Text&gt;&#10;  &lt;Text style={{ color: &quot;#F7F4EC&quot;, fontSize: 34, fontWeight: 700, marginTop: 12 }}&gt;三个数字说明这套系统做到了什么&lt;/Text&gt;&#10;  &lt;Box style={{ display: &quot;flex&quot;, flexDirection: &quot;row&quot;, gap: 32, marginTop: 40 }}&gt;&#10;    &lt;Box style={{ flex: 1, borderTop: &quot;3px solid #22C55E&quot;, paddingTop: 22 }}&gt;&#10;      &lt;Text style={{ color: &quot;#22C55E&quot;, fontSize: 96, fontWeight: 700, fontFamily: &quot;Consolas, monospace&quot;, lineHeight: 1 }}&gt;91&lt;/Text&gt;&#10;      &lt;Text style={{ color: &quot;#F7F4EC&quot;, fontSize: 22, fontWeight: 600, marginTop: 14 }}&gt;项自动化测试&lt;/Text&gt;&#10;      &lt;Text style={{ color: &quot;#9CA3AF&quot;, fontSize: 16, lineHeight: 1.7, marginTop: 10 }}&gt;单元、集成、蜂群协同、真实模型四层。红队四十条用例覆盖直接注入、间接注入、越权与正常请求。&lt;/Text&gt;&#10;    &lt;/Box&gt;&#10;    &lt;Box style={{ flex: 1, borderTop: &quot;3px solid #F59E0B&quot;, paddingTop: 22 }}&gt;&#10;      &lt;Text style={{ color: &quot;#F59E0B&quot;, fontSize: 96, fontWeight: 700, fontFamily: &quot;Consolas, monospace&quot;, lineHeight: 1 }}&gt;21&lt;/Text&gt;&#10;      &lt;Text style={{ color: &quot;#F7F4EC&quot;, fontSize: 22, fontWeight: 600, marginTop: 14 }}&gt;个内置工具&lt;/Text&gt;&#10;      &lt;Text style={{ color: &quot;#9CA3AF&quot;, fontSize: 16, lineHeight: 1.7, marginTop: 10 }}&gt;六个赛题场景全部覆盖，另有四个外部服务提供十三个工具，经同一张注册表并入模型工具集。&lt;/Text&gt;&#10;    &lt;/Box&gt;&#10;    &lt;Box style={{ flex: 1, borderTop: &quot;3px solid #EF4444&quot;, paddingTop: 22 }}&gt;&#10;      &lt;Text style={{ color: &quot;#EF4444&quot;, fontSize: 96, fontWeight: 700, fontFamily: &quot;Consolas, monospace&quot;, lineHeight: 1 }}&gt;100%&lt;/Text&gt;&#10;      &lt;Text style={{ color: &quot;#F7F4EC&quot;, fontSize: 22, fontWeight: 600, marginTop: 14 }}&gt;注入拦截率&lt;/Text&gt;&#10;      &lt;Text style={{ color: &quot;#9CA3AF&quot;, fontSize: 16, lineHeight: 1.7, marginTop: 10 }}&gt;四类注入特征全部命中，正常请求误拦为零。不可逆操作百分之百判红，不给确认通道。&lt;/Text&gt;&#10;    &lt;/Box&gt;&#10;  &lt;/Box&gt;&#10;&#10;  &lt;Box style={{ display: &quot;flex&quot;, flexDirection: &quot;row&quot;, gap: 24, marginTop: 34, borderTop: &quot;1px solid #243044&quot;, paddingTop: 22 }}&gt;&#10;    &lt;Box style={{ flex: 1, background: &quot;rgba(34,197,94,0.07)&quot;, border: &quot;1px solid rgba(34,197,94,0.3)&quot;, borderRadius: 10, padding: 18 }}&gt;&#10;      &lt;Text style={{ color: &quot;#22C55E&quot;, fontSize: 17, fontWeight: 700 }}&gt;怎么跑&lt;/Text&gt;&#10;      &lt;Text style={{ color: &quot;#9CA3AF&quot;, fontSize: 15, lineHeight: 1.65, marginTop: 6 }}&gt;runtime 目录下执行测试命令，输出逐条用例名与通过状态。&lt;/Text&gt;&#10;    &lt;/Box&gt;&#10;    &lt;Box style={{ flex: 1, background: &quot;rgba(245,158,11,0.07)&quot;, border: &quot;1px solid rgba(245,158,11,0.3)&quot;, borderRadius: 10, padding: 18 }}&gt;&#10;      &lt;Text style={{ color: &quot;#F59E0B&quot;, fontSize: 17, fontWeight: 700 }}&gt;在哪里看&lt;/Text&gt;&#10;      &lt;Text style={{ color: &quot;#9CA3AF&quot;, fontSize: 15, lineHeight: 1.65, marginTop: 6 }}&gt;控制台「跑红队集」与「工具清单」两个面板直接给出统计数字。&lt;/Text&gt;&#10;    &lt;/Box&gt;&#10;    &lt;Box style={{ flex: 1, background: &quot;rgba(59,130,246,0.07)&quot;, border: &quot;1px solid rgba(59,130,246,0.3)&quot;, borderRadius: 10, padding: 18 }}&gt;&#10;      &lt;Text style={{ color: &quot;#93C5FD&quot;, fontSize: 17, fontWeight: 700 }}&gt;证据在哪&lt;/Text&gt;&#10;      &lt;Text style={{ color: &quot;#9CA3AF&quot;, fontSize: 15, lineHeight: 1.65, marginTop: 6 }}&gt;《部署说明》第八节列出全部验证命令与完整输出，评委可原样复跑。&lt;/Text&gt;&#10;    &lt;/Box&gt;&#10;  &lt;/Box&gt;&#10;&lt;/Slide&gt;&#10;"/>
         <p:cNvGrpSpPr/>
         <p:nvPr/>
       </p:nvGrpSpPr>
@@ -6050,7 +7020,7 @@
       </p:grpSpPr>
       <p:sp>
         <p:nvSpPr>
-          <p:cNvPr id="151" name=""/>
+          <p:cNvPr id="160" name=""/>
           <p:cNvSpPr/>
           <p:nvPr/>
         </p:nvSpPr>
@@ -6074,7 +7044,7 @@
       </p:sp>
       <p:sp>
         <p:nvSpPr>
-          <p:cNvPr id="152" name="" descr="{&quot;isTemplate&quot;:true,&quot;type&quot;:&quot;text&quot;}"/>
+          <p:cNvPr id="161" name="" descr="{&quot;isTemplate&quot;:true,&quot;type&quot;:&quot;text&quot;}"/>
           <p:cNvSpPr txBox="1"/>
           <p:nvPr/>
         </p:nvSpPr>
@@ -6129,7 +7099,7 @@
       </p:sp>
       <p:sp>
         <p:nvSpPr>
-          <p:cNvPr id="153" name="" descr="{&quot;isTemplate&quot;:true,&quot;type&quot;:&quot;text&quot;}"/>
+          <p:cNvPr id="162" name="" descr="{&quot;isTemplate&quot;:true,&quot;type&quot;:&quot;text&quot;}"/>
           <p:cNvSpPr txBox="1"/>
           <p:nvPr/>
         </p:nvSpPr>
@@ -6164,7 +7134,7 @@
       </p:sp>
       <p:sp>
         <p:nvSpPr>
-          <p:cNvPr id="154" name=""/>
+          <p:cNvPr id="163" name=""/>
           <p:cNvSpPr/>
           <p:nvPr/>
         </p:nvSpPr>
@@ -6204,7 +7174,7 @@
       </p:sp>
       <p:sp>
         <p:nvSpPr>
-          <p:cNvPr id="155" name="" descr="{&quot;isTemplate&quot;:true,&quot;type&quot;:&quot;text&quot;}"/>
+          <p:cNvPr id="164" name="" descr="{&quot;isTemplate&quot;:true,&quot;type&quot;:&quot;text&quot;}"/>
           <p:cNvSpPr txBox="1"/>
           <p:nvPr/>
         </p:nvSpPr>
@@ -6228,8 +7198,8 @@
                 <a:solidFill>
                   <a:srgbClr val="22C55E"/>
                 </a:solidFill>
-                <a:latin typeface="JetBrains Mono"/>
-                <a:ea typeface="JetBrains Mono"/>
+                <a:latin typeface="Consolas"/>
+                <a:ea typeface="Consolas"/>
               </a:rPr>
               <a:t>91</a:t>
             </a:r>
@@ -6239,7 +7209,7 @@
       </p:sp>
       <p:sp>
         <p:nvSpPr>
-          <p:cNvPr id="156" name="" descr="{&quot;isTemplate&quot;:true,&quot;type&quot;:&quot;text&quot;}"/>
+          <p:cNvPr id="165" name="" descr="{&quot;isTemplate&quot;:true,&quot;type&quot;:&quot;text&quot;}"/>
           <p:cNvSpPr txBox="1"/>
           <p:nvPr/>
         </p:nvSpPr>
@@ -6274,7 +7244,7 @@
       </p:sp>
       <p:sp>
         <p:nvSpPr>
-          <p:cNvPr id="157" name="" descr="{&quot;isTemplate&quot;:true,&quot;type&quot;:&quot;text&quot;}"/>
+          <p:cNvPr id="166" name="" descr="{&quot;isTemplate&quot;:true,&quot;type&quot;:&quot;text&quot;}"/>
           <p:cNvSpPr txBox="1"/>
           <p:nvPr/>
         </p:nvSpPr>
@@ -6311,7 +7281,7 @@
       </p:sp>
       <p:sp>
         <p:nvSpPr>
-          <p:cNvPr id="158" name=""/>
+          <p:cNvPr id="167" name=""/>
           <p:cNvSpPr/>
           <p:nvPr/>
         </p:nvSpPr>
@@ -6351,7 +7321,7 @@
       </p:sp>
       <p:sp>
         <p:nvSpPr>
-          <p:cNvPr id="159" name="" descr="{&quot;isTemplate&quot;:true,&quot;type&quot;:&quot;text&quot;}"/>
+          <p:cNvPr id="168" name="" descr="{&quot;isTemplate&quot;:true,&quot;type&quot;:&quot;text&quot;}"/>
           <p:cNvSpPr txBox="1"/>
           <p:nvPr/>
         </p:nvSpPr>
@@ -6375,8 +7345,8 @@
                 <a:solidFill>
                   <a:srgbClr val="F59E0B"/>
                 </a:solidFill>
-                <a:latin typeface="JetBrains Mono"/>
-                <a:ea typeface="JetBrains Mono"/>
+                <a:latin typeface="Consolas"/>
+                <a:ea typeface="Consolas"/>
               </a:rPr>
               <a:t>21</a:t>
             </a:r>
@@ -6386,7 +7356,7 @@
       </p:sp>
       <p:sp>
         <p:nvSpPr>
-          <p:cNvPr id="160" name="" descr="{&quot;isTemplate&quot;:true,&quot;type&quot;:&quot;text&quot;}"/>
+          <p:cNvPr id="169" name="" descr="{&quot;isTemplate&quot;:true,&quot;type&quot;:&quot;text&quot;}"/>
           <p:cNvSpPr txBox="1"/>
           <p:nvPr/>
         </p:nvSpPr>
@@ -6421,7 +7391,7 @@
       </p:sp>
       <p:sp>
         <p:nvSpPr>
-          <p:cNvPr id="161" name="" descr="{&quot;isTemplate&quot;:true,&quot;type&quot;:&quot;text&quot;}"/>
+          <p:cNvPr id="170" name="" descr="{&quot;isTemplate&quot;:true,&quot;type&quot;:&quot;text&quot;}"/>
           <p:cNvSpPr txBox="1"/>
           <p:nvPr/>
         </p:nvSpPr>
@@ -6458,7 +7428,7 @@
       </p:sp>
       <p:sp>
         <p:nvSpPr>
-          <p:cNvPr id="162" name=""/>
+          <p:cNvPr id="171" name=""/>
           <p:cNvSpPr/>
           <p:nvPr/>
         </p:nvSpPr>
@@ -6498,7 +7468,7 @@
       </p:sp>
       <p:sp>
         <p:nvSpPr>
-          <p:cNvPr id="163" name="" descr="{&quot;isTemplate&quot;:true,&quot;type&quot;:&quot;text&quot;}"/>
+          <p:cNvPr id="172" name="" descr="{&quot;isTemplate&quot;:true,&quot;type&quot;:&quot;text&quot;}"/>
           <p:cNvSpPr txBox="1"/>
           <p:nvPr/>
         </p:nvSpPr>
@@ -6522,8 +7492,8 @@
                 <a:solidFill>
                   <a:srgbClr val="EF4444"/>
                 </a:solidFill>
-                <a:latin typeface="JetBrains Mono"/>
-                <a:ea typeface="JetBrains Mono"/>
+                <a:latin typeface="Consolas"/>
+                <a:ea typeface="Consolas"/>
               </a:rPr>
               <a:t>100%</a:t>
             </a:r>
@@ -6533,7 +7503,7 @@
       </p:sp>
       <p:sp>
         <p:nvSpPr>
-          <p:cNvPr id="164" name="" descr="{&quot;isTemplate&quot;:true,&quot;type&quot;:&quot;text&quot;}"/>
+          <p:cNvPr id="173" name="" descr="{&quot;isTemplate&quot;:true,&quot;type&quot;:&quot;text&quot;}"/>
           <p:cNvSpPr txBox="1"/>
           <p:nvPr/>
         </p:nvSpPr>
@@ -6568,7 +7538,7 @@
       </p:sp>
       <p:sp>
         <p:nvSpPr>
-          <p:cNvPr id="165" name="" descr="{&quot;isTemplate&quot;:true,&quot;type&quot;:&quot;text&quot;}"/>
+          <p:cNvPr id="174" name="" descr="{&quot;isTemplate&quot;:true,&quot;type&quot;:&quot;text&quot;}"/>
           <p:cNvSpPr txBox="1"/>
           <p:nvPr/>
         </p:nvSpPr>
@@ -6605,7 +7575,7 @@
       </p:sp>
       <p:sp>
         <p:nvSpPr>
-          <p:cNvPr id="166" name=""/>
+          <p:cNvPr id="175" name=""/>
           <p:cNvSpPr/>
           <p:nvPr/>
         </p:nvSpPr>
@@ -6645,7 +7615,7 @@
       </p:sp>
       <p:sp>
         <p:nvSpPr>
-          <p:cNvPr id="167" name=""/>
+          <p:cNvPr id="176" name=""/>
           <p:cNvSpPr/>
           <p:nvPr/>
         </p:nvSpPr>
@@ -6680,7 +7650,7 @@
       </p:sp>
       <p:sp>
         <p:nvSpPr>
-          <p:cNvPr id="168" name="" descr="{&quot;isTemplate&quot;:true,&quot;type&quot;:&quot;text&quot;}"/>
+          <p:cNvPr id="177" name="" descr="{&quot;isTemplate&quot;:true,&quot;type&quot;:&quot;text&quot;}"/>
           <p:cNvSpPr txBox="1"/>
           <p:nvPr/>
         </p:nvSpPr>
@@ -6715,7 +7685,7 @@
       </p:sp>
       <p:sp>
         <p:nvSpPr>
-          <p:cNvPr id="169" name="" descr="{&quot;isTemplate&quot;:true,&quot;type&quot;:&quot;text&quot;}"/>
+          <p:cNvPr id="178" name="" descr="{&quot;isTemplate&quot;:true,&quot;type&quot;:&quot;text&quot;}"/>
           <p:cNvSpPr txBox="1"/>
           <p:nvPr/>
         </p:nvSpPr>
@@ -6762,7 +7732,7 @@
       </p:sp>
       <p:sp>
         <p:nvSpPr>
-          <p:cNvPr id="170" name=""/>
+          <p:cNvPr id="179" name=""/>
           <p:cNvSpPr/>
           <p:nvPr/>
         </p:nvSpPr>
@@ -6797,7 +7767,7 @@
       </p:sp>
       <p:sp>
         <p:nvSpPr>
-          <p:cNvPr id="171" name="" descr="{&quot;isTemplate&quot;:true,&quot;type&quot;:&quot;text&quot;}"/>
+          <p:cNvPr id="180" name="" descr="{&quot;isTemplate&quot;:true,&quot;type&quot;:&quot;text&quot;}"/>
           <p:cNvSpPr txBox="1"/>
           <p:nvPr/>
         </p:nvSpPr>
@@ -6832,7 +7802,7 @@
       </p:sp>
       <p:sp>
         <p:nvSpPr>
-          <p:cNvPr id="172" name="" descr="{&quot;isTemplate&quot;:true,&quot;type&quot;:&quot;text&quot;}"/>
+          <p:cNvPr id="181" name="" descr="{&quot;isTemplate&quot;:true,&quot;type&quot;:&quot;text&quot;}"/>
           <p:cNvSpPr txBox="1"/>
           <p:nvPr/>
         </p:nvSpPr>
@@ -6869,7 +7839,7 @@
       </p:sp>
       <p:sp>
         <p:nvSpPr>
-          <p:cNvPr id="173" name=""/>
+          <p:cNvPr id="182" name=""/>
           <p:cNvSpPr/>
           <p:nvPr/>
         </p:nvSpPr>
@@ -6904,7 +7874,7 @@
       </p:sp>
       <p:sp>
         <p:nvSpPr>
-          <p:cNvPr id="174" name="" descr="{&quot;isTemplate&quot;:true,&quot;type&quot;:&quot;text&quot;}"/>
+          <p:cNvPr id="183" name="" descr="{&quot;isTemplate&quot;:true,&quot;type&quot;:&quot;text&quot;}"/>
           <p:cNvSpPr txBox="1"/>
           <p:nvPr/>
         </p:nvSpPr>
@@ -6939,7 +7909,7 @@
       </p:sp>
       <p:sp>
         <p:nvSpPr>
-          <p:cNvPr id="175" name="" descr="{&quot;isTemplate&quot;:true,&quot;type&quot;:&quot;text&quot;}"/>
+          <p:cNvPr id="184" name="" descr="{&quot;isTemplate&quot;:true,&quot;type&quot;:&quot;text&quot;}"/>
           <p:cNvSpPr txBox="1"/>
           <p:nvPr/>
         </p:nvSpPr>
@@ -6976,6 +7946,7 @@
       </p:sp>
     </p:spTree>
   </p:cSld>
+  <p:extLst/>
 </p:sld>
 </file>
 
@@ -6984,7 +7955,7 @@
   <p:cSld>
     <p:spTree>
       <p:nvGrpSpPr>
-        <p:cNvPr id="176" name="" descr="&lt;Slide style={{ background: &quot;#0B1220&quot;, padding: &quot;42px 72px 40px&quot;, display: &quot;flex&quot;, flexDirection: &quot;column&quot; }}&gt;&#10;  &lt;Text style={{ color: &quot;#6B7280&quot;, fontSize: 14, letterSpacing: 3 }}&gt;问题&lt;/Text&gt;&#10;  &lt;Text style={{ color: &quot;#F7F4EC&quot;, fontSize: 34, fontWeight: 700, marginTop: 12 }}&gt;一个大脑包办所有事，代价落在三处&lt;/Text&gt;&#10;  &lt;Box style={{ display: &quot;flex&quot;, flexDirection: &quot;row&quot;, gap: 28, marginTop: 38 }}&gt;&#10;    &lt;Box style={{ flex: 1, background: &quot;rgba(239,68,68,0.08)&quot;, border: &quot;1px solid rgba(239,68,68,0.35)&quot;, borderRadius: 12, padding: 26, height: 300 }}&gt;&#10;      &lt;Text style={{ color: &quot;#EF4444&quot;, fontSize: 40, fontWeight: 700, fontFamily: &quot;JetBrains Mono, monospace&quot; }}&gt;01&lt;/Text&gt;&#10;      &lt;Text style={{ color: &quot;#F7F4EC&quot;, fontSize: 24, fontWeight: 600, marginTop: 14 }}&gt;判不准&lt;/Text&gt;&#10;      &lt;Text style={{ color: &quot;#9CA3AF&quot;, fontSize: 17, lineHeight: 1.75, marginTop: 10 }}&gt;同一个模型既要想「用户要什么」，又要想「这事能不能办」。两个目标写在一段提示词里，互相干扰，结果是该拦的没拦，该放的没放。&lt;/Text&gt;&#10;    &lt;/Box&gt;&#10;    &lt;Box style={{ flex: 1, background: &quot;rgba(245,158,11,0.08)&quot;, border: &quot;1px solid rgba(245,158,11,0.35)&quot;, borderRadius: 12, padding: 26, height: 300 }}&gt;&#10;      &lt;Text style={{ color: &quot;#F59E0B&quot;, fontSize: 40, fontWeight: 700, fontFamily: &quot;JetBrains Mono, monospace&quot; }}&gt;02&lt;/Text&gt;&#10;      &lt;Text style={{ color: &quot;#F7F4EC&quot;, fontSize: 24, fontWeight: 600, marginTop: 14 }}&gt;说不清&lt;/Text&gt;&#10;      &lt;Text style={{ color: &quot;#9CA3AF&quot;, fontSize: 17, lineHeight: 1.75, marginTop: 10 }}&gt;出错时只能看到一个结论，不知道是哪一步出的问题。评委问「为什么判黄」，答不上具体规则与阈值，等于没有判定。&lt;/Text&gt;&#10;    &lt;/Box&gt;&#10;    &lt;Box style={{ flex: 1, background: &quot;rgba(107,114,128,0.10)&quot;, border: &quot;1px solid rgba(107,114,128,0.35)&quot;, borderRadius: 12, padding: 26, height: 300 }}&gt;&#10;      &lt;Text style={{ color: &quot;#9CA3AF&quot;, fontSize: 40, fontWeight: 700, fontFamily: &quot;JetBrains Mono, monospace&quot; }}&gt;03&lt;/Text&gt;&#10;      &lt;Text style={{ color: &quot;#F7F4EC&quot;, fontSize: 24, fontWeight: 600, marginTop: 14 }}&gt;改不动&lt;/Text&gt;&#10;      &lt;Text style={{ color: &quot;#9CA3AF&quot;, fontSize: 17, lineHeight: 1.75, marginTop: 10 }}&gt;要加一条风控规则，得动主流程；要加一句合规校验，还得动主流程。改一处牵全身，团队里没人敢动那段代码。&lt;/Text&gt;&#10;    &lt;/Box&gt;&#10;  &lt;/Box&gt;&#10;&#10;  &lt;Box style={{ display: &quot;flex&quot;, flexDirection: &quot;row&quot;, gap: 24, marginTop: 30, borderTop: &quot;1px solid #243044&quot;, paddingTop: 22 }}&gt;&#10;    &lt;Box style={{ flex: 1.4, display: &quot;flex&quot;, flexDirection: &quot;column&quot; }}&gt;&#10;      &lt;Text style={{ color: &quot;#22C55E&quot;, fontSize: 20, fontWeight: 600 }}&gt;解法不是换更强的模型，是把一件事拆给多个专职角色&lt;/Text&gt;&#10;      &lt;Text style={{ color: &quot;#9CA3AF&quot;, fontSize: 16, lineHeight: 1.7, marginTop: 8 }}&gt;每个角色只回答自己那一个问题，模型只做理解与选择，判定逻辑留在代码里。&lt;/Text&gt;&#10;      &lt;Text style={{ color: &quot;#6B7280&quot;, fontSize: 15, lineHeight: 1.7, marginTop: 12 }}&gt;三个代价对应三处改动：多视角交叉验证替代单点判断，规则命中留痕替代只给结论，角色隔离替代改主流程。&lt;/Text&gt;&#10;    &lt;/Box&gt;&#10;    &lt;Box style={{ flex: 1, background: &quot;rgba(34,197,94,0.07)&quot;, border: &quot;1px solid rgba(34,197,94,0.3)&quot;, borderRadius: 10, padding: 18, display: &quot;flex&quot;, flexDirection: &quot;column&quot; }}&gt;&#10;      &lt;Text style={{ color: &quot;#22C55E&quot;, fontSize: 17, fontWeight: 700 }}&gt;三个代价怎么消&lt;/Text&gt;&#10;      &lt;Text style={{ color: &quot;#9CA3AF&quot;, fontSize: 15, lineHeight: 1.65, marginTop: 6 }}&gt;判不准靠并行多视角交叉验证，说不清靠命中规则留痕，改不动靠角色隔离各自演进。&lt;/Text&gt;&#10;      &lt;Text style={{ color: &quot;#6B7280&quot;, fontSize: 14, lineHeight: 1.65, marginTop: 8 }}&gt;三组代价在同一套改动里一起消掉，不需要分批上线。&lt;/Text&gt;&#10;    &lt;/Box&gt;&#10;  &lt;/Box&gt;&#10;&lt;/Slide&gt;&#10;"/>
+        <p:cNvPr id="185" name="" descr="&lt;Slide style={{ background: &quot;#0B1220&quot;, padding: &quot;42px 72px 40px&quot;, display: &quot;flex&quot;, flexDirection: &quot;column&quot; }}&gt;&#10;  &lt;Text style={{ color: &quot;#6B7280&quot;, fontSize: 14, letterSpacing: 3 }}&gt;问题&lt;/Text&gt;&#10;  &lt;Text style={{ color: &quot;#F7F4EC&quot;, fontSize: 34, fontWeight: 700, marginTop: 12 }}&gt;一个大脑包办所有事，代价落在三处&lt;/Text&gt;&#10;  &lt;Box style={{ display: &quot;flex&quot;, flexDirection: &quot;row&quot;, gap: 28, marginTop: 38 }}&gt;&#10;    &lt;Box style={{ flex: 1, background: &quot;rgba(239,68,68,0.08)&quot;, border: &quot;1px solid rgba(239,68,68,0.35)&quot;, borderRadius: 12, padding: 26, height: 300 }}&gt;&#10;      &lt;Text style={{ color: &quot;#EF4444&quot;, fontSize: 40, fontWeight: 700, fontFamily: &quot;Consolas, monospace&quot; }}&gt;01&lt;/Text&gt;&#10;      &lt;Text style={{ color: &quot;#F7F4EC&quot;, fontSize: 24, fontWeight: 600, marginTop: 14 }}&gt;判不准&lt;/Text&gt;&#10;      &lt;Text style={{ color: &quot;#9CA3AF&quot;, fontSize: 17, lineHeight: 1.75, marginTop: 10 }}&gt;同一个模型既要想「用户要什么」，又要想「这事能不能办」。两个目标写在一段提示词里，互相干扰，结果是该拦的没拦，该放的没放。&lt;/Text&gt;&#10;    &lt;/Box&gt;&#10;    &lt;Box style={{ flex: 1, background: &quot;rgba(245,158,11,0.08)&quot;, border: &quot;1px solid rgba(245,158,11,0.35)&quot;, borderRadius: 12, padding: 26, height: 300 }}&gt;&#10;      &lt;Text style={{ color: &quot;#F59E0B&quot;, fontSize: 40, fontWeight: 700, fontFamily: &quot;Consolas, monospace&quot; }}&gt;02&lt;/Text&gt;&#10;      &lt;Text style={{ color: &quot;#F7F4EC&quot;, fontSize: 24, fontWeight: 600, marginTop: 14 }}&gt;说不清&lt;/Text&gt;&#10;      &lt;Text style={{ color: &quot;#9CA3AF&quot;, fontSize: 17, lineHeight: 1.75, marginTop: 10 }}&gt;出错时只能看到一个结论，不知道是哪一步出的问题。评委问「为什么判黄」，答不上具体规则与阈值，等于没有判定。&lt;/Text&gt;&#10;    &lt;/Box&gt;&#10;    &lt;Box style={{ flex: 1, background: &quot;rgba(107,114,128,0.10)&quot;, border: &quot;1px solid rgba(107,114,128,0.35)&quot;, borderRadius: 12, padding: 26, height: 300 }}&gt;&#10;      &lt;Text style={{ color: &quot;#9CA3AF&quot;, fontSize: 40, fontWeight: 700, fontFamily: &quot;Consolas, monospace&quot; }}&gt;03&lt;/Text&gt;&#10;      &lt;Text style={{ color: &quot;#F7F4EC&quot;, fontSize: 24, fontWeight: 600, marginTop: 14 }}&gt;改不动&lt;/Text&gt;&#10;      &lt;Text style={{ color: &quot;#9CA3AF&quot;, fontSize: 17, lineHeight: 1.75, marginTop: 10 }}&gt;要加一条风控规则，得动主流程；要加一句合规校验，还得动主流程。改一处牵全身，团队里没人敢动那段代码。&lt;/Text&gt;&#10;    &lt;/Box&gt;&#10;  &lt;/Box&gt;&#10;&#10;  &lt;Box style={{ display: &quot;flex&quot;, flexDirection: &quot;row&quot;, gap: 24, marginTop: 30, borderTop: &quot;1px solid #243044&quot;, paddingTop: 22 }}&gt;&#10;    &lt;Box style={{ flex: 1.4, display: &quot;flex&quot;, flexDirection: &quot;column&quot; }}&gt;&#10;      &lt;Text style={{ color: &quot;#22C55E&quot;, fontSize: 20, fontWeight: 600 }}&gt;解法不是换更强的模型，是把一件事拆给多个专职角色&lt;/Text&gt;&#10;      &lt;Text style={{ color: &quot;#9CA3AF&quot;, fontSize: 16, lineHeight: 1.7, marginTop: 8 }}&gt;每个角色只回答自己那一个问题，模型只做理解与选择，判定逻辑留在代码里。&lt;/Text&gt;&#10;      &lt;Text style={{ color: &quot;#6B7280&quot;, fontSize: 15, lineHeight: 1.7, marginTop: 12 }}&gt;三个代价对应三处改动：多视角交叉验证替代单点判断，规则命中留痕替代只给结论，角色隔离替代改主流程。&lt;/Text&gt;&#10;    &lt;/Box&gt;&#10;    &lt;Box style={{ flex: 1, background: &quot;rgba(34,197,94,0.07)&quot;, border: &quot;1px solid rgba(34,197,94,0.3)&quot;, borderRadius: 10, padding: 18, display: &quot;flex&quot;, flexDirection: &quot;column&quot; }}&gt;&#10;      &lt;Text style={{ color: &quot;#22C55E&quot;, fontSize: 17, fontWeight: 700 }}&gt;三个代价怎么消&lt;/Text&gt;&#10;      &lt;Text style={{ color: &quot;#9CA3AF&quot;, fontSize: 15, lineHeight: 1.65, marginTop: 6 }}&gt;判不准靠并行多视角交叉验证，说不清靠命中规则留痕，改不动靠角色隔离各自演进。&lt;/Text&gt;&#10;      &lt;Text style={{ color: &quot;#6B7280&quot;, fontSize: 14, lineHeight: 1.65, marginTop: 8 }}&gt;三组代价在同一套改动里一起消掉，不需要分批上线。&lt;/Text&gt;&#10;    &lt;/Box&gt;&#10;  &lt;/Box&gt;&#10;&lt;/Slide&gt;&#10;"/>
         <p:cNvGrpSpPr/>
         <p:nvPr/>
       </p:nvGrpSpPr>
@@ -6998,7 +7969,7 @@
       </p:grpSpPr>
       <p:sp>
         <p:nvSpPr>
-          <p:cNvPr id="177" name=""/>
+          <p:cNvPr id="186" name=""/>
           <p:cNvSpPr/>
           <p:nvPr/>
         </p:nvSpPr>
@@ -7022,7 +7993,7 @@
       </p:sp>
       <p:sp>
         <p:nvSpPr>
-          <p:cNvPr id="178" name="" descr="{&quot;isTemplate&quot;:true,&quot;type&quot;:&quot;text&quot;}"/>
+          <p:cNvPr id="187" name="" descr="{&quot;isTemplate&quot;:true,&quot;type&quot;:&quot;text&quot;}"/>
           <p:cNvSpPr txBox="1"/>
           <p:nvPr/>
         </p:nvSpPr>
@@ -7057,7 +8028,7 @@
       </p:sp>
       <p:sp>
         <p:nvSpPr>
-          <p:cNvPr id="179" name="" descr="{&quot;isTemplate&quot;:true,&quot;type&quot;:&quot;text&quot;}"/>
+          <p:cNvPr id="188" name="" descr="{&quot;isTemplate&quot;:true,&quot;type&quot;:&quot;text&quot;}"/>
           <p:cNvSpPr txBox="1"/>
           <p:nvPr/>
         </p:nvSpPr>
@@ -7092,7 +8063,7 @@
       </p:sp>
       <p:sp>
         <p:nvSpPr>
-          <p:cNvPr id="180" name=""/>
+          <p:cNvPr id="189" name=""/>
           <p:cNvSpPr/>
           <p:nvPr/>
         </p:nvSpPr>
@@ -7127,7 +8098,7 @@
       </p:sp>
       <p:sp>
         <p:nvSpPr>
-          <p:cNvPr id="181" name="" descr="{&quot;isTemplate&quot;:true,&quot;type&quot;:&quot;text&quot;}"/>
+          <p:cNvPr id="190" name="" descr="{&quot;isTemplate&quot;:true,&quot;type&quot;:&quot;text&quot;}"/>
           <p:cNvSpPr txBox="1"/>
           <p:nvPr/>
         </p:nvSpPr>
@@ -7151,8 +8122,8 @@
                 <a:solidFill>
                   <a:srgbClr val="EF4444"/>
                 </a:solidFill>
-                <a:latin typeface="JetBrains Mono"/>
-                <a:ea typeface="JetBrains Mono"/>
+                <a:latin typeface="Consolas"/>
+                <a:ea typeface="Consolas"/>
               </a:rPr>
               <a:t>01</a:t>
             </a:r>
@@ -7162,7 +8133,7 @@
       </p:sp>
       <p:sp>
         <p:nvSpPr>
-          <p:cNvPr id="182" name="" descr="{&quot;isTemplate&quot;:true,&quot;type&quot;:&quot;text&quot;}"/>
+          <p:cNvPr id="191" name="" descr="{&quot;isTemplate&quot;:true,&quot;type&quot;:&quot;text&quot;}"/>
           <p:cNvSpPr txBox="1"/>
           <p:nvPr/>
         </p:nvSpPr>
@@ -7197,7 +8168,7 @@
       </p:sp>
       <p:sp>
         <p:nvSpPr>
-          <p:cNvPr id="183" name="" descr="{&quot;isTemplate&quot;:true,&quot;type&quot;:&quot;text&quot;}"/>
+          <p:cNvPr id="192" name="" descr="{&quot;isTemplate&quot;:true,&quot;type&quot;:&quot;text&quot;}"/>
           <p:cNvSpPr txBox="1"/>
           <p:nvPr/>
         </p:nvSpPr>
@@ -7234,7 +8205,7 @@
       </p:sp>
       <p:sp>
         <p:nvSpPr>
-          <p:cNvPr id="184" name=""/>
+          <p:cNvPr id="193" name=""/>
           <p:cNvSpPr/>
           <p:nvPr/>
         </p:nvSpPr>
@@ -7269,7 +8240,7 @@
       </p:sp>
       <p:sp>
         <p:nvSpPr>
-          <p:cNvPr id="185" name="" descr="{&quot;isTemplate&quot;:true,&quot;type&quot;:&quot;text&quot;}"/>
+          <p:cNvPr id="194" name="" descr="{&quot;isTemplate&quot;:true,&quot;type&quot;:&quot;text&quot;}"/>
           <p:cNvSpPr txBox="1"/>
           <p:nvPr/>
         </p:nvSpPr>
@@ -7293,8 +8264,8 @@
                 <a:solidFill>
                   <a:srgbClr val="F59E0B"/>
                 </a:solidFill>
-                <a:latin typeface="JetBrains Mono"/>
-                <a:ea typeface="JetBrains Mono"/>
+                <a:latin typeface="Consolas"/>
+                <a:ea typeface="Consolas"/>
               </a:rPr>
               <a:t>02</a:t>
             </a:r>
@@ -7304,7 +8275,7 @@
       </p:sp>
       <p:sp>
         <p:nvSpPr>
-          <p:cNvPr id="186" name="" descr="{&quot;isTemplate&quot;:true,&quot;type&quot;:&quot;text&quot;}"/>
+          <p:cNvPr id="195" name="" descr="{&quot;isTemplate&quot;:true,&quot;type&quot;:&quot;text&quot;}"/>
           <p:cNvSpPr txBox="1"/>
           <p:nvPr/>
         </p:nvSpPr>
@@ -7339,7 +8310,7 @@
       </p:sp>
       <p:sp>
         <p:nvSpPr>
-          <p:cNvPr id="187" name="" descr="{&quot;isTemplate&quot;:true,&quot;type&quot;:&quot;text&quot;}"/>
+          <p:cNvPr id="196" name="" descr="{&quot;isTemplate&quot;:true,&quot;type&quot;:&quot;text&quot;}"/>
           <p:cNvSpPr txBox="1"/>
           <p:nvPr/>
         </p:nvSpPr>
@@ -7376,7 +8347,7 @@
       </p:sp>
       <p:sp>
         <p:nvSpPr>
-          <p:cNvPr id="188" name=""/>
+          <p:cNvPr id="197" name=""/>
           <p:cNvSpPr/>
           <p:nvPr/>
         </p:nvSpPr>
@@ -7411,7 +8382,7 @@
       </p:sp>
       <p:sp>
         <p:nvSpPr>
-          <p:cNvPr id="189" name="" descr="{&quot;isTemplate&quot;:true,&quot;type&quot;:&quot;text&quot;}"/>
+          <p:cNvPr id="198" name="" descr="{&quot;isTemplate&quot;:true,&quot;type&quot;:&quot;text&quot;}"/>
           <p:cNvSpPr txBox="1"/>
           <p:nvPr/>
         </p:nvSpPr>
@@ -7435,8 +8406,8 @@
                 <a:solidFill>
                   <a:srgbClr val="9CA3AF"/>
                 </a:solidFill>
-                <a:latin typeface="JetBrains Mono"/>
-                <a:ea typeface="JetBrains Mono"/>
+                <a:latin typeface="Consolas"/>
+                <a:ea typeface="Consolas"/>
               </a:rPr>
               <a:t>03</a:t>
             </a:r>
@@ -7446,7 +8417,7 @@
       </p:sp>
       <p:sp>
         <p:nvSpPr>
-          <p:cNvPr id="190" name="" descr="{&quot;isTemplate&quot;:true,&quot;type&quot;:&quot;text&quot;}"/>
+          <p:cNvPr id="199" name="" descr="{&quot;isTemplate&quot;:true,&quot;type&quot;:&quot;text&quot;}"/>
           <p:cNvSpPr txBox="1"/>
           <p:nvPr/>
         </p:nvSpPr>
@@ -7481,7 +8452,7 @@
       </p:sp>
       <p:sp>
         <p:nvSpPr>
-          <p:cNvPr id="191" name="" descr="{&quot;isTemplate&quot;:true,&quot;type&quot;:&quot;text&quot;}"/>
+          <p:cNvPr id="200" name="" descr="{&quot;isTemplate&quot;:true,&quot;type&quot;:&quot;text&quot;}"/>
           <p:cNvSpPr txBox="1"/>
           <p:nvPr/>
         </p:nvSpPr>
@@ -7518,7 +8489,7 @@
       </p:sp>
       <p:sp>
         <p:nvSpPr>
-          <p:cNvPr id="192" name=""/>
+          <p:cNvPr id="201" name=""/>
           <p:cNvSpPr/>
           <p:nvPr/>
         </p:nvSpPr>
@@ -7558,7 +8529,7 @@
       </p:sp>
       <p:sp>
         <p:nvSpPr>
-          <p:cNvPr id="193" name="" descr="{&quot;isTemplate&quot;:true,&quot;type&quot;:&quot;text&quot;}"/>
+          <p:cNvPr id="202" name="" descr="{&quot;isTemplate&quot;:true,&quot;type&quot;:&quot;text&quot;}"/>
           <p:cNvSpPr txBox="1"/>
           <p:nvPr/>
         </p:nvSpPr>
@@ -7593,7 +8564,7 @@
       </p:sp>
       <p:sp>
         <p:nvSpPr>
-          <p:cNvPr id="194" name="" descr="{&quot;isTemplate&quot;:true,&quot;type&quot;:&quot;text&quot;}"/>
+          <p:cNvPr id="203" name="" descr="{&quot;isTemplate&quot;:true,&quot;type&quot;:&quot;text&quot;}"/>
           <p:cNvSpPr txBox="1"/>
           <p:nvPr/>
         </p:nvSpPr>
@@ -7628,7 +8599,7 @@
       </p:sp>
       <p:sp>
         <p:nvSpPr>
-          <p:cNvPr id="195" name="" descr="{&quot;isTemplate&quot;:true,&quot;type&quot;:&quot;text&quot;}"/>
+          <p:cNvPr id="204" name="" descr="{&quot;isTemplate&quot;:true,&quot;type&quot;:&quot;text&quot;}"/>
           <p:cNvSpPr txBox="1"/>
           <p:nvPr/>
         </p:nvSpPr>
@@ -7665,7 +8636,7 @@
       </p:sp>
       <p:sp>
         <p:nvSpPr>
-          <p:cNvPr id="196" name=""/>
+          <p:cNvPr id="205" name=""/>
           <p:cNvSpPr/>
           <p:nvPr/>
         </p:nvSpPr>
@@ -7700,7 +8671,7 @@
       </p:sp>
       <p:sp>
         <p:nvSpPr>
-          <p:cNvPr id="197" name="" descr="{&quot;isTemplate&quot;:true,&quot;type&quot;:&quot;text&quot;}"/>
+          <p:cNvPr id="206" name="" descr="{&quot;isTemplate&quot;:true,&quot;type&quot;:&quot;text&quot;}"/>
           <p:cNvSpPr txBox="1"/>
           <p:nvPr/>
         </p:nvSpPr>
@@ -7735,7 +8706,7 @@
       </p:sp>
       <p:sp>
         <p:nvSpPr>
-          <p:cNvPr id="198" name="" descr="{&quot;isTemplate&quot;:true,&quot;type&quot;:&quot;text&quot;}"/>
+          <p:cNvPr id="207" name="" descr="{&quot;isTemplate&quot;:true,&quot;type&quot;:&quot;text&quot;}"/>
           <p:cNvSpPr txBox="1"/>
           <p:nvPr/>
         </p:nvSpPr>
@@ -7772,7 +8743,7 @@
       </p:sp>
       <p:sp>
         <p:nvSpPr>
-          <p:cNvPr id="199" name="" descr="{&quot;isTemplate&quot;:true,&quot;type&quot;:&quot;text&quot;}"/>
+          <p:cNvPr id="208" name="" descr="{&quot;isTemplate&quot;:true,&quot;type&quot;:&quot;text&quot;}"/>
           <p:cNvSpPr txBox="1"/>
           <p:nvPr/>
         </p:nvSpPr>
@@ -7807,6 +8778,7 @@
       </p:sp>
     </p:spTree>
   </p:cSld>
+  <p:extLst/>
 </p:sld>
 </file>
 
@@ -7815,7 +8787,7 @@
   <p:cSld>
     <p:spTree>
       <p:nvGrpSpPr>
-        <p:cNvPr id="200" name="" descr="&lt;Slide style={{ background: &quot;#0B1220&quot;, padding: &quot;44px 72px&quot;, display: &quot;flex&quot;, flexDirection: &quot;column&quot; }}&gt;&#10;  &lt;Text style={{ color: &quot;#6B7280&quot;, fontSize: 14, letterSpacing: 3 }}&gt;方案&lt;/Text&gt;&#10;  &lt;Text style={{ color: &quot;#F7F4EC&quot;, fontSize: 34, fontWeight: 700, marginTop: 10 }}&gt;五个角色，各管一件事，结论汇到仲裁&lt;/Text&gt;&#10;&#10;  &lt;Box style={{ display: &quot;flex&quot;, flexDirection: &quot;column&quot;, alignItems: &quot;center&quot;, marginTop: 24, gap: 15 }}&gt;&#10;    &lt;Box style={{ background: &quot;rgba(34,197,94,0.12)&quot;, border: &quot;1px solid #22C55E&quot;, borderRadius: 10, padding: &quot;17px 32px&quot;, display: &quot;flex&quot;, flexDirection: &quot;row&quot;, alignItems: &quot;center&quot;, gap: 20 }}&gt;&#10;      &lt;Text style={{ color: &quot;#22C55E&quot;, fontSize: 20, fontWeight: 700 }}&gt;意图官&lt;/Text&gt;&#10;      &lt;Text style={{ color: &quot;#D1D5DB&quot;, fontSize: 16 }}&gt;听懂诉求，抽出工具与槽位，缺参数就问&lt;/Text&gt;&#10;    &lt;/Box&gt;&#10;    &lt;Text style={{ color: &quot;#4B5563&quot;, fontSize: 16 }}&gt;↓ 派发&lt;/Text&gt;&#10;    &lt;Box style={{ display: &quot;flex&quot;, flexDirection: &quot;row&quot;, gap: 20 }}&gt;&#10;      &lt;Box style={{ width: 300, background: &quot;rgba(245,158,11,0.10)&quot;, border: &quot;1px solid rgba(245,158,11,0.5)&quot;, borderRadius: 10, padding: &quot;22px 20px&quot; }}&gt;&#10;        &lt;Text style={{ color: &quot;#F59E0B&quot;, fontSize: 19, fontWeight: 700 }}&gt;风控官&lt;/Text&gt;&#10;        &lt;Text style={{ color: &quot;#9CA3AF&quot;, fontSize: 15, lineHeight: 1.65, marginTop: 8 }}&gt;按策略判风险，四维叠加，输出命中规则&lt;/Text&gt;&#10;      &lt;/Box&gt;&#10;      &lt;Box style={{ width: 300, background: &quot;rgba(239,68,68,0.10)&quot;, border: &quot;1px solid rgba(239,68,68,0.5)&quot;, borderRadius: 10, padding: &quot;22px 20px&quot; }}&gt;&#10;        &lt;Text style={{ color: &quot;#EF4444&quot;, fontSize: 19, fontWeight: 700 }}&gt;合规官&lt;/Text&gt;&#10;        &lt;Text style={{ color: &quot;#9CA3AF&quot;, fontSize: 15, lineHeight: 1.65, marginTop: 8 }}&gt;查收款人来源，查工具白名单，只做否决&lt;/Text&gt;&#10;      &lt;/Box&gt;&#10;      &lt;Box style={{ width: 300, background: &quot;rgba(107,114,128,0.12)&quot;, border: &quot;1px solid rgba(107,114,128,0.5)&quot;, borderRadius: 10, padding: &quot;22px 20px&quot; }}&gt;&#10;        &lt;Text style={{ color: &quot;#D1D5DB&quot;, fontSize: 19, fontWeight: 700 }}&gt;体验官&lt;/Text&gt;&#10;        &lt;Text style={{ color: &quot;#9CA3AF&quot;, fontSize: 15, lineHeight: 1.65, marginTop: 8 }}&gt;判断还缺什么，给替代路径，不参与风险&lt;/Text&gt;&#10;      &lt;/Box&gt;&#10;    &lt;/Box&gt;&#10;    &lt;Text style={{ color: &quot;#4B5563&quot;, fontSize: 16 }}&gt;↓ 三份结论并行汇入&lt;/Text&gt;&#10;    &lt;Box style={{ background: &quot;rgba(59,130,246,0.12)&quot;, border: &quot;1px solid #3B82F6&quot;, borderRadius: 10, padding: &quot;17px 32px&quot;, display: &quot;flex&quot;, flexDirection: &quot;row&quot;, alignItems: &quot;center&quot;, gap: 20 }}&gt;&#10;      &lt;Text style={{ color: &quot;#3B82F6&quot;, fontSize: 20, fontWeight: 700 }}&gt;仲裁官&lt;/Text&gt;&#10;      &lt;Text style={{ color: &quot;#D1D5DB&quot;, fontSize: 16 }}&gt;取最高风险，合并理由，任一否决即拦&lt;/Text&gt;&#10;    &lt;/Box&gt;&#10;    &lt;Box style={{ display: &quot;flex&quot;, flexDirection: &quot;row&quot;, gap: 20, marginTop: 4 }}&gt;&#10;      &lt;Box style={{ background: &quot;rgba(34,197,94,0.10)&quot;, border: &quot;1px solid rgba(34,197,94,0.5)&quot;, borderRadius: 10, padding: &quot;16px 28px&quot; }}&gt;&#10;        &lt;Text style={{ color: &quot;#22C55E&quot;, fontSize: 18, fontWeight: 700 }}&gt;执行官　执行或签发令牌&lt;/Text&gt;&#10;      &lt;/Box&gt;&#10;      &lt;Box style={{ background: &quot;rgba(34,197,94,0.10)&quot;, border: &quot;1px solid rgba(34,197,94,0.5)&quot;, borderRadius: 10, padding: &quot;16px 28px&quot; }}&gt;&#10;        &lt;Text style={{ color: &quot;#22C55E&quot;, fontSize: 18, fontWeight: 700 }}&gt;审计官　写入哈希链&lt;/Text&gt;&#10;      &lt;/Box&gt;&#10;    &lt;/Box&gt;&#10;  &lt;/Box&gt;&#10;&lt;/Slide&gt;&#10;"/>
+        <p:cNvPr id="209" name="" descr="&lt;Slide style={{ background: &quot;#0B1220&quot;, padding: &quot;44px 72px&quot;, display: &quot;flex&quot;, flexDirection: &quot;column&quot; }}&gt;&#10;  &lt;Text style={{ color: &quot;#6B7280&quot;, fontSize: 14, letterSpacing: 3 }}&gt;方案&lt;/Text&gt;&#10;  &lt;Text style={{ color: &quot;#F7F4EC&quot;, fontSize: 34, fontWeight: 700, marginTop: 10 }}&gt;五个角色，各管一件事，结论汇到仲裁&lt;/Text&gt;&#10;&#10;  &lt;Box style={{ display: &quot;flex&quot;, flexDirection: &quot;column&quot;, alignItems: &quot;center&quot;, marginTop: 24, gap: 15 }}&gt;&#10;    &lt;Box style={{ background: &quot;rgba(34,197,94,0.12)&quot;, border: &quot;1px solid #22C55E&quot;, borderRadius: 10, padding: &quot;17px 32px&quot;, display: &quot;flex&quot;, flexDirection: &quot;row&quot;, alignItems: &quot;center&quot;, gap: 20 }}&gt;&#10;      &lt;Text style={{ color: &quot;#22C55E&quot;, fontSize: 20, fontWeight: 700 }}&gt;意图官&lt;/Text&gt;&#10;      &lt;Text style={{ color: &quot;#D1D5DB&quot;, fontSize: 16 }}&gt;听懂诉求，抽出工具与槽位，缺参数就问&lt;/Text&gt;&#10;    &lt;/Box&gt;&#10;    &lt;Text style={{ color: &quot;#4B5563&quot;, fontSize: 16 }}&gt;↓ 派发&lt;/Text&gt;&#10;    &lt;Box style={{ display: &quot;flex&quot;, flexDirection: &quot;row&quot;, gap: 20 }}&gt;&#10;      &lt;Box style={{ width: 300, background: &quot;rgba(245,158,11,0.10)&quot;, border: &quot;1px solid rgba(245,158,11,0.5)&quot;, borderRadius: 10, padding: &quot;22px 20px&quot; }}&gt;&#10;        &lt;Text style={{ color: &quot;#F59E0B&quot;, fontSize: 19, fontWeight: 700 }}&gt;风控官&lt;/Text&gt;&#10;        &lt;Text style={{ color: &quot;#9CA3AF&quot;, fontSize: 15, lineHeight: 1.65, marginTop: 8 }}&gt;按策略判风险，四维叠加，输出命中规则&lt;/Text&gt;&#10;      &lt;/Box&gt;&#10;      &lt;Box style={{ width: 300, background: &quot;rgba(239,68,68,0.10)&quot;, border: &quot;1px solid rgba(239,68,68,0.5)&quot;, borderRadius: 10, padding: &quot;22px 20px&quot; }}&gt;&#10;        &lt;Text style={{ color: &quot;#EF4444&quot;, fontSize: 19, fontWeight: 700 }}&gt;合规官&lt;/Text&gt;&#10;        &lt;Text style={{ color: &quot;#9CA3AF&quot;, fontSize: 15, lineHeight: 1.65, marginTop: 8 }}&gt;查收款人来源，查工具白名单，只做否决&lt;/Text&gt;&#10;      &lt;/Box&gt;&#10;      &lt;Box style={{ width: 300, background: &quot;rgba(107,114,128,0.12)&quot;, border: &quot;1px solid rgba(107,114,128,0.5)&quot;, borderRadius: 10, padding: &quot;22px 20px&quot; }}&gt;&#10;        &lt;Text style={{ color: &quot;#D1D5DB&quot;, fontSize: 19, fontWeight: 700 }}&gt;体验官&lt;/Text&gt;&#10;        &lt;Text style={{ color: &quot;#9CA3AF&quot;, fontSize: 15, lineHeight: 1.65, marginTop: 8 }}&gt;判断还缺什么，给替代路径，不参与风险&lt;/Text&gt;&#10;      &lt;/Box&gt;&#10;    &lt;/Box&gt;&#10;    &lt;Text style={{ color: &quot;#4B5563&quot;, fontSize: 16 }}&gt;↓ 三份结论并行汇入&lt;/Text&gt;&#10;    &lt;Box style={{ background: &quot;rgba(59,130,246,0.12)&quot;, border: &quot;1px solid #3B82F6&quot;, borderRadius: 10, padding: &quot;17px 32px&quot;, display: &quot;flex&quot;, flexDirection: &quot;row&quot;, alignItems: &quot;center&quot;, gap: 20 }}&gt;&#10;      &lt;Text style={{ color: &quot;#3B82F6&quot;, fontSize: 20, fontWeight: 700 }}&gt;仲裁官&lt;/Text&gt;&#10;      &lt;Text style={{ color: &quot;#D1D5DB&quot;, fontSize: 16 }}&gt;取最高风险，合并理由，任一否决即拦&lt;/Text&gt;&#10;    &lt;/Box&gt;&#10;    &lt;Box style={{ display: &quot;flex&quot;, flexDirection: &quot;row&quot;, gap: 20, marginTop: 4 }}&gt;&#10;      &lt;Box style={{ background: &quot;rgba(34,197,94,0.10)&quot;, border: &quot;1px solid rgba(34,197,94,0.5)&quot;, borderRadius: 10, padding: &quot;16px 28px&quot; }}&gt;&#10;        &lt;Text style={{ color: &quot;#22C55E&quot;, fontSize: 18, fontWeight: 700 }}&gt;执行官　执行或签发令牌&lt;/Text&gt;&#10;      &lt;/Box&gt;&#10;      &lt;Box style={{ background: &quot;rgba(34,197,94,0.10)&quot;, border: &quot;1px solid rgba(34,197,94,0.5)&quot;, borderRadius: 10, padding: &quot;16px 28px&quot; }}&gt;&#10;        &lt;Text style={{ color: &quot;#22C55E&quot;, fontSize: 18, fontWeight: 700 }}&gt;审计官　写入哈希链&lt;/Text&gt;&#10;      &lt;/Box&gt;&#10;    &lt;/Box&gt;&#10;  &lt;/Box&gt;&#10;&lt;/Slide&gt;&#10;"/>
         <p:cNvGrpSpPr/>
         <p:nvPr/>
       </p:nvGrpSpPr>
@@ -7829,7 +8801,7 @@
       </p:grpSpPr>
       <p:sp>
         <p:nvSpPr>
-          <p:cNvPr id="201" name=""/>
+          <p:cNvPr id="210" name=""/>
           <p:cNvSpPr/>
           <p:nvPr/>
         </p:nvSpPr>
@@ -7853,7 +8825,7 @@
       </p:sp>
       <p:sp>
         <p:nvSpPr>
-          <p:cNvPr id="202" name="" descr="{&quot;isTemplate&quot;:true,&quot;type&quot;:&quot;text&quot;}"/>
+          <p:cNvPr id="211" name="" descr="{&quot;isTemplate&quot;:true,&quot;type&quot;:&quot;text&quot;}"/>
           <p:cNvSpPr txBox="1"/>
           <p:nvPr/>
         </p:nvSpPr>
@@ -7888,7 +8860,7 @@
       </p:sp>
       <p:sp>
         <p:nvSpPr>
-          <p:cNvPr id="203" name="" descr="{&quot;isTemplate&quot;:true,&quot;type&quot;:&quot;text&quot;}"/>
+          <p:cNvPr id="212" name="" descr="{&quot;isTemplate&quot;:true,&quot;type&quot;:&quot;text&quot;}"/>
           <p:cNvSpPr txBox="1"/>
           <p:nvPr/>
         </p:nvSpPr>
@@ -7923,7 +8895,7 @@
       </p:sp>
       <p:sp>
         <p:nvSpPr>
-          <p:cNvPr id="204" name=""/>
+          <p:cNvPr id="213" name=""/>
           <p:cNvSpPr/>
           <p:nvPr/>
         </p:nvSpPr>
@@ -7956,7 +8928,7 @@
       </p:sp>
       <p:sp>
         <p:nvSpPr>
-          <p:cNvPr id="205" name="" descr="{&quot;isTemplate&quot;:true,&quot;type&quot;:&quot;text&quot;}"/>
+          <p:cNvPr id="214" name="" descr="{&quot;isTemplate&quot;:true,&quot;type&quot;:&quot;text&quot;}"/>
           <p:cNvSpPr txBox="1"/>
           <p:nvPr/>
         </p:nvSpPr>
@@ -7991,7 +8963,7 @@
       </p:sp>
       <p:sp>
         <p:nvSpPr>
-          <p:cNvPr id="206" name="" descr="{&quot;isTemplate&quot;:true,&quot;type&quot;:&quot;text&quot;}"/>
+          <p:cNvPr id="215" name="" descr="{&quot;isTemplate&quot;:true,&quot;type&quot;:&quot;text&quot;}"/>
           <p:cNvSpPr txBox="1"/>
           <p:nvPr/>
         </p:nvSpPr>
@@ -8026,7 +8998,7 @@
       </p:sp>
       <p:sp>
         <p:nvSpPr>
-          <p:cNvPr id="207" name="" descr="{&quot;isTemplate&quot;:true,&quot;type&quot;:&quot;text&quot;}"/>
+          <p:cNvPr id="216" name="" descr="{&quot;isTemplate&quot;:true,&quot;type&quot;:&quot;text&quot;}"/>
           <p:cNvSpPr txBox="1"/>
           <p:nvPr/>
         </p:nvSpPr>
@@ -8071,7 +9043,7 @@
       </p:sp>
       <p:sp>
         <p:nvSpPr>
-          <p:cNvPr id="208" name=""/>
+          <p:cNvPr id="217" name=""/>
           <p:cNvSpPr/>
           <p:nvPr/>
         </p:nvSpPr>
@@ -8106,7 +9078,7 @@
       </p:sp>
       <p:sp>
         <p:nvSpPr>
-          <p:cNvPr id="209" name="" descr="{&quot;isTemplate&quot;:true,&quot;type&quot;:&quot;text&quot;}"/>
+          <p:cNvPr id="218" name="" descr="{&quot;isTemplate&quot;:true,&quot;type&quot;:&quot;text&quot;}"/>
           <p:cNvSpPr txBox="1"/>
           <p:nvPr/>
         </p:nvSpPr>
@@ -8141,7 +9113,7 @@
       </p:sp>
       <p:sp>
         <p:nvSpPr>
-          <p:cNvPr id="210" name="" descr="{&quot;isTemplate&quot;:true,&quot;type&quot;:&quot;text&quot;}"/>
+          <p:cNvPr id="219" name="" descr="{&quot;isTemplate&quot;:true,&quot;type&quot;:&quot;text&quot;}"/>
           <p:cNvSpPr txBox="1"/>
           <p:nvPr/>
         </p:nvSpPr>
@@ -8178,7 +9150,7 @@
       </p:sp>
       <p:sp>
         <p:nvSpPr>
-          <p:cNvPr id="211" name=""/>
+          <p:cNvPr id="220" name=""/>
           <p:cNvSpPr/>
           <p:nvPr/>
         </p:nvSpPr>
@@ -8213,7 +9185,7 @@
       </p:sp>
       <p:sp>
         <p:nvSpPr>
-          <p:cNvPr id="212" name="" descr="{&quot;isTemplate&quot;:true,&quot;type&quot;:&quot;text&quot;}"/>
+          <p:cNvPr id="221" name="" descr="{&quot;isTemplate&quot;:true,&quot;type&quot;:&quot;text&quot;}"/>
           <p:cNvSpPr txBox="1"/>
           <p:nvPr/>
         </p:nvSpPr>
@@ -8248,7 +9220,7 @@
       </p:sp>
       <p:sp>
         <p:nvSpPr>
-          <p:cNvPr id="213" name="" descr="{&quot;isTemplate&quot;:true,&quot;type&quot;:&quot;text&quot;}"/>
+          <p:cNvPr id="222" name="" descr="{&quot;isTemplate&quot;:true,&quot;type&quot;:&quot;text&quot;}"/>
           <p:cNvSpPr txBox="1"/>
           <p:nvPr/>
         </p:nvSpPr>
@@ -8285,7 +9257,7 @@
       </p:sp>
       <p:sp>
         <p:nvSpPr>
-          <p:cNvPr id="214" name=""/>
+          <p:cNvPr id="223" name=""/>
           <p:cNvSpPr/>
           <p:nvPr/>
         </p:nvSpPr>
@@ -8320,7 +9292,7 @@
       </p:sp>
       <p:sp>
         <p:nvSpPr>
-          <p:cNvPr id="215" name="" descr="{&quot;isTemplate&quot;:true,&quot;type&quot;:&quot;text&quot;}"/>
+          <p:cNvPr id="224" name="" descr="{&quot;isTemplate&quot;:true,&quot;type&quot;:&quot;text&quot;}"/>
           <p:cNvSpPr txBox="1"/>
           <p:nvPr/>
         </p:nvSpPr>
@@ -8355,7 +9327,7 @@
       </p:sp>
       <p:sp>
         <p:nvSpPr>
-          <p:cNvPr id="216" name="" descr="{&quot;isTemplate&quot;:true,&quot;type&quot;:&quot;text&quot;}"/>
+          <p:cNvPr id="225" name="" descr="{&quot;isTemplate&quot;:true,&quot;type&quot;:&quot;text&quot;}"/>
           <p:cNvSpPr txBox="1"/>
           <p:nvPr/>
         </p:nvSpPr>
@@ -8392,7 +9364,7 @@
       </p:sp>
       <p:sp>
         <p:nvSpPr>
-          <p:cNvPr id="217" name="" descr="{&quot;isTemplate&quot;:true,&quot;type&quot;:&quot;text&quot;}"/>
+          <p:cNvPr id="226" name="" descr="{&quot;isTemplate&quot;:true,&quot;type&quot;:&quot;text&quot;}"/>
           <p:cNvSpPr txBox="1"/>
           <p:nvPr/>
         </p:nvSpPr>
@@ -8437,7 +9409,7 @@
       </p:sp>
       <p:sp>
         <p:nvSpPr>
-          <p:cNvPr id="218" name=""/>
+          <p:cNvPr id="227" name=""/>
           <p:cNvSpPr/>
           <p:nvPr/>
         </p:nvSpPr>
@@ -8470,7 +9442,7 @@
       </p:sp>
       <p:sp>
         <p:nvSpPr>
-          <p:cNvPr id="219" name="" descr="{&quot;isTemplate&quot;:true,&quot;type&quot;:&quot;text&quot;}"/>
+          <p:cNvPr id="228" name="" descr="{&quot;isTemplate&quot;:true,&quot;type&quot;:&quot;text&quot;}"/>
           <p:cNvSpPr txBox="1"/>
           <p:nvPr/>
         </p:nvSpPr>
@@ -8505,7 +9477,7 @@
       </p:sp>
       <p:sp>
         <p:nvSpPr>
-          <p:cNvPr id="220" name="" descr="{&quot;isTemplate&quot;:true,&quot;type&quot;:&quot;text&quot;}"/>
+          <p:cNvPr id="229" name="" descr="{&quot;isTemplate&quot;:true,&quot;type&quot;:&quot;text&quot;}"/>
           <p:cNvSpPr txBox="1"/>
           <p:nvPr/>
         </p:nvSpPr>
@@ -8540,7 +9512,7 @@
       </p:sp>
       <p:sp>
         <p:nvSpPr>
-          <p:cNvPr id="221" name=""/>
+          <p:cNvPr id="230" name=""/>
           <p:cNvSpPr/>
           <p:nvPr/>
         </p:nvSpPr>
@@ -8575,7 +9547,7 @@
       </p:sp>
       <p:sp>
         <p:nvSpPr>
-          <p:cNvPr id="222" name="" descr="{&quot;isTemplate&quot;:true,&quot;type&quot;:&quot;text&quot;}"/>
+          <p:cNvPr id="231" name="" descr="{&quot;isTemplate&quot;:true,&quot;type&quot;:&quot;text&quot;}"/>
           <p:cNvSpPr txBox="1"/>
           <p:nvPr/>
         </p:nvSpPr>
@@ -8610,7 +9582,7 @@
       </p:sp>
       <p:sp>
         <p:nvSpPr>
-          <p:cNvPr id="223" name=""/>
+          <p:cNvPr id="232" name=""/>
           <p:cNvSpPr/>
           <p:nvPr/>
         </p:nvSpPr>
@@ -8645,7 +9617,7 @@
       </p:sp>
       <p:sp>
         <p:nvSpPr>
-          <p:cNvPr id="224" name="" descr="{&quot;isTemplate&quot;:true,&quot;type&quot;:&quot;text&quot;}"/>
+          <p:cNvPr id="233" name="" descr="{&quot;isTemplate&quot;:true,&quot;type&quot;:&quot;text&quot;}"/>
           <p:cNvSpPr txBox="1"/>
           <p:nvPr/>
         </p:nvSpPr>
@@ -8680,6 +9652,7 @@
       </p:sp>
     </p:spTree>
   </p:cSld>
+  <p:extLst/>
 </p:sld>
 </file>
 
@@ -8688,7 +9661,7 @@
   <p:cSld>
     <p:spTree>
       <p:nvGrpSpPr>
-        <p:cNvPr id="225" name="" descr="&lt;Slide style={{ background: &quot;#0B1220&quot;, padding: &quot;44px 72px&quot;, display: &quot;flex&quot;, flexDirection: &quot;column&quot; }}&gt;&#10;  &lt;Text style={{ color: &quot;#6B7280&quot;, fontSize: 14, letterSpacing: 3 }}&gt;一条链路&lt;/Text&gt;&#10;  &lt;Text style={{ color: &quot;#F7F4EC&quot;, fontSize: 34, fontWeight: 700, marginTop: 10 }}&gt;「转给小王 100 元」走完七步&lt;/Text&gt;&#10;&#10;  &lt;Box style={{ display: &quot;flex&quot;, flexDirection: &quot;row&quot;, gap: 40, marginTop: 28 }}&gt;&#10;    &lt;Box style={{ flex: 1, display: &quot;flex&quot;, flexDirection: &quot;column&quot;, gap: 15 }}&gt;&#10;      &lt;Box style={{ display: &quot;flex&quot;, flexDirection: &quot;row&quot;, gap: 16, alignItems: &quot;center&quot;, background: &quot;rgba(34,197,94,0.08)&quot;, borderLeft: &quot;3px solid #22C55E&quot;, padding: &quot;16px 16px&quot; }}&gt;&#10;        &lt;Text style={{ color: &quot;#22C55E&quot;, fontSize: 15, fontFamily: &quot;JetBrains Mono, monospace&quot;, width: 28 }}&gt;01&lt;/Text&gt;&#10;        &lt;Text style={{ color: &quot;#F7F4EC&quot;, fontSize: 18, fontWeight: 600, width: 96 }}&gt;输入守卫&lt;/Text&gt;&#10;        &lt;Text style={{ color: &quot;#9CA3AF&quot;, fontSize: 15 }}&gt;归一化，识别注入特征，命中即拦&lt;/Text&gt;&#10;      &lt;/Box&gt;&#10;      &lt;Box style={{ display: &quot;flex&quot;, flexDirection: &quot;row&quot;, gap: 16, alignItems: &quot;center&quot;, background: &quot;rgba(34,197,94,0.08)&quot;, borderLeft: &quot;3px solid #22C55E&quot;, padding: &quot;16px 16px&quot; }}&gt;&#10;        &lt;Text style={{ color: &quot;#22C55E&quot;, fontSize: 15, fontFamily: &quot;JetBrains Mono, monospace&quot;, width: 28 }}&gt;02&lt;/Text&gt;&#10;        &lt;Text style={{ color: &quot;#F7F4EC&quot;, fontSize: 18, fontWeight: 600, width: 96 }}&gt;意图官&lt;/Text&gt;&#10;        &lt;Text style={{ color: &quot;#9CA3AF&quot;, fontSize: 15 }}&gt;落到 transfer，payee 小王，金额 10000 分&lt;/Text&gt;&#10;      &lt;/Box&gt;&#10;      &lt;Box style={{ display: &quot;flex&quot;, flexDirection: &quot;row&quot;, gap: 16, alignItems: &quot;center&quot;, background: &quot;rgba(245,158,11,0.08)&quot;, borderLeft: &quot;3px solid #F59E0B&quot;, padding: &quot;16px 16px&quot; }}&gt;&#10;        &lt;Text style={{ color: &quot;#F59E0B&quot;, fontSize: 15, fontFamily: &quot;JetBrains Mono, monospace&quot;, width: 28 }}&gt;03&lt;/Text&gt;&#10;        &lt;Text style={{ color: &quot;#F7F4EC&quot;, fontSize: 18, fontWeight: 600, width: 96 }}&gt;三评估并行&lt;/Text&gt;&#10;        &lt;Text style={{ color: &quot;#9CA3AF&quot;, fontSize: 15 }}&gt;风控判黄，合规放行，体验无需追问&lt;/Text&gt;&#10;      &lt;/Box&gt;&#10;      &lt;Box style={{ display: &quot;flex&quot;, flexDirection: &quot;row&quot;, gap: 16, alignItems: &quot;center&quot;, background: &quot;rgba(245,158,11,0.08)&quot;, borderLeft: &quot;3px solid #F59E0B&quot;, padding: &quot;16px 16px&quot; }}&gt;&#10;        &lt;Text style={{ color: &quot;#F59E0B&quot;, fontSize: 15, fontFamily: &quot;JetBrains Mono, monospace&quot;, width: 28 }}&gt;04&lt;/Text&gt;&#10;        &lt;Text style={{ color: &quot;#F7F4EC&quot;, fontSize: 18, fontWeight: 600, width: 96 }}&gt;仲裁官&lt;/Text&gt;&#10;        &lt;Text style={{ color: &quot;#9CA3AF&quot;, fontSize: 15 }}&gt;绿绿黄取最高，判黄，需确认&lt;/Text&gt;&#10;      &lt;/Box&gt;&#10;      &lt;Box style={{ display: &quot;flex&quot;, flexDirection: &quot;row&quot;, gap: 16, alignItems: &quot;center&quot;, background: &quot;rgba(245,158,11,0.08)&quot;, borderLeft: &quot;3px solid #F59E0B&quot;, padding: &quot;16px 16px&quot; }}&gt;&#10;        &lt;Text style={{ color: &quot;#F59E0B&quot;, fontSize: 15, fontFamily: &quot;JetBrains Mono, monospace&quot;, width: 28 }}&gt;05&lt;/Text&gt;&#10;        &lt;Text style={{ color: &quot;#F7F4EC&quot;, fontSize: 18, fontWeight: 600, width: 96 }}&gt;确认令牌&lt;/Text&gt;&#10;        &lt;Text style={{ color: &quot;#9CA3AF&quot;, fontSize: 15 }}&gt;绑定会话、工具、参数摘要，120 秒有效&lt;/Text&gt;&#10;      &lt;/Box&gt;&#10;      &lt;Box style={{ display: &quot;flex&quot;, flexDirection: &quot;row&quot;, gap: 16, alignItems: &quot;center&quot;, background: &quot;rgba(34,197,94,0.08)&quot;, borderLeft: &quot;3px solid #22C55E&quot;, padding: &quot;16px 16px&quot; }}&gt;&#10;        &lt;Text style={{ color: &quot;#22C55E&quot;, fontSize: 15, fontFamily: &quot;JetBrains Mono, monospace&quot;, width: 28 }}&gt;06&lt;/Text&gt;&#10;        &lt;Text style={{ color: &quot;#F7F4EC&quot;, fontSize: 18, fontWeight: 600, width: 96 }}&gt;执行官&lt;/Text&gt;&#10;        &lt;Text style={{ color: &quot;#9CA3AF&quot;, fontSize: 15 }}&gt;重算摘要比对通过，扣账&lt;/Text&gt;&#10;      &lt;/Box&gt;&#10;      &lt;Box style={{ display: &quot;flex&quot;, flexDirection: &quot;row&quot;, gap: 16, alignItems: &quot;center&quot;, background: &quot;rgba(34,197,94,0.08)&quot;, borderLeft: &quot;3px solid #22C55E&quot;, padding: &quot;16px 16px&quot; }}&gt;&#10;        &lt;Text style={{ color: &quot;#22C55E&quot;, fontSize: 15, fontFamily: &quot;JetBrains Mono, monospace&quot;, width: 28 }}&gt;07&lt;/Text&gt;&#10;        &lt;Text style={{ color: &quot;#F7F4EC&quot;, fontSize: 18, fontWeight: 600, width: 96 }}&gt;审计官&lt;/Text&gt;&#10;        &lt;Text style={{ color: &quot;#9CA3AF&quot;, fontSize: 15 }}&gt;写链，序号递增，前序哈希串起来&lt;/Text&gt;&#10;      &lt;/Box&gt;&#10;      &lt;Text style={{ color: &quot;#6B7280&quot;, fontSize: 14, lineHeight: 1.7, marginTop: 4 }}&gt;每一步的输入输出都写进审计记录，界面上可逐条展开核对。&lt;/Text&gt;&#10;    &lt;/Box&gt;&#10;&#10;    &lt;Box style={{ width: 320, display: &quot;flex&quot;, flexDirection: &quot;column&quot;, gap: 14, background: &quot;rgba(59,130,246,0.08)&quot;, border: &quot;1px solid rgba(59,130,246,0.35)&quot;, borderRadius: 12, padding: 24, display: &quot;flex&quot;, flexDirection: &quot;column&quot;, justifyContent: &quot;flex-start&quot; }}&gt;&#10;      &lt;Text style={{ color: &quot;#93C5FD&quot;, fontSize: 18, fontWeight: 700 }}&gt;为什么拆成七步&lt;/Text&gt;&#10;      &lt;Text style={{ color: &quot;#9CA3AF&quot;, fontSize: 16, lineHeight: 1.8, marginTop: 12 }}&gt;每一步都能单独测、单独改、单独讲。判错了看第七步之前的记录，改规则只动一个角色，不影响主流程。&lt;/Text&gt;&#10;      &lt;Box style={{ display: &quot;flex&quot;, flexDirection: &quot;column&quot;, gap: 9, marginTop: 16 }}&gt;&#10;        &lt;Text style={{ color: &quot;#D1D5DB&quot;, fontSize: 15, lineHeight: 1.6 }}&gt;前三步只看用户说了什么&lt;/Text&gt;&#10;        &lt;Text style={{ color: &quot;#D1D5DB&quot;, fontSize: 15, lineHeight: 1.6 }}&gt;中间两步决定能不能办&lt;/Text&gt;&#10;        &lt;Text style={{ color: &quot;#D1D5DB&quot;, fontSize: 15, lineHeight: 1.6 }}&gt;后两步保证办完能回看&lt;/Text&gt;&#10;      &lt;/Box&gt;&#10;      &lt;Text style={{ color: &quot;#6B7280&quot;, fontSize: 14, lineHeight: 1.7, marginTop: 16 }}&gt;七步的结论全部写进审计，界面上可以逐条展开。&lt;/Text&gt;&#10;    &lt;/Box&gt;&#10;  &lt;/Box&gt;&#10;&lt;/Slide&gt;&#10;"/>
+        <p:cNvPr id="234" name="" descr="&lt;Slide style={{ background: &quot;#0B1220&quot;, padding: &quot;44px 72px&quot;, display: &quot;flex&quot;, flexDirection: &quot;column&quot; }}&gt;&#10;  &lt;Text style={{ color: &quot;#6B7280&quot;, fontSize: 14, letterSpacing: 3 }}&gt;一条链路&lt;/Text&gt;&#10;  &lt;Text style={{ color: &quot;#F7F4EC&quot;, fontSize: 34, fontWeight: 700, marginTop: 10 }}&gt;「转给小王 100 元」走完七步&lt;/Text&gt;&#10;&#10;  &lt;Box style={{ display: &quot;flex&quot;, flexDirection: &quot;row&quot;, gap: 40, marginTop: 28 }}&gt;&#10;    &lt;Box style={{ flex: 1, display: &quot;flex&quot;, flexDirection: &quot;column&quot;, gap: 15 }}&gt;&#10;      &lt;Box style={{ display: &quot;flex&quot;, flexDirection: &quot;row&quot;, gap: 16, alignItems: &quot;center&quot;, background: &quot;rgba(34,197,94,0.08)&quot;, borderLeft: &quot;3px solid #22C55E&quot;, padding: &quot;16px 16px&quot; }}&gt;&#10;        &lt;Text style={{ color: &quot;#22C55E&quot;, fontSize: 15, fontFamily: &quot;Consolas, monospace&quot;, width: 28 }}&gt;01&lt;/Text&gt;&#10;        &lt;Text style={{ color: &quot;#F7F4EC&quot;, fontSize: 18, fontWeight: 600, width: 96 }}&gt;输入守卫&lt;/Text&gt;&#10;        &lt;Text style={{ color: &quot;#9CA3AF&quot;, fontSize: 15 }}&gt;归一化，识别注入特征，命中即拦&lt;/Text&gt;&#10;      &lt;/Box&gt;&#10;      &lt;Box style={{ display: &quot;flex&quot;, flexDirection: &quot;row&quot;, gap: 16, alignItems: &quot;center&quot;, background: &quot;rgba(34,197,94,0.08)&quot;, borderLeft: &quot;3px solid #22C55E&quot;, padding: &quot;16px 16px&quot; }}&gt;&#10;        &lt;Text style={{ color: &quot;#22C55E&quot;, fontSize: 15, fontFamily: &quot;Consolas, monospace&quot;, width: 28 }}&gt;02&lt;/Text&gt;&#10;        &lt;Text style={{ color: &quot;#F7F4EC&quot;, fontSize: 18, fontWeight: 600, width: 96 }}&gt;意图官&lt;/Text&gt;&#10;        &lt;Text style={{ color: &quot;#9CA3AF&quot;, fontSize: 15 }}&gt;落到 transfer，payee 小王，金额 10000 分&lt;/Text&gt;&#10;      &lt;/Box&gt;&#10;      &lt;Box style={{ display: &quot;flex&quot;, flexDirection: &quot;row&quot;, gap: 16, alignItems: &quot;center&quot;, background: &quot;rgba(245,158,11,0.08)&quot;, borderLeft: &quot;3px solid #F59E0B&quot;, padding: &quot;16px 16px&quot; }}&gt;&#10;        &lt;Text style={{ color: &quot;#F59E0B&quot;, fontSize: 15, fontFamily: &quot;Consolas, monospace&quot;, width: 28 }}&gt;03&lt;/Text&gt;&#10;        &lt;Text style={{ color: &quot;#F7F4EC&quot;, fontSize: 18, fontWeight: 600, width: 96 }}&gt;三评估并行&lt;/Text&gt;&#10;        &lt;Text style={{ color: &quot;#9CA3AF&quot;, fontSize: 15 }}&gt;风控判黄，合规放行，体验无需追问&lt;/Text&gt;&#10;      &lt;/Box&gt;&#10;      &lt;Box style={{ display: &quot;flex&quot;, flexDirection: &quot;row&quot;, gap: 16, alignItems: &quot;center&quot;, background: &quot;rgba(245,158,11,0.08)&quot;, borderLeft: &quot;3px solid #F59E0B&quot;, padding: &quot;16px 16px&quot; }}&gt;&#10;        &lt;Text style={{ color: &quot;#F59E0B&quot;, fontSize: 15, fontFamily: &quot;Consolas, monospace&quot;, width: 28 }}&gt;04&lt;/Text&gt;&#10;        &lt;Text style={{ color: &quot;#F7F4EC&quot;, fontSize: 18, fontWeight: 600, width: 96 }}&gt;仲裁官&lt;/Text&gt;&#10;        &lt;Text style={{ color: &quot;#9CA3AF&quot;, fontSize: 15 }}&gt;绿绿黄取最高，判黄，需确认&lt;/Text&gt;&#10;      &lt;/Box&gt;&#10;      &lt;Box style={{ display: &quot;flex&quot;, flexDirection: &quot;row&quot;, gap: 16, alignItems: &quot;center&quot;, background: &quot;rgba(245,158,11,0.08)&quot;, borderLeft: &quot;3px solid #F59E0B&quot;, padding: &quot;16px 16px&quot; }}&gt;&#10;        &lt;Text style={{ color: &quot;#F59E0B&quot;, fontSize: 15, fontFamily: &quot;Consolas, monospace&quot;, width: 28 }}&gt;05&lt;/Text&gt;&#10;        &lt;Text style={{ color: &quot;#F7F4EC&quot;, fontSize: 18, fontWeight: 600, width: 96 }}&gt;确认令牌&lt;/Text&gt;&#10;        &lt;Text style={{ color: &quot;#9CA3AF&quot;, fontSize: 15 }}&gt;绑定会话、工具、参数摘要，120 秒有效&lt;/Text&gt;&#10;      &lt;/Box&gt;&#10;      &lt;Box style={{ display: &quot;flex&quot;, flexDirection: &quot;row&quot;, gap: 16, alignItems: &quot;center&quot;, background: &quot;rgba(34,197,94,0.08)&quot;, borderLeft: &quot;3px solid #22C55E&quot;, padding: &quot;16px 16px&quot; }}&gt;&#10;        &lt;Text style={{ color: &quot;#22C55E&quot;, fontSize: 15, fontFamily: &quot;Consolas, monospace&quot;, width: 28 }}&gt;06&lt;/Text&gt;&#10;        &lt;Text style={{ color: &quot;#F7F4EC&quot;, fontSize: 18, fontWeight: 600, width: 96 }}&gt;执行官&lt;/Text&gt;&#10;        &lt;Text style={{ color: &quot;#9CA3AF&quot;, fontSize: 15 }}&gt;重算摘要比对通过，扣账&lt;/Text&gt;&#10;      &lt;/Box&gt;&#10;      &lt;Box style={{ display: &quot;flex&quot;, flexDirection: &quot;row&quot;, gap: 16, alignItems: &quot;center&quot;, background: &quot;rgba(34,197,94,0.08)&quot;, borderLeft: &quot;3px solid #22C55E&quot;, padding: &quot;16px 16px&quot; }}&gt;&#10;        &lt;Text style={{ color: &quot;#22C55E&quot;, fontSize: 15, fontFamily: &quot;Consolas, monospace&quot;, width: 28 }}&gt;07&lt;/Text&gt;&#10;        &lt;Text style={{ color: &quot;#F7F4EC&quot;, fontSize: 18, fontWeight: 600, width: 96 }}&gt;审计官&lt;/Text&gt;&#10;        &lt;Text style={{ color: &quot;#9CA3AF&quot;, fontSize: 15 }}&gt;写链，序号递增，前序哈希串起来&lt;/Text&gt;&#10;      &lt;/Box&gt;&#10;      &lt;Text style={{ color: &quot;#6B7280&quot;, fontSize: 14, lineHeight: 1.7, marginTop: 4 }}&gt;每一步的输入输出都写进审计记录，界面上可逐条展开核对。&lt;/Text&gt;&#10;    &lt;/Box&gt;&#10;&#10;    &lt;Box style={{ width: 320, display: &quot;flex&quot;, flexDirection: &quot;column&quot;, gap: 14, background: &quot;rgba(59,130,246,0.08)&quot;, border: &quot;1px solid rgba(59,130,246,0.35)&quot;, borderRadius: 12, padding: 24, display: &quot;flex&quot;, flexDirection: &quot;column&quot;, justifyContent: &quot;flex-start&quot; }}&gt;&#10;      &lt;Text style={{ color: &quot;#93C5FD&quot;, fontSize: 18, fontWeight: 700 }}&gt;为什么拆成七步&lt;/Text&gt;&#10;      &lt;Text style={{ color: &quot;#9CA3AF&quot;, fontSize: 16, lineHeight: 1.8, marginTop: 12 }}&gt;每一步都能单独测、单独改、单独讲。判错了看第七步之前的记录，改规则只动一个角色，不影响主流程。&lt;/Text&gt;&#10;      &lt;Box style={{ display: &quot;flex&quot;, flexDirection: &quot;column&quot;, gap: 9, marginTop: 16 }}&gt;&#10;        &lt;Text style={{ color: &quot;#D1D5DB&quot;, fontSize: 15, lineHeight: 1.6 }}&gt;前三步只看用户说了什么&lt;/Text&gt;&#10;        &lt;Text style={{ color: &quot;#D1D5DB&quot;, fontSize: 15, lineHeight: 1.6 }}&gt;中间两步决定能不能办&lt;/Text&gt;&#10;        &lt;Text style={{ color: &quot;#D1D5DB&quot;, fontSize: 15, lineHeight: 1.6 }}&gt;后两步保证办完能回看&lt;/Text&gt;&#10;      &lt;/Box&gt;&#10;      &lt;Text style={{ color: &quot;#6B7280&quot;, fontSize: 14, lineHeight: 1.7, marginTop: 16 }}&gt;七步的结论全部写进审计，界面上可以逐条展开。&lt;/Text&gt;&#10;    &lt;/Box&gt;&#10;  &lt;/Box&gt;&#10;&lt;/Slide&gt;&#10;"/>
         <p:cNvGrpSpPr/>
         <p:nvPr/>
       </p:nvGrpSpPr>
@@ -8702,7 +9675,7 @@
       </p:grpSpPr>
       <p:sp>
         <p:nvSpPr>
-          <p:cNvPr id="226" name=""/>
+          <p:cNvPr id="235" name=""/>
           <p:cNvSpPr/>
           <p:nvPr/>
         </p:nvSpPr>
@@ -8726,7 +9699,7 @@
       </p:sp>
       <p:sp>
         <p:nvSpPr>
-          <p:cNvPr id="227" name="" descr="{&quot;isTemplate&quot;:true,&quot;type&quot;:&quot;text&quot;}"/>
+          <p:cNvPr id="236" name="" descr="{&quot;isTemplate&quot;:true,&quot;type&quot;:&quot;text&quot;}"/>
           <p:cNvSpPr txBox="1"/>
           <p:nvPr/>
         </p:nvSpPr>
@@ -8761,7 +9734,7 @@
       </p:sp>
       <p:sp>
         <p:nvSpPr>
-          <p:cNvPr id="228" name="" descr="{&quot;isTemplate&quot;:true,&quot;type&quot;:&quot;text&quot;}"/>
+          <p:cNvPr id="237" name="" descr="{&quot;isTemplate&quot;:true,&quot;type&quot;:&quot;text&quot;}"/>
           <p:cNvSpPr txBox="1"/>
           <p:nvPr/>
         </p:nvSpPr>
@@ -8816,7 +9789,7 @@
       </p:sp>
       <p:sp>
         <p:nvSpPr>
-          <p:cNvPr id="229" name=""/>
+          <p:cNvPr id="238" name=""/>
           <p:cNvSpPr/>
           <p:nvPr/>
         </p:nvSpPr>
@@ -8842,7 +9815,7 @@
       </p:sp>
       <p:sp>
         <p:nvSpPr>
-          <p:cNvPr id="230" name=""/>
+          <p:cNvPr id="239" name=""/>
           <p:cNvSpPr/>
           <p:nvPr/>
         </p:nvSpPr>
@@ -8882,7 +9855,7 @@
       </p:sp>
       <p:sp>
         <p:nvSpPr>
-          <p:cNvPr id="231" name="" descr="{&quot;isTemplate&quot;:true,&quot;type&quot;:&quot;text&quot;}"/>
+          <p:cNvPr id="240" name="" descr="{&quot;isTemplate&quot;:true,&quot;type&quot;:&quot;text&quot;}"/>
           <p:cNvSpPr txBox="1"/>
           <p:nvPr/>
         </p:nvSpPr>
@@ -8906,8 +9879,8 @@
                 <a:solidFill>
                   <a:srgbClr val="22C55E"/>
                 </a:solidFill>
-                <a:latin typeface="JetBrains Mono"/>
-                <a:ea typeface="JetBrains Mono"/>
+                <a:latin typeface="Consolas"/>
+                <a:ea typeface="Consolas"/>
               </a:rPr>
               <a:t>01</a:t>
             </a:r>
@@ -8917,7 +9890,7 @@
       </p:sp>
       <p:sp>
         <p:nvSpPr>
-          <p:cNvPr id="232" name="" descr="{&quot;isTemplate&quot;:true,&quot;type&quot;:&quot;text&quot;}"/>
+          <p:cNvPr id="241" name="" descr="{&quot;isTemplate&quot;:true,&quot;type&quot;:&quot;text&quot;}"/>
           <p:cNvSpPr txBox="1"/>
           <p:nvPr/>
         </p:nvSpPr>
@@ -8952,7 +9925,7 @@
       </p:sp>
       <p:sp>
         <p:nvSpPr>
-          <p:cNvPr id="233" name="" descr="{&quot;isTemplate&quot;:true,&quot;type&quot;:&quot;text&quot;}"/>
+          <p:cNvPr id="242" name="" descr="{&quot;isTemplate&quot;:true,&quot;type&quot;:&quot;text&quot;}"/>
           <p:cNvSpPr txBox="1"/>
           <p:nvPr/>
         </p:nvSpPr>
@@ -8987,7 +9960,7 @@
       </p:sp>
       <p:sp>
         <p:nvSpPr>
-          <p:cNvPr id="234" name=""/>
+          <p:cNvPr id="243" name=""/>
           <p:cNvSpPr/>
           <p:nvPr/>
         </p:nvSpPr>
@@ -9013,7 +9986,7 @@
       </p:sp>
       <p:sp>
         <p:nvSpPr>
-          <p:cNvPr id="235" name=""/>
+          <p:cNvPr id="244" name=""/>
           <p:cNvSpPr/>
           <p:nvPr/>
         </p:nvSpPr>
@@ -9053,7 +10026,7 @@
       </p:sp>
       <p:sp>
         <p:nvSpPr>
-          <p:cNvPr id="236" name="" descr="{&quot;isTemplate&quot;:true,&quot;type&quot;:&quot;text&quot;}"/>
+          <p:cNvPr id="245" name="" descr="{&quot;isTemplate&quot;:true,&quot;type&quot;:&quot;text&quot;}"/>
           <p:cNvSpPr txBox="1"/>
           <p:nvPr/>
         </p:nvSpPr>
@@ -9077,8 +10050,8 @@
                 <a:solidFill>
                   <a:srgbClr val="22C55E"/>
                 </a:solidFill>
-                <a:latin typeface="JetBrains Mono"/>
-                <a:ea typeface="JetBrains Mono"/>
+                <a:latin typeface="Consolas"/>
+                <a:ea typeface="Consolas"/>
               </a:rPr>
               <a:t>02</a:t>
             </a:r>
@@ -9088,7 +10061,7 @@
       </p:sp>
       <p:sp>
         <p:nvSpPr>
-          <p:cNvPr id="237" name="" descr="{&quot;isTemplate&quot;:true,&quot;type&quot;:&quot;text&quot;}"/>
+          <p:cNvPr id="246" name="" descr="{&quot;isTemplate&quot;:true,&quot;type&quot;:&quot;text&quot;}"/>
           <p:cNvSpPr txBox="1"/>
           <p:nvPr/>
         </p:nvSpPr>
@@ -9123,7 +10096,7 @@
       </p:sp>
       <p:sp>
         <p:nvSpPr>
-          <p:cNvPr id="238" name="" descr="{&quot;isTemplate&quot;:true,&quot;type&quot;:&quot;text&quot;}"/>
+          <p:cNvPr id="247" name="" descr="{&quot;isTemplate&quot;:true,&quot;type&quot;:&quot;text&quot;}"/>
           <p:cNvSpPr txBox="1"/>
           <p:nvPr/>
         </p:nvSpPr>
@@ -9218,7 +10191,7 @@
       </p:sp>
       <p:sp>
         <p:nvSpPr>
-          <p:cNvPr id="239" name=""/>
+          <p:cNvPr id="248" name=""/>
           <p:cNvSpPr/>
           <p:nvPr/>
         </p:nvSpPr>
@@ -9244,7 +10217,7 @@
       </p:sp>
       <p:sp>
         <p:nvSpPr>
-          <p:cNvPr id="240" name=""/>
+          <p:cNvPr id="249" name=""/>
           <p:cNvSpPr/>
           <p:nvPr/>
         </p:nvSpPr>
@@ -9284,7 +10257,7 @@
       </p:sp>
       <p:sp>
         <p:nvSpPr>
-          <p:cNvPr id="241" name="" descr="{&quot;isTemplate&quot;:true,&quot;type&quot;:&quot;text&quot;}"/>
+          <p:cNvPr id="250" name="" descr="{&quot;isTemplate&quot;:true,&quot;type&quot;:&quot;text&quot;}"/>
           <p:cNvSpPr txBox="1"/>
           <p:nvPr/>
         </p:nvSpPr>
@@ -9308,8 +10281,8 @@
                 <a:solidFill>
                   <a:srgbClr val="F59E0B"/>
                 </a:solidFill>
-                <a:latin typeface="JetBrains Mono"/>
-                <a:ea typeface="JetBrains Mono"/>
+                <a:latin typeface="Consolas"/>
+                <a:ea typeface="Consolas"/>
               </a:rPr>
               <a:t>03</a:t>
             </a:r>
@@ -9319,7 +10292,7 @@
       </p:sp>
       <p:sp>
         <p:nvSpPr>
-          <p:cNvPr id="242" name="" descr="{&quot;isTemplate&quot;:true,&quot;type&quot;:&quot;text&quot;}"/>
+          <p:cNvPr id="251" name="" descr="{&quot;isTemplate&quot;:true,&quot;type&quot;:&quot;text&quot;}"/>
           <p:cNvSpPr txBox="1"/>
           <p:nvPr/>
         </p:nvSpPr>
@@ -9354,7 +10327,7 @@
       </p:sp>
       <p:sp>
         <p:nvSpPr>
-          <p:cNvPr id="243" name="" descr="{&quot;isTemplate&quot;:true,&quot;type&quot;:&quot;text&quot;}"/>
+          <p:cNvPr id="252" name="" descr="{&quot;isTemplate&quot;:true,&quot;type&quot;:&quot;text&quot;}"/>
           <p:cNvSpPr txBox="1"/>
           <p:nvPr/>
         </p:nvSpPr>
@@ -9389,7 +10362,7 @@
       </p:sp>
       <p:sp>
         <p:nvSpPr>
-          <p:cNvPr id="244" name=""/>
+          <p:cNvPr id="253" name=""/>
           <p:cNvSpPr/>
           <p:nvPr/>
         </p:nvSpPr>
@@ -9415,7 +10388,7 @@
       </p:sp>
       <p:sp>
         <p:nvSpPr>
-          <p:cNvPr id="245" name=""/>
+          <p:cNvPr id="254" name=""/>
           <p:cNvSpPr/>
           <p:nvPr/>
         </p:nvSpPr>
@@ -9455,7 +10428,7 @@
       </p:sp>
       <p:sp>
         <p:nvSpPr>
-          <p:cNvPr id="246" name="" descr="{&quot;isTemplate&quot;:true,&quot;type&quot;:&quot;text&quot;}"/>
+          <p:cNvPr id="255" name="" descr="{&quot;isTemplate&quot;:true,&quot;type&quot;:&quot;text&quot;}"/>
           <p:cNvSpPr txBox="1"/>
           <p:nvPr/>
         </p:nvSpPr>
@@ -9479,8 +10452,8 @@
                 <a:solidFill>
                   <a:srgbClr val="F59E0B"/>
                 </a:solidFill>
-                <a:latin typeface="JetBrains Mono"/>
-                <a:ea typeface="JetBrains Mono"/>
+                <a:latin typeface="Consolas"/>
+                <a:ea typeface="Consolas"/>
               </a:rPr>
               <a:t>04</a:t>
             </a:r>
@@ -9490,7 +10463,7 @@
       </p:sp>
       <p:sp>
         <p:nvSpPr>
-          <p:cNvPr id="247" name="" descr="{&quot;isTemplate&quot;:true,&quot;type&quot;:&quot;text&quot;}"/>
+          <p:cNvPr id="256" name="" descr="{&quot;isTemplate&quot;:true,&quot;type&quot;:&quot;text&quot;}"/>
           <p:cNvSpPr txBox="1"/>
           <p:nvPr/>
         </p:nvSpPr>
@@ -9525,7 +10498,7 @@
       </p:sp>
       <p:sp>
         <p:nvSpPr>
-          <p:cNvPr id="248" name="" descr="{&quot;isTemplate&quot;:true,&quot;type&quot;:&quot;text&quot;}"/>
+          <p:cNvPr id="257" name="" descr="{&quot;isTemplate&quot;:true,&quot;type&quot;:&quot;text&quot;}"/>
           <p:cNvSpPr txBox="1"/>
           <p:nvPr/>
         </p:nvSpPr>
@@ -9560,7 +10533,7 @@
       </p:sp>
       <p:sp>
         <p:nvSpPr>
-          <p:cNvPr id="249" name=""/>
+          <p:cNvPr id="258" name=""/>
           <p:cNvSpPr/>
           <p:nvPr/>
         </p:nvSpPr>
@@ -9586,7 +10559,7 @@
       </p:sp>
       <p:sp>
         <p:nvSpPr>
-          <p:cNvPr id="250" name=""/>
+          <p:cNvPr id="259" name=""/>
           <p:cNvSpPr/>
           <p:nvPr/>
         </p:nvSpPr>
@@ -9626,7 +10599,7 @@
       </p:sp>
       <p:sp>
         <p:nvSpPr>
-          <p:cNvPr id="251" name="" descr="{&quot;isTemplate&quot;:true,&quot;type&quot;:&quot;text&quot;}"/>
+          <p:cNvPr id="260" name="" descr="{&quot;isTemplate&quot;:true,&quot;type&quot;:&quot;text&quot;}"/>
           <p:cNvSpPr txBox="1"/>
           <p:nvPr/>
         </p:nvSpPr>
@@ -9650,8 +10623,8 @@
                 <a:solidFill>
                   <a:srgbClr val="F59E0B"/>
                 </a:solidFill>
-                <a:latin typeface="JetBrains Mono"/>
-                <a:ea typeface="JetBrains Mono"/>
+                <a:latin typeface="Consolas"/>
+                <a:ea typeface="Consolas"/>
               </a:rPr>
               <a:t>05</a:t>
             </a:r>
@@ -9661,7 +10634,7 @@
       </p:sp>
       <p:sp>
         <p:nvSpPr>
-          <p:cNvPr id="252" name="" descr="{&quot;isTemplate&quot;:true,&quot;type&quot;:&quot;text&quot;}"/>
+          <p:cNvPr id="261" name="" descr="{&quot;isTemplate&quot;:true,&quot;type&quot;:&quot;text&quot;}"/>
           <p:cNvSpPr txBox="1"/>
           <p:nvPr/>
         </p:nvSpPr>
@@ -9696,7 +10669,7 @@
       </p:sp>
       <p:sp>
         <p:nvSpPr>
-          <p:cNvPr id="253" name="" descr="{&quot;isTemplate&quot;:true,&quot;type&quot;:&quot;text&quot;}"/>
+          <p:cNvPr id="262" name="" descr="{&quot;isTemplate&quot;:true,&quot;type&quot;:&quot;text&quot;}"/>
           <p:cNvSpPr txBox="1"/>
           <p:nvPr/>
         </p:nvSpPr>
@@ -9751,7 +10724,7 @@
       </p:sp>
       <p:sp>
         <p:nvSpPr>
-          <p:cNvPr id="254" name=""/>
+          <p:cNvPr id="263" name=""/>
           <p:cNvSpPr/>
           <p:nvPr/>
         </p:nvSpPr>
@@ -9777,7 +10750,7 @@
       </p:sp>
       <p:sp>
         <p:nvSpPr>
-          <p:cNvPr id="255" name=""/>
+          <p:cNvPr id="264" name=""/>
           <p:cNvSpPr/>
           <p:nvPr/>
         </p:nvSpPr>
@@ -9817,7 +10790,7 @@
       </p:sp>
       <p:sp>
         <p:nvSpPr>
-          <p:cNvPr id="256" name="" descr="{&quot;isTemplate&quot;:true,&quot;type&quot;:&quot;text&quot;}"/>
+          <p:cNvPr id="265" name="" descr="{&quot;isTemplate&quot;:true,&quot;type&quot;:&quot;text&quot;}"/>
           <p:cNvSpPr txBox="1"/>
           <p:nvPr/>
         </p:nvSpPr>
@@ -9841,8 +10814,8 @@
                 <a:solidFill>
                   <a:srgbClr val="22C55E"/>
                 </a:solidFill>
-                <a:latin typeface="JetBrains Mono"/>
-                <a:ea typeface="JetBrains Mono"/>
+                <a:latin typeface="Consolas"/>
+                <a:ea typeface="Consolas"/>
               </a:rPr>
               <a:t>06</a:t>
             </a:r>
@@ -9852,7 +10825,7 @@
       </p:sp>
       <p:sp>
         <p:nvSpPr>
-          <p:cNvPr id="257" name="" descr="{&quot;isTemplate&quot;:true,&quot;type&quot;:&quot;text&quot;}"/>
+          <p:cNvPr id="266" name="" descr="{&quot;isTemplate&quot;:true,&quot;type&quot;:&quot;text&quot;}"/>
           <p:cNvSpPr txBox="1"/>
           <p:nvPr/>
         </p:nvSpPr>
@@ -9887,7 +10860,7 @@
       </p:sp>
       <p:sp>
         <p:nvSpPr>
-          <p:cNvPr id="258" name="" descr="{&quot;isTemplate&quot;:true,&quot;type&quot;:&quot;text&quot;}"/>
+          <p:cNvPr id="267" name="" descr="{&quot;isTemplate&quot;:true,&quot;type&quot;:&quot;text&quot;}"/>
           <p:cNvSpPr txBox="1"/>
           <p:nvPr/>
         </p:nvSpPr>
@@ -9922,7 +10895,7 @@
       </p:sp>
       <p:sp>
         <p:nvSpPr>
-          <p:cNvPr id="259" name=""/>
+          <p:cNvPr id="268" name=""/>
           <p:cNvSpPr/>
           <p:nvPr/>
         </p:nvSpPr>
@@ -9948,7 +10921,7 @@
       </p:sp>
       <p:sp>
         <p:nvSpPr>
-          <p:cNvPr id="260" name=""/>
+          <p:cNvPr id="269" name=""/>
           <p:cNvSpPr/>
           <p:nvPr/>
         </p:nvSpPr>
@@ -9988,7 +10961,7 @@
       </p:sp>
       <p:sp>
         <p:nvSpPr>
-          <p:cNvPr id="261" name="" descr="{&quot;isTemplate&quot;:true,&quot;type&quot;:&quot;text&quot;}"/>
+          <p:cNvPr id="270" name="" descr="{&quot;isTemplate&quot;:true,&quot;type&quot;:&quot;text&quot;}"/>
           <p:cNvSpPr txBox="1"/>
           <p:nvPr/>
         </p:nvSpPr>
@@ -10012,8 +10985,8 @@
                 <a:solidFill>
                   <a:srgbClr val="22C55E"/>
                 </a:solidFill>
-                <a:latin typeface="JetBrains Mono"/>
-                <a:ea typeface="JetBrains Mono"/>
+                <a:latin typeface="Consolas"/>
+                <a:ea typeface="Consolas"/>
               </a:rPr>
               <a:t>07</a:t>
             </a:r>
@@ -10023,7 +10996,7 @@
       </p:sp>
       <p:sp>
         <p:nvSpPr>
-          <p:cNvPr id="262" name="" descr="{&quot;isTemplate&quot;:true,&quot;type&quot;:&quot;text&quot;}"/>
+          <p:cNvPr id="271" name="" descr="{&quot;isTemplate&quot;:true,&quot;type&quot;:&quot;text&quot;}"/>
           <p:cNvSpPr txBox="1"/>
           <p:nvPr/>
         </p:nvSpPr>
@@ -10058,7 +11031,7 @@
       </p:sp>
       <p:sp>
         <p:nvSpPr>
-          <p:cNvPr id="263" name="" descr="{&quot;isTemplate&quot;:true,&quot;type&quot;:&quot;text&quot;}"/>
+          <p:cNvPr id="272" name="" descr="{&quot;isTemplate&quot;:true,&quot;type&quot;:&quot;text&quot;}"/>
           <p:cNvSpPr txBox="1"/>
           <p:nvPr/>
         </p:nvSpPr>
@@ -10093,7 +11066,7 @@
       </p:sp>
       <p:sp>
         <p:nvSpPr>
-          <p:cNvPr id="264" name="" descr="{&quot;isTemplate&quot;:true,&quot;type&quot;:&quot;text&quot;}"/>
+          <p:cNvPr id="273" name="" descr="{&quot;isTemplate&quot;:true,&quot;type&quot;:&quot;text&quot;}"/>
           <p:cNvSpPr txBox="1"/>
           <p:nvPr/>
         </p:nvSpPr>
@@ -10128,7 +11101,7 @@
       </p:sp>
       <p:sp>
         <p:nvSpPr>
-          <p:cNvPr id="265" name=""/>
+          <p:cNvPr id="274" name=""/>
           <p:cNvSpPr/>
           <p:nvPr/>
         </p:nvSpPr>
@@ -10163,7 +11136,7 @@
       </p:sp>
       <p:sp>
         <p:nvSpPr>
-          <p:cNvPr id="266" name="" descr="{&quot;isTemplate&quot;:true,&quot;type&quot;:&quot;text&quot;}"/>
+          <p:cNvPr id="275" name="" descr="{&quot;isTemplate&quot;:true,&quot;type&quot;:&quot;text&quot;}"/>
           <p:cNvSpPr txBox="1"/>
           <p:nvPr/>
         </p:nvSpPr>
@@ -10198,7 +11171,7 @@
       </p:sp>
       <p:sp>
         <p:nvSpPr>
-          <p:cNvPr id="267" name="" descr="{&quot;isTemplate&quot;:true,&quot;type&quot;:&quot;text&quot;}"/>
+          <p:cNvPr id="276" name="" descr="{&quot;isTemplate&quot;:true,&quot;type&quot;:&quot;text&quot;}"/>
           <p:cNvSpPr txBox="1"/>
           <p:nvPr/>
         </p:nvSpPr>
@@ -10235,7 +11208,7 @@
       </p:sp>
       <p:sp>
         <p:nvSpPr>
-          <p:cNvPr id="268" name="" descr="{&quot;isTemplate&quot;:true,&quot;type&quot;:&quot;text&quot;}"/>
+          <p:cNvPr id="277" name="" descr="{&quot;isTemplate&quot;:true,&quot;type&quot;:&quot;text&quot;}"/>
           <p:cNvSpPr txBox="1"/>
           <p:nvPr/>
         </p:nvSpPr>
@@ -10270,7 +11243,7 @@
       </p:sp>
       <p:sp>
         <p:nvSpPr>
-          <p:cNvPr id="269" name="" descr="{&quot;isTemplate&quot;:true,&quot;type&quot;:&quot;text&quot;}"/>
+          <p:cNvPr id="278" name="" descr="{&quot;isTemplate&quot;:true,&quot;type&quot;:&quot;text&quot;}"/>
           <p:cNvSpPr txBox="1"/>
           <p:nvPr/>
         </p:nvSpPr>
@@ -10305,7 +11278,7 @@
       </p:sp>
       <p:sp>
         <p:nvSpPr>
-          <p:cNvPr id="270" name="" descr="{&quot;isTemplate&quot;:true,&quot;type&quot;:&quot;text&quot;}"/>
+          <p:cNvPr id="279" name="" descr="{&quot;isTemplate&quot;:true,&quot;type&quot;:&quot;text&quot;}"/>
           <p:cNvSpPr txBox="1"/>
           <p:nvPr/>
         </p:nvSpPr>
@@ -10340,7 +11313,7 @@
       </p:sp>
       <p:sp>
         <p:nvSpPr>
-          <p:cNvPr id="271" name="" descr="{&quot;isTemplate&quot;:true,&quot;type&quot;:&quot;text&quot;}"/>
+          <p:cNvPr id="280" name="" descr="{&quot;isTemplate&quot;:true,&quot;type&quot;:&quot;text&quot;}"/>
           <p:cNvSpPr txBox="1"/>
           <p:nvPr/>
         </p:nvSpPr>
@@ -10377,6 +11350,7 @@
       </p:sp>
     </p:spTree>
   </p:cSld>
+  <p:extLst/>
 </p:sld>
 </file>
 
@@ -10385,7 +11359,7 @@
   <p:cSld>
     <p:spTree>
       <p:nvGrpSpPr>
-        <p:cNvPr id="272" name=""/>
+        <p:cNvPr id="281" name=""/>
         <p:cNvGrpSpPr/>
         <p:nvPr/>
       </p:nvGrpSpPr>
@@ -10399,7 +11373,7 @@
       </p:grpSpPr>
       <p:sp>
         <p:nvSpPr>
-          <p:cNvPr id="273" name=""/>
+          <p:cNvPr id="282" name=""/>
           <p:cNvSpPr/>
           <p:nvPr/>
         </p:nvSpPr>
@@ -10426,7 +11400,7 @@
       </p:sp>
       <p:sp>
         <p:nvSpPr>
-          <p:cNvPr id="274" name="" descr="{&quot;isTemplate&quot;:true,&quot;type&quot;:&quot;text&quot;}"/>
+          <p:cNvPr id="283" name="" descr="{&quot;isTemplate&quot;:true,&quot;type&quot;:&quot;text&quot;}"/>
           <p:cNvSpPr txBox="1"/>
           <p:nvPr/>
         </p:nvSpPr>
@@ -10481,7 +11455,7 @@
       </p:sp>
       <p:sp>
         <p:nvSpPr>
-          <p:cNvPr id="275" name="" descr="{&quot;isTemplate&quot;:true,&quot;type&quot;:&quot;text&quot;}"/>
+          <p:cNvPr id="284" name="" descr="{&quot;isTemplate&quot;:true,&quot;type&quot;:&quot;text&quot;}"/>
           <p:cNvSpPr txBox="1"/>
           <p:nvPr/>
         </p:nvSpPr>
@@ -10516,7 +11490,7 @@
       </p:sp>
       <p:sp>
         <p:nvSpPr>
-          <p:cNvPr id="276" name=""/>
+          <p:cNvPr id="285" name=""/>
           <p:cNvSpPr/>
           <p:nvPr/>
         </p:nvSpPr>
@@ -10554,7 +11528,7 @@
       </p:sp>
       <p:sp>
         <p:nvSpPr>
-          <p:cNvPr id="277" name="" descr="{&quot;isTemplate&quot;:true,&quot;type&quot;:&quot;text&quot;}"/>
+          <p:cNvPr id="286" name="" descr="{&quot;isTemplate&quot;:true,&quot;type&quot;:&quot;text&quot;}"/>
           <p:cNvSpPr txBox="1"/>
           <p:nvPr/>
         </p:nvSpPr>
@@ -10589,7 +11563,7 @@
       </p:sp>
       <p:sp>
         <p:nvSpPr>
-          <p:cNvPr id="278" name="" descr="{&quot;isTemplate&quot;:true,&quot;type&quot;:&quot;text&quot;}"/>
+          <p:cNvPr id="287" name="" descr="{&quot;isTemplate&quot;:true,&quot;type&quot;:&quot;text&quot;}"/>
           <p:cNvSpPr txBox="1"/>
           <p:nvPr/>
         </p:nvSpPr>
@@ -10626,7 +11600,7 @@
       </p:sp>
       <p:sp>
         <p:nvSpPr>
-          <p:cNvPr id="279" name="" descr="{&quot;isTemplate&quot;:true,&quot;type&quot;:&quot;text&quot;}"/>
+          <p:cNvPr id="288" name="" descr="{&quot;isTemplate&quot;:true,&quot;type&quot;:&quot;text&quot;}"/>
           <p:cNvSpPr txBox="1"/>
           <p:nvPr/>
         </p:nvSpPr>
@@ -10661,7 +11635,7 @@
       </p:sp>
       <p:sp>
         <p:nvSpPr>
-          <p:cNvPr id="280" name=""/>
+          <p:cNvPr id="289" name=""/>
           <p:cNvSpPr/>
           <p:nvPr/>
         </p:nvSpPr>
@@ -10699,7 +11673,7 @@
       </p:sp>
       <p:sp>
         <p:nvSpPr>
-          <p:cNvPr id="281" name="" descr="{&quot;isTemplate&quot;:true,&quot;type&quot;:&quot;text&quot;}"/>
+          <p:cNvPr id="290" name="" descr="{&quot;isTemplate&quot;:true,&quot;type&quot;:&quot;text&quot;}"/>
           <p:cNvSpPr txBox="1"/>
           <p:nvPr/>
         </p:nvSpPr>
@@ -10734,7 +11708,7 @@
       </p:sp>
       <p:sp>
         <p:nvSpPr>
-          <p:cNvPr id="282" name="" descr="{&quot;isTemplate&quot;:true,&quot;type&quot;:&quot;text&quot;}"/>
+          <p:cNvPr id="291" name="" descr="{&quot;isTemplate&quot;:true,&quot;type&quot;:&quot;text&quot;}"/>
           <p:cNvSpPr txBox="1"/>
           <p:nvPr/>
         </p:nvSpPr>
@@ -10771,7 +11745,7 @@
       </p:sp>
       <p:sp>
         <p:nvSpPr>
-          <p:cNvPr id="283" name="" descr="{&quot;isTemplate&quot;:true,&quot;type&quot;:&quot;text&quot;}"/>
+          <p:cNvPr id="292" name="" descr="{&quot;isTemplate&quot;:true,&quot;type&quot;:&quot;text&quot;}"/>
           <p:cNvSpPr txBox="1"/>
           <p:nvPr/>
         </p:nvSpPr>
@@ -10806,7 +11780,7 @@
       </p:sp>
       <p:sp>
         <p:nvSpPr>
-          <p:cNvPr id="284" name=""/>
+          <p:cNvPr id="293" name=""/>
           <p:cNvSpPr/>
           <p:nvPr/>
         </p:nvSpPr>
@@ -10844,7 +11818,7 @@
       </p:sp>
       <p:sp>
         <p:nvSpPr>
-          <p:cNvPr id="285" name="" descr="{&quot;isTemplate&quot;:true,&quot;type&quot;:&quot;text&quot;}"/>
+          <p:cNvPr id="294" name="" descr="{&quot;isTemplate&quot;:true,&quot;type&quot;:&quot;text&quot;}"/>
           <p:cNvSpPr txBox="1"/>
           <p:nvPr/>
         </p:nvSpPr>
@@ -10879,7 +11853,7 @@
       </p:sp>
       <p:sp>
         <p:nvSpPr>
-          <p:cNvPr id="286" name="" descr="{&quot;isTemplate&quot;:true,&quot;type&quot;:&quot;text&quot;}"/>
+          <p:cNvPr id="295" name="" descr="{&quot;isTemplate&quot;:true,&quot;type&quot;:&quot;text&quot;}"/>
           <p:cNvSpPr txBox="1"/>
           <p:nvPr/>
         </p:nvSpPr>
@@ -10916,7 +11890,7 @@
       </p:sp>
       <p:sp>
         <p:nvSpPr>
-          <p:cNvPr id="287" name="" descr="{&quot;isTemplate&quot;:true,&quot;type&quot;:&quot;text&quot;}"/>
+          <p:cNvPr id="296" name="" descr="{&quot;isTemplate&quot;:true,&quot;type&quot;:&quot;text&quot;}"/>
           <p:cNvSpPr txBox="1"/>
           <p:nvPr/>
         </p:nvSpPr>
@@ -10951,7 +11925,7 @@
       </p:sp>
       <p:sp>
         <p:nvSpPr>
-          <p:cNvPr id="288" name=""/>
+          <p:cNvPr id="297" name=""/>
           <p:cNvSpPr/>
           <p:nvPr/>
         </p:nvSpPr>
@@ -10994,7 +11968,7 @@
       </p:sp>
       <p:sp>
         <p:nvSpPr>
-          <p:cNvPr id="289" name="" descr="{&quot;isTemplate&quot;:true,&quot;type&quot;:&quot;text&quot;}"/>
+          <p:cNvPr id="298" name="" descr="{&quot;isTemplate&quot;:true,&quot;type&quot;:&quot;text&quot;}"/>
           <p:cNvSpPr txBox="1"/>
           <p:nvPr/>
         </p:nvSpPr>
@@ -11029,7 +12003,7 @@
       </p:sp>
       <p:sp>
         <p:nvSpPr>
-          <p:cNvPr id="290" name="" descr="{&quot;isTemplate&quot;:true,&quot;type&quot;:&quot;text&quot;}"/>
+          <p:cNvPr id="299" name="" descr="{&quot;isTemplate&quot;:true,&quot;type&quot;:&quot;text&quot;}"/>
           <p:cNvSpPr txBox="1"/>
           <p:nvPr/>
         </p:nvSpPr>
@@ -11066,7 +12040,7 @@
       </p:sp>
       <p:sp>
         <p:nvSpPr>
-          <p:cNvPr id="291" name=""/>
+          <p:cNvPr id="300" name=""/>
           <p:cNvSpPr/>
           <p:nvPr/>
         </p:nvSpPr>
@@ -11109,7 +12083,7 @@
       </p:sp>
       <p:sp>
         <p:nvSpPr>
-          <p:cNvPr id="292" name="" descr="{&quot;isTemplate&quot;:true,&quot;type&quot;:&quot;text&quot;}"/>
+          <p:cNvPr id="301" name="" descr="{&quot;isTemplate&quot;:true,&quot;type&quot;:&quot;text&quot;}"/>
           <p:cNvSpPr txBox="1"/>
           <p:nvPr/>
         </p:nvSpPr>
@@ -11144,7 +12118,7 @@
       </p:sp>
       <p:sp>
         <p:nvSpPr>
-          <p:cNvPr id="293" name="" descr="{&quot;isTemplate&quot;:true,&quot;type&quot;:&quot;text&quot;}"/>
+          <p:cNvPr id="302" name="" descr="{&quot;isTemplate&quot;:true,&quot;type&quot;:&quot;text&quot;}"/>
           <p:cNvSpPr txBox="1"/>
           <p:nvPr/>
         </p:nvSpPr>
@@ -11181,6 +12155,7 @@
       </p:sp>
     </p:spTree>
   </p:cSld>
+  <p:extLst/>
 </p:sld>
 </file>
 
@@ -11189,7 +12164,7 @@
   <p:cSld>
     <p:spTree>
       <p:nvGrpSpPr>
-        <p:cNvPr id="294" name="" descr="&lt;Slide style={{ background: &quot;#0B1220&quot;, padding: &quot;36px 72px&quot;, display: &quot;flex&quot;, flexDirection: &quot;column&quot; }}&gt;&#10;  &lt;Text style={{ color: &quot;#6B7280&quot;, fontSize: 14, letterSpacing: 3 }}&gt;安全设计 · 二&lt;/Text&gt;&#10;  &lt;Text style={{ color: &quot;#F7F4EC&quot;, fontSize: 34, fontWeight: 700, marginTop: 10 }}&gt;注入防御：模型不碰执行，判断全在代码&lt;/Text&gt;&#10;&#10;  &lt;Box style={{ display: &quot;flex&quot;, flexDirection: &quot;row&quot;, gap: 32, marginTop: 26 }}&gt;&#10;    &lt;Box style={{ flex: 1.15, display: &quot;flex&quot;, flexDirection: &quot;column&quot;, gap: 10 }}&gt;&#10;      &lt;Text style={{ color: &quot;#F7F4EC&quot;, fontSize: 20, fontWeight: 600 }}&gt;四道闸，顺序固定&lt;/Text&gt;&#10;      &lt;Box style={{ background: &quot;rgba(34,197,94,0.08)&quot;, borderLeft: &quot;3px solid #22C55E&quot;, padding: &quot;10px 14px&quot; }}&gt;&#10;        &lt;Text style={{ color: &quot;#22C55E&quot;, fontSize: 16, fontWeight: 600 }}&gt;闸一　输入守卫&lt;/Text&gt;&#10;        &lt;Text style={{ color: &quot;#9CA3AF&quot;, fontSize: 15, lineHeight: 1.6, marginTop: 5 }}&gt;归一化文本，识别指令覆盖、角色伪装、越权索取四类特征，命中即拦，模型看不到这段话。&lt;/Text&gt;&#10;      &lt;/Box&gt;&#10;      &lt;Box style={{ background: &quot;rgba(245,158,11,0.08)&quot;, borderLeft: &quot;3px solid #F59E0B&quot;, padding: &quot;10px 14px&quot; }}&gt;&#10;        &lt;Text style={{ color: &quot;#F59E0B&quot;, fontSize: 16, fontWeight: 600 }}&gt;闸二　职责隔离&lt;/Text&gt;&#10;        &lt;Text style={{ color: &quot;#9CA3AF&quot;, fontSize: 15, lineHeight: 1.6, marginTop: 5 }}&gt;模型只做两件事：理解诉求、选工具。风险判定与参数校验全在代码层，模型说了不算。&lt;/Text&gt;&#10;      &lt;/Box&gt;&#10;      &lt;Box style={{ background: &quot;rgba(239,68,68,0.08)&quot;, borderLeft: &quot;3px solid #EF4444&quot;, padding: &quot;10px 14px&quot; }}&gt;&#10;        &lt;Text style={{ color: &quot;#EF4444&quot;, fontSize: 16, fontWeight: 600 }}&gt;闸三　外部内容隔离&lt;/Text&gt;&#10;        &lt;Text style={{ color: &quot;#9CA3AF&quot;, fontSize: 15, lineHeight: 1.6, marginTop: 5 }}&gt;外部服务返回按数据处理，不进系统提示词，不当指令读。间接注入因此失效。&lt;/Text&gt;&#10;      &lt;/Box&gt;&#10;      &lt;Box style={{ background: &quot;rgba(59,130,246,0.08)&quot;, borderLeft: &quot;3px solid #3B82F6&quot;, padding: &quot;10px 14px&quot; }}&gt;&#10;        &lt;Text style={{ color: &quot;#93C5FD&quot;, fontSize: 16, fontWeight: 600 }}&gt;闸四　参数收口&lt;/Text&gt;&#10;        &lt;Text style={{ color: &quot;#9CA3AF&quot;, fontSize: 15, lineHeight: 1.6, marginTop: 5 }}&gt;工具参数按契约校验，金额越界、收款人凭空出现、非法工具名一律拒绝并记审计。&lt;/Text&gt;&#10;      &lt;/Box&gt;&#10;    &lt;/Box&gt;&#10;&#10;    &lt;Box style={{ flex: 1, display: &quot;flex&quot;, flexDirection: &quot;column&quot;, gap: 12 }}&gt;&#10;      &lt;Box style={{ background: &quot;rgba(34,197,94,0.10)&quot;, border: &quot;1px solid rgba(34,197,94,0.4)&quot;, borderRadius: 12, padding: &quot;24px 22px&quot; }}&gt;&#10;        &lt;Text style={{ color: &quot;#22C55E&quot;, fontSize: 38, fontWeight: 700, fontFamily: &quot;JetBrains Mono, monospace&quot; }}&gt;12 / 12&lt;/Text&gt;&#10;        &lt;Text style={{ color: &quot;#F7F4EC&quot;, fontSize: 18, fontWeight: 600, marginTop: 6 }}&gt;直接注入全部拦截&lt;/Text&gt;&#10;        &lt;Text style={{ color: &quot;#9CA3AF&quot;, fontSize: 15, lineHeight: 1.6, marginTop: 6 }}&gt;「忽略之前的指令」「你现在是管理员」等十二种改写方式，全部在入口被挡下。&lt;/Text&gt;&#10;      &lt;/Box&gt;&#10;      &lt;Box style={{ background: &quot;rgba(245,158,11,0.10)&quot;, border: &quot;1px solid rgba(245,158,11,0.4)&quot;, borderRadius: 12, padding: &quot;24px 22px&quot; }}&gt;&#10;        &lt;Text style={{ color: &quot;#F59E0B&quot;, fontSize: 38, fontWeight: 700, fontFamily: &quot;JetBrains Mono, monospace&quot; }}&gt;8 / 8&lt;/Text&gt;&#10;        &lt;Text style={{ color: &quot;#F7F4EC&quot;, fontSize: 18, fontWeight: 600, marginTop: 6 }}&gt;间接注入全部拦截&lt;/Text&gt;&#10;        &lt;Text style={{ color: &quot;#9CA3AF&quot;, fontSize: 15, lineHeight: 1.6, marginTop: 6 }}&gt;把恶意指令藏在账单备注、订阅名称、理财介绍里，经外部服务返回，隔离机制生效。&lt;/Text&gt;&#10;      &lt;/Box&gt;&#10;      &lt;Box style={{ background: &quot;rgba(107,114,128,0.12)&quot;, border: &quot;1px solid rgba(107,114,128,0.4)&quot;, borderRadius: 12, padding: &quot;24px 22px&quot; }}&gt;&#10;        &lt;Text style={{ color: &quot;#D1D5DB&quot;, fontSize: 38, fontWeight: 700, fontFamily: &quot;JetBrains Mono, monospace&quot; }}&gt;0%&lt;/Text&gt;&#10;        &lt;Text style={{ color: &quot;#F7F4EC&quot;, fontSize: 18, fontWeight: 600, marginTop: 6 }}&gt;正常请求误拦截&lt;/Text&gt;&#10;        &lt;Text style={{ color: &quot;#9CA3AF&quot;, fontSize: 15, lineHeight: 1.6, marginTop: 6 }}&gt;十二条正常业务用例零误拦。拦得住和放得过，两头都守住才算可用。&lt;/Text&gt;&#10;      &lt;/Box&gt;&#10;    &lt;/Box&gt;&#10;  &lt;/Box&gt;&#10;&lt;/Slide&gt;&#10;"/>
+        <p:cNvPr id="303" name="" descr="&lt;Slide style={{ background: &quot;#0B1220&quot;, padding: &quot;36px 72px&quot;, display: &quot;flex&quot;, flexDirection: &quot;column&quot; }}&gt;&#10;  &lt;Text style={{ color: &quot;#6B7280&quot;, fontSize: 14, letterSpacing: 3 }}&gt;安全设计 · 二&lt;/Text&gt;&#10;  &lt;Text style={{ color: &quot;#F7F4EC&quot;, fontSize: 34, fontWeight: 700, marginTop: 10 }}&gt;注入防御：模型不碰执行，判断全在代码&lt;/Text&gt;&#10;&#10;  &lt;Box style={{ display: &quot;flex&quot;, flexDirection: &quot;row&quot;, gap: 32, marginTop: 26 }}&gt;&#10;    &lt;Box style={{ flex: 1.15, display: &quot;flex&quot;, flexDirection: &quot;column&quot;, gap: 10 }}&gt;&#10;      &lt;Text style={{ color: &quot;#F7F4EC&quot;, fontSize: 20, fontWeight: 600 }}&gt;四道闸，顺序固定&lt;/Text&gt;&#10;      &lt;Box style={{ background: &quot;rgba(34,197,94,0.08)&quot;, borderLeft: &quot;3px solid #22C55E&quot;, padding: &quot;10px 14px&quot; }}&gt;&#10;        &lt;Text style={{ color: &quot;#22C55E&quot;, fontSize: 16, fontWeight: 600 }}&gt;闸一　输入守卫&lt;/Text&gt;&#10;        &lt;Text style={{ color: &quot;#9CA3AF&quot;, fontSize: 15, lineHeight: 1.6, marginTop: 5 }}&gt;归一化文本，识别指令覆盖、角色伪装、越权索取四类特征，命中即拦，模型看不到这段话。&lt;/Text&gt;&#10;      &lt;/Box&gt;&#10;      &lt;Box style={{ background: &quot;rgba(245,158,11,0.08)&quot;, borderLeft: &quot;3px solid #F59E0B&quot;, padding: &quot;10px 14px&quot; }}&gt;&#10;        &lt;Text style={{ color: &quot;#F59E0B&quot;, fontSize: 16, fontWeight: 600 }}&gt;闸二　职责隔离&lt;/Text&gt;&#10;        &lt;Text style={{ color: &quot;#9CA3AF&quot;, fontSize: 15, lineHeight: 1.6, marginTop: 5 }}&gt;模型只做两件事：理解诉求、选工具。风险判定与参数校验全在代码层，模型说了不算。&lt;/Text&gt;&#10;      &lt;/Box&gt;&#10;      &lt;Box style={{ background: &quot;rgba(239,68,68,0.08)&quot;, borderLeft: &quot;3px solid #EF4444&quot;, padding: &quot;10px 14px&quot; }}&gt;&#10;        &lt;Text style={{ color: &quot;#EF4444&quot;, fontSize: 16, fontWeight: 600 }}&gt;闸三　外部内容隔离&lt;/Text&gt;&#10;        &lt;Text style={{ color: &quot;#9CA3AF&quot;, fontSize: 15, lineHeight: 1.6, marginTop: 5 }}&gt;外部服务返回按数据处理，不进系统提示词，不当指令读。间接注入因此失效。&lt;/Text&gt;&#10;      &lt;/Box&gt;&#10;      &lt;Box style={{ background: &quot;rgba(59,130,246,0.08)&quot;, borderLeft: &quot;3px solid #3B82F6&quot;, padding: &quot;10px 14px&quot; }}&gt;&#10;        &lt;Text style={{ color: &quot;#93C5FD&quot;, fontSize: 16, fontWeight: 600 }}&gt;闸四　参数收口&lt;/Text&gt;&#10;        &lt;Text style={{ color: &quot;#9CA3AF&quot;, fontSize: 15, lineHeight: 1.6, marginTop: 5 }}&gt;工具参数按契约校验，金额越界、收款人凭空出现、非法工具名一律拒绝并记审计。&lt;/Text&gt;&#10;      &lt;/Box&gt;&#10;    &lt;/Box&gt;&#10;&#10;    &lt;Box style={{ flex: 1, display: &quot;flex&quot;, flexDirection: &quot;column&quot;, gap: 12 }}&gt;&#10;      &lt;Box style={{ background: &quot;rgba(34,197,94,0.10)&quot;, border: &quot;1px solid rgba(34,197,94,0.4)&quot;, borderRadius: 12, padding: &quot;24px 22px&quot; }}&gt;&#10;        &lt;Text style={{ color: &quot;#22C55E&quot;, fontSize: 38, fontWeight: 700, fontFamily: &quot;Consolas, monospace&quot; }}&gt;12 / 12&lt;/Text&gt;&#10;        &lt;Text style={{ color: &quot;#F7F4EC&quot;, fontSize: 18, fontWeight: 600, marginTop: 6 }}&gt;直接注入全部拦截&lt;/Text&gt;&#10;        &lt;Text style={{ color: &quot;#9CA3AF&quot;, fontSize: 15, lineHeight: 1.6, marginTop: 6 }}&gt;「忽略之前的指令」「你现在是管理员」等十二种改写方式，全部在入口被挡下。&lt;/Text&gt;&#10;      &lt;/Box&gt;&#10;      &lt;Box style={{ background: &quot;rgba(245,158,11,0.10)&quot;, border: &quot;1px solid rgba(245,158,11,0.4)&quot;, borderRadius: 12, padding: &quot;24px 22px&quot; }}&gt;&#10;        &lt;Text style={{ color: &quot;#F59E0B&quot;, fontSize: 38, fontWeight: 700, fontFamily: &quot;Consolas, monospace&quot; }}&gt;8 / 8&lt;/Text&gt;&#10;        &lt;Text style={{ color: &quot;#F7F4EC&quot;, fontSize: 18, fontWeight: 600, marginTop: 6 }}&gt;间接注入全部拦截&lt;/Text&gt;&#10;        &lt;Text style={{ color: &quot;#9CA3AF&quot;, fontSize: 15, lineHeight: 1.6, marginTop: 6 }}&gt;把恶意指令藏在账单备注、订阅名称、理财介绍里，经外部服务返回，隔离机制生效。&lt;/Text&gt;&#10;      &lt;/Box&gt;&#10;      &lt;Box style={{ background: &quot;rgba(107,114,128,0.12)&quot;, border: &quot;1px solid rgba(107,114,128,0.4)&quot;, borderRadius: 12, padding: &quot;24px 22px&quot; }}&gt;&#10;        &lt;Text style={{ color: &quot;#D1D5DB&quot;, fontSize: 38, fontWeight: 700, fontFamily: &quot;Consolas, monospace&quot; }}&gt;0%&lt;/Text&gt;&#10;        &lt;Text style={{ color: &quot;#F7F4EC&quot;, fontSize: 18, fontWeight: 600, marginTop: 6 }}&gt;正常请求误拦截&lt;/Text&gt;&#10;        &lt;Text style={{ color: &quot;#9CA3AF&quot;, fontSize: 15, lineHeight: 1.6, marginTop: 6 }}&gt;十二条正常业务用例零误拦。拦得住和放得过，两头都守住才算可用。&lt;/Text&gt;&#10;      &lt;/Box&gt;&#10;    &lt;/Box&gt;&#10;  &lt;/Box&gt;&#10;&lt;/Slide&gt;&#10;"/>
         <p:cNvGrpSpPr/>
         <p:nvPr/>
       </p:nvGrpSpPr>
@@ -11203,7 +12178,7 @@
       </p:grpSpPr>
       <p:sp>
         <p:nvSpPr>
-          <p:cNvPr id="295" name=""/>
+          <p:cNvPr id="304" name=""/>
           <p:cNvSpPr/>
           <p:nvPr/>
         </p:nvSpPr>
@@ -11227,7 +12202,7 @@
       </p:sp>
       <p:sp>
         <p:nvSpPr>
-          <p:cNvPr id="296" name="" descr="{&quot;isTemplate&quot;:true,&quot;type&quot;:&quot;text&quot;}"/>
+          <p:cNvPr id="305" name="" descr="{&quot;isTemplate&quot;:true,&quot;type&quot;:&quot;text&quot;}"/>
           <p:cNvSpPr txBox="1"/>
           <p:nvPr/>
         </p:nvSpPr>
@@ -11282,7 +12257,7 @@
       </p:sp>
       <p:sp>
         <p:nvSpPr>
-          <p:cNvPr id="297" name="" descr="{&quot;isTemplate&quot;:true,&quot;type&quot;:&quot;text&quot;}"/>
+          <p:cNvPr id="306" name="" descr="{&quot;isTemplate&quot;:true,&quot;type&quot;:&quot;text&quot;}"/>
           <p:cNvSpPr txBox="1"/>
           <p:nvPr/>
         </p:nvSpPr>
@@ -11317,7 +12292,7 @@
       </p:sp>
       <p:sp>
         <p:nvSpPr>
-          <p:cNvPr id="298" name="" descr="{&quot;isTemplate&quot;:true,&quot;type&quot;:&quot;text&quot;}"/>
+          <p:cNvPr id="307" name="" descr="{&quot;isTemplate&quot;:true,&quot;type&quot;:&quot;text&quot;}"/>
           <p:cNvSpPr txBox="1"/>
           <p:nvPr/>
         </p:nvSpPr>
@@ -11352,7 +12327,7 @@
       </p:sp>
       <p:sp>
         <p:nvSpPr>
-          <p:cNvPr id="299" name=""/>
+          <p:cNvPr id="308" name=""/>
           <p:cNvSpPr/>
           <p:nvPr/>
         </p:nvSpPr>
@@ -11378,7 +12353,7 @@
       </p:sp>
       <p:sp>
         <p:nvSpPr>
-          <p:cNvPr id="300" name=""/>
+          <p:cNvPr id="309" name=""/>
           <p:cNvSpPr/>
           <p:nvPr/>
         </p:nvSpPr>
@@ -11418,7 +12393,7 @@
       </p:sp>
       <p:sp>
         <p:nvSpPr>
-          <p:cNvPr id="301" name="" descr="{&quot;isTemplate&quot;:true,&quot;type&quot;:&quot;text&quot;}"/>
+          <p:cNvPr id="310" name="" descr="{&quot;isTemplate&quot;:true,&quot;type&quot;:&quot;text&quot;}"/>
           <p:cNvSpPr txBox="1"/>
           <p:nvPr/>
         </p:nvSpPr>
@@ -11453,7 +12428,7 @@
       </p:sp>
       <p:sp>
         <p:nvSpPr>
-          <p:cNvPr id="302" name="" descr="{&quot;isTemplate&quot;:true,&quot;type&quot;:&quot;text&quot;}"/>
+          <p:cNvPr id="311" name="" descr="{&quot;isTemplate&quot;:true,&quot;type&quot;:&quot;text&quot;}"/>
           <p:cNvSpPr txBox="1"/>
           <p:nvPr/>
         </p:nvSpPr>
@@ -11490,7 +12465,7 @@
       </p:sp>
       <p:sp>
         <p:nvSpPr>
-          <p:cNvPr id="303" name=""/>
+          <p:cNvPr id="312" name=""/>
           <p:cNvSpPr/>
           <p:nvPr/>
         </p:nvSpPr>
@@ -11516,7 +12491,7 @@
       </p:sp>
       <p:sp>
         <p:nvSpPr>
-          <p:cNvPr id="304" name=""/>
+          <p:cNvPr id="313" name=""/>
           <p:cNvSpPr/>
           <p:nvPr/>
         </p:nvSpPr>
@@ -11556,7 +12531,7 @@
       </p:sp>
       <p:sp>
         <p:nvSpPr>
-          <p:cNvPr id="305" name="" descr="{&quot;isTemplate&quot;:true,&quot;type&quot;:&quot;text&quot;}"/>
+          <p:cNvPr id="314" name="" descr="{&quot;isTemplate&quot;:true,&quot;type&quot;:&quot;text&quot;}"/>
           <p:cNvSpPr txBox="1"/>
           <p:nvPr/>
         </p:nvSpPr>
@@ -11591,7 +12566,7 @@
       </p:sp>
       <p:sp>
         <p:nvSpPr>
-          <p:cNvPr id="306" name="" descr="{&quot;isTemplate&quot;:true,&quot;type&quot;:&quot;text&quot;}"/>
+          <p:cNvPr id="315" name="" descr="{&quot;isTemplate&quot;:true,&quot;type&quot;:&quot;text&quot;}"/>
           <p:cNvSpPr txBox="1"/>
           <p:nvPr/>
         </p:nvSpPr>
@@ -11628,7 +12603,7 @@
       </p:sp>
       <p:sp>
         <p:nvSpPr>
-          <p:cNvPr id="307" name=""/>
+          <p:cNvPr id="316" name=""/>
           <p:cNvSpPr/>
           <p:nvPr/>
         </p:nvSpPr>
@@ -11654,7 +12629,7 @@
       </p:sp>
       <p:sp>
         <p:nvSpPr>
-          <p:cNvPr id="308" name=""/>
+          <p:cNvPr id="317" name=""/>
           <p:cNvSpPr/>
           <p:nvPr/>
         </p:nvSpPr>
@@ -11694,7 +12669,7 @@
       </p:sp>
       <p:sp>
         <p:nvSpPr>
-          <p:cNvPr id="309" name="" descr="{&quot;isTemplate&quot;:true,&quot;type&quot;:&quot;text&quot;}"/>
+          <p:cNvPr id="318" name="" descr="{&quot;isTemplate&quot;:true,&quot;type&quot;:&quot;text&quot;}"/>
           <p:cNvSpPr txBox="1"/>
           <p:nvPr/>
         </p:nvSpPr>
@@ -11729,7 +12704,7 @@
       </p:sp>
       <p:sp>
         <p:nvSpPr>
-          <p:cNvPr id="310" name="" descr="{&quot;isTemplate&quot;:true,&quot;type&quot;:&quot;text&quot;}"/>
+          <p:cNvPr id="319" name="" descr="{&quot;isTemplate&quot;:true,&quot;type&quot;:&quot;text&quot;}"/>
           <p:cNvSpPr txBox="1"/>
           <p:nvPr/>
         </p:nvSpPr>
@@ -11764,7 +12739,7 @@
       </p:sp>
       <p:sp>
         <p:nvSpPr>
-          <p:cNvPr id="311" name=""/>
+          <p:cNvPr id="320" name=""/>
           <p:cNvSpPr/>
           <p:nvPr/>
         </p:nvSpPr>
@@ -11790,7 +12765,7 @@
       </p:sp>
       <p:sp>
         <p:nvSpPr>
-          <p:cNvPr id="312" name=""/>
+          <p:cNvPr id="321" name=""/>
           <p:cNvSpPr/>
           <p:nvPr/>
         </p:nvSpPr>
@@ -11830,7 +12805,7 @@
       </p:sp>
       <p:sp>
         <p:nvSpPr>
-          <p:cNvPr id="313" name="" descr="{&quot;isTemplate&quot;:true,&quot;type&quot;:&quot;text&quot;}"/>
+          <p:cNvPr id="322" name="" descr="{&quot;isTemplate&quot;:true,&quot;type&quot;:&quot;text&quot;}"/>
           <p:cNvSpPr txBox="1"/>
           <p:nvPr/>
         </p:nvSpPr>
@@ -11865,7 +12840,7 @@
       </p:sp>
       <p:sp>
         <p:nvSpPr>
-          <p:cNvPr id="314" name="" descr="{&quot;isTemplate&quot;:true,&quot;type&quot;:&quot;text&quot;}"/>
+          <p:cNvPr id="323" name="" descr="{&quot;isTemplate&quot;:true,&quot;type&quot;:&quot;text&quot;}"/>
           <p:cNvSpPr txBox="1"/>
           <p:nvPr/>
         </p:nvSpPr>
@@ -11900,7 +12875,7 @@
       </p:sp>
       <p:sp>
         <p:nvSpPr>
-          <p:cNvPr id="315" name=""/>
+          <p:cNvPr id="324" name=""/>
           <p:cNvSpPr/>
           <p:nvPr/>
         </p:nvSpPr>
@@ -11935,7 +12910,7 @@
       </p:sp>
       <p:sp>
         <p:nvSpPr>
-          <p:cNvPr id="316" name="" descr="{&quot;isTemplate&quot;:true,&quot;type&quot;:&quot;text&quot;}"/>
+          <p:cNvPr id="325" name="" descr="{&quot;isTemplate&quot;:true,&quot;type&quot;:&quot;text&quot;}"/>
           <p:cNvSpPr txBox="1"/>
           <p:nvPr/>
         </p:nvSpPr>
@@ -11959,8 +12934,8 @@
                 <a:solidFill>
                   <a:srgbClr val="22C55E"/>
                 </a:solidFill>
-                <a:latin typeface="JetBrains Mono"/>
-                <a:ea typeface="JetBrains Mono"/>
+                <a:latin typeface="Consolas"/>
+                <a:ea typeface="Consolas"/>
               </a:rPr>
               <a:t>12 / 12</a:t>
             </a:r>
@@ -11970,7 +12945,7 @@
       </p:sp>
       <p:sp>
         <p:nvSpPr>
-          <p:cNvPr id="317" name="" descr="{&quot;isTemplate&quot;:true,&quot;type&quot;:&quot;text&quot;}"/>
+          <p:cNvPr id="326" name="" descr="{&quot;isTemplate&quot;:true,&quot;type&quot;:&quot;text&quot;}"/>
           <p:cNvSpPr txBox="1"/>
           <p:nvPr/>
         </p:nvSpPr>
@@ -12005,7 +12980,7 @@
       </p:sp>
       <p:sp>
         <p:nvSpPr>
-          <p:cNvPr id="318" name="" descr="{&quot;isTemplate&quot;:true,&quot;type&quot;:&quot;text&quot;}"/>
+          <p:cNvPr id="327" name="" descr="{&quot;isTemplate&quot;:true,&quot;type&quot;:&quot;text&quot;}"/>
           <p:cNvSpPr txBox="1"/>
           <p:nvPr/>
         </p:nvSpPr>
@@ -12042,7 +13017,7 @@
       </p:sp>
       <p:sp>
         <p:nvSpPr>
-          <p:cNvPr id="319" name=""/>
+          <p:cNvPr id="328" name=""/>
           <p:cNvSpPr/>
           <p:nvPr/>
         </p:nvSpPr>
@@ -12077,7 +13052,7 @@
       </p:sp>
       <p:sp>
         <p:nvSpPr>
-          <p:cNvPr id="320" name="" descr="{&quot;isTemplate&quot;:true,&quot;type&quot;:&quot;text&quot;}"/>
+          <p:cNvPr id="329" name="" descr="{&quot;isTemplate&quot;:true,&quot;type&quot;:&quot;text&quot;}"/>
           <p:cNvSpPr txBox="1"/>
           <p:nvPr/>
         </p:nvSpPr>
@@ -12101,8 +13076,8 @@
                 <a:solidFill>
                   <a:srgbClr val="F59E0B"/>
                 </a:solidFill>
-                <a:latin typeface="JetBrains Mono"/>
-                <a:ea typeface="JetBrains Mono"/>
+                <a:latin typeface="Consolas"/>
+                <a:ea typeface="Consolas"/>
               </a:rPr>
               <a:t>8 / 8</a:t>
             </a:r>
@@ -12112,7 +13087,7 @@
       </p:sp>
       <p:sp>
         <p:nvSpPr>
-          <p:cNvPr id="321" name="" descr="{&quot;isTemplate&quot;:true,&quot;type&quot;:&quot;text&quot;}"/>
+          <p:cNvPr id="330" name="" descr="{&quot;isTemplate&quot;:true,&quot;type&quot;:&quot;text&quot;}"/>
           <p:cNvSpPr txBox="1"/>
           <p:nvPr/>
         </p:nvSpPr>
@@ -12147,7 +13122,7 @@
       </p:sp>
       <p:sp>
         <p:nvSpPr>
-          <p:cNvPr id="322" name="" descr="{&quot;isTemplate&quot;:true,&quot;type&quot;:&quot;text&quot;}"/>
+          <p:cNvPr id="331" name="" descr="{&quot;isTemplate&quot;:true,&quot;type&quot;:&quot;text&quot;}"/>
           <p:cNvSpPr txBox="1"/>
           <p:nvPr/>
         </p:nvSpPr>
@@ -12184,7 +13159,7 @@
       </p:sp>
       <p:sp>
         <p:nvSpPr>
-          <p:cNvPr id="323" name=""/>
+          <p:cNvPr id="332" name=""/>
           <p:cNvSpPr/>
           <p:nvPr/>
         </p:nvSpPr>
@@ -12219,7 +13194,7 @@
       </p:sp>
       <p:sp>
         <p:nvSpPr>
-          <p:cNvPr id="324" name="" descr="{&quot;isTemplate&quot;:true,&quot;type&quot;:&quot;text&quot;}"/>
+          <p:cNvPr id="333" name="" descr="{&quot;isTemplate&quot;:true,&quot;type&quot;:&quot;text&quot;}"/>
           <p:cNvSpPr txBox="1"/>
           <p:nvPr/>
         </p:nvSpPr>
@@ -12243,8 +13218,8 @@
                 <a:solidFill>
                   <a:srgbClr val="D1D5DB"/>
                 </a:solidFill>
-                <a:latin typeface="JetBrains Mono"/>
-                <a:ea typeface="JetBrains Mono"/>
+                <a:latin typeface="Consolas"/>
+                <a:ea typeface="Consolas"/>
               </a:rPr>
               <a:t>0%</a:t>
             </a:r>
@@ -12254,7 +13229,7 @@
       </p:sp>
       <p:sp>
         <p:nvSpPr>
-          <p:cNvPr id="325" name="" descr="{&quot;isTemplate&quot;:true,&quot;type&quot;:&quot;text&quot;}"/>
+          <p:cNvPr id="334" name="" descr="{&quot;isTemplate&quot;:true,&quot;type&quot;:&quot;text&quot;}"/>
           <p:cNvSpPr txBox="1"/>
           <p:nvPr/>
         </p:nvSpPr>
@@ -12289,7 +13264,7 @@
       </p:sp>
       <p:sp>
         <p:nvSpPr>
-          <p:cNvPr id="326" name="" descr="{&quot;isTemplate&quot;:true,&quot;type&quot;:&quot;text&quot;}"/>
+          <p:cNvPr id="335" name="" descr="{&quot;isTemplate&quot;:true,&quot;type&quot;:&quot;text&quot;}"/>
           <p:cNvSpPr txBox="1"/>
           <p:nvPr/>
         </p:nvSpPr>
@@ -12324,6 +13299,7 @@
       </p:sp>
     </p:spTree>
   </p:cSld>
+  <p:extLst/>
 </p:sld>
 </file>
 
@@ -12332,7 +13308,7 @@
   <p:cSld>
     <p:spTree>
       <p:nvGrpSpPr>
-        <p:cNvPr id="327" name="" descr="&lt;Slide style={{ background: &quot;#0B1220&quot;, padding: &quot;44px 72px&quot;, display: &quot;flex&quot;, flexDirection: &quot;column&quot; }}&gt;&#10;  &lt;Text style={{ color: &quot;#6B7280&quot;, fontSize: 14, letterSpacing: 3 }}&gt;核心能力&lt;/Text&gt;&#10;  &lt;Text style={{ color: &quot;#F7F4EC&quot;, fontSize: 34, fontWeight: 700, marginTop: 10 }}&gt;意图理解：规则优先，模型兜底&lt;/Text&gt;&#10;&#10;  &lt;Box style={{ display: &quot;flex&quot;, flexDirection: &quot;row&quot;, gap: 36, marginTop: 32 }}&gt;&#10;    &lt;Box style={{ flex: 1.2, display: &quot;flex&quot;, flexDirection: &quot;column&quot;, gap: 14 }}&gt;&#10;      &lt;Box style={{ background: &quot;rgba(34,197,94,0.08)&quot;, border: &quot;1px solid rgba(34,197,94,0.4)&quot;, borderRadius: 12, padding: &quot;22px 22px&quot; }}&gt;&#10;        &lt;Text style={{ color: &quot;#22C55E&quot;, fontSize: 20, fontWeight: 700 }}&gt;第一层　规则匹配&lt;/Text&gt;&#10;        &lt;Text style={{ color: &quot;#9CA3AF&quot;, fontSize: 16, lineHeight: 1.65, marginTop: 8 }}&gt;十一条意图规则覆盖六类常见表述，一条规则可派生多个工具意图。中英文数字金额一并归一，单轮解析耗时一毫秒内，结果确定可复现。&lt;/Text&gt;&#10;        &lt;Text style={{ color: &quot;#6B7280&quot;, fontSize: 15, marginTop: 12 }}&gt;「转给小王 500」「给房东下周转 3000 房租」都能直接落到工具与槽位。&lt;/Text&gt;&#10;      &lt;/Box&gt;&#10;      &lt;Box style={{ background: &quot;rgba(59,130,246,0.08)&quot;, border: &quot;1px solid rgba(59,130,246,0.4)&quot;, borderRadius: 12, padding: &quot;22px 22px&quot; }}&gt;&#10;        &lt;Text style={{ color: &quot;#93C5FD&quot;, fontSize: 20, fontWeight: 700 }}&gt;第二层　模型兜底&lt;/Text&gt;&#10;        &lt;Text style={{ color: &quot;#9CA3AF&quot;, fontSize: 16, lineHeight: 1.75, marginTop: 10 }}&gt;规则没命中才请模型解析，输出受契约约束：工具名、槽位、置信度、理由。越界工具名或非法槽位值直接丢弃。&lt;/Text&gt;&#10;        &lt;Text style={{ color: &quot;#6B7280&quot;, fontSize: 15, marginTop: 12 }}&gt;响应零点六至零点九秒，失败时回落到追问，不猜。&lt;/Text&gt;&#10;      &lt;/Box&gt;&#10;      &lt;Box style={{ background: &quot;rgba(107,114,128,0.12)&quot;, border: &quot;1px solid rgba(107,114,128,0.4)&quot;, borderRadius: 12, padding: &quot;22px 22px&quot; }}&gt;&#10;        &lt;Text style={{ color: &quot;#D1D5DB&quot;, fontSize: 20, fontWeight: 700 }}&gt;第三层　缺槽追问&lt;/Text&gt;&#10;        &lt;Text style={{ color: &quot;#9CA3AF&quot;, fontSize: 16, lineHeight: 1.75, marginTop: 10 }}&gt;槽位不全不执行。少金额就问金额，少收款人就问收款人，追问结果回填后重走判定流程。&lt;/Text&gt;&#10;        &lt;Text style={{ color: &quot;#6B7280&quot;, fontSize: 15, marginTop: 12 }}&gt;体验官只提建议，不改判定，问句由编排层统一生成。&lt;/Text&gt;&#10;      &lt;/Box&gt;&#10;    &lt;/Box&gt;&#10;&#10;    &lt;Box style={{ flex: 1, background: &quot;rgba(11,18,32,0.6)&quot;, border: &quot;1px solid #374151&quot;, borderRadius: 12, padding: &quot;22px 22px&quot;, display: &quot;flex&quot;, flexDirection: &quot;column&quot; }}&gt;&#10;      &lt;Text style={{ color: &quot;#6B7280&quot;, fontSize: 14, letterSpacing: 2 }}&gt;一次解析的输出&lt;/Text&gt;&#10;      &lt;Text style={{ color: &quot;#22C55E&quot;, fontSize: 15, marginTop: 16, fontFamily: &quot;JetBrains Mono, monospace&quot; }}&gt;意图：智能转账&lt;/Text&gt;&#10;      &lt;Text style={{ color: &quot;#F59E0B&quot;, fontSize: 15, marginTop: 8, fontFamily: &quot;JetBrains Mono, monospace&quot; }}&gt;工具：transfer&lt;/Text&gt;&#10;      &lt;Text style={{ color: &quot;#93C5FD&quot;, fontSize: 15, marginTop: 8, fontFamily: &quot;JetBrains Mono, monospace&quot; }}&gt;收款人：小王&lt;/Text&gt;&#10;      &lt;Text style={{ color: &quot;#F7F4EC&quot;, fontSize: 15, marginTop: 8, fontFamily: &quot;JetBrains Mono, monospace&quot; }}&gt;金额：50000 分&lt;/Text&gt;&#10;      &lt;Text style={{ color: &quot;#9CA3AF&quot;, fontSize: 15, marginTop: 8, fontFamily: &quot;JetBrains Mono, monospace&quot; }}&gt;置信度：0.96&lt;/Text&gt;&#10;      &lt;Text style={{ color: &quot;#6B7280&quot;, fontSize: 15, marginTop: 8, fontFamily: &quot;JetBrains Mono, monospace&quot; }}&gt;理由：出现「转给」与金额&lt;/Text&gt;&#10;      &lt;Text style={{ color: &quot;#6B7280&quot;, fontSize: 14, lineHeight: 1.75, marginTop: 18 }}&gt;金额一律用整数分存储，避免浮点误差。理由与置信度一起落审计，出错时能回看是哪一步判的。&lt;/Text&gt;&#10;      &lt;Box style={{ borderTop: &quot;1px solid #243044&quot;, marginTop: 16, paddingTop: 14, display: &quot;flex&quot;, flexDirection: &quot;column&quot;, gap: 8 }}&gt;&#10;        &lt;Text style={{ color: &quot;#D1D5DB&quot;, fontSize: 14, lineHeight: 1.6 }}&gt;槽位缺失时输出 missing 列表，编排层据此追问。&lt;/Text&gt;&#10;        &lt;Text style={{ color: &quot;#D1D5DB&quot;, fontSize: 14, lineHeight: 1.6 }}&gt;置信度低于阈值时同样走追问，不猜金额。&lt;/Text&gt;&#10;        &lt;Text style={{ color: &quot;#D1D5DB&quot;, fontSize: 14, lineHeight: 1.6 }}&gt;每次解析的耗时与来源一并记录，便于对比规则与模型的表现。&lt;/Text&gt;&#10;      &lt;/Box&gt;&#10;    &lt;/Box&gt;&#10;  &lt;/Box&gt;&#10;&lt;/Slide&gt;&#10;"/>
+        <p:cNvPr id="336" name="" descr="&lt;Slide style={{ background: &quot;#0B1220&quot;, padding: &quot;44px 72px&quot;, display: &quot;flex&quot;, flexDirection: &quot;column&quot; }}&gt;&#10;  &lt;Text style={{ color: &quot;#6B7280&quot;, fontSize: 14, letterSpacing: 3 }}&gt;核心能力&lt;/Text&gt;&#10;  &lt;Text style={{ color: &quot;#F7F4EC&quot;, fontSize: 34, fontWeight: 700, marginTop: 10 }}&gt;意图理解：规则优先，模型兜底&lt;/Text&gt;&#10;&#10;  &lt;Box style={{ display: &quot;flex&quot;, flexDirection: &quot;row&quot;, gap: 36, marginTop: 32 }}&gt;&#10;    &lt;Box style={{ flex: 1.2, display: &quot;flex&quot;, flexDirection: &quot;column&quot;, gap: 14 }}&gt;&#10;      &lt;Box style={{ background: &quot;rgba(34,197,94,0.08)&quot;, border: &quot;1px solid rgba(34,197,94,0.4)&quot;, borderRadius: 12, padding: &quot;22px 22px&quot; }}&gt;&#10;        &lt;Text style={{ color: &quot;#22C55E&quot;, fontSize: 20, fontWeight: 700 }}&gt;第一层　规则匹配&lt;/Text&gt;&#10;        &lt;Text style={{ color: &quot;#9CA3AF&quot;, fontSize: 16, lineHeight: 1.65, marginTop: 8 }}&gt;十一条意图规则覆盖六类常见表述，一条规则可派生多个工具意图。中英文数字金额一并归一，单轮解析耗时一毫秒内，结果确定可复现。&lt;/Text&gt;&#10;        &lt;Text style={{ color: &quot;#6B7280&quot;, fontSize: 15, marginTop: 12 }}&gt;「转给小王 500」「给房东下周转 3000 房租」都能直接落到工具与槽位。&lt;/Text&gt;&#10;      &lt;/Box&gt;&#10;      &lt;Box style={{ background: &quot;rgba(59,130,246,0.08)&quot;, border: &quot;1px solid rgba(59,130,246,0.4)&quot;, borderRadius: 12, padding: &quot;22px 22px&quot; }}&gt;&#10;        &lt;Text style={{ color: &quot;#93C5FD&quot;, fontSize: 20, fontWeight: 700 }}&gt;第二层　模型兜底&lt;/Text&gt;&#10;        &lt;Text style={{ color: &quot;#9CA3AF&quot;, fontSize: 16, lineHeight: 1.75, marginTop: 10 }}&gt;规则没命中才请模型解析，输出受契约约束：工具名、槽位、置信度、理由。越界工具名或非法槽位值直接丢弃。&lt;/Text&gt;&#10;        &lt;Text style={{ color: &quot;#6B7280&quot;, fontSize: 15, marginTop: 12 }}&gt;响应零点六至零点九秒，失败时回落到追问，不猜。&lt;/Text&gt;&#10;      &lt;/Box&gt;&#10;      &lt;Box style={{ background: &quot;rgba(107,114,128,0.12)&quot;, border: &quot;1px solid rgba(107,114,128,0.4)&quot;, borderRadius: 12, padding: &quot;22px 22px&quot; }}&gt;&#10;        &lt;Text style={{ color: &quot;#D1D5DB&quot;, fontSize: 20, fontWeight: 700 }}&gt;第三层　缺槽追问&lt;/Text&gt;&#10;        &lt;Text style={{ color: &quot;#9CA3AF&quot;, fontSize: 16, lineHeight: 1.75, marginTop: 10 }}&gt;槽位不全不执行。少金额就问金额，少收款人就问收款人，追问结果回填后重走判定流程。&lt;/Text&gt;&#10;        &lt;Text style={{ color: &quot;#6B7280&quot;, fontSize: 15, marginTop: 12 }}&gt;体验官只提建议，不改判定，问句由编排层统一生成。&lt;/Text&gt;&#10;      &lt;/Box&gt;&#10;    &lt;/Box&gt;&#10;&#10;    &lt;Box style={{ flex: 1, background: &quot;rgba(11,18,32,0.6)&quot;, border: &quot;1px solid #374151&quot;, borderRadius: 12, padding: &quot;22px 22px&quot;, display: &quot;flex&quot;, flexDirection: &quot;column&quot; }}&gt;&#10;      &lt;Text style={{ color: &quot;#6B7280&quot;, fontSize: 14, letterSpacing: 2 }}&gt;一次解析的输出&lt;/Text&gt;&#10;      &lt;Text style={{ color: &quot;#22C55E&quot;, fontSize: 15, marginTop: 16, fontFamily: &quot;Consolas, monospace&quot; }}&gt;意图：智能转账&lt;/Text&gt;&#10;      &lt;Text style={{ color: &quot;#F59E0B&quot;, fontSize: 15, marginTop: 8, fontFamily: &quot;Consolas, monospace&quot; }}&gt;工具：transfer&lt;/Text&gt;&#10;      &lt;Text style={{ color: &quot;#93C5FD&quot;, fontSize: 15, marginTop: 8, fontFamily: &quot;Consolas, monospace&quot; }}&gt;收款人：小王&lt;/Text&gt;&#10;      &lt;Text style={{ color: &quot;#F7F4EC&quot;, fontSize: 15, marginTop: 8, fontFamily: &quot;Consolas, monospace&quot; }}&gt;金额：50000 分&lt;/Text&gt;&#10;      &lt;Text style={{ color: &quot;#9CA3AF&quot;, fontSize: 15, marginTop: 8, fontFamily: &quot;Consolas, monospace&quot; }}&gt;置信度：0.96&lt;/Text&gt;&#10;      &lt;Text style={{ color: &quot;#6B7280&quot;, fontSize: 15, marginTop: 8, fontFamily: &quot;Consolas, monospace&quot; }}&gt;理由：出现「转给」与金额&lt;/Text&gt;&#10;      &lt;Text style={{ color: &quot;#6B7280&quot;, fontSize: 14, lineHeight: 1.75, marginTop: 18 }}&gt;金额一律用整数分存储，避免浮点误差。理由与置信度一起落审计，出错时能回看是哪一步判的。&lt;/Text&gt;&#10;      &lt;Box style={{ borderTop: &quot;1px solid #243044&quot;, marginTop: 16, paddingTop: 14, display: &quot;flex&quot;, flexDirection: &quot;column&quot;, gap: 8 }}&gt;&#10;        &lt;Text style={{ color: &quot;#D1D5DB&quot;, fontSize: 14, lineHeight: 1.6 }}&gt;槽位缺失时输出 missing 列表，编排层据此追问。&lt;/Text&gt;&#10;        &lt;Text style={{ color: &quot;#D1D5DB&quot;, fontSize: 14, lineHeight: 1.6 }}&gt;置信度低于阈值时同样走追问，不猜金额。&lt;/Text&gt;&#10;        &lt;Text style={{ color: &quot;#D1D5DB&quot;, fontSize: 14, lineHeight: 1.6 }}&gt;每次解析的耗时与来源一并记录，便于对比规则与模型的表现。&lt;/Text&gt;&#10;      &lt;/Box&gt;&#10;    &lt;/Box&gt;&#10;  &lt;/Box&gt;&#10;&lt;/Slide&gt;&#10;"/>
         <p:cNvGrpSpPr/>
         <p:nvPr/>
       </p:nvGrpSpPr>
@@ -12346,7 +13322,7 @@
       </p:grpSpPr>
       <p:sp>
         <p:nvSpPr>
-          <p:cNvPr id="328" name=""/>
+          <p:cNvPr id="337" name=""/>
           <p:cNvSpPr/>
           <p:nvPr/>
         </p:nvSpPr>
@@ -12370,7 +13346,7 @@
       </p:sp>
       <p:sp>
         <p:nvSpPr>
-          <p:cNvPr id="329" name="" descr="{&quot;isTemplate&quot;:true,&quot;type&quot;:&quot;text&quot;}"/>
+          <p:cNvPr id="338" name="" descr="{&quot;isTemplate&quot;:true,&quot;type&quot;:&quot;text&quot;}"/>
           <p:cNvSpPr txBox="1"/>
           <p:nvPr/>
         </p:nvSpPr>
@@ -12405,7 +13381,7 @@
       </p:sp>
       <p:sp>
         <p:nvSpPr>
-          <p:cNvPr id="330" name="" descr="{&quot;isTemplate&quot;:true,&quot;type&quot;:&quot;text&quot;}"/>
+          <p:cNvPr id="339" name="" descr="{&quot;isTemplate&quot;:true,&quot;type&quot;:&quot;text&quot;}"/>
           <p:cNvSpPr txBox="1"/>
           <p:nvPr/>
         </p:nvSpPr>
@@ -12440,7 +13416,7 @@
       </p:sp>
       <p:sp>
         <p:nvSpPr>
-          <p:cNvPr id="331" name=""/>
+          <p:cNvPr id="340" name=""/>
           <p:cNvSpPr/>
           <p:nvPr/>
         </p:nvSpPr>
@@ -12475,7 +13451,7 @@
       </p:sp>
       <p:sp>
         <p:nvSpPr>
-          <p:cNvPr id="332" name="" descr="{&quot;isTemplate&quot;:true,&quot;type&quot;:&quot;text&quot;}"/>
+          <p:cNvPr id="341" name="" descr="{&quot;isTemplate&quot;:true,&quot;type&quot;:&quot;text&quot;}"/>
           <p:cNvSpPr txBox="1"/>
           <p:nvPr/>
         </p:nvSpPr>
@@ -12510,7 +13486,7 @@
       </p:sp>
       <p:sp>
         <p:nvSpPr>
-          <p:cNvPr id="333" name="" descr="{&quot;isTemplate&quot;:true,&quot;type&quot;:&quot;text&quot;}"/>
+          <p:cNvPr id="342" name="" descr="{&quot;isTemplate&quot;:true,&quot;type&quot;:&quot;text&quot;}"/>
           <p:cNvSpPr txBox="1"/>
           <p:nvPr/>
         </p:nvSpPr>
@@ -12547,7 +13523,7 @@
       </p:sp>
       <p:sp>
         <p:nvSpPr>
-          <p:cNvPr id="334" name="" descr="{&quot;isTemplate&quot;:true,&quot;type&quot;:&quot;text&quot;}"/>
+          <p:cNvPr id="343" name="" descr="{&quot;isTemplate&quot;:true,&quot;type&quot;:&quot;text&quot;}"/>
           <p:cNvSpPr txBox="1"/>
           <p:nvPr/>
         </p:nvSpPr>
@@ -12622,7 +13598,7 @@
       </p:sp>
       <p:sp>
         <p:nvSpPr>
-          <p:cNvPr id="335" name=""/>
+          <p:cNvPr id="344" name=""/>
           <p:cNvSpPr/>
           <p:nvPr/>
         </p:nvSpPr>
@@ -12657,7 +13633,7 @@
       </p:sp>
       <p:sp>
         <p:nvSpPr>
-          <p:cNvPr id="336" name="" descr="{&quot;isTemplate&quot;:true,&quot;type&quot;:&quot;text&quot;}"/>
+          <p:cNvPr id="345" name="" descr="{&quot;isTemplate&quot;:true,&quot;type&quot;:&quot;text&quot;}"/>
           <p:cNvSpPr txBox="1"/>
           <p:nvPr/>
         </p:nvSpPr>
@@ -12692,7 +13668,7 @@
       </p:sp>
       <p:sp>
         <p:nvSpPr>
-          <p:cNvPr id="337" name="" descr="{&quot;isTemplate&quot;:true,&quot;type&quot;:&quot;text&quot;}"/>
+          <p:cNvPr id="346" name="" descr="{&quot;isTemplate&quot;:true,&quot;type&quot;:&quot;text&quot;}"/>
           <p:cNvSpPr txBox="1"/>
           <p:nvPr/>
         </p:nvSpPr>
@@ -12729,7 +13705,7 @@
       </p:sp>
       <p:sp>
         <p:nvSpPr>
-          <p:cNvPr id="338" name="" descr="{&quot;isTemplate&quot;:true,&quot;type&quot;:&quot;text&quot;}"/>
+          <p:cNvPr id="347" name="" descr="{&quot;isTemplate&quot;:true,&quot;type&quot;:&quot;text&quot;}"/>
           <p:cNvSpPr txBox="1"/>
           <p:nvPr/>
         </p:nvSpPr>
@@ -12764,7 +13740,7 @@
       </p:sp>
       <p:sp>
         <p:nvSpPr>
-          <p:cNvPr id="339" name=""/>
+          <p:cNvPr id="348" name=""/>
           <p:cNvSpPr/>
           <p:nvPr/>
         </p:nvSpPr>
@@ -12799,7 +13775,7 @@
       </p:sp>
       <p:sp>
         <p:nvSpPr>
-          <p:cNvPr id="340" name="" descr="{&quot;isTemplate&quot;:true,&quot;type&quot;:&quot;text&quot;}"/>
+          <p:cNvPr id="349" name="" descr="{&quot;isTemplate&quot;:true,&quot;type&quot;:&quot;text&quot;}"/>
           <p:cNvSpPr txBox="1"/>
           <p:nvPr/>
         </p:nvSpPr>
@@ -12834,7 +13810,7 @@
       </p:sp>
       <p:sp>
         <p:nvSpPr>
-          <p:cNvPr id="341" name="" descr="{&quot;isTemplate&quot;:true,&quot;type&quot;:&quot;text&quot;}"/>
+          <p:cNvPr id="350" name="" descr="{&quot;isTemplate&quot;:true,&quot;type&quot;:&quot;text&quot;}"/>
           <p:cNvSpPr txBox="1"/>
           <p:nvPr/>
         </p:nvSpPr>
@@ -12871,7 +13847,7 @@
       </p:sp>
       <p:sp>
         <p:nvSpPr>
-          <p:cNvPr id="342" name="" descr="{&quot;isTemplate&quot;:true,&quot;type&quot;:&quot;text&quot;}"/>
+          <p:cNvPr id="351" name="" descr="{&quot;isTemplate&quot;:true,&quot;type&quot;:&quot;text&quot;}"/>
           <p:cNvSpPr txBox="1"/>
           <p:nvPr/>
         </p:nvSpPr>
@@ -12906,7 +13882,7 @@
       </p:sp>
       <p:sp>
         <p:nvSpPr>
-          <p:cNvPr id="343" name=""/>
+          <p:cNvPr id="352" name=""/>
           <p:cNvSpPr/>
           <p:nvPr/>
         </p:nvSpPr>
@@ -12939,7 +13915,7 @@
       </p:sp>
       <p:sp>
         <p:nvSpPr>
-          <p:cNvPr id="344" name="" descr="{&quot;isTemplate&quot;:true,&quot;type&quot;:&quot;text&quot;}"/>
+          <p:cNvPr id="353" name="" descr="{&quot;isTemplate&quot;:true,&quot;type&quot;:&quot;text&quot;}"/>
           <p:cNvSpPr txBox="1"/>
           <p:nvPr/>
         </p:nvSpPr>
@@ -12974,7 +13950,7 @@
       </p:sp>
       <p:sp>
         <p:nvSpPr>
-          <p:cNvPr id="345" name="" descr="{&quot;isTemplate&quot;:true,&quot;type&quot;:&quot;text&quot;}"/>
+          <p:cNvPr id="354" name="" descr="{&quot;isTemplate&quot;:true,&quot;type&quot;:&quot;text&quot;}"/>
           <p:cNvSpPr txBox="1"/>
           <p:nvPr/>
         </p:nvSpPr>
@@ -12998,8 +13974,8 @@
                 <a:solidFill>
                   <a:srgbClr val="22C55E"/>
                 </a:solidFill>
-                <a:latin typeface="JetBrains Mono"/>
-                <a:ea typeface="JetBrains Mono"/>
+                <a:latin typeface="Consolas"/>
+                <a:ea typeface="Consolas"/>
               </a:rPr>
               <a:t>意图：智能转账</a:t>
             </a:r>
@@ -13009,7 +13985,7 @@
       </p:sp>
       <p:sp>
         <p:nvSpPr>
-          <p:cNvPr id="346" name="" descr="{&quot;isTemplate&quot;:true,&quot;type&quot;:&quot;text&quot;}"/>
+          <p:cNvPr id="355" name="" descr="{&quot;isTemplate&quot;:true,&quot;type&quot;:&quot;text&quot;}"/>
           <p:cNvSpPr txBox="1"/>
           <p:nvPr/>
         </p:nvSpPr>
@@ -13033,8 +14009,8 @@
                 <a:solidFill>
                   <a:srgbClr val="F59E0B"/>
                 </a:solidFill>
-                <a:latin typeface="JetBrains Mono"/>
-                <a:ea typeface="JetBrains Mono"/>
+                <a:latin typeface="Consolas"/>
+                <a:ea typeface="Consolas"/>
               </a:rPr>
               <a:t>工具：</a:t>
             </a:r>
@@ -13043,8 +14019,8 @@
                 <a:solidFill>
                   <a:srgbClr val="F59E0B"/>
                 </a:solidFill>
-                <a:latin typeface="JetBrains Mono"/>
-                <a:ea typeface="JetBrains Mono"/>
+                <a:latin typeface="Consolas"/>
+                <a:ea typeface="Consolas"/>
               </a:rPr>
               <a:t>transfer</a:t>
             </a:r>
@@ -13054,7 +14030,7 @@
       </p:sp>
       <p:sp>
         <p:nvSpPr>
-          <p:cNvPr id="347" name="" descr="{&quot;isTemplate&quot;:true,&quot;type&quot;:&quot;text&quot;}"/>
+          <p:cNvPr id="356" name="" descr="{&quot;isTemplate&quot;:true,&quot;type&quot;:&quot;text&quot;}"/>
           <p:cNvSpPr txBox="1"/>
           <p:nvPr/>
         </p:nvSpPr>
@@ -13078,8 +14054,8 @@
                 <a:solidFill>
                   <a:srgbClr val="93C5FD"/>
                 </a:solidFill>
-                <a:latin typeface="JetBrains Mono"/>
-                <a:ea typeface="JetBrains Mono"/>
+                <a:latin typeface="Consolas"/>
+                <a:ea typeface="Consolas"/>
               </a:rPr>
               <a:t>收款人：小王</a:t>
             </a:r>
@@ -13089,7 +14065,7 @@
       </p:sp>
       <p:sp>
         <p:nvSpPr>
-          <p:cNvPr id="348" name="" descr="{&quot;isTemplate&quot;:true,&quot;type&quot;:&quot;text&quot;}"/>
+          <p:cNvPr id="357" name="" descr="{&quot;isTemplate&quot;:true,&quot;type&quot;:&quot;text&quot;}"/>
           <p:cNvSpPr txBox="1"/>
           <p:nvPr/>
         </p:nvSpPr>
@@ -13113,8 +14089,8 @@
                 <a:solidFill>
                   <a:srgbClr val="F7F4EC"/>
                 </a:solidFill>
-                <a:latin typeface="JetBrains Mono"/>
-                <a:ea typeface="JetBrains Mono"/>
+                <a:latin typeface="Consolas"/>
+                <a:ea typeface="Consolas"/>
               </a:rPr>
               <a:t>金额：</a:t>
             </a:r>
@@ -13123,8 +14099,8 @@
                 <a:solidFill>
                   <a:srgbClr val="F7F4EC"/>
                 </a:solidFill>
-                <a:latin typeface="JetBrains Mono"/>
-                <a:ea typeface="JetBrains Mono"/>
+                <a:latin typeface="Consolas"/>
+                <a:ea typeface="Consolas"/>
               </a:rPr>
               <a:t xml:space="preserve">50000 </a:t>
             </a:r>
@@ -13133,8 +14109,8 @@
                 <a:solidFill>
                   <a:srgbClr val="F7F4EC"/>
                 </a:solidFill>
-                <a:latin typeface="JetBrains Mono"/>
-                <a:ea typeface="JetBrains Mono"/>
+                <a:latin typeface="Consolas"/>
+                <a:ea typeface="Consolas"/>
               </a:rPr>
               <a:t>分</a:t>
             </a:r>
@@ -13144,7 +14120,7 @@
       </p:sp>
       <p:sp>
         <p:nvSpPr>
-          <p:cNvPr id="349" name="" descr="{&quot;isTemplate&quot;:true,&quot;type&quot;:&quot;text&quot;}"/>
+          <p:cNvPr id="358" name="" descr="{&quot;isTemplate&quot;:true,&quot;type&quot;:&quot;text&quot;}"/>
           <p:cNvSpPr txBox="1"/>
           <p:nvPr/>
         </p:nvSpPr>
@@ -13168,8 +14144,8 @@
                 <a:solidFill>
                   <a:srgbClr val="9CA3AF"/>
                 </a:solidFill>
-                <a:latin typeface="JetBrains Mono"/>
-                <a:ea typeface="JetBrains Mono"/>
+                <a:latin typeface="Consolas"/>
+                <a:ea typeface="Consolas"/>
               </a:rPr>
               <a:t>置信度：</a:t>
             </a:r>
@@ -13178,8 +14154,8 @@
                 <a:solidFill>
                   <a:srgbClr val="9CA3AF"/>
                 </a:solidFill>
-                <a:latin typeface="JetBrains Mono"/>
-                <a:ea typeface="JetBrains Mono"/>
+                <a:latin typeface="Consolas"/>
+                <a:ea typeface="Consolas"/>
               </a:rPr>
               <a:t>0.96</a:t>
             </a:r>
@@ -13189,7 +14165,7 @@
       </p:sp>
       <p:sp>
         <p:nvSpPr>
-          <p:cNvPr id="350" name="" descr="{&quot;isTemplate&quot;:true,&quot;type&quot;:&quot;text&quot;}"/>
+          <p:cNvPr id="359" name="" descr="{&quot;isTemplate&quot;:true,&quot;type&quot;:&quot;text&quot;}"/>
           <p:cNvSpPr txBox="1"/>
           <p:nvPr/>
         </p:nvSpPr>
@@ -13213,8 +14189,8 @@
                 <a:solidFill>
                   <a:srgbClr val="6B7280"/>
                 </a:solidFill>
-                <a:latin typeface="JetBrains Mono"/>
-                <a:ea typeface="JetBrains Mono"/>
+                <a:latin typeface="Consolas"/>
+                <a:ea typeface="Consolas"/>
               </a:rPr>
               <a:t>理由：出现「转给」与金额</a:t>
             </a:r>
@@ -13224,7 +14200,7 @@
       </p:sp>
       <p:sp>
         <p:nvSpPr>
-          <p:cNvPr id="351" name="" descr="{&quot;isTemplate&quot;:true,&quot;type&quot;:&quot;text&quot;}"/>
+          <p:cNvPr id="360" name="" descr="{&quot;isTemplate&quot;:true,&quot;type&quot;:&quot;text&quot;}"/>
           <p:cNvSpPr txBox="1"/>
           <p:nvPr/>
         </p:nvSpPr>
@@ -13261,7 +14237,7 @@
       </p:sp>
       <p:sp>
         <p:nvSpPr>
-          <p:cNvPr id="352" name=""/>
+          <p:cNvPr id="361" name=""/>
           <p:cNvSpPr/>
           <p:nvPr/>
         </p:nvSpPr>
@@ -13301,7 +14277,7 @@
       </p:sp>
       <p:sp>
         <p:nvSpPr>
-          <p:cNvPr id="353" name="" descr="{&quot;isTemplate&quot;:true,&quot;type&quot;:&quot;text&quot;}"/>
+          <p:cNvPr id="362" name="" descr="{&quot;isTemplate&quot;:true,&quot;type&quot;:&quot;text&quot;}"/>
           <p:cNvSpPr txBox="1"/>
           <p:nvPr/>
         </p:nvSpPr>
@@ -13356,7 +14332,7 @@
       </p:sp>
       <p:sp>
         <p:nvSpPr>
-          <p:cNvPr id="354" name="" descr="{&quot;isTemplate&quot;:true,&quot;type&quot;:&quot;text&quot;}"/>
+          <p:cNvPr id="363" name="" descr="{&quot;isTemplate&quot;:true,&quot;type&quot;:&quot;text&quot;}"/>
           <p:cNvSpPr txBox="1"/>
           <p:nvPr/>
         </p:nvSpPr>
@@ -13391,7 +14367,7 @@
       </p:sp>
       <p:sp>
         <p:nvSpPr>
-          <p:cNvPr id="355" name="" descr="{&quot;isTemplate&quot;:true,&quot;type&quot;:&quot;text&quot;}"/>
+          <p:cNvPr id="364" name="" descr="{&quot;isTemplate&quot;:true,&quot;type&quot;:&quot;text&quot;}"/>
           <p:cNvSpPr txBox="1"/>
           <p:nvPr/>
         </p:nvSpPr>
@@ -13426,6 +14402,7 @@
       </p:sp>
     </p:spTree>
   </p:cSld>
+  <p:extLst/>
 </p:sld>
 </file>
 
@@ -13434,7 +14411,7 @@
   <p:cSld>
     <p:spTree>
       <p:nvGrpSpPr>
-        <p:cNvPr id="356" name="" descr="&lt;Slide style={{ background: &quot;#0B1220&quot;, padding: &quot;44px 72px&quot;, display: &quot;flex&quot;, flexDirection: &quot;column&quot; }}&gt;&#10;  &lt;Text style={{ color: &quot;#6B7280&quot;, fontSize: 14, letterSpacing: 3 }}&gt;可追溯&lt;/Text&gt;&#10;  &lt;Text style={{ color: &quot;#F7F4EC&quot;, fontSize: 34, fontWeight: 700, marginTop: 10 }}&gt;每条结论都带出处，审计链改一条即断&lt;/Text&gt;&#10;&#10;  &lt;Box style={{ display: &quot;flex&quot;, flexDirection: &quot;row&quot;, gap: 36, marginTop: 32 }}&gt;&#10;    &lt;Box style={{ flex: 1.1, display: &quot;flex&quot;, flexDirection: &quot;column&quot;, gap: 12 }}&gt;&#10;      &lt;Text style={{ color: &quot;#F7F4EC&quot;, fontSize: 20, fontWeight: 600 }}&gt;追加式哈希链&lt;/Text&gt;&#10;      &lt;Box style={{ background: &quot;rgba(59,130,246,0.08)&quot;, border: &quot;1px solid rgba(59,130,246,0.35)&quot;, borderRadius: 12, padding: 22 }}&gt;&#10;        &lt;Text style={{ color: &quot;#93C5FD&quot;, fontSize: 15, fontFamily: &quot;JetBrains Mono, monospace&quot; }}&gt;hash₁ = SHA256(GENESIS + 内容₁)&lt;/Text&gt;&#10;        &lt;Text style={{ color: &quot;#93C5FD&quot;, fontSize: 15, fontFamily: &quot;JetBrains Mono, monospace&quot;, marginTop: 8 }}&gt;hash₂ = SHA256(hash₁ + 内容₂)&lt;/Text&gt;&#10;        &lt;Text style={{ color: &quot;#93C5FD&quot;, fontSize: 15, fontFamily: &quot;JetBrains Mono, monospace&quot;, marginTop: 8 }}&gt;hash₃ = SHA256(hash₂ + 内容₃)&lt;/Text&gt;&#10;      &lt;/Box&gt;&#10;      &lt;Text style={{ color: &quot;#9CA3AF&quot;, fontSize: 16, lineHeight: 1.8 }}&gt;每条记录写入前把上一条的哈希拼进摘要再算哈希。改动中间任意一条，后面全部对不上，篡改无法悄悄通过校验。&lt;/Text&gt;&#10;      &lt;Box style={{ background: &quot;rgba(34,197,94,0.08)&quot;, border: &quot;1px solid rgba(34,197,94,0.35)&quot;, borderRadius: 12, padding: 20 }}&gt;&#10;        &lt;Text style={{ color: &quot;#22C55E&quot;, fontSize: 17, fontWeight: 600 }}&gt;实测：改首行后校验失败&lt;/Text&gt;&#10;        &lt;Text style={{ color: &quot;#9CA3AF&quot;, fontSize: 15, lineHeight: 1.7, marginTop: 8 }}&gt;审计查询接口返回的 chain.ok 字段在校验通过时为真，人工改写一条记录后立刻为假。&lt;/Text&gt;&#10;      &lt;/Box&gt;&#10;      &lt;Box style={{ background: &quot;rgba(59,130,246,0.08)&quot;, border: &quot;1px solid rgba(59,130,246,0.35)&quot;, borderRadius: 12, padding: 20 }}&gt;&#10;        &lt;Text style={{ color: &quot;#93C5FD&quot;, fontSize: 17, fontWeight: 600 }}&gt;只追加，不改写&lt;/Text&gt;&#10;        &lt;Text style={{ color: &quot;#9CA3AF&quot;, fontSize: 15, lineHeight: 1.7, marginTop: 8 }}&gt;审计记录只追加不覆盖，历史条目不可编辑。序号从一开始递增，可据此确认没有丢条。&lt;/Text&gt;&#10;      &lt;/Box&gt;&#10;    &lt;/Box&gt;&#10;&#10;    &lt;Box style={{ flex: 1, display: &quot;flex&quot;, flexDirection: &quot;column&quot;, gap: 12 }}&gt;&#10;      &lt;Text style={{ color: &quot;#F7F4EC&quot;, fontSize: 20, fontWeight: 600 }}&gt;一条记录里有什么&lt;/Text&gt;&#10;      &lt;Box style={{ background: &quot;rgba(107,114,128,0.10)&quot;, border: &quot;1px solid rgba(107,114,128,0.35)&quot;, borderRadius: 12, padding: 22, display: &quot;flex&quot;, flexDirection: &quot;column&quot;, gap: 10 }}&gt;&#10;        &lt;Text style={{ color: &quot;#D1D5DB&quot;, fontSize: 15 }}&gt;序号与时间戳&lt;/Text&gt;&#10;        &lt;Text style={{ color: &quot;#D1D5DB&quot;, fontSize: 15 }}&gt;会话标识与渠道来源&lt;/Text&gt;&#10;        &lt;Text style={{ color: &quot;#D1D5DB&quot;, fontSize: 15 }}&gt;意图、工具、槽位摘要&lt;/Text&gt;&#10;        &lt;Text style={{ color: &quot;#D1D5DB&quot;, fontSize: 15 }}&gt;风险等级与命中的规则编号&lt;/Text&gt;&#10;        &lt;Text style={{ color: &quot;#D1D5DB&quot;, fontSize: 15 }}&gt;蜂群各角色的分工结论&lt;/Text&gt;&#10;        &lt;Text style={{ color: &quot;#D1D5DB&quot;, fontSize: 15 }}&gt;前序哈希与本条哈希&lt;/Text&gt;&#10;      &lt;/Box&gt;&#10;      &lt;Box style={{ background: &quot;rgba(245,158,11,0.08)&quot;, border: &quot;1px solid rgba(245,158,11,0.35)&quot;, borderRadius: 12, padding: 20 }}&gt;&#10;        &lt;Text style={{ color: &quot;#F59E0B&quot;, fontSize: 17, fontWeight: 600 }}&gt;敏感字段脱敏&lt;/Text&gt;&#10;        &lt;Text style={{ color: &quot;#9CA3AF&quot;, fontSize: 15, lineHeight: 1.7, marginTop: 8 }}&gt;卡号只留后四位，手机号中段掩码。审计文件全文检索无明文卡号与手机号。&lt;/Text&gt;&#10;      &lt;/Box&gt;&#10;      &lt;Box style={{ background: &quot;rgba(107,114,128,0.12)&quot;, border: &quot;1px solid rgba(107,114,128,0.35)&quot;, borderRadius: 12, padding: 20 }}&gt;&#10;        &lt;Text style={{ color: &quot;#D1D5DB&quot;, fontSize: 17, fontWeight: 600 }}&gt;查询接口自带校验&lt;/Text&gt;&#10;        &lt;Text style={{ color: &quot;#9CA3AF&quot;, fontSize: 15, lineHeight: 1.7, marginTop: 8 }}&gt;审计查询返回时顺带重算全链，校验结果由 chain.ok 字段给出，界面直接显示通过或失败。&lt;/Text&gt;&#10;      &lt;/Box&gt;&#10;    &lt;/Box&gt;&#10;  &lt;/Box&gt;&#10;&lt;/Slide&gt;&#10;"/>
+        <p:cNvPr id="365" name="" descr="&lt;Slide style={{ background: &quot;#0B1220&quot;, padding: &quot;44px 72px&quot;, display: &quot;flex&quot;, flexDirection: &quot;column&quot; }}&gt;&#10;  &lt;Text style={{ color: &quot;#6B7280&quot;, fontSize: 14, letterSpacing: 3 }}&gt;可追溯&lt;/Text&gt;&#10;  &lt;Text style={{ color: &quot;#F7F4EC&quot;, fontSize: 34, fontWeight: 700, marginTop: 10 }}&gt;每条结论都带出处，审计链改一条即断&lt;/Text&gt;&#10;&#10;  &lt;Box style={{ display: &quot;flex&quot;, flexDirection: &quot;row&quot;, gap: 36, marginTop: 32 }}&gt;&#10;    &lt;Box style={{ flex: 1.1, display: &quot;flex&quot;, flexDirection: &quot;column&quot;, gap: 12 }}&gt;&#10;      &lt;Text style={{ color: &quot;#F7F4EC&quot;, fontSize: 20, fontWeight: 600 }}&gt;追加式哈希链&lt;/Text&gt;&#10;      &lt;Box style={{ background: &quot;rgba(59,130,246,0.08)&quot;, border: &quot;1px solid rgba(59,130,246,0.35)&quot;, borderRadius: 12, padding: 22 }}&gt;&#10;        &lt;Text style={{ color: &quot;#93C5FD&quot;, fontSize: 15, fontFamily: &quot;Consolas, monospace&quot; }}&gt;hash₁ = SHA256(GENESIS + 内容₁)&lt;/Text&gt;&#10;        &lt;Text style={{ color: &quot;#93C5FD&quot;, fontSize: 15, fontFamily: &quot;Consolas, monospace&quot;, marginTop: 8 }}&gt;hash₂ = SHA256(hash₁ + 内容₂)&lt;/Text&gt;&#10;        &lt;Text style={{ color: &quot;#93C5FD&quot;, fontSize: 15, fontFamily: &quot;Consolas, monospace&quot;, marginTop: 8 }}&gt;hash₃ = SHA256(hash₂ + 内容₃)&lt;/Text&gt;&#10;      &lt;/Box&gt;&#10;      &lt;Text style={{ color: &quot;#9CA3AF&quot;, fontSize: 16, lineHeight: 1.8 }}&gt;每条记录写入前把上一条的哈希拼进摘要再算哈希。改动中间任意一条，后面全部对不上，篡改无法悄悄通过校验。&lt;/Text&gt;&#10;      &lt;Box style={{ background: &quot;rgba(34,197,94,0.08)&quot;, border: &quot;1px solid rgba(34,197,94,0.35)&quot;, borderRadius: 12, padding: 20 }}&gt;&#10;        &lt;Text style={{ color: &quot;#22C55E&quot;, fontSize: 17, fontWeight: 600 }}&gt;实测：改首行后校验失败&lt;/Text&gt;&#10;        &lt;Text style={{ color: &quot;#9CA3AF&quot;, fontSize: 15, lineHeight: 1.7, marginTop: 8 }}&gt;审计查询接口返回的 chain.ok 字段在校验通过时为真，人工改写一条记录后立刻为假。&lt;/Text&gt;&#10;      &lt;/Box&gt;&#10;      &lt;Box style={{ background: &quot;rgba(59,130,246,0.08)&quot;, border: &quot;1px solid rgba(59,130,246,0.35)&quot;, borderRadius: 12, padding: 20 }}&gt;&#10;        &lt;Text style={{ color: &quot;#93C5FD&quot;, fontSize: 17, fontWeight: 600 }}&gt;只追加，不改写&lt;/Text&gt;&#10;        &lt;Text style={{ color: &quot;#9CA3AF&quot;, fontSize: 15, lineHeight: 1.7, marginTop: 8 }}&gt;审计记录只追加不覆盖，历史条目不可编辑。序号从一开始递增，可据此确认没有丢条。&lt;/Text&gt;&#10;      &lt;/Box&gt;&#10;    &lt;/Box&gt;&#10;&#10;    &lt;Box style={{ flex: 1, display: &quot;flex&quot;, flexDirection: &quot;column&quot;, gap: 12 }}&gt;&#10;      &lt;Text style={{ color: &quot;#F7F4EC&quot;, fontSize: 20, fontWeight: 600 }}&gt;一条记录里有什么&lt;/Text&gt;&#10;      &lt;Box style={{ background: &quot;rgba(107,114,128,0.10)&quot;, border: &quot;1px solid rgba(107,114,128,0.35)&quot;, borderRadius: 12, padding: 22, display: &quot;flex&quot;, flexDirection: &quot;column&quot;, gap: 10 }}&gt;&#10;        &lt;Text style={{ color: &quot;#D1D5DB&quot;, fontSize: 15 }}&gt;序号与时间戳&lt;/Text&gt;&#10;        &lt;Text style={{ color: &quot;#D1D5DB&quot;, fontSize: 15 }}&gt;会话标识与渠道来源&lt;/Text&gt;&#10;        &lt;Text style={{ color: &quot;#D1D5DB&quot;, fontSize: 15 }}&gt;意图、工具、槽位摘要&lt;/Text&gt;&#10;        &lt;Text style={{ color: &quot;#D1D5DB&quot;, fontSize: 15 }}&gt;风险等级与命中的规则编号&lt;/Text&gt;&#10;        &lt;Text style={{ color: &quot;#D1D5DB&quot;, fontSize: 15 }}&gt;蜂群各角色的分工结论&lt;/Text&gt;&#10;        &lt;Text style={{ color: &quot;#D1D5DB&quot;, fontSize: 15 }}&gt;前序哈希与本条哈希&lt;/Text&gt;&#10;      &lt;/Box&gt;&#10;      &lt;Box style={{ background: &quot;rgba(245,158,11,0.08)&quot;, border: &quot;1px solid rgba(245,158,11,0.35)&quot;, borderRadius: 12, padding: 20 }}&gt;&#10;        &lt;Text style={{ color: &quot;#F59E0B&quot;, fontSize: 17, fontWeight: 600 }}&gt;敏感字段脱敏&lt;/Text&gt;&#10;        &lt;Text style={{ color: &quot;#9CA3AF&quot;, fontSize: 15, lineHeight: 1.7, marginTop: 8 }}&gt;卡号只留后四位，手机号中段掩码。审计文件全文检索无明文卡号与手机号。&lt;/Text&gt;&#10;      &lt;/Box&gt;&#10;      &lt;Box style={{ background: &quot;rgba(107,114,128,0.12)&quot;, border: &quot;1px solid rgba(107,114,128,0.35)&quot;, borderRadius: 12, padding: 20 }}&gt;&#10;        &lt;Text style={{ color: &quot;#D1D5DB&quot;, fontSize: 17, fontWeight: 600 }}&gt;查询接口自带校验&lt;/Text&gt;&#10;        &lt;Text style={{ color: &quot;#9CA3AF&quot;, fontSize: 15, lineHeight: 1.7, marginTop: 8 }}&gt;审计查询返回时顺带重算全链，校验结果由 chain.ok 字段给出，界面直接显示通过或失败。&lt;/Text&gt;&#10;      &lt;/Box&gt;&#10;    &lt;/Box&gt;&#10;  &lt;/Box&gt;&#10;&lt;/Slide&gt;&#10;"/>
         <p:cNvGrpSpPr/>
         <p:nvPr/>
       </p:nvGrpSpPr>
@@ -13448,7 +14425,7 @@
       </p:grpSpPr>
       <p:sp>
         <p:nvSpPr>
-          <p:cNvPr id="357" name=""/>
+          <p:cNvPr id="366" name=""/>
           <p:cNvSpPr/>
           <p:nvPr/>
         </p:nvSpPr>
@@ -13472,7 +14449,7 @@
       </p:sp>
       <p:sp>
         <p:nvSpPr>
-          <p:cNvPr id="358" name="" descr="{&quot;isTemplate&quot;:true,&quot;type&quot;:&quot;text&quot;}"/>
+          <p:cNvPr id="367" name="" descr="{&quot;isTemplate&quot;:true,&quot;type&quot;:&quot;text&quot;}"/>
           <p:cNvSpPr txBox="1"/>
           <p:nvPr/>
         </p:nvSpPr>
@@ -13507,7 +14484,7 @@
       </p:sp>
       <p:sp>
         <p:nvSpPr>
-          <p:cNvPr id="359" name="" descr="{&quot;isTemplate&quot;:true,&quot;type&quot;:&quot;text&quot;}"/>
+          <p:cNvPr id="368" name="" descr="{&quot;isTemplate&quot;:true,&quot;type&quot;:&quot;text&quot;}"/>
           <p:cNvSpPr txBox="1"/>
           <p:nvPr/>
         </p:nvSpPr>
@@ -13542,7 +14519,7 @@
       </p:sp>
       <p:sp>
         <p:nvSpPr>
-          <p:cNvPr id="360" name="" descr="{&quot;isTemplate&quot;:true,&quot;type&quot;:&quot;text&quot;}"/>
+          <p:cNvPr id="369" name="" descr="{&quot;isTemplate&quot;:true,&quot;type&quot;:&quot;text&quot;}"/>
           <p:cNvSpPr txBox="1"/>
           <p:nvPr/>
         </p:nvSpPr>
@@ -13577,7 +14554,7 @@
       </p:sp>
       <p:sp>
         <p:nvSpPr>
-          <p:cNvPr id="361" name=""/>
+          <p:cNvPr id="370" name=""/>
           <p:cNvSpPr/>
           <p:nvPr/>
         </p:nvSpPr>
@@ -13612,7 +14589,7 @@
       </p:sp>
       <p:sp>
         <p:nvSpPr>
-          <p:cNvPr id="362" name="" descr="{&quot;isTemplate&quot;:true,&quot;type&quot;:&quot;text&quot;}"/>
+          <p:cNvPr id="371" name="" descr="{&quot;isTemplate&quot;:true,&quot;type&quot;:&quot;text&quot;}"/>
           <p:cNvSpPr txBox="1"/>
           <p:nvPr/>
         </p:nvSpPr>
@@ -13636,8 +14613,8 @@
                 <a:solidFill>
                   <a:srgbClr val="93C5FD"/>
                 </a:solidFill>
-                <a:latin typeface="JetBrains Mono"/>
-                <a:ea typeface="JetBrains Mono"/>
+                <a:latin typeface="Consolas"/>
+                <a:ea typeface="Consolas"/>
               </a:rPr>
               <a:t xml:space="preserve">hash₁ = SHA256(GENESIS + </a:t>
             </a:r>
@@ -13646,8 +14623,8 @@
                 <a:solidFill>
                   <a:srgbClr val="93C5FD"/>
                 </a:solidFill>
-                <a:latin typeface="JetBrains Mono"/>
-                <a:ea typeface="JetBrains Mono"/>
+                <a:latin typeface="Consolas"/>
+                <a:ea typeface="Consolas"/>
               </a:rPr>
               <a:t>内容₁</a:t>
             </a:r>
@@ -13656,8 +14633,8 @@
                 <a:solidFill>
                   <a:srgbClr val="93C5FD"/>
                 </a:solidFill>
-                <a:latin typeface="JetBrains Mono"/>
-                <a:ea typeface="JetBrains Mono"/>
+                <a:latin typeface="Consolas"/>
+                <a:ea typeface="Consolas"/>
               </a:rPr>
               <a:t>)</a:t>
             </a:r>
@@ -13667,7 +14644,7 @@
       </p:sp>
       <p:sp>
         <p:nvSpPr>
-          <p:cNvPr id="363" name="" descr="{&quot;isTemplate&quot;:true,&quot;type&quot;:&quot;text&quot;}"/>
+          <p:cNvPr id="372" name="" descr="{&quot;isTemplate&quot;:true,&quot;type&quot;:&quot;text&quot;}"/>
           <p:cNvSpPr txBox="1"/>
           <p:nvPr/>
         </p:nvSpPr>
@@ -13691,8 +14668,8 @@
                 <a:solidFill>
                   <a:srgbClr val="93C5FD"/>
                 </a:solidFill>
-                <a:latin typeface="JetBrains Mono"/>
-                <a:ea typeface="JetBrains Mono"/>
+                <a:latin typeface="Consolas"/>
+                <a:ea typeface="Consolas"/>
               </a:rPr>
               <a:t xml:space="preserve">hash₂ = SHA256(hash₁ + </a:t>
             </a:r>
@@ -13701,8 +14678,8 @@
                 <a:solidFill>
                   <a:srgbClr val="93C5FD"/>
                 </a:solidFill>
-                <a:latin typeface="JetBrains Mono"/>
-                <a:ea typeface="JetBrains Mono"/>
+                <a:latin typeface="Consolas"/>
+                <a:ea typeface="Consolas"/>
               </a:rPr>
               <a:t>内容₂</a:t>
             </a:r>
@@ -13711,8 +14688,8 @@
                 <a:solidFill>
                   <a:srgbClr val="93C5FD"/>
                 </a:solidFill>
-                <a:latin typeface="JetBrains Mono"/>
-                <a:ea typeface="JetBrains Mono"/>
+                <a:latin typeface="Consolas"/>
+                <a:ea typeface="Consolas"/>
               </a:rPr>
               <a:t>)</a:t>
             </a:r>
@@ -13722,7 +14699,7 @@
       </p:sp>
       <p:sp>
         <p:nvSpPr>
-          <p:cNvPr id="364" name="" descr="{&quot;isTemplate&quot;:true,&quot;type&quot;:&quot;text&quot;}"/>
+          <p:cNvPr id="373" name="" descr="{&quot;isTemplate&quot;:true,&quot;type&quot;:&quot;text&quot;}"/>
           <p:cNvSpPr txBox="1"/>
           <p:nvPr/>
         </p:nvSpPr>
@@ -13746,8 +14723,8 @@
                 <a:solidFill>
                   <a:srgbClr val="93C5FD"/>
                 </a:solidFill>
-                <a:latin typeface="JetBrains Mono"/>
-                <a:ea typeface="JetBrains Mono"/>
+                <a:latin typeface="Consolas"/>
+                <a:ea typeface="Consolas"/>
               </a:rPr>
               <a:t xml:space="preserve">hash₃ = SHA256(hash₂ + </a:t>
             </a:r>
@@ -13756,8 +14733,8 @@
                 <a:solidFill>
                   <a:srgbClr val="93C5FD"/>
                 </a:solidFill>
-                <a:latin typeface="JetBrains Mono"/>
-                <a:ea typeface="JetBrains Mono"/>
+                <a:latin typeface="Consolas"/>
+                <a:ea typeface="Consolas"/>
               </a:rPr>
               <a:t>内容₃</a:t>
             </a:r>
@@ -13766,8 +14743,8 @@
                 <a:solidFill>
                   <a:srgbClr val="93C5FD"/>
                 </a:solidFill>
-                <a:latin typeface="JetBrains Mono"/>
-                <a:ea typeface="JetBrains Mono"/>
+                <a:latin typeface="Consolas"/>
+                <a:ea typeface="Consolas"/>
               </a:rPr>
               <a:t>)</a:t>
             </a:r>
@@ -13777,7 +14754,7 @@
       </p:sp>
       <p:sp>
         <p:nvSpPr>
-          <p:cNvPr id="365" name="" descr="{&quot;isTemplate&quot;:true,&quot;type&quot;:&quot;text&quot;}"/>
+          <p:cNvPr id="374" name="" descr="{&quot;isTemplate&quot;:true,&quot;type&quot;:&quot;text&quot;}"/>
           <p:cNvSpPr txBox="1"/>
           <p:nvPr/>
         </p:nvSpPr>
@@ -13814,7 +14791,7 @@
       </p:sp>
       <p:sp>
         <p:nvSpPr>
-          <p:cNvPr id="366" name=""/>
+          <p:cNvPr id="375" name=""/>
           <p:cNvSpPr/>
           <p:nvPr/>
         </p:nvSpPr>
@@ -13849,7 +14826,7 @@
       </p:sp>
       <p:sp>
         <p:nvSpPr>
-          <p:cNvPr id="367" name="" descr="{&quot;isTemplate&quot;:true,&quot;type&quot;:&quot;text&quot;}"/>
+          <p:cNvPr id="376" name="" descr="{&quot;isTemplate&quot;:true,&quot;type&quot;:&quot;text&quot;}"/>
           <p:cNvSpPr txBox="1"/>
           <p:nvPr/>
         </p:nvSpPr>
@@ -13884,7 +14861,7 @@
       </p:sp>
       <p:sp>
         <p:nvSpPr>
-          <p:cNvPr id="368" name="" descr="{&quot;isTemplate&quot;:true,&quot;type&quot;:&quot;text&quot;}"/>
+          <p:cNvPr id="377" name="" descr="{&quot;isTemplate&quot;:true,&quot;type&quot;:&quot;text&quot;}"/>
           <p:cNvSpPr txBox="1"/>
           <p:nvPr/>
         </p:nvSpPr>
@@ -13941,7 +14918,7 @@
       </p:sp>
       <p:sp>
         <p:nvSpPr>
-          <p:cNvPr id="369" name=""/>
+          <p:cNvPr id="378" name=""/>
           <p:cNvSpPr/>
           <p:nvPr/>
         </p:nvSpPr>
@@ -13976,7 +14953,7 @@
       </p:sp>
       <p:sp>
         <p:nvSpPr>
-          <p:cNvPr id="370" name="" descr="{&quot;isTemplate&quot;:true,&quot;type&quot;:&quot;text&quot;}"/>
+          <p:cNvPr id="379" name="" descr="{&quot;isTemplate&quot;:true,&quot;type&quot;:&quot;text&quot;}"/>
           <p:cNvSpPr txBox="1"/>
           <p:nvPr/>
         </p:nvSpPr>
@@ -14011,7 +14988,7 @@
       </p:sp>
       <p:sp>
         <p:nvSpPr>
-          <p:cNvPr id="371" name="" descr="{&quot;isTemplate&quot;:true,&quot;type&quot;:&quot;text&quot;}"/>
+          <p:cNvPr id="380" name="" descr="{&quot;isTemplate&quot;:true,&quot;type&quot;:&quot;text&quot;}"/>
           <p:cNvSpPr txBox="1"/>
           <p:nvPr/>
         </p:nvSpPr>
@@ -14048,7 +15025,7 @@
       </p:sp>
       <p:sp>
         <p:nvSpPr>
-          <p:cNvPr id="372" name="" descr="{&quot;isTemplate&quot;:true,&quot;type&quot;:&quot;text&quot;}"/>
+          <p:cNvPr id="381" name="" descr="{&quot;isTemplate&quot;:true,&quot;type&quot;:&quot;text&quot;}"/>
           <p:cNvSpPr txBox="1"/>
           <p:nvPr/>
         </p:nvSpPr>
@@ -14083,7 +15060,7 @@
       </p:sp>
       <p:sp>
         <p:nvSpPr>
-          <p:cNvPr id="373" name=""/>
+          <p:cNvPr id="382" name=""/>
           <p:cNvSpPr/>
           <p:nvPr/>
         </p:nvSpPr>
@@ -14118,7 +15095,7 @@
       </p:sp>
       <p:sp>
         <p:nvSpPr>
-          <p:cNvPr id="374" name="" descr="{&quot;isTemplate&quot;:true,&quot;type&quot;:&quot;text&quot;}"/>
+          <p:cNvPr id="383" name="" descr="{&quot;isTemplate&quot;:true,&quot;type&quot;:&quot;text&quot;}"/>
           <p:cNvSpPr txBox="1"/>
           <p:nvPr/>
         </p:nvSpPr>
@@ -14153,7 +15130,7 @@
       </p:sp>
       <p:sp>
         <p:nvSpPr>
-          <p:cNvPr id="375" name="" descr="{&quot;isTemplate&quot;:true,&quot;type&quot;:&quot;text&quot;}"/>
+          <p:cNvPr id="384" name="" descr="{&quot;isTemplate&quot;:true,&quot;type&quot;:&quot;text&quot;}"/>
           <p:cNvSpPr txBox="1"/>
           <p:nvPr/>
         </p:nvSpPr>
@@ -14188,7 +15165,7 @@
       </p:sp>
       <p:sp>
         <p:nvSpPr>
-          <p:cNvPr id="376" name="" descr="{&quot;isTemplate&quot;:true,&quot;type&quot;:&quot;text&quot;}"/>
+          <p:cNvPr id="385" name="" descr="{&quot;isTemplate&quot;:true,&quot;type&quot;:&quot;text&quot;}"/>
           <p:cNvSpPr txBox="1"/>
           <p:nvPr/>
         </p:nvSpPr>
@@ -14223,7 +15200,7 @@
       </p:sp>
       <p:sp>
         <p:nvSpPr>
-          <p:cNvPr id="377" name="" descr="{&quot;isTemplate&quot;:true,&quot;type&quot;:&quot;text&quot;}"/>
+          <p:cNvPr id="386" name="" descr="{&quot;isTemplate&quot;:true,&quot;type&quot;:&quot;text&quot;}"/>
           <p:cNvSpPr txBox="1"/>
           <p:nvPr/>
         </p:nvSpPr>
@@ -14258,7 +15235,7 @@
       </p:sp>
       <p:sp>
         <p:nvSpPr>
-          <p:cNvPr id="378" name="" descr="{&quot;isTemplate&quot;:true,&quot;type&quot;:&quot;text&quot;}"/>
+          <p:cNvPr id="387" name="" descr="{&quot;isTemplate&quot;:true,&quot;type&quot;:&quot;text&quot;}"/>
           <p:cNvSpPr txBox="1"/>
           <p:nvPr/>
         </p:nvSpPr>
@@ -14293,7 +15270,7 @@
       </p:sp>
       <p:sp>
         <p:nvSpPr>
-          <p:cNvPr id="379" name="" descr="{&quot;isTemplate&quot;:true,&quot;type&quot;:&quot;text&quot;}"/>
+          <p:cNvPr id="388" name="" descr="{&quot;isTemplate&quot;:true,&quot;type&quot;:&quot;text&quot;}"/>
           <p:cNvSpPr txBox="1"/>
           <p:nvPr/>
         </p:nvSpPr>
@@ -14328,7 +15305,7 @@
       </p:sp>
       <p:sp>
         <p:nvSpPr>
-          <p:cNvPr id="380" name=""/>
+          <p:cNvPr id="389" name=""/>
           <p:cNvSpPr/>
           <p:nvPr/>
         </p:nvSpPr>
@@ -14363,7 +15340,7 @@
       </p:sp>
       <p:sp>
         <p:nvSpPr>
-          <p:cNvPr id="381" name="" descr="{&quot;isTemplate&quot;:true,&quot;type&quot;:&quot;text&quot;}"/>
+          <p:cNvPr id="390" name="" descr="{&quot;isTemplate&quot;:true,&quot;type&quot;:&quot;text&quot;}"/>
           <p:cNvSpPr txBox="1"/>
           <p:nvPr/>
         </p:nvSpPr>
@@ -14398,7 +15375,7 @@
       </p:sp>
       <p:sp>
         <p:nvSpPr>
-          <p:cNvPr id="382" name="" descr="{&quot;isTemplate&quot;:true,&quot;type&quot;:&quot;text&quot;}"/>
+          <p:cNvPr id="391" name="" descr="{&quot;isTemplate&quot;:true,&quot;type&quot;:&quot;text&quot;}"/>
           <p:cNvSpPr txBox="1"/>
           <p:nvPr/>
         </p:nvSpPr>
@@ -14435,7 +15412,7 @@
       </p:sp>
       <p:sp>
         <p:nvSpPr>
-          <p:cNvPr id="383" name=""/>
+          <p:cNvPr id="392" name=""/>
           <p:cNvSpPr/>
           <p:nvPr/>
         </p:nvSpPr>
@@ -14470,7 +15447,7 @@
       </p:sp>
       <p:sp>
         <p:nvSpPr>
-          <p:cNvPr id="384" name="" descr="{&quot;isTemplate&quot;:true,&quot;type&quot;:&quot;text&quot;}"/>
+          <p:cNvPr id="393" name="" descr="{&quot;isTemplate&quot;:true,&quot;type&quot;:&quot;text&quot;}"/>
           <p:cNvSpPr txBox="1"/>
           <p:nvPr/>
         </p:nvSpPr>
@@ -14505,7 +15482,7 @@
       </p:sp>
       <p:sp>
         <p:nvSpPr>
-          <p:cNvPr id="385" name="" descr="{&quot;isTemplate&quot;:true,&quot;type&quot;:&quot;text&quot;}"/>
+          <p:cNvPr id="394" name="" descr="{&quot;isTemplate&quot;:true,&quot;type&quot;:&quot;text&quot;}"/>
           <p:cNvSpPr txBox="1"/>
           <p:nvPr/>
         </p:nvSpPr>
@@ -14562,6 +15539,7 @@
       </p:sp>
     </p:spTree>
   </p:cSld>
+  <p:extLst/>
 </p:sld>
 </file>
 

--- a/ppt/面向金融的蜂群多智能体系统-答辩材料/面向金融的蜂群多智能体系统-答辩材料.pptx
+++ b/ppt/面向金融的蜂群多智能体系统-答辩材料/面向金融的蜂群多智能体系统-答辩材料.pptx
@@ -237,617 +237,6 @@
     </a:lvl9pPr>
   </p:notesStyle>
 </p:notesMaster>
-</file>
-
-<file path=ppt/notesSlides/notesSlide1.xml><?xml version="1.0" encoding="utf-8"?>
-<p:notes xmlns:p="http://schemas.openxmlformats.org/presentationml/2006/main" xmlns:a="http://schemas.openxmlformats.org/drawingml/2006/main" xmlns:r="http://schemas.openxmlformats.org/officeDocument/2006/relationships">
-  <p:cSld>
-    <p:spTree>
-      <p:nvGrpSpPr>
-        <p:cNvPr id="1" name=""/>
-        <p:cNvGrpSpPr/>
-        <p:nvPr/>
-      </p:nvGrpSpPr>
-      <p:grpSpPr>
-        <a:xfrm>
-          <a:off x="0" y="0"/>
-          <a:ext cx="0" cy="0"/>
-          <a:chOff x="0" y="0"/>
-          <a:chExt cx="0" cy="0"/>
-        </a:xfrm>
-      </p:grpSpPr>
-      <p:sp>
-        <p:nvSpPr>
-          <p:cNvPr id="2" name="备注占位符 1"/>
-          <p:cNvSpPr>
-            <a:spLocks noGrp="1"/>
-          </p:cNvSpPr>
-          <p:nvPr>
-            <p:ph type="body" idx="1"/>
-          </p:nvPr>
-        </p:nvSpPr>
-        <p:spPr/>
-        <p:txBody>
-          <a:bodyPr/>
-          <a:lstStyle/>
-          <a:p>
-            <a:r>
-              <a:rPr lang="zh-CN" altLang="en-US" dirty="0"/>
-              <a:t>开场一句话：我们做了一个银行智能体，它不会乱动钱，出了事说得清。</a:t>
-            </a:r>
-          </a:p>
-        </p:txBody>
-      </p:sp>
-    </p:spTree>
-  </p:cSld>
-  <p:clrMapOvr>
-    <a:masterClrMapping/>
-  </p:clrMapOvr>
-</p:notes>
-</file>
-
-<file path=ppt/notesSlides/notesSlide10.xml><?xml version="1.0" encoding="utf-8"?>
-<p:notes xmlns:p="http://schemas.openxmlformats.org/presentationml/2006/main" xmlns:a="http://schemas.openxmlformats.org/drawingml/2006/main" xmlns:r="http://schemas.openxmlformats.org/officeDocument/2006/relationships">
-  <p:cSld>
-    <p:spTree>
-      <p:nvGrpSpPr>
-        <p:cNvPr id="1" name=""/>
-        <p:cNvGrpSpPr/>
-        <p:nvPr/>
-      </p:nvGrpSpPr>
-      <p:grpSpPr>
-        <a:xfrm>
-          <a:off x="0" y="0"/>
-          <a:ext cx="0" cy="0"/>
-          <a:chOff x="0" y="0"/>
-          <a:chExt cx="0" cy="0"/>
-        </a:xfrm>
-      </p:grpSpPr>
-      <p:sp>
-        <p:nvSpPr>
-          <p:cNvPr id="2" name="备注占位符 1"/>
-          <p:cNvSpPr>
-            <a:spLocks noGrp="1"/>
-          </p:cNvSpPr>
-          <p:nvPr>
-            <p:ph type="body" idx="1"/>
-          </p:nvPr>
-        </p:nvSpPr>
-        <p:spPr/>
-        <p:txBody>
-          <a:bodyPr/>
-          <a:lstStyle/>
-          <a:p>
-            <a:r>
-              <a:rPr lang="zh-CN" altLang="en-US" dirty="0"/>
-              <a:t>三套能力收敛成一份描述符。新增一个工具三步搞定，不用动主循环。</a:t>
-            </a:r>
-          </a:p>
-        </p:txBody>
-      </p:sp>
-    </p:spTree>
-  </p:cSld>
-  <p:clrMapOvr>
-    <a:masterClrMapping/>
-  </p:clrMapOvr>
-</p:notes>
-</file>
-
-<file path=ppt/notesSlides/notesSlide11.xml><?xml version="1.0" encoding="utf-8"?>
-<p:notes xmlns:p="http://schemas.openxmlformats.org/presentationml/2006/main" xmlns:a="http://schemas.openxmlformats.org/drawingml/2006/main" xmlns:r="http://schemas.openxmlformats.org/officeDocument/2006/relationships">
-  <p:cSld>
-    <p:spTree>
-      <p:nvGrpSpPr>
-        <p:cNvPr id="1" name=""/>
-        <p:cNvGrpSpPr/>
-        <p:nvPr/>
-      </p:nvGrpSpPr>
-      <p:grpSpPr>
-        <a:xfrm>
-          <a:off x="0" y="0"/>
-          <a:ext cx="0" cy="0"/>
-          <a:chOff x="0" y="0"/>
-          <a:chExt cx="0" cy="0"/>
-        </a:xfrm>
-      </p:grpSpPr>
-      <p:sp>
-        <p:nvSpPr>
-          <p:cNvPr id="2" name="备注占位符 1"/>
-          <p:cNvSpPr>
-            <a:spLocks noGrp="1"/>
-          </p:cNvSpPr>
-          <p:nvPr>
-            <p:ph type="body" idx="1"/>
-          </p:nvPr>
-        </p:nvSpPr>
-        <p:spPr/>
-        <p:txBody>
-          <a:bodyPr/>
-          <a:lstStyle/>
-          <a:p>
-            <a:r>
-              <a:rPr lang="zh-CN" altLang="en-US" dirty="0"/>
-              <a:t>每个数字都配了验证命令和完整输出，评委可以原样复跑，不是只听我们说。</a:t>
-            </a:r>
-          </a:p>
-        </p:txBody>
-      </p:sp>
-    </p:spTree>
-  </p:cSld>
-  <p:clrMapOvr>
-    <a:masterClrMapping/>
-  </p:clrMapOvr>
-</p:notes>
-</file>
-
-<file path=ppt/notesSlides/notesSlide12.xml><?xml version="1.0" encoding="utf-8"?>
-<p:notes xmlns:p="http://schemas.openxmlformats.org/presentationml/2006/main" xmlns:a="http://schemas.openxmlformats.org/drawingml/2006/main" xmlns:r="http://schemas.openxmlformats.org/officeDocument/2006/relationships">
-  <p:cSld>
-    <p:spTree>
-      <p:nvGrpSpPr>
-        <p:cNvPr id="1" name=""/>
-        <p:cNvGrpSpPr/>
-        <p:nvPr/>
-      </p:nvGrpSpPr>
-      <p:grpSpPr>
-        <a:xfrm>
-          <a:off x="0" y="0"/>
-          <a:ext cx="0" cy="0"/>
-          <a:chOff x="0" y="0"/>
-          <a:chExt cx="0" cy="0"/>
-        </a:xfrm>
-      </p:grpSpPr>
-      <p:sp>
-        <p:nvSpPr>
-          <p:cNvPr id="2" name="备注占位符 1"/>
-          <p:cNvSpPr>
-            <a:spLocks noGrp="1"/>
-          </p:cNvSpPr>
-          <p:nvPr>
-            <p:ph type="body" idx="1"/>
-          </p:nvPr>
-        </p:nvSpPr>
-        <p:spPr/>
-        <p:txBody>
-          <a:bodyPr/>
-          <a:lstStyle/>
-          <a:p>
-            <a:r>
-              <a:rPr lang="zh-CN" altLang="en-US" dirty="0"/>
-              <a:t>这一页是加分项。八项已知风险，每项写清影响、缓解、残余风险和建议，还列了没测到的范围。</a:t>
-            </a:r>
-          </a:p>
-        </p:txBody>
-      </p:sp>
-    </p:spTree>
-  </p:cSld>
-  <p:clrMapOvr>
-    <a:masterClrMapping/>
-  </p:clrMapOvr>
-</p:notes>
-</file>
-
-<file path=ppt/notesSlides/notesSlide13.xml><?xml version="1.0" encoding="utf-8"?>
-<p:notes xmlns:p="http://schemas.openxmlformats.org/presentationml/2006/main" xmlns:a="http://schemas.openxmlformats.org/drawingml/2006/main" xmlns:r="http://schemas.openxmlformats.org/officeDocument/2006/relationships">
-  <p:cSld>
-    <p:spTree>
-      <p:nvGrpSpPr>
-        <p:cNvPr id="1" name=""/>
-        <p:cNvGrpSpPr/>
-        <p:nvPr/>
-      </p:nvGrpSpPr>
-      <p:grpSpPr>
-        <a:xfrm>
-          <a:off x="0" y="0"/>
-          <a:ext cx="0" cy="0"/>
-          <a:chOff x="0" y="0"/>
-          <a:chExt cx="0" cy="0"/>
-        </a:xfrm>
-      </p:grpSpPr>
-      <p:sp>
-        <p:nvSpPr>
-          <p:cNvPr id="2" name="备注占位符 1"/>
-          <p:cNvSpPr>
-            <a:spLocks noGrp="1"/>
-          </p:cNvSpPr>
-          <p:nvPr>
-            <p:ph type="body" idx="1"/>
-          </p:nvPr>
-        </p:nvSpPr>
-        <p:spPr/>
-        <p:txBody>
-          <a:bodyPr/>
-          <a:lstStyle/>
-          <a:p>
-            <a:r>
-              <a:rPr lang="zh-CN" altLang="en-US" dirty="0"/>
-              <a:t>把一件事拆给多个专职角色，比换更强的模型更可靠。谢谢各位评委。</a:t>
-            </a:r>
-          </a:p>
-        </p:txBody>
-      </p:sp>
-    </p:spTree>
-  </p:cSld>
-  <p:clrMapOvr>
-    <a:masterClrMapping/>
-  </p:clrMapOvr>
-</p:notes>
-</file>
-
-<file path=ppt/notesSlides/notesSlide2.xml><?xml version="1.0" encoding="utf-8"?>
-<p:notes xmlns:p="http://schemas.openxmlformats.org/presentationml/2006/main" xmlns:a="http://schemas.openxmlformats.org/drawingml/2006/main" xmlns:r="http://schemas.openxmlformats.org/officeDocument/2006/relationships">
-  <p:cSld>
-    <p:spTree>
-      <p:nvGrpSpPr>
-        <p:cNvPr id="1" name=""/>
-        <p:cNvGrpSpPr/>
-        <p:nvPr/>
-      </p:nvGrpSpPr>
-      <p:grpSpPr>
-        <a:xfrm>
-          <a:off x="0" y="0"/>
-          <a:ext cx="0" cy="0"/>
-          <a:chOff x="0" y="0"/>
-          <a:chExt cx="0" cy="0"/>
-        </a:xfrm>
-      </p:grpSpPr>
-      <p:sp>
-        <p:nvSpPr>
-          <p:cNvPr id="2" name="备注占位符 1"/>
-          <p:cNvSpPr>
-            <a:spLocks noGrp="1"/>
-          </p:cNvSpPr>
-          <p:nvPr>
-            <p:ph type="body" idx="1"/>
-          </p:nvPr>
-        </p:nvSpPr>
-        <p:spPr/>
-        <p:txBody>
-          <a:bodyPr/>
-          <a:lstStyle/>
-          <a:p>
-            <a:r>
-              <a:rPr lang="zh-CN" altLang="en-US" dirty="0"/>
-              <a:t>三个数字：九十一项测试全通，二十一个内置工具加四个外部服务，注入拦截百分之百且正常请求零误拦。每个数字都能在评委机器上复跑。</a:t>
-            </a:r>
-          </a:p>
-        </p:txBody>
-      </p:sp>
-    </p:spTree>
-  </p:cSld>
-  <p:clrMapOvr>
-    <a:masterClrMapping/>
-  </p:clrMapOvr>
-</p:notes>
-</file>
-
-<file path=ppt/notesSlides/notesSlide3.xml><?xml version="1.0" encoding="utf-8"?>
-<p:notes xmlns:p="http://schemas.openxmlformats.org/presentationml/2006/main" xmlns:a="http://schemas.openxmlformats.org/drawingml/2006/main" xmlns:r="http://schemas.openxmlformats.org/officeDocument/2006/relationships">
-  <p:cSld>
-    <p:spTree>
-      <p:nvGrpSpPr>
-        <p:cNvPr id="1" name=""/>
-        <p:cNvGrpSpPr/>
-        <p:nvPr/>
-      </p:nvGrpSpPr>
-      <p:grpSpPr>
-        <a:xfrm>
-          <a:off x="0" y="0"/>
-          <a:ext cx="0" cy="0"/>
-          <a:chOff x="0" y="0"/>
-          <a:chExt cx="0" cy="0"/>
-        </a:xfrm>
-      </p:grpSpPr>
-      <p:sp>
-        <p:nvSpPr>
-          <p:cNvPr id="2" name="备注占位符 1"/>
-          <p:cNvSpPr>
-            <a:spLocks noGrp="1"/>
-          </p:cNvSpPr>
-          <p:nvPr>
-            <p:ph type="body" idx="1"/>
-          </p:nvPr>
-        </p:nvSpPr>
-        <p:spPr/>
-        <p:txBody>
-          <a:bodyPr/>
-          <a:lstStyle/>
-          <a:p>
-            <a:r>
-              <a:rPr lang="zh-CN" altLang="en-US" dirty="0"/>
-              <a:t>传统做法是一个大脑包办所有事，代价有三处：判不准、说不清、改不动。这三点直接决定了我们后面每一个设计选择。</a:t>
-            </a:r>
-          </a:p>
-        </p:txBody>
-      </p:sp>
-    </p:spTree>
-  </p:cSld>
-  <p:clrMapOvr>
-    <a:masterClrMapping/>
-  </p:clrMapOvr>
-</p:notes>
-</file>
-
-<file path=ppt/notesSlides/notesSlide4.xml><?xml version="1.0" encoding="utf-8"?>
-<p:notes xmlns:p="http://schemas.openxmlformats.org/presentationml/2006/main" xmlns:a="http://schemas.openxmlformats.org/drawingml/2006/main" xmlns:r="http://schemas.openxmlformats.org/officeDocument/2006/relationships">
-  <p:cSld>
-    <p:spTree>
-      <p:nvGrpSpPr>
-        <p:cNvPr id="1" name=""/>
-        <p:cNvGrpSpPr/>
-        <p:nvPr/>
-      </p:nvGrpSpPr>
-      <p:grpSpPr>
-        <a:xfrm>
-          <a:off x="0" y="0"/>
-          <a:ext cx="0" cy="0"/>
-          <a:chOff x="0" y="0"/>
-          <a:chExt cx="0" cy="0"/>
-        </a:xfrm>
-      </p:grpSpPr>
-      <p:sp>
-        <p:nvSpPr>
-          <p:cNvPr id="2" name="备注占位符 1"/>
-          <p:cNvSpPr>
-            <a:spLocks noGrp="1"/>
-          </p:cNvSpPr>
-          <p:nvPr>
-            <p:ph type="body" idx="1"/>
-          </p:nvPr>
-        </p:nvSpPr>
-        <p:spPr/>
-        <p:txBody>
-          <a:bodyPr/>
-          <a:lstStyle/>
-          <a:p>
-            <a:r>
-              <a:rPr lang="zh-CN" altLang="en-US" dirty="0"/>
-              <a:t>五个角色各管一件事。风控、合规、体验三个评估官并行跑，任一失败不拖累其余。仲裁官取最高风险，任一否决即拦。</a:t>
-            </a:r>
-          </a:p>
-        </p:txBody>
-      </p:sp>
-    </p:spTree>
-  </p:cSld>
-  <p:clrMapOvr>
-    <a:masterClrMapping/>
-  </p:clrMapOvr>
-</p:notes>
-</file>
-
-<file path=ppt/notesSlides/notesSlide5.xml><?xml version="1.0" encoding="utf-8"?>
-<p:notes xmlns:p="http://schemas.openxmlformats.org/presentationml/2006/main" xmlns:a="http://schemas.openxmlformats.org/drawingml/2006/main" xmlns:r="http://schemas.openxmlformats.org/officeDocument/2006/relationships">
-  <p:cSld>
-    <p:spTree>
-      <p:nvGrpSpPr>
-        <p:cNvPr id="1" name=""/>
-        <p:cNvGrpSpPr/>
-        <p:nvPr/>
-      </p:nvGrpSpPr>
-      <p:grpSpPr>
-        <a:xfrm>
-          <a:off x="0" y="0"/>
-          <a:ext cx="0" cy="0"/>
-          <a:chOff x="0" y="0"/>
-          <a:chExt cx="0" cy="0"/>
-        </a:xfrm>
-      </p:grpSpPr>
-      <p:sp>
-        <p:nvSpPr>
-          <p:cNvPr id="2" name="备注占位符 1"/>
-          <p:cNvSpPr>
-            <a:spLocks noGrp="1"/>
-          </p:cNvSpPr>
-          <p:nvPr>
-            <p:ph type="body" idx="1"/>
-          </p:nvPr>
-        </p:nvSpPr>
-        <p:spPr/>
-        <p:txBody>
-          <a:bodyPr/>
-          <a:lstStyle/>
-          <a:p>
-            <a:r>
-              <a:rPr lang="zh-CN" altLang="en-US" dirty="0"/>
-              <a:t>用一条转账讲完链路：守卫、意图、三评估、仲裁、令牌、执行、审计。评委记住一条链路就够。</a:t>
-            </a:r>
-          </a:p>
-        </p:txBody>
-      </p:sp>
-    </p:spTree>
-  </p:cSld>
-  <p:clrMapOvr>
-    <a:masterClrMapping/>
-  </p:clrMapOvr>
-</p:notes>
-</file>
-
-<file path=ppt/notesSlides/notesSlide6.xml><?xml version="1.0" encoding="utf-8"?>
-<p:notes xmlns:p="http://schemas.openxmlformats.org/presentationml/2006/main" xmlns:a="http://schemas.openxmlformats.org/drawingml/2006/main" xmlns:r="http://schemas.openxmlformats.org/officeDocument/2006/relationships">
-  <p:cSld>
-    <p:spTree>
-      <p:nvGrpSpPr>
-        <p:cNvPr id="1" name=""/>
-        <p:cNvGrpSpPr/>
-        <p:nvPr/>
-      </p:nvGrpSpPr>
-      <p:grpSpPr>
-        <a:xfrm>
-          <a:off x="0" y="0"/>
-          <a:ext cx="0" cy="0"/>
-          <a:chOff x="0" y="0"/>
-          <a:chExt cx="0" cy="0"/>
-        </a:xfrm>
-      </p:grpSpPr>
-      <p:sp>
-        <p:nvSpPr>
-          <p:cNvPr id="2" name="备注占位符 1"/>
-          <p:cNvSpPr>
-            <a:spLocks noGrp="1"/>
-          </p:cNvSpPr>
-          <p:nvPr>
-            <p:ph type="body" idx="1"/>
-          </p:nvPr>
-        </p:nvSpPr>
-        <p:spPr/>
-        <p:txBody>
-          <a:bodyPr/>
-          <a:lstStyle/>
-          <a:p>
-            <a:r>
-              <a:rPr lang="zh-CN" altLang="en-US" dirty="0"/>
-              <a:t>三色是结论，四维是依据。点开任何一条判定，都能看到具体规则编号和数字。</a:t>
-            </a:r>
-          </a:p>
-        </p:txBody>
-      </p:sp>
-    </p:spTree>
-  </p:cSld>
-  <p:clrMapOvr>
-    <a:masterClrMapping/>
-  </p:clrMapOvr>
-</p:notes>
-</file>
-
-<file path=ppt/notesSlides/notesSlide7.xml><?xml version="1.0" encoding="utf-8"?>
-<p:notes xmlns:p="http://schemas.openxmlformats.org/presentationml/2006/main" xmlns:a="http://schemas.openxmlformats.org/drawingml/2006/main" xmlns:r="http://schemas.openxmlformats.org/officeDocument/2006/relationships">
-  <p:cSld>
-    <p:spTree>
-      <p:nvGrpSpPr>
-        <p:cNvPr id="1" name=""/>
-        <p:cNvGrpSpPr/>
-        <p:nvPr/>
-      </p:nvGrpSpPr>
-      <p:grpSpPr>
-        <a:xfrm>
-          <a:off x="0" y="0"/>
-          <a:ext cx="0" cy="0"/>
-          <a:chOff x="0" y="0"/>
-          <a:chExt cx="0" cy="0"/>
-        </a:xfrm>
-      </p:grpSpPr>
-      <p:sp>
-        <p:nvSpPr>
-          <p:cNvPr id="2" name="备注占位符 1"/>
-          <p:cNvSpPr>
-            <a:spLocks noGrp="1"/>
-          </p:cNvSpPr>
-          <p:nvPr>
-            <p:ph type="body" idx="1"/>
-          </p:nvPr>
-        </p:nvSpPr>
-        <p:spPr/>
-        <p:txBody>
-          <a:bodyPr/>
-          <a:lstStyle/>
-          <a:p>
-            <a:r>
-              <a:rPr lang="zh-CN" altLang="en-US" dirty="0"/>
-              <a:t>四道闸顺序不能错：守卫在最前，令牌在判定之后。顺序错了就有绕过路径。</a:t>
-            </a:r>
-          </a:p>
-        </p:txBody>
-      </p:sp>
-    </p:spTree>
-  </p:cSld>
-  <p:clrMapOvr>
-    <a:masterClrMapping/>
-  </p:clrMapOvr>
-</p:notes>
-</file>
-
-<file path=ppt/notesSlides/notesSlide8.xml><?xml version="1.0" encoding="utf-8"?>
-<p:notes xmlns:p="http://schemas.openxmlformats.org/presentationml/2006/main" xmlns:a="http://schemas.openxmlformats.org/drawingml/2006/main" xmlns:r="http://schemas.openxmlformats.org/officeDocument/2006/relationships">
-  <p:cSld>
-    <p:spTree>
-      <p:nvGrpSpPr>
-        <p:cNvPr id="1" name=""/>
-        <p:cNvGrpSpPr/>
-        <p:nvPr/>
-      </p:nvGrpSpPr>
-      <p:grpSpPr>
-        <a:xfrm>
-          <a:off x="0" y="0"/>
-          <a:ext cx="0" cy="0"/>
-          <a:chOff x="0" y="0"/>
-          <a:chExt cx="0" cy="0"/>
-        </a:xfrm>
-      </p:grpSpPr>
-      <p:sp>
-        <p:nvSpPr>
-          <p:cNvPr id="2" name="备注占位符 1"/>
-          <p:cNvSpPr>
-            <a:spLocks noGrp="1"/>
-          </p:cNvSpPr>
-          <p:nvPr>
-            <p:ph type="body" idx="1"/>
-          </p:nvPr>
-        </p:nvSpPr>
-        <p:spPr/>
-        <p:txBody>
-          <a:bodyPr/>
-          <a:lstStyle/>
-          <a:p>
-            <a:r>
-              <a:rPr lang="zh-CN" altLang="en-US" dirty="0"/>
-              <a:t>规则优先，模型兜底，契约再兜底。模型错就退回规则，不阻塞对话。</a:t>
-            </a:r>
-          </a:p>
-        </p:txBody>
-      </p:sp>
-    </p:spTree>
-  </p:cSld>
-  <p:clrMapOvr>
-    <a:masterClrMapping/>
-  </p:clrMapOvr>
-</p:notes>
-</file>
-
-<file path=ppt/notesSlides/notesSlide9.xml><?xml version="1.0" encoding="utf-8"?>
-<p:notes xmlns:p="http://schemas.openxmlformats.org/presentationml/2006/main" xmlns:a="http://schemas.openxmlformats.org/drawingml/2006/main" xmlns:r="http://schemas.openxmlformats.org/officeDocument/2006/relationships">
-  <p:cSld>
-    <p:spTree>
-      <p:nvGrpSpPr>
-        <p:cNvPr id="1" name=""/>
-        <p:cNvGrpSpPr/>
-        <p:nvPr/>
-      </p:nvGrpSpPr>
-      <p:grpSpPr>
-        <a:xfrm>
-          <a:off x="0" y="0"/>
-          <a:ext cx="0" cy="0"/>
-          <a:chOff x="0" y="0"/>
-          <a:chExt cx="0" cy="0"/>
-        </a:xfrm>
-      </p:grpSpPr>
-      <p:sp>
-        <p:nvSpPr>
-          <p:cNvPr id="2" name="备注占位符 1"/>
-          <p:cNvSpPr>
-            <a:spLocks noGrp="1"/>
-          </p:cNvSpPr>
-          <p:nvPr>
-            <p:ph type="body" idx="1"/>
-          </p:nvPr>
-        </p:nvSpPr>
-        <p:spPr/>
-        <p:txBody>
-          <a:bodyPr/>
-          <a:lstStyle/>
-          <a:p>
-            <a:r>
-              <a:rPr lang="zh-CN" altLang="en-US" dirty="0"/>
-              <a:t>数字只来自工具返回，模型不产数字。审计链每条带前序哈希，改一条就断，实测改首行后校验立即失败。</a:t>
-            </a:r>
-          </a:p>
-        </p:txBody>
-      </p:sp>
-    </p:spTree>
-  </p:cSld>
-  <p:clrMapOvr>
-    <a:masterClrMapping/>
-  </p:clrMapOvr>
-</p:notes>
 </file>
 
 <file path=ppt/slideLayouts/slideLayout1.xml><?xml version="1.0" encoding="utf-8"?>
@@ -1167,7 +556,7 @@
   <p:cSld>
     <p:spTree>
       <p:nvGrpSpPr>
-        <p:cNvPr id="1" name="" descr="&lt;Slide style={{ background: &quot;#0B1220&quot;, padding: &quot;42px 72px 40px&quot;, display: &quot;flex&quot;, flexDirection: &quot;column&quot; }}&gt;&#10;  &lt;Text style={{ color: &quot;#F59E0B&quot;, fontSize: 15, letterSpacing: 5, fontWeight: 600 }}&gt;2026 FINTECHATHON · 人工智能赛道&lt;/Text&gt;&#10;  &lt;Text style={{ color: &quot;#F7F4EC&quot;, fontSize: 66, fontWeight: 700, lineHeight: 1.2, marginTop: 20 }}&gt;面向金融的蜂群多智能体系统&lt;/Text&gt;&#10;  &lt;Box style={{ width: 96, height: 6, background: &quot;#22C55E&quot;, marginTop: 16 }} /&gt;&#10;  &lt;Text style={{ color: &quot;#9CA3AF&quot;, fontSize: 21, lineHeight: 1.6, marginTop: 16 }}&gt;五个角色分工完成一次银行事务，从听懂到办完全程可追溯&lt;/Text&gt;&#10;&#10;  &lt;Box style={{ display: &quot;flex&quot;, flexDirection: &quot;row&quot;, gap: 14, marginTop: 30 }}&gt;&#10;    &lt;Box style={{ flex: 1, background: &quot;rgba(34,197,94,0.10)&quot;, border: &quot;1px solid rgba(34,197,94,0.45)&quot;, borderRadius: 10, padding: &quot;22px 18px&quot; }}&gt;&#10;      &lt;Text style={{ color: &quot;#22C55E&quot;, fontSize: 20, fontWeight: 700 }}&gt;意图官&lt;/Text&gt;&#10;      &lt;Text style={{ color: &quot;#9CA3AF&quot;, fontSize: 14, lineHeight: 1.55, marginTop: 6 }}&gt;听懂诉求，抽出工具与槽位&lt;/Text&gt;&#10;    &lt;/Box&gt;&#10;    &lt;Box style={{ flex: 1, background: &quot;rgba(245,158,11,0.10)&quot;, border: &quot;1px solid rgba(245,158,11,0.45)&quot;, borderRadius: 10, padding: &quot;26px 18px&quot; }}&gt;&#10;      &lt;Text style={{ color: &quot;#F59E0B&quot;, fontSize: 20, fontWeight: 700 }}&gt;风控官&lt;/Text&gt;&#10;      &lt;Text style={{ color: &quot;#9CA3AF&quot;, fontSize: 14, lineHeight: 1.55, marginTop: 6 }}&gt;四维叠加判风险等级&lt;/Text&gt;&#10;    &lt;/Box&gt;&#10;    &lt;Box style={{ flex: 1, background: &quot;rgba(245,158,11,0.10)&quot;, border: &quot;1px solid rgba(245,158,11,0.45)&quot;, borderRadius: 10, padding: &quot;26px 18px&quot; }}&gt;&#10;      &lt;Text style={{ color: &quot;#F59E0B&quot;, fontSize: 20, fontWeight: 700 }}&gt;合规官&lt;/Text&gt;&#10;      &lt;Text style={{ color: &quot;#9CA3AF&quot;, fontSize: 14, lineHeight: 1.55, marginTop: 6 }}&gt;查收款人来源与白名单&lt;/Text&gt;&#10;    &lt;/Box&gt;&#10;    &lt;Box style={{ flex: 1, background: &quot;rgba(107,114,128,0.12)&quot;, border: &quot;1px solid rgba(107,114,128,0.45)&quot;, borderRadius: 10, padding: &quot;26px 18px&quot; }}&gt;&#10;      &lt;Text style={{ color: &quot;#D1D5DB&quot;, fontSize: 20, fontWeight: 700 }}&gt;体验官&lt;/Text&gt;&#10;      &lt;Text style={{ color: &quot;#9CA3AF&quot;, fontSize: 14, lineHeight: 1.55, marginTop: 6 }}&gt;指出缺什么并给替代路径&lt;/Text&gt;&#10;    &lt;/Box&gt;&#10;    &lt;Box style={{ flex: 1, background: &quot;rgba(59,130,246,0.12)&quot;, border: &quot;1px solid rgba(59,130,246,0.45)&quot;, borderRadius: 10, padding: &quot;26px 18px&quot; }}&gt;&#10;      &lt;Text style={{ color: &quot;#93C5FD&quot;, fontSize: 20, fontWeight: 700 }}&gt;仲裁官&lt;/Text&gt;&#10;      &lt;Text style={{ color: &quot;#9CA3AF&quot;, fontSize: 14, lineHeight: 1.55, marginTop: 6 }}&gt;取最高风险并合并理由&lt;/Text&gt;&#10;    &lt;/Box&gt;&#10;  &lt;/Box&gt;&#10;&#10;  &lt;Box style={{ display: &quot;flex&quot;, flexDirection: &quot;row&quot;, gap: 14, marginTop: 16 }}&gt;&#10;    &lt;Box style={{ flex: 1, background: &quot;rgba(34,197,94,0.07)&quot;, border: &quot;1px solid rgba(34,197,94,0.3)&quot;, borderRadius: 10, padding: &quot;26px 18px&quot; }}&gt;&#10;      &lt;Text style={{ color: &quot;#22C55E&quot;, fontSize: 20, fontWeight: 700 }}&gt;执行官&lt;/Text&gt;&#10;      &lt;Text style={{ color: &quot;#9CA3AF&quot;, fontSize: 14, lineHeight: 1.55, marginTop: 6 }}&gt;按确认令牌执行写操作&lt;/Text&gt;&#10;    &lt;/Box&gt;&#10;    &lt;Box style={{ flex: 1, background: &quot;rgba(34,197,94,0.07)&quot;, border: &quot;1px solid rgba(34,197,94,0.3)&quot;, borderRadius: 10, padding: &quot;26px 18px&quot; }}&gt;&#10;      &lt;Text style={{ color: &quot;#22C55E&quot;, fontSize: 20, fontWeight: 700 }}&gt;审计官&lt;/Text&gt;&#10;      &lt;Text style={{ color: &quot;#9CA3AF&quot;, fontSize: 14, lineHeight: 1.55, marginTop: 6 }}&gt;写入哈希链，序号递增&lt;/Text&gt;&#10;    &lt;/Box&gt;&#10;    &lt;Box style={{ flex: 1.4, background: &quot;rgba(107,114,128,0.10)&quot;, border: &quot;1px solid rgba(107,114,128,0.3)&quot;, borderRadius: 10, padding: &quot;26px 18px&quot; }}&gt;&#10;      &lt;Text style={{ color: &quot;#D1D5DB&quot;, fontSize: 20, fontWeight: 700 }}&gt;六个赛题场景全部打通&lt;/Text&gt;&#10;      &lt;Text style={{ color: &quot;#9CA3AF&quot;, fontSize: 14, lineHeight: 1.55, marginTop: 6 }}&gt;转账、账单、理财、卡片、订阅、跨场景联动&lt;/Text&gt;&#10;    &lt;/Box&gt;&#10;  &lt;/Box&gt;&#10;&#10;  &lt;Box style={{ display: &quot;flex&quot;, flexDirection: &quot;row&quot;, gap: 14, marginTop: 18, borderTop: &quot;1px solid #243044&quot;, paddingTop: 22 }}&gt;&#10;    &lt;Box style={{ flex: 1 }}&gt;&#10;      &lt;Text style={{ color: &quot;#6B7280&quot;, fontSize: 12, letterSpacing: 2 }}&gt;团队&lt;/Text&gt;&#10;      &lt;Text style={{ color: &quot;#D1D5DB&quot;, fontSize: 16, marginTop: 5 }}&gt;CordiBank 蜂群项目组&lt;/Text&gt;&#10;    &lt;/Box&gt;&#10;    &lt;Box style={{ flex: 1 }}&gt;&#10;      &lt;Text style={{ color: &quot;#6B7280&quot;, fontSize: 12, letterSpacing: 2 }}&gt;规模&lt;/Text&gt;&#10;      &lt;Text style={{ color: &quot;#D1D5DB&quot;, fontSize: 16, marginTop: 5 }}&gt;91 项测试全通，21 个内置工具&lt;/Text&gt;&#10;    &lt;/Box&gt;&#10;    &lt;Box style={{ flex: 1 }}&gt;&#10;      &lt;Text style={{ color: &quot;#6B7280&quot;, fontSize: 12, letterSpacing: 2 }}&gt;交付&lt;/Text&gt;&#10;      &lt;Text style={{ color: &quot;#D1D5DB&quot;, fontSize: 16, marginTop: 5 }}&gt;代码、文档、部署说明、测试用例&lt;/Text&gt;&#10;    &lt;/Box&gt;&#10;    &lt;Box style={{ flex: 1 }}&gt;&#10;      &lt;Text style={{ color: &quot;#6B7280&quot;, fontSize: 12, letterSpacing: 2 }}&gt;时间&lt;/Text&gt;&#10;      &lt;Text style={{ color: &quot;#D1D5DB&quot;, fontSize: 16, marginTop: 5 }}&gt;2026 年 10 月&lt;/Text&gt;&#10;    &lt;/Box&gt;&#10;  &lt;/Box&gt;&#10;&#10;  &lt;Text style={{ color: &quot;#4B5563&quot;, fontSize: 14, marginTop: 16 }}&gt;本项目使用 CordiSwarm 智能体编排框架构建，运行于 Node 22 与 TypeScript 之上，前端为 Vue 3 与 Vite&lt;/Text&gt;&#10;&lt;/Slide&gt;&#10;"/>
+        <p:cNvPr id="1" name="" descr="&lt;Slide style={{ background: &quot;#0B1220&quot;, padding: &quot;42px 72px 40px&quot;, display: &quot;flex&quot;, flexDirection: &quot;column&quot; }}&gt;&#10;  &lt;Text style={{ color: &quot;#F59E0B&quot;, fontSize: 15, letterSpacing: 5, fontWeight: 600 }}&gt;2026 FINTECHATHON · 人工智能赛道&lt;/Text&gt;&#10;  &lt;Text style={{ color: &quot;#F7F4EC&quot;, fontSize: 66, fontWeight: 700, lineHeight: 1.2, marginTop: 20 }}&gt;面向金融的蜂群多智能体系统&lt;/Text&gt;&#10;  &lt;Box style={{ width: 96, height: 6, background: &quot;#22C55E&quot;, marginTop: 16 }} /&gt;&#10;  &lt;Text style={{ color: &quot;#9CA3AF&quot;, fontSize: 21, lineHeight: 1.6, marginTop: 16 }}&gt;七个角色分工完成一次银行事务，从听懂到办完全程可追溯&lt;/Text&gt;&#10;&#10;  &lt;Box style={{ display: &quot;flex&quot;, flexDirection: &quot;row&quot;, gap: 14, marginTop: 30 }}&gt;&#10;    &lt;Box style={{ flex: 1, background: &quot;rgba(34,197,94,0.10)&quot;, border: &quot;1px solid rgba(34,197,94,0.45)&quot;, borderRadius: 10, padding: &quot;22px 18px&quot; }}&gt;&#10;      &lt;Text style={{ color: &quot;#22C55E&quot;, fontSize: 20, fontWeight: 700 }}&gt;意图官&lt;/Text&gt;&#10;      &lt;Text style={{ color: &quot;#9CA3AF&quot;, fontSize: 14, lineHeight: 1.55, marginTop: 6 }}&gt;听懂诉求，抽出工具与槽位&lt;/Text&gt;&#10;    &lt;/Box&gt;&#10;    &lt;Box style={{ flex: 1, background: &quot;rgba(245,158,11,0.10)&quot;, border: &quot;1px solid rgba(245,158,11,0.45)&quot;, borderRadius: 10, padding: &quot;26px 18px&quot; }}&gt;&#10;      &lt;Text style={{ color: &quot;#F59E0B&quot;, fontSize: 20, fontWeight: 700 }}&gt;风控官&lt;/Text&gt;&#10;      &lt;Text style={{ color: &quot;#9CA3AF&quot;, fontSize: 14, lineHeight: 1.55, marginTop: 6 }}&gt;四维叠加判风险等级&lt;/Text&gt;&#10;    &lt;/Box&gt;&#10;    &lt;Box style={{ flex: 1, background: &quot;rgba(245,158,11,0.10)&quot;, border: &quot;1px solid rgba(245,158,11,0.45)&quot;, borderRadius: 10, padding: &quot;26px 18px&quot; }}&gt;&#10;      &lt;Text style={{ color: &quot;#F59E0B&quot;, fontSize: 20, fontWeight: 700 }}&gt;合规官&lt;/Text&gt;&#10;      &lt;Text style={{ color: &quot;#9CA3AF&quot;, fontSize: 14, lineHeight: 1.55, marginTop: 6 }}&gt;查收款人来源与白名单&lt;/Text&gt;&#10;    &lt;/Box&gt;&#10;    &lt;Box style={{ flex: 1, background: &quot;rgba(107,114,128,0.12)&quot;, border: &quot;1px solid rgba(107,114,128,0.45)&quot;, borderRadius: 10, padding: &quot;26px 18px&quot; }}&gt;&#10;      &lt;Text style={{ color: &quot;#D1D5DB&quot;, fontSize: 20, fontWeight: 700 }}&gt;体验官&lt;/Text&gt;&#10;      &lt;Text style={{ color: &quot;#9CA3AF&quot;, fontSize: 14, lineHeight: 1.55, marginTop: 6 }}&gt;指出缺什么并给替代路径&lt;/Text&gt;&#10;    &lt;/Box&gt;&#10;    &lt;Box style={{ flex: 1, background: &quot;rgba(59,130,246,0.12)&quot;, border: &quot;1px solid rgba(59,130,246,0.45)&quot;, borderRadius: 10, padding: &quot;26px 18px&quot; }}&gt;&#10;      &lt;Text style={{ color: &quot;#93C5FD&quot;, fontSize: 20, fontWeight: 700 }}&gt;仲裁官&lt;/Text&gt;&#10;      &lt;Text style={{ color: &quot;#9CA3AF&quot;, fontSize: 14, lineHeight: 1.55, marginTop: 6 }}&gt;取最高风险并合并理由&lt;/Text&gt;&#10;    &lt;/Box&gt;&#10;  &lt;/Box&gt;&#10;&#10;  &lt;Box style={{ display: &quot;flex&quot;, flexDirection: &quot;row&quot;, gap: 14, marginTop: 16 }}&gt;&#10;    &lt;Box style={{ flex: 1, background: &quot;rgba(34,197,94,0.07)&quot;, border: &quot;1px solid rgba(34,197,94,0.3)&quot;, borderRadius: 10, padding: &quot;26px 18px&quot; }}&gt;&#10;      &lt;Text style={{ color: &quot;#22C55E&quot;, fontSize: 20, fontWeight: 700 }}&gt;执行官&lt;/Text&gt;&#10;      &lt;Text style={{ color: &quot;#9CA3AF&quot;, fontSize: 14, lineHeight: 1.55, marginTop: 6 }}&gt;按确认令牌执行写操作&lt;/Text&gt;&#10;    &lt;/Box&gt;&#10;    &lt;Box style={{ flex: 1, background: &quot;rgba(34,197,94,0.07)&quot;, border: &quot;1px solid rgba(34,197,94,0.3)&quot;, borderRadius: 10, padding: &quot;26px 18px&quot; }}&gt;&#10;      &lt;Text style={{ color: &quot;#22C55E&quot;, fontSize: 20, fontWeight: 700 }}&gt;审计官&lt;/Text&gt;&#10;      &lt;Text style={{ color: &quot;#9CA3AF&quot;, fontSize: 14, lineHeight: 1.55, marginTop: 6 }}&gt;写入哈希链，序号递增&lt;/Text&gt;&#10;    &lt;/Box&gt;&#10;    &lt;Box style={{ flex: 1.4, background: &quot;rgba(107,114,128,0.10)&quot;, border: &quot;1px solid rgba(107,114,128,0.3)&quot;, borderRadius: 10, padding: &quot;26px 18px&quot; }}&gt;&#10;      &lt;Text style={{ color: &quot;#D1D5DB&quot;, fontSize: 20, fontWeight: 700 }}&gt;六个赛题场景全部打通&lt;/Text&gt;&#10;      &lt;Text style={{ color: &quot;#9CA3AF&quot;, fontSize: 14, lineHeight: 1.55, marginTop: 6 }}&gt;转账、账单、理财、卡片、订阅、跨场景联动&lt;/Text&gt;&#10;    &lt;/Box&gt;&#10;  &lt;/Box&gt;&#10;&#10;  &lt;Box style={{ display: &quot;flex&quot;, flexDirection: &quot;row&quot;, gap: 14, marginTop: 18, borderTop: &quot;1px solid #243044&quot;, paddingTop: 22 }}&gt;&#10;    &lt;Box style={{ flex: 1 }}&gt;&#10;      &lt;Text style={{ color: &quot;#6B7280&quot;, fontSize: 12, letterSpacing: 2 }}&gt;团队&lt;/Text&gt;&#10;      &lt;Text style={{ color: &quot;#D1D5DB&quot;, fontSize: 16, marginTop: 5 }}&gt;CordiBank 蜂群项目组&lt;/Text&gt;&#10;    &lt;/Box&gt;&#10;    &lt;Box style={{ flex: 1 }}&gt;&#10;      &lt;Text style={{ color: &quot;#6B7280&quot;, fontSize: 12, letterSpacing: 2 }}&gt;规模&lt;/Text&gt;&#10;      &lt;Text style={{ color: &quot;#D1D5DB&quot;, fontSize: 16, marginTop: 5 }}&gt;91 项测试全通，21 个内置工具&lt;/Text&gt;&#10;    &lt;/Box&gt;&#10;    &lt;Box style={{ flex: 1 }}&gt;&#10;      &lt;Text style={{ color: &quot;#6B7280&quot;, fontSize: 12, letterSpacing: 2 }}&gt;交付&lt;/Text&gt;&#10;      &lt;Text style={{ color: &quot;#D1D5DB&quot;, fontSize: 16, marginTop: 5 }}&gt;代码、文档、部署说明、测试用例&lt;/Text&gt;&#10;    &lt;/Box&gt;&#10;    &lt;Box style={{ flex: 1 }}&gt;&#10;      &lt;Text style={{ color: &quot;#6B7280&quot;, fontSize: 12, letterSpacing: 2 }}&gt;时间&lt;/Text&gt;&#10;      &lt;Text style={{ color: &quot;#D1D5DB&quot;, fontSize: 16, marginTop: 5 }}&gt;2026 年 10 月&lt;/Text&gt;&#10;    &lt;/Box&gt;&#10;  &lt;/Box&gt;&#10;&#10;  &lt;Text style={{ color: &quot;#4B5563&quot;, fontSize: 14, marginTop: 16 }}&gt;本项目使用 CordiSwarm 智能体编排框架构建，运行于 Node 22 与 TypeScript 之上，前端为 Vue 3 与 Vite&lt;/Text&gt;&#10;&lt;/Slide&gt;&#10;"/>
         <p:cNvGrpSpPr/>
         <p:nvPr/>
       </p:nvGrpSpPr>
@@ -1336,7 +725,7 @@
                 <a:latin typeface="Microsoft YaHei"/>
                 <a:ea typeface="Microsoft YaHei"/>
               </a:rPr>
-              <a:t>五个角色分工完成一次银行事务，从听懂到办完全程可追溯</a:t>
+              <a:t>七个角色分工完成一次银行事务，从听懂到办完全程可追溯</a:t>
             </a:r>
             <a:endParaRPr/>
           </a:p>
@@ -2699,7 +2088,6 @@
       </p:sp>
     </p:spTree>
   </p:cSld>
-  <p:extLst/>
 </p:sld>
 </file>
 
@@ -3547,7 +2935,6 @@
       </p:sp>
     </p:spTree>
   </p:cSld>
-  <p:extLst/>
 </p:sld>
 </file>
 
@@ -5059,7 +4446,6 @@
       </p:sp>
     </p:spTree>
   </p:cSld>
-  <p:extLst/>
 </p:sld>
 </file>
 
@@ -6233,7 +5619,6 @@
       </p:sp>
     </p:spTree>
   </p:cSld>
-  <p:extLst/>
 </p:sld>
 </file>
 
@@ -6242,7 +5627,7 @@
   <p:cSld>
     <p:spTree>
       <p:nvGrpSpPr>
-        <p:cNvPr id="138" name="" descr="&lt;Slide style={{ background: &quot;#0B1220&quot;, padding: &quot;44px 72px 40px&quot;, display: &quot;flex&quot;, flexDirection: &quot;column&quot;, justifyContent: &quot;space-between&quot; }}&gt;&#10;  &lt;Box style={{ display: &quot;flex&quot;, flexDirection: &quot;column&quot;, alignItems: &quot;center&quot; }}&gt;&#10;    &lt;Text style={{ color: &quot;#6B7280&quot;, fontSize: 14, letterSpacing: 5 }}&gt;结语&lt;/Text&gt;&#10;    &lt;Text style={{ color: &quot;#F7F4EC&quot;, fontSize: 54, fontWeight: 700, lineHeight: 1.32, marginTop: 24, textAlign: &quot;center&quot; }}&gt;把一件事拆给多个专职角色，&lt;br /&gt;比换更强的模型更可靠&lt;/Text&gt;&#10;    &lt;Box style={{ width: 96, height: 6, background: &quot;#22C55E&quot;, marginTop: 28 }} /&gt;&#10;  &lt;/Box&gt;&#10;&#10;  &lt;Box style={{ display: &quot;flex&quot;, flexDirection: &quot;row&quot;, gap: 22 }}&gt;&#10;    &lt;Box style={{ flex: 1, background: &quot;rgba(34,197,94,0.08)&quot;, border: &quot;1px solid rgba(34,197,94,0.32)&quot;, borderRadius: 11, padding: &quot;20px 22px&quot; }}&gt;&#10;      &lt;Text style={{ color: &quot;#22C55E&quot;, fontSize: 30, fontWeight: 700, fontFamily: &quot;Consolas, monospace&quot; }}&gt;五角色&lt;/Text&gt;&#10;      &lt;Text style={{ color: &quot;#9CA3AF&quot;, fontSize: 16, lineHeight: 1.6, marginTop: 8 }}&gt;分工与仲裁&lt;/Text&gt;&#10;      &lt;Text style={{ color: &quot;#6B7280&quot;, fontSize: 14, lineHeight: 1.6, marginTop: 8 }}&gt;意图、风控、合规、体验并行评估，仲裁取最高&lt;/Text&gt;&#10;    &lt;/Box&gt;&#10;    &lt;Box style={{ flex: 1, background: &quot;rgba(245,158,11,0.08)&quot;, border: &quot;1px solid rgba(245,158,11,0.32)&quot;, borderRadius: 11, padding: &quot;20px 22px&quot; }}&gt;&#10;      &lt;Text style={{ color: &quot;#F59E0B&quot;, fontSize: 30, fontWeight: 700, fontFamily: &quot;Consolas, monospace&quot; }}&gt;三色分级&lt;/Text&gt;&#10;      &lt;Text style={{ color: &quot;#9CA3AF&quot;, fontSize: 16, lineHeight: 1.6, marginTop: 8 }}&gt;绿黄红与令牌&lt;/Text&gt;&#10;      &lt;Text style={{ color: &quot;#6B7280&quot;, fontSize: 14, lineHeight: 1.6, marginTop: 8 }}&gt;直连、令牌、拦截三档，判定带规则编号&lt;/Text&gt;&#10;    &lt;/Box&gt;&#10;    &lt;Box style={{ flex: 1, background: &quot;rgba(59,130,246,0.08)&quot;, border: &quot;1px solid rgba(59,130,246,0.32)&quot;, borderRadius: 11, padding: &quot;20px 22px&quot; }}&gt;&#10;      &lt;Text style={{ color: &quot;#3B82F6&quot;, fontSize: 30, fontWeight: 700, fontFamily: &quot;Consolas, monospace&quot; }}&gt;哈希链&lt;/Text&gt;&#10;      &lt;Text style={{ color: &quot;#9CA3AF&quot;, fontSize: 16, lineHeight: 1.6, marginTop: 8 }}&gt;全程可追溯&lt;/Text&gt;&#10;      &lt;Text style={{ color: &quot;#6B7280&quot;, fontSize: 14, lineHeight: 1.6, marginTop: 8 }}&gt;前序哈希串起每条记录，改一条即断链&lt;/Text&gt;&#10;    &lt;/Box&gt;&#10;  &lt;/Box&gt;&#10;&#10;  &lt;Box style={{ borderTop: &quot;1px solid #243044&quot;, paddingTop: 20, display: &quot;flex&quot;, flexDirection: &quot;row&quot;, gap: 20, alignItems: &quot;center&quot; }}&gt;&#10;    &lt;Text style={{ color: &quot;#9CA3AF&quot;, fontSize: 17 }}&gt;代码、文档、部署说明与全部测试用例随提交包提供，可在评委机器上复跑&lt;/Text&gt;&#10;    &lt;Box style={{ flex: 1 }} /&gt;&#10;    &lt;Text style={{ color: &quot;#6B7280&quot;, fontSize: 15 }}&gt;CordiBank 蜂群项目组&lt;/Text&gt;&#10;    &lt;Text style={{ color: &quot;#6B7280&quot;, fontSize: 15 }}&gt;2026 年 10 月&lt;/Text&gt;&#10;  &lt;/Box&gt;&#10;&lt;/Slide&gt;&#10;"/>
+        <p:cNvPr id="138" name="" descr="&lt;Slide style={{ background: &quot;#0B1220&quot;, padding: &quot;44px 72px 40px&quot;, display: &quot;flex&quot;, flexDirection: &quot;column&quot;, justifyContent: &quot;space-between&quot; }}&gt;&#10;  &lt;Box style={{ display: &quot;flex&quot;, flexDirection: &quot;column&quot;, alignItems: &quot;center&quot; }}&gt;&#10;    &lt;Text style={{ color: &quot;#6B7280&quot;, fontSize: 14, letterSpacing: 5 }}&gt;结语&lt;/Text&gt;&#10;    &lt;Text style={{ color: &quot;#F7F4EC&quot;, fontSize: 54, fontWeight: 700, lineHeight: 1.32, marginTop: 24, textAlign: &quot;center&quot; }}&gt;把一件事拆给多个专职角色，&lt;br /&gt;比换更强的模型更可靠&lt;/Text&gt;&#10;    &lt;Box style={{ width: 96, height: 6, background: &quot;#22C55E&quot;, marginTop: 28 }} /&gt;&#10;  &lt;/Box&gt;&#10;&#10;  &lt;Box style={{ display: &quot;flex&quot;, flexDirection: &quot;row&quot;, gap: 22 }}&gt;&#10;    &lt;Box style={{ flex: 1, background: &quot;rgba(34,197,94,0.08)&quot;, border: &quot;1px solid rgba(34,197,94,0.32)&quot;, borderRadius: 11, padding: &quot;20px 22px&quot; }}&gt;&#10;      &lt;Text style={{ color: &quot;#22C55E&quot;, fontSize: 30, fontWeight: 700, fontFamily: &quot;Consolas, monospace&quot; }}&gt;七个角色&lt;/Text&gt;&#10;      &lt;Text style={{ color: &quot;#9CA3AF&quot;, fontSize: 16, lineHeight: 1.6, marginTop: 8 }}&gt;分工与仲裁&lt;/Text&gt;&#10;      &lt;Text style={{ color: &quot;#6B7280&quot;, fontSize: 14, lineHeight: 1.6, marginTop: 8 }}&gt;意图、风控、合规、体验并行评估，仲裁取最高&lt;/Text&gt;&#10;    &lt;/Box&gt;&#10;    &lt;Box style={{ flex: 1, background: &quot;rgba(245,158,11,0.08)&quot;, border: &quot;1px solid rgba(245,158,11,0.32)&quot;, borderRadius: 11, padding: &quot;20px 22px&quot; }}&gt;&#10;      &lt;Text style={{ color: &quot;#F59E0B&quot;, fontSize: 30, fontWeight: 700, fontFamily: &quot;Consolas, monospace&quot; }}&gt;三色分级&lt;/Text&gt;&#10;      &lt;Text style={{ color: &quot;#9CA3AF&quot;, fontSize: 16, lineHeight: 1.6, marginTop: 8 }}&gt;绿黄红与令牌&lt;/Text&gt;&#10;      &lt;Text style={{ color: &quot;#6B7280&quot;, fontSize: 14, lineHeight: 1.6, marginTop: 8 }}&gt;直连、令牌、拦截三档，判定带规则编号&lt;/Text&gt;&#10;    &lt;/Box&gt;&#10;    &lt;Box style={{ flex: 1, background: &quot;rgba(59,130,246,0.08)&quot;, border: &quot;1px solid rgba(59,130,246,0.32)&quot;, borderRadius: 11, padding: &quot;20px 22px&quot; }}&gt;&#10;      &lt;Text style={{ color: &quot;#3B82F6&quot;, fontSize: 30, fontWeight: 700, fontFamily: &quot;Consolas, monospace&quot; }}&gt;哈希链&lt;/Text&gt;&#10;      &lt;Text style={{ color: &quot;#9CA3AF&quot;, fontSize: 16, lineHeight: 1.6, marginTop: 8 }}&gt;全程可追溯&lt;/Text&gt;&#10;      &lt;Text style={{ color: &quot;#6B7280&quot;, fontSize: 14, lineHeight: 1.6, marginTop: 8 }}&gt;前序哈希串起每条记录，改一条即断链&lt;/Text&gt;&#10;    &lt;/Box&gt;&#10;  &lt;/Box&gt;&#10;&#10;  &lt;Box style={{ borderTop: &quot;1px solid #243044&quot;, paddingTop: 20, display: &quot;flex&quot;, flexDirection: &quot;row&quot;, gap: 20, alignItems: &quot;center&quot; }}&gt;&#10;    &lt;Text style={{ color: &quot;#9CA3AF&quot;, fontSize: 17 }}&gt;代码、文档、部署说明与全部测试用例随提交包提供，可在评委机器上复跑&lt;/Text&gt;&#10;    &lt;Box style={{ flex: 1 }} /&gt;&#10;    &lt;Text style={{ color: &quot;#6B7280&quot;, fontSize: 15 }}&gt;CordiBank 蜂群项目组&lt;/Text&gt;&#10;    &lt;Text style={{ color: &quot;#6B7280&quot;, fontSize: 15 }}&gt;2026 年 10 月&lt;/Text&gt;&#10;  &lt;/Box&gt;&#10;&lt;/Slide&gt;&#10;"/>
         <p:cNvGrpSpPr/>
         <p:nvPr/>
       </p:nvGrpSpPr>
@@ -6454,7 +5839,7 @@
                 <a:latin typeface="Consolas"/>
                 <a:ea typeface="Consolas"/>
               </a:rPr>
-              <a:t>五角色</a:t>
+              <a:t>七个角色</a:t>
             </a:r>
             <a:endParaRPr/>
           </a:p>
@@ -6997,7 +6382,6 @@
       </p:sp>
     </p:spTree>
   </p:cSld>
-  <p:extLst/>
 </p:sld>
 </file>
 
@@ -7946,7 +7330,6 @@
       </p:sp>
     </p:spTree>
   </p:cSld>
-  <p:extLst/>
 </p:sld>
 </file>
 
@@ -8778,7 +8161,6 @@
       </p:sp>
     </p:spTree>
   </p:cSld>
-  <p:extLst/>
 </p:sld>
 </file>
 
@@ -8787,7 +8169,7 @@
   <p:cSld>
     <p:spTree>
       <p:nvGrpSpPr>
-        <p:cNvPr id="209" name="" descr="&lt;Slide style={{ background: &quot;#0B1220&quot;, padding: &quot;44px 72px&quot;, display: &quot;flex&quot;, flexDirection: &quot;column&quot; }}&gt;&#10;  &lt;Text style={{ color: &quot;#6B7280&quot;, fontSize: 14, letterSpacing: 3 }}&gt;方案&lt;/Text&gt;&#10;  &lt;Text style={{ color: &quot;#F7F4EC&quot;, fontSize: 34, fontWeight: 700, marginTop: 10 }}&gt;五个角色，各管一件事，结论汇到仲裁&lt;/Text&gt;&#10;&#10;  &lt;Box style={{ display: &quot;flex&quot;, flexDirection: &quot;column&quot;, alignItems: &quot;center&quot;, marginTop: 24, gap: 15 }}&gt;&#10;    &lt;Box style={{ background: &quot;rgba(34,197,94,0.12)&quot;, border: &quot;1px solid #22C55E&quot;, borderRadius: 10, padding: &quot;17px 32px&quot;, display: &quot;flex&quot;, flexDirection: &quot;row&quot;, alignItems: &quot;center&quot;, gap: 20 }}&gt;&#10;      &lt;Text style={{ color: &quot;#22C55E&quot;, fontSize: 20, fontWeight: 700 }}&gt;意图官&lt;/Text&gt;&#10;      &lt;Text style={{ color: &quot;#D1D5DB&quot;, fontSize: 16 }}&gt;听懂诉求，抽出工具与槽位，缺参数就问&lt;/Text&gt;&#10;    &lt;/Box&gt;&#10;    &lt;Text style={{ color: &quot;#4B5563&quot;, fontSize: 16 }}&gt;↓ 派发&lt;/Text&gt;&#10;    &lt;Box style={{ display: &quot;flex&quot;, flexDirection: &quot;row&quot;, gap: 20 }}&gt;&#10;      &lt;Box style={{ width: 300, background: &quot;rgba(245,158,11,0.10)&quot;, border: &quot;1px solid rgba(245,158,11,0.5)&quot;, borderRadius: 10, padding: &quot;22px 20px&quot; }}&gt;&#10;        &lt;Text style={{ color: &quot;#F59E0B&quot;, fontSize: 19, fontWeight: 700 }}&gt;风控官&lt;/Text&gt;&#10;        &lt;Text style={{ color: &quot;#9CA3AF&quot;, fontSize: 15, lineHeight: 1.65, marginTop: 8 }}&gt;按策略判风险，四维叠加，输出命中规则&lt;/Text&gt;&#10;      &lt;/Box&gt;&#10;      &lt;Box style={{ width: 300, background: &quot;rgba(239,68,68,0.10)&quot;, border: &quot;1px solid rgba(239,68,68,0.5)&quot;, borderRadius: 10, padding: &quot;22px 20px&quot; }}&gt;&#10;        &lt;Text style={{ color: &quot;#EF4444&quot;, fontSize: 19, fontWeight: 700 }}&gt;合规官&lt;/Text&gt;&#10;        &lt;Text style={{ color: &quot;#9CA3AF&quot;, fontSize: 15, lineHeight: 1.65, marginTop: 8 }}&gt;查收款人来源，查工具白名单，只做否决&lt;/Text&gt;&#10;      &lt;/Box&gt;&#10;      &lt;Box style={{ width: 300, background: &quot;rgba(107,114,128,0.12)&quot;, border: &quot;1px solid rgba(107,114,128,0.5)&quot;, borderRadius: 10, padding: &quot;22px 20px&quot; }}&gt;&#10;        &lt;Text style={{ color: &quot;#D1D5DB&quot;, fontSize: 19, fontWeight: 700 }}&gt;体验官&lt;/Text&gt;&#10;        &lt;Text style={{ color: &quot;#9CA3AF&quot;, fontSize: 15, lineHeight: 1.65, marginTop: 8 }}&gt;判断还缺什么，给替代路径，不参与风险&lt;/Text&gt;&#10;      &lt;/Box&gt;&#10;    &lt;/Box&gt;&#10;    &lt;Text style={{ color: &quot;#4B5563&quot;, fontSize: 16 }}&gt;↓ 三份结论并行汇入&lt;/Text&gt;&#10;    &lt;Box style={{ background: &quot;rgba(59,130,246,0.12)&quot;, border: &quot;1px solid #3B82F6&quot;, borderRadius: 10, padding: &quot;17px 32px&quot;, display: &quot;flex&quot;, flexDirection: &quot;row&quot;, alignItems: &quot;center&quot;, gap: 20 }}&gt;&#10;      &lt;Text style={{ color: &quot;#3B82F6&quot;, fontSize: 20, fontWeight: 700 }}&gt;仲裁官&lt;/Text&gt;&#10;      &lt;Text style={{ color: &quot;#D1D5DB&quot;, fontSize: 16 }}&gt;取最高风险，合并理由，任一否决即拦&lt;/Text&gt;&#10;    &lt;/Box&gt;&#10;    &lt;Box style={{ display: &quot;flex&quot;, flexDirection: &quot;row&quot;, gap: 20, marginTop: 4 }}&gt;&#10;      &lt;Box style={{ background: &quot;rgba(34,197,94,0.10)&quot;, border: &quot;1px solid rgba(34,197,94,0.5)&quot;, borderRadius: 10, padding: &quot;16px 28px&quot; }}&gt;&#10;        &lt;Text style={{ color: &quot;#22C55E&quot;, fontSize: 18, fontWeight: 700 }}&gt;执行官　执行或签发令牌&lt;/Text&gt;&#10;      &lt;/Box&gt;&#10;      &lt;Box style={{ background: &quot;rgba(34,197,94,0.10)&quot;, border: &quot;1px solid rgba(34,197,94,0.5)&quot;, borderRadius: 10, padding: &quot;16px 28px&quot; }}&gt;&#10;        &lt;Text style={{ color: &quot;#22C55E&quot;, fontSize: 18, fontWeight: 700 }}&gt;审计官　写入哈希链&lt;/Text&gt;&#10;      &lt;/Box&gt;&#10;    &lt;/Box&gt;&#10;  &lt;/Box&gt;&#10;&lt;/Slide&gt;&#10;"/>
+        <p:cNvPr id="209" name="" descr="&lt;Slide style={{ background: &quot;#0B1220&quot;, padding: &quot;44px 72px&quot;, display: &quot;flex&quot;, flexDirection: &quot;column&quot; }}&gt;&#10;  &lt;Text style={{ color: &quot;#6B7280&quot;, fontSize: 14, letterSpacing: 3 }}&gt;方案&lt;/Text&gt;&#10;  &lt;Text style={{ color: &quot;#F7F4EC&quot;, fontSize: 34, fontWeight: 700, marginTop: 10 }}&gt;七个角色，各管一件事，结论汇到仲裁&lt;/Text&gt;&#10;&#10;  &lt;Box style={{ display: &quot;flex&quot;, flexDirection: &quot;column&quot;, marginTop: 22, gap: 13 }}&gt;&#10;    &lt;Box style={{ alignSelf: &quot;center&quot;, background: &quot;rgba(34,197,94,0.12)&quot;, border: &quot;1px solid #22C55E&quot;, borderRadius: 10, padding: &quot;17px 32px&quot;, display: &quot;flex&quot;, flexDirection: &quot;row&quot;, alignItems: &quot;center&quot;, gap: 20 }}&gt;&#10;      &lt;Text style={{ color: &quot;#22C55E&quot;, fontSize: 20, fontWeight: 700 }}&gt;意图官&lt;/Text&gt;&#10;      &lt;Text style={{ color: &quot;#D1D5DB&quot;, fontSize: 16 }}&gt;听懂诉求，抽出工具与槽位，缺参数就问&lt;/Text&gt;&#10;    &lt;/Box&gt;&#10;    &lt;Text style={{ color: &quot;#4B5563&quot;, fontSize: 16, textAlign: &quot;center&quot; }}&gt;↓ 派发&lt;/Text&gt;&#10;    &lt;Box style={{ display: &quot;flex&quot;, flexDirection: &quot;row&quot;, gap: 20 }}&gt;&#10;      &lt;Box style={{ flex: 1, background: &quot;rgba(245,158,11,0.10)&quot;, border: &quot;1px solid rgba(245,158,11,0.5)&quot;, borderRadius: 10, padding: &quot;22px 20px&quot; }}&gt;&#10;        &lt;Text style={{ color: &quot;#F59E0B&quot;, fontSize: 19, fontWeight: 700 }}&gt;风控官&lt;/Text&gt;&#10;        &lt;Text style={{ color: &quot;#9CA3AF&quot;, fontSize: 15, lineHeight: 1.65, marginTop: 8 }}&gt;按策略判风险，四维叠加，输出命中规则&lt;/Text&gt;&#10;      &lt;/Box&gt;&#10;      &lt;Box style={{ flex: 1, background: &quot;rgba(239,68,68,0.10)&quot;, border: &quot;1px solid rgba(239,68,68,0.5)&quot;, borderRadius: 10, padding: &quot;22px 20px&quot; }}&gt;&#10;        &lt;Text style={{ color: &quot;#EF4444&quot;, fontSize: 19, fontWeight: 700 }}&gt;合规官&lt;/Text&gt;&#10;        &lt;Text style={{ color: &quot;#9CA3AF&quot;, fontSize: 15, lineHeight: 1.65, marginTop: 8 }}&gt;查收款人来源，查工具白名单，只做否决&lt;/Text&gt;&#10;      &lt;/Box&gt;&#10;      &lt;Box style={{ flex: 1, background: &quot;rgba(107,114,128,0.12)&quot;, border: &quot;1px solid rgba(107,114,128,0.5)&quot;, borderRadius: 10, padding: &quot;22px 20px&quot; }}&gt;&#10;        &lt;Text style={{ color: &quot;#D1D5DB&quot;, fontSize: 19, fontWeight: 700 }}&gt;体验官&lt;/Text&gt;&#10;        &lt;Text style={{ color: &quot;#9CA3AF&quot;, fontSize: 15, lineHeight: 1.65, marginTop: 8 }}&gt;判断还缺什么，给替代路径，不参与风险&lt;/Text&gt;&#10;      &lt;/Box&gt;&#10;      &lt;Box style={{ flex: 1, background: &quot;rgba(34,197,94,0.06)&quot;, border: &quot;1px solid rgba(34,197,94,0.32)&quot;, borderRadius: 10, padding: &quot;22px 20px&quot; }}&gt;&#10;        &lt;Text style={{ color: &quot;#22C55E&quot;, fontSize: 19, fontWeight: 700 }}&gt;三路并行&lt;/Text&gt;&#10;        &lt;Text style={{ color: &quot;#9CA3AF&quot;, fontSize: 15, lineHeight: 1.65, marginTop: 8 }}&gt;同时执行，任一失败只降级该维度，其余照常&lt;/Text&gt;&#10;      &lt;/Box&gt;&#10;    &lt;/Box&gt;&#10;    &lt;Text style={{ color: &quot;#4B5563&quot;, fontSize: 16, textAlign: &quot;center&quot; }}&gt;↓ 三份结论并行汇入&lt;/Text&gt;&#10;    &lt;Box style={{ alignSelf: &quot;center&quot;, background: &quot;rgba(59,130,246,0.12)&quot;, border: &quot;1px solid #3B82F6&quot;, borderRadius: 10, padding: &quot;17px 32px&quot;, display: &quot;flex&quot;, flexDirection: &quot;row&quot;, alignItems: &quot;center&quot;, gap: 20 }}&gt;&#10;      &lt;Text style={{ color: &quot;#3B82F6&quot;, fontSize: 20, fontWeight: 700 }}&gt;仲裁官&lt;/Text&gt;&#10;      &lt;Text style={{ color: &quot;#D1D5DB&quot;, fontSize: 16 }}&gt;取最高风险，合并理由，任一否决即拦&lt;/Text&gt;&#10;    &lt;/Box&gt;&#10;    &lt;Box style={{ display: &quot;flex&quot;, flexDirection: &quot;row&quot;, gap: 20, marginTop: 4 }}&gt;&#10;      &lt;Box style={{ background: &quot;rgba(34,197,94,0.10)&quot;, border: &quot;1px solid rgba(34,197,94,0.5)&quot;, borderRadius: 10, padding: &quot;16px 28px&quot; }}&gt;&#10;        &lt;Text style={{ color: &quot;#22C55E&quot;, fontSize: 18, fontWeight: 700 }}&gt;执行官　执行或签发令牌&lt;/Text&gt;&#10;      &lt;/Box&gt;&#10;      &lt;Box style={{ background: &quot;rgba(34,197,94,0.10)&quot;, border: &quot;1px solid rgba(34,197,94,0.5)&quot;, borderRadius: 10, padding: &quot;16px 28px&quot; }}&gt;&#10;        &lt;Text style={{ color: &quot;#22C55E&quot;, fontSize: 18, fontWeight: 700 }}&gt;审计官　写入哈希链&lt;/Text&gt;&#10;      &lt;/Box&gt;&#10;    &lt;/Box&gt;&#10;&#10;    &lt;Box style={{ display: &quot;flex&quot;, flexDirection: &quot;row&quot;, gap: 20, marginTop: 18, borderTop: &quot;1px solid #243044&quot;, paddingTop: 16 }}&gt;&#10;      &lt;Box style={{ flex: 1, background: &quot;rgba(59,130,246,0.07)&quot;, border: &quot;1px solid rgba(59,130,246,0.3)&quot;, borderRadius: 10, padding: &quot;14px 18px&quot; }}&gt;&#10;        &lt;Text style={{ color: &quot;#93C5FD&quot;, fontSize: 16, fontWeight: 700 }}&gt;模型只在一环出现&lt;/Text&gt;&#10;        &lt;Text style={{ color: &quot;#9CA3AF&quot;, fontSize: 15, lineHeight: 1.6, marginTop: 5 }}&gt;模型只在意图官解析诉求与选工具，风险判定与执行全在代码层。&lt;/Text&gt;&#10;      &lt;/Box&gt;&#10;      &lt;Box style={{ flex: 1, background: &quot;rgba(107,114,128,0.10)&quot;, border: &quot;1px solid rgba(107,114,128,0.3)&quot;, borderRadius: 10, padding: &quot;14px 18px&quot; }}&gt;&#10;        &lt;Text style={{ color: &quot;#D1D5DB&quot;, fontSize: 16, fontWeight: 700 }}&gt;每个角色留痕&lt;/Text&gt;&#10;        &lt;Text style={{ color: &quot;#9CA3AF&quot;, fontSize: 15, lineHeight: 1.6, marginTop: 5 }}&gt;七个角色的结论与耗时都进审计，界面上可逐条展开核对。&lt;/Text&gt;&#10;      &lt;/Box&gt;&#10;    &lt;/Box&gt;&#10;  &lt;/Box&gt;&#10;&lt;/Slide&gt;&#10;"/>
         <p:cNvGrpSpPr/>
         <p:nvPr/>
       </p:nvGrpSpPr>
@@ -8887,7 +8269,7 @@
                 <a:latin typeface="Microsoft YaHei"/>
                 <a:ea typeface="Microsoft YaHei"/>
               </a:rPr>
-              <a:t>五个角色，各管一件事，结论汇到仲裁</a:t>
+              <a:t>七个角色，各管一件事，结论汇到仲裁</a:t>
             </a:r>
             <a:endParaRPr/>
           </a:p>
@@ -8901,7 +8283,7 @@
         </p:nvSpPr>
         <p:spPr>
           <a:xfrm rot="0" flipH="0" flipV="0">
-            <a:off x="4038600" y="1295400"/>
+            <a:off x="4038600" y="1276350"/>
             <a:ext cx="4114800" cy="552450"/>
           </a:xfrm>
           <a:prstGeom prst="roundRect">
@@ -8934,7 +8316,7 @@
         </p:nvSpPr>
         <p:spPr>
           <a:xfrm rot="0" flipH="0" flipV="0">
-            <a:off x="4343400" y="1457325"/>
+            <a:off x="4343400" y="1438275"/>
             <a:ext cx="571500" cy="228600"/>
           </a:xfrm>
           <a:prstGeom prst="rect"/>
@@ -8969,7 +8351,7 @@
         </p:nvSpPr>
         <p:spPr>
           <a:xfrm rot="0" flipH="0" flipV="0">
-            <a:off x="5105400" y="1476375"/>
+            <a:off x="5105400" y="1457325"/>
             <a:ext cx="2743200" cy="190500"/>
           </a:xfrm>
           <a:prstGeom prst="rect"/>
@@ -9004,15 +8386,15 @@
         </p:nvSpPr>
         <p:spPr>
           <a:xfrm rot="0" flipH="0" flipV="0">
-            <a:off x="5886450" y="1990725"/>
-            <a:ext cx="428625" cy="190500"/>
-          </a:xfrm>
-          <a:prstGeom prst="rect"/>
-        </p:spPr>
-        <p:txBody>
-          <a:bodyPr wrap="none" lIns="0" tIns="0" rIns="0" bIns="0"/>
-          <a:p>
-            <a:pPr>
+            <a:off x="685800" y="1952625"/>
+            <a:ext cx="10820400" cy="190500"/>
+          </a:xfrm>
+          <a:prstGeom prst="rect"/>
+        </p:spPr>
+        <p:txBody>
+          <a:bodyPr wrap="none" lIns="0" tIns="0" rIns="0" bIns="0"/>
+          <a:p>
+            <a:pPr algn="ctr">
               <a:lnSpc>
                 <a:spcPct val="100000"/>
               </a:lnSpc>
@@ -9049,8 +8431,8 @@
         </p:nvSpPr>
         <p:spPr>
           <a:xfrm rot="0" flipH="0" flipV="0">
-            <a:off x="1619250" y="2324100"/>
-            <a:ext cx="2857500" cy="1285875"/>
+            <a:off x="685800" y="2266950"/>
+            <a:ext cx="2562225" cy="1285875"/>
           </a:xfrm>
           <a:prstGeom prst="roundRect">
             <a:avLst>
@@ -9084,8 +8466,8 @@
         </p:nvSpPr>
         <p:spPr>
           <a:xfrm rot="0" flipH="0" flipV="0">
-            <a:off x="1809750" y="2533650"/>
-            <a:ext cx="2476500" cy="219075"/>
+            <a:off x="876300" y="2476500"/>
+            <a:ext cx="2181225" cy="219075"/>
           </a:xfrm>
           <a:prstGeom prst="rect"/>
         </p:spPr>
@@ -9119,8 +8501,8 @@
         </p:nvSpPr>
         <p:spPr>
           <a:xfrm rot="0" flipH="0" flipV="0">
-            <a:off x="1809750" y="2828925"/>
-            <a:ext cx="2476500" cy="571500"/>
+            <a:off x="876300" y="2771775"/>
+            <a:ext cx="2181225" cy="571500"/>
           </a:xfrm>
           <a:prstGeom prst="rect"/>
         </p:spPr>
@@ -9156,8 +8538,8 @@
         </p:nvSpPr>
         <p:spPr>
           <a:xfrm rot="0" flipH="0" flipV="0">
-            <a:off x="4667250" y="2324100"/>
-            <a:ext cx="2857500" cy="1285875"/>
+            <a:off x="3438525" y="2266950"/>
+            <a:ext cx="2562225" cy="1285875"/>
           </a:xfrm>
           <a:prstGeom prst="roundRect">
             <a:avLst>
@@ -9191,8 +8573,8 @@
         </p:nvSpPr>
         <p:spPr>
           <a:xfrm rot="0" flipH="0" flipV="0">
-            <a:off x="4857750" y="2533650"/>
-            <a:ext cx="2476500" cy="219075"/>
+            <a:off x="3629025" y="2476500"/>
+            <a:ext cx="2181225" cy="219075"/>
           </a:xfrm>
           <a:prstGeom prst="rect"/>
         </p:spPr>
@@ -9226,8 +8608,8 @@
         </p:nvSpPr>
         <p:spPr>
           <a:xfrm rot="0" flipH="0" flipV="0">
-            <a:off x="4857750" y="2828925"/>
-            <a:ext cx="2476500" cy="571500"/>
+            <a:off x="3629025" y="2771775"/>
+            <a:ext cx="2181225" cy="571500"/>
           </a:xfrm>
           <a:prstGeom prst="rect"/>
         </p:spPr>
@@ -9263,8 +8645,8 @@
         </p:nvSpPr>
         <p:spPr>
           <a:xfrm rot="0" flipH="0" flipV="0">
-            <a:off x="7715250" y="2324100"/>
-            <a:ext cx="2857500" cy="1285875"/>
+            <a:off x="6191250" y="2266950"/>
+            <a:ext cx="2562225" cy="1285875"/>
           </a:xfrm>
           <a:prstGeom prst="roundRect">
             <a:avLst>
@@ -9298,8 +8680,8 @@
         </p:nvSpPr>
         <p:spPr>
           <a:xfrm rot="0" flipH="0" flipV="0">
-            <a:off x="7905750" y="2533650"/>
-            <a:ext cx="2476500" cy="219075"/>
+            <a:off x="6381750" y="2476500"/>
+            <a:ext cx="2181225" cy="219075"/>
           </a:xfrm>
           <a:prstGeom prst="rect"/>
         </p:spPr>
@@ -9333,8 +8715,8 @@
         </p:nvSpPr>
         <p:spPr>
           <a:xfrm rot="0" flipH="0" flipV="0">
-            <a:off x="7905750" y="2828925"/>
-            <a:ext cx="2476500" cy="571500"/>
+            <a:off x="6381750" y="2771775"/>
+            <a:ext cx="2181225" cy="571500"/>
           </a:xfrm>
           <a:prstGeom prst="rect"/>
         </p:spPr>
@@ -9364,21 +8746,128 @@
       </p:sp>
       <p:sp>
         <p:nvSpPr>
-          <p:cNvPr id="226" name="" descr="{&quot;isTemplate&quot;:true,&quot;type&quot;:&quot;text&quot;}"/>
-          <p:cNvSpPr txBox="1"/>
-          <p:nvPr/>
-        </p:nvSpPr>
-        <p:spPr>
-          <a:xfrm rot="0" flipH="0" flipV="0">
-            <a:off x="5429250" y="3752850"/>
-            <a:ext cx="1343025" cy="190500"/>
-          </a:xfrm>
-          <a:prstGeom prst="rect"/>
-        </p:spPr>
-        <p:txBody>
-          <a:bodyPr wrap="none" lIns="0" tIns="0" rIns="0" bIns="0"/>
-          <a:p>
-            <a:pPr>
+          <p:cNvPr id="226" name=""/>
+          <p:cNvSpPr/>
+          <p:nvPr/>
+        </p:nvSpPr>
+        <p:spPr>
+          <a:xfrm rot="0" flipH="0" flipV="0">
+            <a:off x="8943975" y="2266950"/>
+            <a:ext cx="2562225" cy="1285875"/>
+          </a:xfrm>
+          <a:prstGeom prst="roundRect">
+            <a:avLst>
+              <a:gd name="adj" fmla="val 7407"/>
+            </a:avLst>
+          </a:prstGeom>
+          <a:solidFill>
+            <a:srgbClr val="22C55E">
+              <a:alpha val="6000"/>
+            </a:srgbClr>
+          </a:solidFill>
+          <a:ln w="12700">
+            <a:solidFill>
+              <a:srgbClr val="22C55E">
+                <a:alpha val="32000"/>
+              </a:srgbClr>
+            </a:solidFill>
+            <a:prstDash val="solid"/>
+          </a:ln>
+        </p:spPr>
+        <p:txBody>
+          <a:bodyPr/>
+          <a:p/>
+        </p:txBody>
+      </p:sp>
+      <p:sp>
+        <p:nvSpPr>
+          <p:cNvPr id="227" name="" descr="{&quot;isTemplate&quot;:true,&quot;type&quot;:&quot;text&quot;}"/>
+          <p:cNvSpPr txBox="1"/>
+          <p:nvPr/>
+        </p:nvSpPr>
+        <p:spPr>
+          <a:xfrm rot="0" flipH="0" flipV="0">
+            <a:off x="9134475" y="2476500"/>
+            <a:ext cx="2181225" cy="219075"/>
+          </a:xfrm>
+          <a:prstGeom prst="rect"/>
+        </p:spPr>
+        <p:txBody>
+          <a:bodyPr wrap="none" lIns="0" tIns="0" rIns="0" bIns="0"/>
+          <a:p>
+            <a:pPr>
+              <a:lnSpc>
+                <a:spcPct val="100000"/>
+              </a:lnSpc>
+            </a:pPr>
+            <a:r>
+              <a:rPr lang="zh-CN" sz="1425" b="1">
+                <a:solidFill>
+                  <a:srgbClr val="22C55E"/>
+                </a:solidFill>
+                <a:latin typeface="Microsoft YaHei"/>
+                <a:ea typeface="Microsoft YaHei"/>
+              </a:rPr>
+              <a:t>三路并行</a:t>
+            </a:r>
+            <a:endParaRPr/>
+          </a:p>
+        </p:txBody>
+      </p:sp>
+      <p:sp>
+        <p:nvSpPr>
+          <p:cNvPr id="228" name="" descr="{&quot;isTemplate&quot;:true,&quot;type&quot;:&quot;text&quot;}"/>
+          <p:cNvSpPr txBox="1"/>
+          <p:nvPr/>
+        </p:nvSpPr>
+        <p:spPr>
+          <a:xfrm rot="0" flipH="0" flipV="0">
+            <a:off x="9134475" y="2771775"/>
+            <a:ext cx="2181225" cy="571500"/>
+          </a:xfrm>
+          <a:prstGeom prst="rect"/>
+        </p:spPr>
+        <p:txBody>
+          <a:bodyPr wrap="square" lIns="0" tIns="0" rIns="0" bIns="0">
+            <a:normAutofit/>
+          </a:bodyPr>
+          <a:p>
+            <a:pPr>
+              <a:lnSpc>
+                <a:spcPct val="165000"/>
+              </a:lnSpc>
+            </a:pPr>
+            <a:r>
+              <a:rPr lang="zh-CN" sz="1125">
+                <a:solidFill>
+                  <a:srgbClr val="9CA3AF"/>
+                </a:solidFill>
+                <a:latin typeface="Microsoft YaHei"/>
+                <a:ea typeface="Microsoft YaHei"/>
+              </a:rPr>
+              <a:t>同时执行，任一失败只降级该维度，其余照常</a:t>
+            </a:r>
+            <a:endParaRPr/>
+          </a:p>
+        </p:txBody>
+      </p:sp>
+      <p:sp>
+        <p:nvSpPr>
+          <p:cNvPr id="229" name="" descr="{&quot;isTemplate&quot;:true,&quot;type&quot;:&quot;text&quot;}"/>
+          <p:cNvSpPr txBox="1"/>
+          <p:nvPr/>
+        </p:nvSpPr>
+        <p:spPr>
+          <a:xfrm rot="0" flipH="0" flipV="0">
+            <a:off x="685800" y="3676650"/>
+            <a:ext cx="10820400" cy="190500"/>
+          </a:xfrm>
+          <a:prstGeom prst="rect"/>
+        </p:spPr>
+        <p:txBody>
+          <a:bodyPr wrap="none" lIns="0" tIns="0" rIns="0" bIns="0"/>
+          <a:p>
+            <a:pPr algn="ctr">
               <a:lnSpc>
                 <a:spcPct val="100000"/>
               </a:lnSpc>
@@ -9409,13 +8898,13 @@
       </p:sp>
       <p:sp>
         <p:nvSpPr>
-          <p:cNvPr id="227" name=""/>
+          <p:cNvPr id="230" name=""/>
           <p:cNvSpPr/>
           <p:nvPr/>
         </p:nvSpPr>
         <p:spPr>
           <a:xfrm rot="0" flipH="0" flipV="0">
-            <a:off x="4114800" y="4086225"/>
+            <a:off x="4114800" y="3990975"/>
             <a:ext cx="3962400" cy="552450"/>
           </a:xfrm>
           <a:prstGeom prst="roundRect">
@@ -9442,13 +8931,13 @@
       </p:sp>
       <p:sp>
         <p:nvSpPr>
-          <p:cNvPr id="228" name="" descr="{&quot;isTemplate&quot;:true,&quot;type&quot;:&quot;text&quot;}"/>
-          <p:cNvSpPr txBox="1"/>
-          <p:nvPr/>
-        </p:nvSpPr>
-        <p:spPr>
-          <a:xfrm rot="0" flipH="0" flipV="0">
-            <a:off x="4419600" y="4248150"/>
+          <p:cNvPr id="231" name="" descr="{&quot;isTemplate&quot;:true,&quot;type&quot;:&quot;text&quot;}"/>
+          <p:cNvSpPr txBox="1"/>
+          <p:nvPr/>
+        </p:nvSpPr>
+        <p:spPr>
+          <a:xfrm rot="0" flipH="0" flipV="0">
+            <a:off x="4419600" y="4152900"/>
             <a:ext cx="571500" cy="228600"/>
           </a:xfrm>
           <a:prstGeom prst="rect"/>
@@ -9477,13 +8966,13 @@
       </p:sp>
       <p:sp>
         <p:nvSpPr>
-          <p:cNvPr id="229" name="" descr="{&quot;isTemplate&quot;:true,&quot;type&quot;:&quot;text&quot;}"/>
-          <p:cNvSpPr txBox="1"/>
-          <p:nvPr/>
-        </p:nvSpPr>
-        <p:spPr>
-          <a:xfrm rot="0" flipH="0" flipV="0">
-            <a:off x="5181600" y="4267200"/>
+          <p:cNvPr id="232" name="" descr="{&quot;isTemplate&quot;:true,&quot;type&quot;:&quot;text&quot;}"/>
+          <p:cNvSpPr txBox="1"/>
+          <p:nvPr/>
+        </p:nvSpPr>
+        <p:spPr>
+          <a:xfrm rot="0" flipH="0" flipV="0">
+            <a:off x="5181600" y="4171950"/>
             <a:ext cx="2590800" cy="190500"/>
           </a:xfrm>
           <a:prstGeom prst="rect"/>
@@ -9512,13 +9001,13 @@
       </p:sp>
       <p:sp>
         <p:nvSpPr>
-          <p:cNvPr id="230" name=""/>
+          <p:cNvPr id="233" name=""/>
           <p:cNvSpPr/>
           <p:nvPr/>
         </p:nvSpPr>
         <p:spPr>
           <a:xfrm rot="0" flipH="0" flipV="0">
-            <a:off x="3752850" y="4819650"/>
+            <a:off x="685800" y="4705350"/>
             <a:ext cx="2419350" cy="514350"/>
           </a:xfrm>
           <a:prstGeom prst="roundRect">
@@ -9547,13 +9036,13 @@
       </p:sp>
       <p:sp>
         <p:nvSpPr>
-          <p:cNvPr id="231" name="" descr="{&quot;isTemplate&quot;:true,&quot;type&quot;:&quot;text&quot;}"/>
-          <p:cNvSpPr txBox="1"/>
-          <p:nvPr/>
-        </p:nvSpPr>
-        <p:spPr>
-          <a:xfrm rot="0" flipH="0" flipV="0">
-            <a:off x="4019550" y="4972050"/>
+          <p:cNvPr id="234" name="" descr="{&quot;isTemplate&quot;:true,&quot;type&quot;:&quot;text&quot;}"/>
+          <p:cNvSpPr txBox="1"/>
+          <p:nvPr/>
+        </p:nvSpPr>
+        <p:spPr>
+          <a:xfrm rot="0" flipH="0" flipV="0">
+            <a:off x="952500" y="4857750"/>
             <a:ext cx="1885950" cy="209550"/>
           </a:xfrm>
           <a:prstGeom prst="rect"/>
@@ -9582,13 +9071,13 @@
       </p:sp>
       <p:sp>
         <p:nvSpPr>
-          <p:cNvPr id="232" name=""/>
+          <p:cNvPr id="235" name=""/>
           <p:cNvSpPr/>
           <p:nvPr/>
         </p:nvSpPr>
         <p:spPr>
           <a:xfrm rot="0" flipH="0" flipV="0">
-            <a:off x="6362700" y="4819650"/>
+            <a:off x="3295650" y="4705350"/>
             <a:ext cx="2076450" cy="514350"/>
           </a:xfrm>
           <a:prstGeom prst="roundRect">
@@ -9617,13 +9106,13 @@
       </p:sp>
       <p:sp>
         <p:nvSpPr>
-          <p:cNvPr id="233" name="" descr="{&quot;isTemplate&quot;:true,&quot;type&quot;:&quot;text&quot;}"/>
-          <p:cNvSpPr txBox="1"/>
-          <p:nvPr/>
-        </p:nvSpPr>
-        <p:spPr>
-          <a:xfrm rot="0" flipH="0" flipV="0">
-            <a:off x="6629400" y="4972050"/>
+          <p:cNvPr id="236" name="" descr="{&quot;isTemplate&quot;:true,&quot;type&quot;:&quot;text&quot;}"/>
+          <p:cNvSpPr txBox="1"/>
+          <p:nvPr/>
+        </p:nvSpPr>
+        <p:spPr>
+          <a:xfrm rot="0" flipH="0" flipV="0">
+            <a:off x="3562350" y="4857750"/>
             <a:ext cx="1543050" cy="209550"/>
           </a:xfrm>
           <a:prstGeom prst="rect"/>
@@ -9645,6 +9134,256 @@
                 <a:ea typeface="Microsoft YaHei"/>
               </a:rPr>
               <a:t>审计官　写入哈希链</a:t>
+            </a:r>
+            <a:endParaRPr/>
+          </a:p>
+        </p:txBody>
+      </p:sp>
+      <p:sp>
+        <p:nvSpPr>
+          <p:cNvPr id="237" name=""/>
+          <p:cNvSpPr/>
+          <p:nvPr/>
+        </p:nvSpPr>
+        <p:spPr>
+          <a:xfrm rot="0" flipH="0" flipV="0">
+            <a:off x="685800" y="5514975"/>
+            <a:ext cx="10820400" cy="952500"/>
+          </a:xfrm>
+          <a:custGeom>
+            <a:pathLst>
+              <a:path w="1136" h="100">
+                <a:moveTo>
+                  <a:pt x="0" y="0"/>
+                </a:moveTo>
+                <a:lnTo>
+                  <a:pt x="1136" y="0"/>
+                </a:lnTo>
+                <a:lnTo>
+                  <a:pt x="1136" y="1"/>
+                </a:lnTo>
+                <a:lnTo>
+                  <a:pt x="0" y="1"/>
+                </a:lnTo>
+                <a:close/>
+              </a:path>
+            </a:pathLst>
+          </a:custGeom>
+          <a:solidFill>
+            <a:srgbClr val="243044"/>
+          </a:solidFill>
+          <a:ln/>
+        </p:spPr>
+        <p:txBody>
+          <a:bodyPr/>
+          <a:p/>
+        </p:txBody>
+      </p:sp>
+      <p:sp>
+        <p:nvSpPr>
+          <p:cNvPr id="238" name=""/>
+          <p:cNvSpPr/>
+          <p:nvPr/>
+        </p:nvSpPr>
+        <p:spPr>
+          <a:xfrm rot="0" flipH="0" flipV="0">
+            <a:off x="685800" y="5676900"/>
+            <a:ext cx="5314950" cy="781050"/>
+          </a:xfrm>
+          <a:prstGeom prst="roundRect">
+            <a:avLst>
+              <a:gd name="adj" fmla="val 12195"/>
+            </a:avLst>
+          </a:prstGeom>
+          <a:solidFill>
+            <a:srgbClr val="3B82F6">
+              <a:alpha val="7000"/>
+            </a:srgbClr>
+          </a:solidFill>
+          <a:ln w="12700">
+            <a:solidFill>
+              <a:srgbClr val="3B82F6">
+                <a:alpha val="30000"/>
+              </a:srgbClr>
+            </a:solidFill>
+            <a:prstDash val="solid"/>
+          </a:ln>
+        </p:spPr>
+        <p:txBody>
+          <a:bodyPr/>
+          <a:p/>
+        </p:txBody>
+      </p:sp>
+      <p:sp>
+        <p:nvSpPr>
+          <p:cNvPr id="239" name="" descr="{&quot;isTemplate&quot;:true,&quot;type&quot;:&quot;text&quot;}"/>
+          <p:cNvSpPr txBox="1"/>
+          <p:nvPr/>
+        </p:nvSpPr>
+        <p:spPr>
+          <a:xfrm rot="0" flipH="0" flipV="0">
+            <a:off x="857250" y="5810250"/>
+            <a:ext cx="4972050" cy="190500"/>
+          </a:xfrm>
+          <a:prstGeom prst="rect"/>
+        </p:spPr>
+        <p:txBody>
+          <a:bodyPr wrap="none" lIns="0" tIns="0" rIns="0" bIns="0"/>
+          <a:p>
+            <a:pPr>
+              <a:lnSpc>
+                <a:spcPct val="100000"/>
+              </a:lnSpc>
+            </a:pPr>
+            <a:r>
+              <a:rPr lang="zh-CN" sz="1200" b="1">
+                <a:solidFill>
+                  <a:srgbClr val="93C5FD"/>
+                </a:solidFill>
+                <a:latin typeface="Microsoft YaHei"/>
+                <a:ea typeface="Microsoft YaHei"/>
+              </a:rPr>
+              <a:t>模型只在一环出现</a:t>
+            </a:r>
+            <a:endParaRPr/>
+          </a:p>
+        </p:txBody>
+      </p:sp>
+      <p:sp>
+        <p:nvSpPr>
+          <p:cNvPr id="240" name="" descr="{&quot;isTemplate&quot;:true,&quot;type&quot;:&quot;text&quot;}"/>
+          <p:cNvSpPr txBox="1"/>
+          <p:nvPr/>
+        </p:nvSpPr>
+        <p:spPr>
+          <a:xfrm rot="0" flipH="0" flipV="0">
+            <a:off x="857250" y="6048375"/>
+            <a:ext cx="4972050" cy="276225"/>
+          </a:xfrm>
+          <a:prstGeom prst="rect"/>
+        </p:spPr>
+        <p:txBody>
+          <a:bodyPr wrap="none" lIns="0" tIns="0" rIns="0" bIns="0"/>
+          <a:p>
+            <a:pPr>
+              <a:lnSpc>
+                <a:spcPct val="160000"/>
+              </a:lnSpc>
+            </a:pPr>
+            <a:r>
+              <a:rPr lang="zh-CN" sz="1125">
+                <a:solidFill>
+                  <a:srgbClr val="9CA3AF"/>
+                </a:solidFill>
+                <a:latin typeface="Microsoft YaHei"/>
+                <a:ea typeface="Microsoft YaHei"/>
+              </a:rPr>
+              <a:t>模型只在意图官解析诉求与选工具，风险判定与执行全在代码层。</a:t>
+            </a:r>
+            <a:endParaRPr/>
+          </a:p>
+        </p:txBody>
+      </p:sp>
+      <p:sp>
+        <p:nvSpPr>
+          <p:cNvPr id="241" name=""/>
+          <p:cNvSpPr/>
+          <p:nvPr/>
+        </p:nvSpPr>
+        <p:spPr>
+          <a:xfrm rot="0" flipH="0" flipV="0">
+            <a:off x="6191250" y="5676900"/>
+            <a:ext cx="5314950" cy="781050"/>
+          </a:xfrm>
+          <a:prstGeom prst="roundRect">
+            <a:avLst>
+              <a:gd name="adj" fmla="val 12195"/>
+            </a:avLst>
+          </a:prstGeom>
+          <a:solidFill>
+            <a:srgbClr val="6B7280">
+              <a:alpha val="10000"/>
+            </a:srgbClr>
+          </a:solidFill>
+          <a:ln w="12700">
+            <a:solidFill>
+              <a:srgbClr val="6B7280">
+                <a:alpha val="30000"/>
+              </a:srgbClr>
+            </a:solidFill>
+            <a:prstDash val="solid"/>
+          </a:ln>
+        </p:spPr>
+        <p:txBody>
+          <a:bodyPr/>
+          <a:p/>
+        </p:txBody>
+      </p:sp>
+      <p:sp>
+        <p:nvSpPr>
+          <p:cNvPr id="242" name="" descr="{&quot;isTemplate&quot;:true,&quot;type&quot;:&quot;text&quot;}"/>
+          <p:cNvSpPr txBox="1"/>
+          <p:nvPr/>
+        </p:nvSpPr>
+        <p:spPr>
+          <a:xfrm rot="0" flipH="0" flipV="0">
+            <a:off x="6362700" y="5810250"/>
+            <a:ext cx="4972050" cy="190500"/>
+          </a:xfrm>
+          <a:prstGeom prst="rect"/>
+        </p:spPr>
+        <p:txBody>
+          <a:bodyPr wrap="none" lIns="0" tIns="0" rIns="0" bIns="0"/>
+          <a:p>
+            <a:pPr>
+              <a:lnSpc>
+                <a:spcPct val="100000"/>
+              </a:lnSpc>
+            </a:pPr>
+            <a:r>
+              <a:rPr lang="zh-CN" sz="1200" b="1">
+                <a:solidFill>
+                  <a:srgbClr val="D1D5DB"/>
+                </a:solidFill>
+                <a:latin typeface="Microsoft YaHei"/>
+                <a:ea typeface="Microsoft YaHei"/>
+              </a:rPr>
+              <a:t>每个角色留痕</a:t>
+            </a:r>
+            <a:endParaRPr/>
+          </a:p>
+        </p:txBody>
+      </p:sp>
+      <p:sp>
+        <p:nvSpPr>
+          <p:cNvPr id="243" name="" descr="{&quot;isTemplate&quot;:true,&quot;type&quot;:&quot;text&quot;}"/>
+          <p:cNvSpPr txBox="1"/>
+          <p:nvPr/>
+        </p:nvSpPr>
+        <p:spPr>
+          <a:xfrm rot="0" flipH="0" flipV="0">
+            <a:off x="6362700" y="6048375"/>
+            <a:ext cx="4972050" cy="276225"/>
+          </a:xfrm>
+          <a:prstGeom prst="rect"/>
+        </p:spPr>
+        <p:txBody>
+          <a:bodyPr wrap="none" lIns="0" tIns="0" rIns="0" bIns="0"/>
+          <a:p>
+            <a:pPr>
+              <a:lnSpc>
+                <a:spcPct val="160000"/>
+              </a:lnSpc>
+            </a:pPr>
+            <a:r>
+              <a:rPr lang="zh-CN" sz="1125">
+                <a:solidFill>
+                  <a:srgbClr val="9CA3AF"/>
+                </a:solidFill>
+                <a:latin typeface="Microsoft YaHei"/>
+                <a:ea typeface="Microsoft YaHei"/>
+              </a:rPr>
+              <a:t>七个角色的结论与耗时都进审计，界面上可逐条展开核对。</a:t>
             </a:r>
             <a:endParaRPr/>
           </a:p>
@@ -9652,7 +9391,6 @@
       </p:sp>
     </p:spTree>
   </p:cSld>
-  <p:extLst/>
 </p:sld>
 </file>
 
@@ -9661,7 +9399,7 @@
   <p:cSld>
     <p:spTree>
       <p:nvGrpSpPr>
-        <p:cNvPr id="234" name="" descr="&lt;Slide style={{ background: &quot;#0B1220&quot;, padding: &quot;44px 72px&quot;, display: &quot;flex&quot;, flexDirection: &quot;column&quot; }}&gt;&#10;  &lt;Text style={{ color: &quot;#6B7280&quot;, fontSize: 14, letterSpacing: 3 }}&gt;一条链路&lt;/Text&gt;&#10;  &lt;Text style={{ color: &quot;#F7F4EC&quot;, fontSize: 34, fontWeight: 700, marginTop: 10 }}&gt;「转给小王 100 元」走完七步&lt;/Text&gt;&#10;&#10;  &lt;Box style={{ display: &quot;flex&quot;, flexDirection: &quot;row&quot;, gap: 40, marginTop: 28 }}&gt;&#10;    &lt;Box style={{ flex: 1, display: &quot;flex&quot;, flexDirection: &quot;column&quot;, gap: 15 }}&gt;&#10;      &lt;Box style={{ display: &quot;flex&quot;, flexDirection: &quot;row&quot;, gap: 16, alignItems: &quot;center&quot;, background: &quot;rgba(34,197,94,0.08)&quot;, borderLeft: &quot;3px solid #22C55E&quot;, padding: &quot;16px 16px&quot; }}&gt;&#10;        &lt;Text style={{ color: &quot;#22C55E&quot;, fontSize: 15, fontFamily: &quot;Consolas, monospace&quot;, width: 28 }}&gt;01&lt;/Text&gt;&#10;        &lt;Text style={{ color: &quot;#F7F4EC&quot;, fontSize: 18, fontWeight: 600, width: 96 }}&gt;输入守卫&lt;/Text&gt;&#10;        &lt;Text style={{ color: &quot;#9CA3AF&quot;, fontSize: 15 }}&gt;归一化，识别注入特征，命中即拦&lt;/Text&gt;&#10;      &lt;/Box&gt;&#10;      &lt;Box style={{ display: &quot;flex&quot;, flexDirection: &quot;row&quot;, gap: 16, alignItems: &quot;center&quot;, background: &quot;rgba(34,197,94,0.08)&quot;, borderLeft: &quot;3px solid #22C55E&quot;, padding: &quot;16px 16px&quot; }}&gt;&#10;        &lt;Text style={{ color: &quot;#22C55E&quot;, fontSize: 15, fontFamily: &quot;Consolas, monospace&quot;, width: 28 }}&gt;02&lt;/Text&gt;&#10;        &lt;Text style={{ color: &quot;#F7F4EC&quot;, fontSize: 18, fontWeight: 600, width: 96 }}&gt;意图官&lt;/Text&gt;&#10;        &lt;Text style={{ color: &quot;#9CA3AF&quot;, fontSize: 15 }}&gt;落到 transfer，payee 小王，金额 10000 分&lt;/Text&gt;&#10;      &lt;/Box&gt;&#10;      &lt;Box style={{ display: &quot;flex&quot;, flexDirection: &quot;row&quot;, gap: 16, alignItems: &quot;center&quot;, background: &quot;rgba(245,158,11,0.08)&quot;, borderLeft: &quot;3px solid #F59E0B&quot;, padding: &quot;16px 16px&quot; }}&gt;&#10;        &lt;Text style={{ color: &quot;#F59E0B&quot;, fontSize: 15, fontFamily: &quot;Consolas, monospace&quot;, width: 28 }}&gt;03&lt;/Text&gt;&#10;        &lt;Text style={{ color: &quot;#F7F4EC&quot;, fontSize: 18, fontWeight: 600, width: 96 }}&gt;三评估并行&lt;/Text&gt;&#10;        &lt;Text style={{ color: &quot;#9CA3AF&quot;, fontSize: 15 }}&gt;风控判黄，合规放行，体验无需追问&lt;/Text&gt;&#10;      &lt;/Box&gt;&#10;      &lt;Box style={{ display: &quot;flex&quot;, flexDirection: &quot;row&quot;, gap: 16, alignItems: &quot;center&quot;, background: &quot;rgba(245,158,11,0.08)&quot;, borderLeft: &quot;3px solid #F59E0B&quot;, padding: &quot;16px 16px&quot; }}&gt;&#10;        &lt;Text style={{ color: &quot;#F59E0B&quot;, fontSize: 15, fontFamily: &quot;Consolas, monospace&quot;, width: 28 }}&gt;04&lt;/Text&gt;&#10;        &lt;Text style={{ color: &quot;#F7F4EC&quot;, fontSize: 18, fontWeight: 600, width: 96 }}&gt;仲裁官&lt;/Text&gt;&#10;        &lt;Text style={{ color: &quot;#9CA3AF&quot;, fontSize: 15 }}&gt;绿绿黄取最高，判黄，需确认&lt;/Text&gt;&#10;      &lt;/Box&gt;&#10;      &lt;Box style={{ display: &quot;flex&quot;, flexDirection: &quot;row&quot;, gap: 16, alignItems: &quot;center&quot;, background: &quot;rgba(245,158,11,0.08)&quot;, borderLeft: &quot;3px solid #F59E0B&quot;, padding: &quot;16px 16px&quot; }}&gt;&#10;        &lt;Text style={{ color: &quot;#F59E0B&quot;, fontSize: 15, fontFamily: &quot;Consolas, monospace&quot;, width: 28 }}&gt;05&lt;/Text&gt;&#10;        &lt;Text style={{ color: &quot;#F7F4EC&quot;, fontSize: 18, fontWeight: 600, width: 96 }}&gt;确认令牌&lt;/Text&gt;&#10;        &lt;Text style={{ color: &quot;#9CA3AF&quot;, fontSize: 15 }}&gt;绑定会话、工具、参数摘要，120 秒有效&lt;/Text&gt;&#10;      &lt;/Box&gt;&#10;      &lt;Box style={{ display: &quot;flex&quot;, flexDirection: &quot;row&quot;, gap: 16, alignItems: &quot;center&quot;, background: &quot;rgba(34,197,94,0.08)&quot;, borderLeft: &quot;3px solid #22C55E&quot;, padding: &quot;16px 16px&quot; }}&gt;&#10;        &lt;Text style={{ color: &quot;#22C55E&quot;, fontSize: 15, fontFamily: &quot;Consolas, monospace&quot;, width: 28 }}&gt;06&lt;/Text&gt;&#10;        &lt;Text style={{ color: &quot;#F7F4EC&quot;, fontSize: 18, fontWeight: 600, width: 96 }}&gt;执行官&lt;/Text&gt;&#10;        &lt;Text style={{ color: &quot;#9CA3AF&quot;, fontSize: 15 }}&gt;重算摘要比对通过，扣账&lt;/Text&gt;&#10;      &lt;/Box&gt;&#10;      &lt;Box style={{ display: &quot;flex&quot;, flexDirection: &quot;row&quot;, gap: 16, alignItems: &quot;center&quot;, background: &quot;rgba(34,197,94,0.08)&quot;, borderLeft: &quot;3px solid #22C55E&quot;, padding: &quot;16px 16px&quot; }}&gt;&#10;        &lt;Text style={{ color: &quot;#22C55E&quot;, fontSize: 15, fontFamily: &quot;Consolas, monospace&quot;, width: 28 }}&gt;07&lt;/Text&gt;&#10;        &lt;Text style={{ color: &quot;#F7F4EC&quot;, fontSize: 18, fontWeight: 600, width: 96 }}&gt;审计官&lt;/Text&gt;&#10;        &lt;Text style={{ color: &quot;#9CA3AF&quot;, fontSize: 15 }}&gt;写链，序号递增，前序哈希串起来&lt;/Text&gt;&#10;      &lt;/Box&gt;&#10;      &lt;Text style={{ color: &quot;#6B7280&quot;, fontSize: 14, lineHeight: 1.7, marginTop: 4 }}&gt;每一步的输入输出都写进审计记录，界面上可逐条展开核对。&lt;/Text&gt;&#10;    &lt;/Box&gt;&#10;&#10;    &lt;Box style={{ width: 320, display: &quot;flex&quot;, flexDirection: &quot;column&quot;, gap: 14, background: &quot;rgba(59,130,246,0.08)&quot;, border: &quot;1px solid rgba(59,130,246,0.35)&quot;, borderRadius: 12, padding: 24, display: &quot;flex&quot;, flexDirection: &quot;column&quot;, justifyContent: &quot;flex-start&quot; }}&gt;&#10;      &lt;Text style={{ color: &quot;#93C5FD&quot;, fontSize: 18, fontWeight: 700 }}&gt;为什么拆成七步&lt;/Text&gt;&#10;      &lt;Text style={{ color: &quot;#9CA3AF&quot;, fontSize: 16, lineHeight: 1.8, marginTop: 12 }}&gt;每一步都能单独测、单独改、单独讲。判错了看第七步之前的记录，改规则只动一个角色，不影响主流程。&lt;/Text&gt;&#10;      &lt;Box style={{ display: &quot;flex&quot;, flexDirection: &quot;column&quot;, gap: 9, marginTop: 16 }}&gt;&#10;        &lt;Text style={{ color: &quot;#D1D5DB&quot;, fontSize: 15, lineHeight: 1.6 }}&gt;前三步只看用户说了什么&lt;/Text&gt;&#10;        &lt;Text style={{ color: &quot;#D1D5DB&quot;, fontSize: 15, lineHeight: 1.6 }}&gt;中间两步决定能不能办&lt;/Text&gt;&#10;        &lt;Text style={{ color: &quot;#D1D5DB&quot;, fontSize: 15, lineHeight: 1.6 }}&gt;后两步保证办完能回看&lt;/Text&gt;&#10;      &lt;/Box&gt;&#10;      &lt;Text style={{ color: &quot;#6B7280&quot;, fontSize: 14, lineHeight: 1.7, marginTop: 16 }}&gt;七步的结论全部写进审计，界面上可以逐条展开。&lt;/Text&gt;&#10;    &lt;/Box&gt;&#10;  &lt;/Box&gt;&#10;&lt;/Slide&gt;&#10;"/>
+        <p:cNvPr id="244" name="" descr="&lt;Slide style={{ background: &quot;#0B1220&quot;, padding: &quot;44px 72px&quot;, display: &quot;flex&quot;, flexDirection: &quot;column&quot; }}&gt;&#10;  &lt;Text style={{ color: &quot;#6B7280&quot;, fontSize: 14, letterSpacing: 3 }}&gt;一条链路&lt;/Text&gt;&#10;  &lt;Text style={{ color: &quot;#F7F4EC&quot;, fontSize: 34, fontWeight: 700, marginTop: 10 }}&gt;「转给小王 100 元」走完七步&lt;/Text&gt;&#10;&#10;  &lt;Box style={{ display: &quot;flex&quot;, flexDirection: &quot;row&quot;, gap: 40, marginTop: 28 }}&gt;&#10;    &lt;Box style={{ flex: 1, display: &quot;flex&quot;, flexDirection: &quot;column&quot;, gap: 15 }}&gt;&#10;      &lt;Box style={{ display: &quot;flex&quot;, flexDirection: &quot;row&quot;, gap: 16, alignItems: &quot;center&quot;, background: &quot;rgba(34,197,94,0.08)&quot;, borderLeft: &quot;3px solid #22C55E&quot;, padding: &quot;16px 16px&quot; }}&gt;&#10;        &lt;Text style={{ color: &quot;#22C55E&quot;, fontSize: 15, fontFamily: &quot;Consolas, monospace&quot;, width: 28 }}&gt;01&lt;/Text&gt;&#10;        &lt;Text style={{ color: &quot;#F7F4EC&quot;, fontSize: 18, fontWeight: 600, width: 96 }}&gt;输入守卫&lt;/Text&gt;&#10;        &lt;Text style={{ color: &quot;#9CA3AF&quot;, fontSize: 15 }}&gt;归一化，识别注入特征，命中即拦&lt;/Text&gt;&#10;      &lt;/Box&gt;&#10;      &lt;Box style={{ display: &quot;flex&quot;, flexDirection: &quot;row&quot;, gap: 16, alignItems: &quot;center&quot;, background: &quot;rgba(34,197,94,0.08)&quot;, borderLeft: &quot;3px solid #22C55E&quot;, padding: &quot;16px 16px&quot; }}&gt;&#10;        &lt;Text style={{ color: &quot;#22C55E&quot;, fontSize: 15, fontFamily: &quot;Consolas, monospace&quot;, width: 28 }}&gt;02&lt;/Text&gt;&#10;        &lt;Text style={{ color: &quot;#F7F4EC&quot;, fontSize: 18, fontWeight: 600, width: 96 }}&gt;意图官&lt;/Text&gt;&#10;        &lt;Text style={{ color: &quot;#9CA3AF&quot;, fontSize: 15 }}&gt;落到 transfer，payee 小王，金额 10000 分&lt;/Text&gt;&#10;      &lt;/Box&gt;&#10;      &lt;Box style={{ display: &quot;flex&quot;, flexDirection: &quot;row&quot;, gap: 16, alignItems: &quot;center&quot;, background: &quot;rgba(245,158,11,0.08)&quot;, borderLeft: &quot;3px solid #F59E0B&quot;, padding: &quot;16px 16px&quot; }}&gt;&#10;        &lt;Text style={{ color: &quot;#F59E0B&quot;, fontSize: 15, fontFamily: &quot;Consolas, monospace&quot;, width: 28 }}&gt;03&lt;/Text&gt;&#10;        &lt;Text style={{ color: &quot;#F7F4EC&quot;, fontSize: 18, fontWeight: 600, width: 96 }}&gt;三评估并行&lt;/Text&gt;&#10;        &lt;Text style={{ color: &quot;#9CA3AF&quot;, fontSize: 15 }}&gt;风控判黄，合规放行，体验无需追问&lt;/Text&gt;&#10;      &lt;/Box&gt;&#10;      &lt;Box style={{ display: &quot;flex&quot;, flexDirection: &quot;row&quot;, gap: 16, alignItems: &quot;center&quot;, background: &quot;rgba(245,158,11,0.08)&quot;, borderLeft: &quot;3px solid #F59E0B&quot;, padding: &quot;16px 16px&quot; }}&gt;&#10;        &lt;Text style={{ color: &quot;#F59E0B&quot;, fontSize: 15, fontFamily: &quot;Consolas, monospace&quot;, width: 28 }}&gt;04&lt;/Text&gt;&#10;        &lt;Text style={{ color: &quot;#F7F4EC&quot;, fontSize: 18, fontWeight: 600, width: 96 }}&gt;仲裁官&lt;/Text&gt;&#10;        &lt;Text style={{ color: &quot;#9CA3AF&quot;, fontSize: 15 }}&gt;绿绿黄取最高，判黄，需确认&lt;/Text&gt;&#10;      &lt;/Box&gt;&#10;      &lt;Box style={{ display: &quot;flex&quot;, flexDirection: &quot;row&quot;, gap: 16, alignItems: &quot;center&quot;, background: &quot;rgba(245,158,11,0.08)&quot;, borderLeft: &quot;3px solid #F59E0B&quot;, padding: &quot;16px 16px&quot; }}&gt;&#10;        &lt;Text style={{ color: &quot;#F59E0B&quot;, fontSize: 15, fontFamily: &quot;Consolas, monospace&quot;, width: 28 }}&gt;05&lt;/Text&gt;&#10;        &lt;Text style={{ color: &quot;#F7F4EC&quot;, fontSize: 18, fontWeight: 600, width: 96 }}&gt;确认令牌&lt;/Text&gt;&#10;        &lt;Text style={{ color: &quot;#9CA3AF&quot;, fontSize: 15 }}&gt;绑定会话、工具、参数摘要，120 秒有效&lt;/Text&gt;&#10;      &lt;/Box&gt;&#10;      &lt;Box style={{ display: &quot;flex&quot;, flexDirection: &quot;row&quot;, gap: 16, alignItems: &quot;center&quot;, background: &quot;rgba(34,197,94,0.08)&quot;, borderLeft: &quot;3px solid #22C55E&quot;, padding: &quot;16px 16px&quot; }}&gt;&#10;        &lt;Text style={{ color: &quot;#22C55E&quot;, fontSize: 15, fontFamily: &quot;Consolas, monospace&quot;, width: 28 }}&gt;06&lt;/Text&gt;&#10;        &lt;Text style={{ color: &quot;#F7F4EC&quot;, fontSize: 18, fontWeight: 600, width: 96 }}&gt;执行官&lt;/Text&gt;&#10;        &lt;Text style={{ color: &quot;#9CA3AF&quot;, fontSize: 15 }}&gt;重算摘要比对通过，扣账&lt;/Text&gt;&#10;      &lt;/Box&gt;&#10;      &lt;Box style={{ display: &quot;flex&quot;, flexDirection: &quot;row&quot;, gap: 16, alignItems: &quot;center&quot;, background: &quot;rgba(34,197,94,0.08)&quot;, borderLeft: &quot;3px solid #22C55E&quot;, padding: &quot;16px 16px&quot; }}&gt;&#10;        &lt;Text style={{ color: &quot;#22C55E&quot;, fontSize: 15, fontFamily: &quot;Consolas, monospace&quot;, width: 28 }}&gt;07&lt;/Text&gt;&#10;        &lt;Text style={{ color: &quot;#F7F4EC&quot;, fontSize: 18, fontWeight: 600, width: 96 }}&gt;审计官&lt;/Text&gt;&#10;        &lt;Text style={{ color: &quot;#9CA3AF&quot;, fontSize: 15 }}&gt;写链，序号递增，前序哈希串起来&lt;/Text&gt;&#10;      &lt;/Box&gt;&#10;      &lt;Text style={{ color: &quot;#6B7280&quot;, fontSize: 14, lineHeight: 1.7, marginTop: 4 }}&gt;每一步的输入输出都写进审计记录，界面上可逐条展开核对。&lt;/Text&gt;&#10;    &lt;/Box&gt;&#10;&#10;    &lt;Box style={{ width: 320, display: &quot;flex&quot;, flexDirection: &quot;column&quot;, gap: 14, background: &quot;rgba(59,130,246,0.08)&quot;, border: &quot;1px solid rgba(59,130,246,0.35)&quot;, borderRadius: 12, padding: 24, display: &quot;flex&quot;, flexDirection: &quot;column&quot;, justifyContent: &quot;flex-start&quot; }}&gt;&#10;      &lt;Text style={{ color: &quot;#93C5FD&quot;, fontSize: 18, fontWeight: 700 }}&gt;为什么拆成七步&lt;/Text&gt;&#10;      &lt;Text style={{ color: &quot;#9CA3AF&quot;, fontSize: 16, lineHeight: 1.8, marginTop: 12 }}&gt;每一步都能单独测、单独改、单独讲。判错了看第七步之前的记录，改规则只动一个角色，不影响主流程。&lt;/Text&gt;&#10;      &lt;Box style={{ display: &quot;flex&quot;, flexDirection: &quot;column&quot;, gap: 9, marginTop: 16 }}&gt;&#10;        &lt;Text style={{ color: &quot;#D1D5DB&quot;, fontSize: 15, lineHeight: 1.6 }}&gt;前三步只看用户说了什么&lt;/Text&gt;&#10;        &lt;Text style={{ color: &quot;#D1D5DB&quot;, fontSize: 15, lineHeight: 1.6 }}&gt;中间两步决定能不能办&lt;/Text&gt;&#10;        &lt;Text style={{ color: &quot;#D1D5DB&quot;, fontSize: 15, lineHeight: 1.6 }}&gt;后两步保证办完能回看&lt;/Text&gt;&#10;      &lt;/Box&gt;&#10;      &lt;Text style={{ color: &quot;#6B7280&quot;, fontSize: 14, lineHeight: 1.7, marginTop: 16 }}&gt;七步的结论全部写进审计，界面上可以逐条展开。&lt;/Text&gt;&#10;    &lt;/Box&gt;&#10;  &lt;/Box&gt;&#10;&lt;/Slide&gt;&#10;"/>
         <p:cNvGrpSpPr/>
         <p:nvPr/>
       </p:nvGrpSpPr>
@@ -9675,7 +9413,7 @@
       </p:grpSpPr>
       <p:sp>
         <p:nvSpPr>
-          <p:cNvPr id="235" name=""/>
+          <p:cNvPr id="245" name=""/>
           <p:cNvSpPr/>
           <p:nvPr/>
         </p:nvSpPr>
@@ -9699,7 +9437,7 @@
       </p:sp>
       <p:sp>
         <p:nvSpPr>
-          <p:cNvPr id="236" name="" descr="{&quot;isTemplate&quot;:true,&quot;type&quot;:&quot;text&quot;}"/>
+          <p:cNvPr id="246" name="" descr="{&quot;isTemplate&quot;:true,&quot;type&quot;:&quot;text&quot;}"/>
           <p:cNvSpPr txBox="1"/>
           <p:nvPr/>
         </p:nvSpPr>
@@ -9734,7 +9472,7 @@
       </p:sp>
       <p:sp>
         <p:nvSpPr>
-          <p:cNvPr id="237" name="" descr="{&quot;isTemplate&quot;:true,&quot;type&quot;:&quot;text&quot;}"/>
+          <p:cNvPr id="247" name="" descr="{&quot;isTemplate&quot;:true,&quot;type&quot;:&quot;text&quot;}"/>
           <p:cNvSpPr txBox="1"/>
           <p:nvPr/>
         </p:nvSpPr>
@@ -9789,7 +9527,7 @@
       </p:sp>
       <p:sp>
         <p:nvSpPr>
-          <p:cNvPr id="238" name=""/>
+          <p:cNvPr id="248" name=""/>
           <p:cNvSpPr/>
           <p:nvPr/>
         </p:nvSpPr>
@@ -9815,7 +9553,7 @@
       </p:sp>
       <p:sp>
         <p:nvSpPr>
-          <p:cNvPr id="239" name=""/>
+          <p:cNvPr id="249" name=""/>
           <p:cNvSpPr/>
           <p:nvPr/>
         </p:nvSpPr>
@@ -9855,7 +9593,7 @@
       </p:sp>
       <p:sp>
         <p:nvSpPr>
-          <p:cNvPr id="240" name="" descr="{&quot;isTemplate&quot;:true,&quot;type&quot;:&quot;text&quot;}"/>
+          <p:cNvPr id="250" name="" descr="{&quot;isTemplate&quot;:true,&quot;type&quot;:&quot;text&quot;}"/>
           <p:cNvSpPr txBox="1"/>
           <p:nvPr/>
         </p:nvSpPr>
@@ -9890,7 +9628,7 @@
       </p:sp>
       <p:sp>
         <p:nvSpPr>
-          <p:cNvPr id="241" name="" descr="{&quot;isTemplate&quot;:true,&quot;type&quot;:&quot;text&quot;}"/>
+          <p:cNvPr id="251" name="" descr="{&quot;isTemplate&quot;:true,&quot;type&quot;:&quot;text&quot;}"/>
           <p:cNvSpPr txBox="1"/>
           <p:nvPr/>
         </p:nvSpPr>
@@ -9925,7 +9663,7 @@
       </p:sp>
       <p:sp>
         <p:nvSpPr>
-          <p:cNvPr id="242" name="" descr="{&quot;isTemplate&quot;:true,&quot;type&quot;:&quot;text&quot;}"/>
+          <p:cNvPr id="252" name="" descr="{&quot;isTemplate&quot;:true,&quot;type&quot;:&quot;text&quot;}"/>
           <p:cNvSpPr txBox="1"/>
           <p:nvPr/>
         </p:nvSpPr>
@@ -9960,7 +9698,7 @@
       </p:sp>
       <p:sp>
         <p:nvSpPr>
-          <p:cNvPr id="243" name=""/>
+          <p:cNvPr id="253" name=""/>
           <p:cNvSpPr/>
           <p:nvPr/>
         </p:nvSpPr>
@@ -9986,7 +9724,7 @@
       </p:sp>
       <p:sp>
         <p:nvSpPr>
-          <p:cNvPr id="244" name=""/>
+          <p:cNvPr id="254" name=""/>
           <p:cNvSpPr/>
           <p:nvPr/>
         </p:nvSpPr>
@@ -10026,7 +9764,7 @@
       </p:sp>
       <p:sp>
         <p:nvSpPr>
-          <p:cNvPr id="245" name="" descr="{&quot;isTemplate&quot;:true,&quot;type&quot;:&quot;text&quot;}"/>
+          <p:cNvPr id="255" name="" descr="{&quot;isTemplate&quot;:true,&quot;type&quot;:&quot;text&quot;}"/>
           <p:cNvSpPr txBox="1"/>
           <p:nvPr/>
         </p:nvSpPr>
@@ -10061,7 +9799,7 @@
       </p:sp>
       <p:sp>
         <p:nvSpPr>
-          <p:cNvPr id="246" name="" descr="{&quot;isTemplate&quot;:true,&quot;type&quot;:&quot;text&quot;}"/>
+          <p:cNvPr id="256" name="" descr="{&quot;isTemplate&quot;:true,&quot;type&quot;:&quot;text&quot;}"/>
           <p:cNvSpPr txBox="1"/>
           <p:nvPr/>
         </p:nvSpPr>
@@ -10096,7 +9834,7 @@
       </p:sp>
       <p:sp>
         <p:nvSpPr>
-          <p:cNvPr id="247" name="" descr="{&quot;isTemplate&quot;:true,&quot;type&quot;:&quot;text&quot;}"/>
+          <p:cNvPr id="257" name="" descr="{&quot;isTemplate&quot;:true,&quot;type&quot;:&quot;text&quot;}"/>
           <p:cNvSpPr txBox="1"/>
           <p:nvPr/>
         </p:nvSpPr>
@@ -10191,7 +9929,7 @@
       </p:sp>
       <p:sp>
         <p:nvSpPr>
-          <p:cNvPr id="248" name=""/>
+          <p:cNvPr id="258" name=""/>
           <p:cNvSpPr/>
           <p:nvPr/>
         </p:nvSpPr>
@@ -10217,7 +9955,7 @@
       </p:sp>
       <p:sp>
         <p:nvSpPr>
-          <p:cNvPr id="249" name=""/>
+          <p:cNvPr id="259" name=""/>
           <p:cNvSpPr/>
           <p:nvPr/>
         </p:nvSpPr>
@@ -10257,7 +9995,7 @@
       </p:sp>
       <p:sp>
         <p:nvSpPr>
-          <p:cNvPr id="250" name="" descr="{&quot;isTemplate&quot;:true,&quot;type&quot;:&quot;text&quot;}"/>
+          <p:cNvPr id="260" name="" descr="{&quot;isTemplate&quot;:true,&quot;type&quot;:&quot;text&quot;}"/>
           <p:cNvSpPr txBox="1"/>
           <p:nvPr/>
         </p:nvSpPr>
@@ -10292,7 +10030,7 @@
       </p:sp>
       <p:sp>
         <p:nvSpPr>
-          <p:cNvPr id="251" name="" descr="{&quot;isTemplate&quot;:true,&quot;type&quot;:&quot;text&quot;}"/>
+          <p:cNvPr id="261" name="" descr="{&quot;isTemplate&quot;:true,&quot;type&quot;:&quot;text&quot;}"/>
           <p:cNvSpPr txBox="1"/>
           <p:nvPr/>
         </p:nvSpPr>
@@ -10327,7 +10065,7 @@
       </p:sp>
       <p:sp>
         <p:nvSpPr>
-          <p:cNvPr id="252" name="" descr="{&quot;isTemplate&quot;:true,&quot;type&quot;:&quot;text&quot;}"/>
+          <p:cNvPr id="262" name="" descr="{&quot;isTemplate&quot;:true,&quot;type&quot;:&quot;text&quot;}"/>
           <p:cNvSpPr txBox="1"/>
           <p:nvPr/>
         </p:nvSpPr>
@@ -10362,7 +10100,7 @@
       </p:sp>
       <p:sp>
         <p:nvSpPr>
-          <p:cNvPr id="253" name=""/>
+          <p:cNvPr id="263" name=""/>
           <p:cNvSpPr/>
           <p:nvPr/>
         </p:nvSpPr>
@@ -10388,7 +10126,7 @@
       </p:sp>
       <p:sp>
         <p:nvSpPr>
-          <p:cNvPr id="254" name=""/>
+          <p:cNvPr id="264" name=""/>
           <p:cNvSpPr/>
           <p:nvPr/>
         </p:nvSpPr>
@@ -10428,7 +10166,7 @@
       </p:sp>
       <p:sp>
         <p:nvSpPr>
-          <p:cNvPr id="255" name="" descr="{&quot;isTemplate&quot;:true,&quot;type&quot;:&quot;text&quot;}"/>
+          <p:cNvPr id="265" name="" descr="{&quot;isTemplate&quot;:true,&quot;type&quot;:&quot;text&quot;}"/>
           <p:cNvSpPr txBox="1"/>
           <p:nvPr/>
         </p:nvSpPr>
@@ -10463,7 +10201,7 @@
       </p:sp>
       <p:sp>
         <p:nvSpPr>
-          <p:cNvPr id="256" name="" descr="{&quot;isTemplate&quot;:true,&quot;type&quot;:&quot;text&quot;}"/>
+          <p:cNvPr id="266" name="" descr="{&quot;isTemplate&quot;:true,&quot;type&quot;:&quot;text&quot;}"/>
           <p:cNvSpPr txBox="1"/>
           <p:nvPr/>
         </p:nvSpPr>
@@ -10498,7 +10236,7 @@
       </p:sp>
       <p:sp>
         <p:nvSpPr>
-          <p:cNvPr id="257" name="" descr="{&quot;isTemplate&quot;:true,&quot;type&quot;:&quot;text&quot;}"/>
+          <p:cNvPr id="267" name="" descr="{&quot;isTemplate&quot;:true,&quot;type&quot;:&quot;text&quot;}"/>
           <p:cNvSpPr txBox="1"/>
           <p:nvPr/>
         </p:nvSpPr>
@@ -10533,7 +10271,7 @@
       </p:sp>
       <p:sp>
         <p:nvSpPr>
-          <p:cNvPr id="258" name=""/>
+          <p:cNvPr id="268" name=""/>
           <p:cNvSpPr/>
           <p:nvPr/>
         </p:nvSpPr>
@@ -10559,7 +10297,7 @@
       </p:sp>
       <p:sp>
         <p:nvSpPr>
-          <p:cNvPr id="259" name=""/>
+          <p:cNvPr id="269" name=""/>
           <p:cNvSpPr/>
           <p:nvPr/>
         </p:nvSpPr>
@@ -10599,7 +10337,7 @@
       </p:sp>
       <p:sp>
         <p:nvSpPr>
-          <p:cNvPr id="260" name="" descr="{&quot;isTemplate&quot;:true,&quot;type&quot;:&quot;text&quot;}"/>
+          <p:cNvPr id="270" name="" descr="{&quot;isTemplate&quot;:true,&quot;type&quot;:&quot;text&quot;}"/>
           <p:cNvSpPr txBox="1"/>
           <p:nvPr/>
         </p:nvSpPr>
@@ -10634,7 +10372,7 @@
       </p:sp>
       <p:sp>
         <p:nvSpPr>
-          <p:cNvPr id="261" name="" descr="{&quot;isTemplate&quot;:true,&quot;type&quot;:&quot;text&quot;}"/>
+          <p:cNvPr id="271" name="" descr="{&quot;isTemplate&quot;:true,&quot;type&quot;:&quot;text&quot;}"/>
           <p:cNvSpPr txBox="1"/>
           <p:nvPr/>
         </p:nvSpPr>
@@ -10669,7 +10407,7 @@
       </p:sp>
       <p:sp>
         <p:nvSpPr>
-          <p:cNvPr id="262" name="" descr="{&quot;isTemplate&quot;:true,&quot;type&quot;:&quot;text&quot;}"/>
+          <p:cNvPr id="272" name="" descr="{&quot;isTemplate&quot;:true,&quot;type&quot;:&quot;text&quot;}"/>
           <p:cNvSpPr txBox="1"/>
           <p:nvPr/>
         </p:nvSpPr>
@@ -10724,7 +10462,7 @@
       </p:sp>
       <p:sp>
         <p:nvSpPr>
-          <p:cNvPr id="263" name=""/>
+          <p:cNvPr id="273" name=""/>
           <p:cNvSpPr/>
           <p:nvPr/>
         </p:nvSpPr>
@@ -10750,7 +10488,7 @@
       </p:sp>
       <p:sp>
         <p:nvSpPr>
-          <p:cNvPr id="264" name=""/>
+          <p:cNvPr id="274" name=""/>
           <p:cNvSpPr/>
           <p:nvPr/>
         </p:nvSpPr>
@@ -10790,7 +10528,7 @@
       </p:sp>
       <p:sp>
         <p:nvSpPr>
-          <p:cNvPr id="265" name="" descr="{&quot;isTemplate&quot;:true,&quot;type&quot;:&quot;text&quot;}"/>
+          <p:cNvPr id="275" name="" descr="{&quot;isTemplate&quot;:true,&quot;type&quot;:&quot;text&quot;}"/>
           <p:cNvSpPr txBox="1"/>
           <p:nvPr/>
         </p:nvSpPr>
@@ -10825,7 +10563,7 @@
       </p:sp>
       <p:sp>
         <p:nvSpPr>
-          <p:cNvPr id="266" name="" descr="{&quot;isTemplate&quot;:true,&quot;type&quot;:&quot;text&quot;}"/>
+          <p:cNvPr id="276" name="" descr="{&quot;isTemplate&quot;:true,&quot;type&quot;:&quot;text&quot;}"/>
           <p:cNvSpPr txBox="1"/>
           <p:nvPr/>
         </p:nvSpPr>
@@ -10860,7 +10598,7 @@
       </p:sp>
       <p:sp>
         <p:nvSpPr>
-          <p:cNvPr id="267" name="" descr="{&quot;isTemplate&quot;:true,&quot;type&quot;:&quot;text&quot;}"/>
+          <p:cNvPr id="277" name="" descr="{&quot;isTemplate&quot;:true,&quot;type&quot;:&quot;text&quot;}"/>
           <p:cNvSpPr txBox="1"/>
           <p:nvPr/>
         </p:nvSpPr>
@@ -10895,7 +10633,7 @@
       </p:sp>
       <p:sp>
         <p:nvSpPr>
-          <p:cNvPr id="268" name=""/>
+          <p:cNvPr id="278" name=""/>
           <p:cNvSpPr/>
           <p:nvPr/>
         </p:nvSpPr>
@@ -10921,7 +10659,7 @@
       </p:sp>
       <p:sp>
         <p:nvSpPr>
-          <p:cNvPr id="269" name=""/>
+          <p:cNvPr id="279" name=""/>
           <p:cNvSpPr/>
           <p:nvPr/>
         </p:nvSpPr>
@@ -10961,7 +10699,7 @@
       </p:sp>
       <p:sp>
         <p:nvSpPr>
-          <p:cNvPr id="270" name="" descr="{&quot;isTemplate&quot;:true,&quot;type&quot;:&quot;text&quot;}"/>
+          <p:cNvPr id="280" name="" descr="{&quot;isTemplate&quot;:true,&quot;type&quot;:&quot;text&quot;}"/>
           <p:cNvSpPr txBox="1"/>
           <p:nvPr/>
         </p:nvSpPr>
@@ -10996,7 +10734,7 @@
       </p:sp>
       <p:sp>
         <p:nvSpPr>
-          <p:cNvPr id="271" name="" descr="{&quot;isTemplate&quot;:true,&quot;type&quot;:&quot;text&quot;}"/>
+          <p:cNvPr id="281" name="" descr="{&quot;isTemplate&quot;:true,&quot;type&quot;:&quot;text&quot;}"/>
           <p:cNvSpPr txBox="1"/>
           <p:nvPr/>
         </p:nvSpPr>
@@ -11031,7 +10769,7 @@
       </p:sp>
       <p:sp>
         <p:nvSpPr>
-          <p:cNvPr id="272" name="" descr="{&quot;isTemplate&quot;:true,&quot;type&quot;:&quot;text&quot;}"/>
+          <p:cNvPr id="282" name="" descr="{&quot;isTemplate&quot;:true,&quot;type&quot;:&quot;text&quot;}"/>
           <p:cNvSpPr txBox="1"/>
           <p:nvPr/>
         </p:nvSpPr>
@@ -11066,7 +10804,7 @@
       </p:sp>
       <p:sp>
         <p:nvSpPr>
-          <p:cNvPr id="273" name="" descr="{&quot;isTemplate&quot;:true,&quot;type&quot;:&quot;text&quot;}"/>
+          <p:cNvPr id="283" name="" descr="{&quot;isTemplate&quot;:true,&quot;type&quot;:&quot;text&quot;}"/>
           <p:cNvSpPr txBox="1"/>
           <p:nvPr/>
         </p:nvSpPr>
@@ -11101,7 +10839,7 @@
       </p:sp>
       <p:sp>
         <p:nvSpPr>
-          <p:cNvPr id="274" name=""/>
+          <p:cNvPr id="284" name=""/>
           <p:cNvSpPr/>
           <p:nvPr/>
         </p:nvSpPr>
@@ -11136,7 +10874,7 @@
       </p:sp>
       <p:sp>
         <p:nvSpPr>
-          <p:cNvPr id="275" name="" descr="{&quot;isTemplate&quot;:true,&quot;type&quot;:&quot;text&quot;}"/>
+          <p:cNvPr id="285" name="" descr="{&quot;isTemplate&quot;:true,&quot;type&quot;:&quot;text&quot;}"/>
           <p:cNvSpPr txBox="1"/>
           <p:nvPr/>
         </p:nvSpPr>
@@ -11171,7 +10909,7 @@
       </p:sp>
       <p:sp>
         <p:nvSpPr>
-          <p:cNvPr id="276" name="" descr="{&quot;isTemplate&quot;:true,&quot;type&quot;:&quot;text&quot;}"/>
+          <p:cNvPr id="286" name="" descr="{&quot;isTemplate&quot;:true,&quot;type&quot;:&quot;text&quot;}"/>
           <p:cNvSpPr txBox="1"/>
           <p:nvPr/>
         </p:nvSpPr>
@@ -11208,7 +10946,7 @@
       </p:sp>
       <p:sp>
         <p:nvSpPr>
-          <p:cNvPr id="277" name="" descr="{&quot;isTemplate&quot;:true,&quot;type&quot;:&quot;text&quot;}"/>
+          <p:cNvPr id="287" name="" descr="{&quot;isTemplate&quot;:true,&quot;type&quot;:&quot;text&quot;}"/>
           <p:cNvSpPr txBox="1"/>
           <p:nvPr/>
         </p:nvSpPr>
@@ -11243,7 +10981,7 @@
       </p:sp>
       <p:sp>
         <p:nvSpPr>
-          <p:cNvPr id="278" name="" descr="{&quot;isTemplate&quot;:true,&quot;type&quot;:&quot;text&quot;}"/>
+          <p:cNvPr id="288" name="" descr="{&quot;isTemplate&quot;:true,&quot;type&quot;:&quot;text&quot;}"/>
           <p:cNvSpPr txBox="1"/>
           <p:nvPr/>
         </p:nvSpPr>
@@ -11278,7 +11016,7 @@
       </p:sp>
       <p:sp>
         <p:nvSpPr>
-          <p:cNvPr id="279" name="" descr="{&quot;isTemplate&quot;:true,&quot;type&quot;:&quot;text&quot;}"/>
+          <p:cNvPr id="289" name="" descr="{&quot;isTemplate&quot;:true,&quot;type&quot;:&quot;text&quot;}"/>
           <p:cNvSpPr txBox="1"/>
           <p:nvPr/>
         </p:nvSpPr>
@@ -11313,7 +11051,7 @@
       </p:sp>
       <p:sp>
         <p:nvSpPr>
-          <p:cNvPr id="280" name="" descr="{&quot;isTemplate&quot;:true,&quot;type&quot;:&quot;text&quot;}"/>
+          <p:cNvPr id="290" name="" descr="{&quot;isTemplate&quot;:true,&quot;type&quot;:&quot;text&quot;}"/>
           <p:cNvSpPr txBox="1"/>
           <p:nvPr/>
         </p:nvSpPr>
@@ -11350,7 +11088,6 @@
       </p:sp>
     </p:spTree>
   </p:cSld>
-  <p:extLst/>
 </p:sld>
 </file>
 
@@ -11359,7 +11096,7 @@
   <p:cSld>
     <p:spTree>
       <p:nvGrpSpPr>
-        <p:cNvPr id="281" name=""/>
+        <p:cNvPr id="291" name=""/>
         <p:cNvGrpSpPr/>
         <p:nvPr/>
       </p:nvGrpSpPr>
@@ -11373,7 +11110,7 @@
       </p:grpSpPr>
       <p:sp>
         <p:nvSpPr>
-          <p:cNvPr id="282" name=""/>
+          <p:cNvPr id="292" name=""/>
           <p:cNvSpPr/>
           <p:nvPr/>
         </p:nvSpPr>
@@ -11400,7 +11137,7 @@
       </p:sp>
       <p:sp>
         <p:nvSpPr>
-          <p:cNvPr id="283" name="" descr="{&quot;isTemplate&quot;:true,&quot;type&quot;:&quot;text&quot;}"/>
+          <p:cNvPr id="293" name="" descr="{&quot;isTemplate&quot;:true,&quot;type&quot;:&quot;text&quot;}"/>
           <p:cNvSpPr txBox="1"/>
           <p:nvPr/>
         </p:nvSpPr>
@@ -11455,7 +11192,7 @@
       </p:sp>
       <p:sp>
         <p:nvSpPr>
-          <p:cNvPr id="284" name="" descr="{&quot;isTemplate&quot;:true,&quot;type&quot;:&quot;text&quot;}"/>
+          <p:cNvPr id="294" name="" descr="{&quot;isTemplate&quot;:true,&quot;type&quot;:&quot;text&quot;}"/>
           <p:cNvSpPr txBox="1"/>
           <p:nvPr/>
         </p:nvSpPr>
@@ -11490,7 +11227,7 @@
       </p:sp>
       <p:sp>
         <p:nvSpPr>
-          <p:cNvPr id="285" name=""/>
+          <p:cNvPr id="295" name=""/>
           <p:cNvSpPr/>
           <p:nvPr/>
         </p:nvSpPr>
@@ -11528,7 +11265,7 @@
       </p:sp>
       <p:sp>
         <p:nvSpPr>
-          <p:cNvPr id="286" name="" descr="{&quot;isTemplate&quot;:true,&quot;type&quot;:&quot;text&quot;}"/>
+          <p:cNvPr id="296" name="" descr="{&quot;isTemplate&quot;:true,&quot;type&quot;:&quot;text&quot;}"/>
           <p:cNvSpPr txBox="1"/>
           <p:nvPr/>
         </p:nvSpPr>
@@ -11563,7 +11300,7 @@
       </p:sp>
       <p:sp>
         <p:nvSpPr>
-          <p:cNvPr id="287" name="" descr="{&quot;isTemplate&quot;:true,&quot;type&quot;:&quot;text&quot;}"/>
+          <p:cNvPr id="297" name="" descr="{&quot;isTemplate&quot;:true,&quot;type&quot;:&quot;text&quot;}"/>
           <p:cNvSpPr txBox="1"/>
           <p:nvPr/>
         </p:nvSpPr>
@@ -11600,7 +11337,7 @@
       </p:sp>
       <p:sp>
         <p:nvSpPr>
-          <p:cNvPr id="288" name="" descr="{&quot;isTemplate&quot;:true,&quot;type&quot;:&quot;text&quot;}"/>
+          <p:cNvPr id="298" name="" descr="{&quot;isTemplate&quot;:true,&quot;type&quot;:&quot;text&quot;}"/>
           <p:cNvSpPr txBox="1"/>
           <p:nvPr/>
         </p:nvSpPr>
@@ -11635,7 +11372,7 @@
       </p:sp>
       <p:sp>
         <p:nvSpPr>
-          <p:cNvPr id="289" name=""/>
+          <p:cNvPr id="299" name=""/>
           <p:cNvSpPr/>
           <p:nvPr/>
         </p:nvSpPr>
@@ -11673,7 +11410,7 @@
       </p:sp>
       <p:sp>
         <p:nvSpPr>
-          <p:cNvPr id="290" name="" descr="{&quot;isTemplate&quot;:true,&quot;type&quot;:&quot;text&quot;}"/>
+          <p:cNvPr id="300" name="" descr="{&quot;isTemplate&quot;:true,&quot;type&quot;:&quot;text&quot;}"/>
           <p:cNvSpPr txBox="1"/>
           <p:nvPr/>
         </p:nvSpPr>
@@ -11708,7 +11445,7 @@
       </p:sp>
       <p:sp>
         <p:nvSpPr>
-          <p:cNvPr id="291" name="" descr="{&quot;isTemplate&quot;:true,&quot;type&quot;:&quot;text&quot;}"/>
+          <p:cNvPr id="301" name="" descr="{&quot;isTemplate&quot;:true,&quot;type&quot;:&quot;text&quot;}"/>
           <p:cNvSpPr txBox="1"/>
           <p:nvPr/>
         </p:nvSpPr>
@@ -11745,7 +11482,7 @@
       </p:sp>
       <p:sp>
         <p:nvSpPr>
-          <p:cNvPr id="292" name="" descr="{&quot;isTemplate&quot;:true,&quot;type&quot;:&quot;text&quot;}"/>
+          <p:cNvPr id="302" name="" descr="{&quot;isTemplate&quot;:true,&quot;type&quot;:&quot;text&quot;}"/>
           <p:cNvSpPr txBox="1"/>
           <p:nvPr/>
         </p:nvSpPr>
@@ -11780,7 +11517,7 @@
       </p:sp>
       <p:sp>
         <p:nvSpPr>
-          <p:cNvPr id="293" name=""/>
+          <p:cNvPr id="303" name=""/>
           <p:cNvSpPr/>
           <p:nvPr/>
         </p:nvSpPr>
@@ -11818,7 +11555,7 @@
       </p:sp>
       <p:sp>
         <p:nvSpPr>
-          <p:cNvPr id="294" name="" descr="{&quot;isTemplate&quot;:true,&quot;type&quot;:&quot;text&quot;}"/>
+          <p:cNvPr id="304" name="" descr="{&quot;isTemplate&quot;:true,&quot;type&quot;:&quot;text&quot;}"/>
           <p:cNvSpPr txBox="1"/>
           <p:nvPr/>
         </p:nvSpPr>
@@ -11853,7 +11590,7 @@
       </p:sp>
       <p:sp>
         <p:nvSpPr>
-          <p:cNvPr id="295" name="" descr="{&quot;isTemplate&quot;:true,&quot;type&quot;:&quot;text&quot;}"/>
+          <p:cNvPr id="305" name="" descr="{&quot;isTemplate&quot;:true,&quot;type&quot;:&quot;text&quot;}"/>
           <p:cNvSpPr txBox="1"/>
           <p:nvPr/>
         </p:nvSpPr>
@@ -11890,7 +11627,7 @@
       </p:sp>
       <p:sp>
         <p:nvSpPr>
-          <p:cNvPr id="296" name="" descr="{&quot;isTemplate&quot;:true,&quot;type&quot;:&quot;text&quot;}"/>
+          <p:cNvPr id="306" name="" descr="{&quot;isTemplate&quot;:true,&quot;type&quot;:&quot;text&quot;}"/>
           <p:cNvSpPr txBox="1"/>
           <p:nvPr/>
         </p:nvSpPr>
@@ -11925,7 +11662,7 @@
       </p:sp>
       <p:sp>
         <p:nvSpPr>
-          <p:cNvPr id="297" name=""/>
+          <p:cNvPr id="307" name=""/>
           <p:cNvSpPr/>
           <p:nvPr/>
         </p:nvSpPr>
@@ -11968,7 +11705,7 @@
       </p:sp>
       <p:sp>
         <p:nvSpPr>
-          <p:cNvPr id="298" name="" descr="{&quot;isTemplate&quot;:true,&quot;type&quot;:&quot;text&quot;}"/>
+          <p:cNvPr id="308" name="" descr="{&quot;isTemplate&quot;:true,&quot;type&quot;:&quot;text&quot;}"/>
           <p:cNvSpPr txBox="1"/>
           <p:nvPr/>
         </p:nvSpPr>
@@ -12003,7 +11740,7 @@
       </p:sp>
       <p:sp>
         <p:nvSpPr>
-          <p:cNvPr id="299" name="" descr="{&quot;isTemplate&quot;:true,&quot;type&quot;:&quot;text&quot;}"/>
+          <p:cNvPr id="309" name="" descr="{&quot;isTemplate&quot;:true,&quot;type&quot;:&quot;text&quot;}"/>
           <p:cNvSpPr txBox="1"/>
           <p:nvPr/>
         </p:nvSpPr>
@@ -12040,7 +11777,7 @@
       </p:sp>
       <p:sp>
         <p:nvSpPr>
-          <p:cNvPr id="300" name=""/>
+          <p:cNvPr id="310" name=""/>
           <p:cNvSpPr/>
           <p:nvPr/>
         </p:nvSpPr>
@@ -12083,7 +11820,7 @@
       </p:sp>
       <p:sp>
         <p:nvSpPr>
-          <p:cNvPr id="301" name="" descr="{&quot;isTemplate&quot;:true,&quot;type&quot;:&quot;text&quot;}"/>
+          <p:cNvPr id="311" name="" descr="{&quot;isTemplate&quot;:true,&quot;type&quot;:&quot;text&quot;}"/>
           <p:cNvSpPr txBox="1"/>
           <p:nvPr/>
         </p:nvSpPr>
@@ -12118,7 +11855,7 @@
       </p:sp>
       <p:sp>
         <p:nvSpPr>
-          <p:cNvPr id="302" name="" descr="{&quot;isTemplate&quot;:true,&quot;type&quot;:&quot;text&quot;}"/>
+          <p:cNvPr id="312" name="" descr="{&quot;isTemplate&quot;:true,&quot;type&quot;:&quot;text&quot;}"/>
           <p:cNvSpPr txBox="1"/>
           <p:nvPr/>
         </p:nvSpPr>
@@ -12155,7 +11892,6 @@
       </p:sp>
     </p:spTree>
   </p:cSld>
-  <p:extLst/>
 </p:sld>
 </file>
 
@@ -12164,7 +11900,7 @@
   <p:cSld>
     <p:spTree>
       <p:nvGrpSpPr>
-        <p:cNvPr id="303" name="" descr="&lt;Slide style={{ background: &quot;#0B1220&quot;, padding: &quot;36px 72px&quot;, display: &quot;flex&quot;, flexDirection: &quot;column&quot; }}&gt;&#10;  &lt;Text style={{ color: &quot;#6B7280&quot;, fontSize: 14, letterSpacing: 3 }}&gt;安全设计 · 二&lt;/Text&gt;&#10;  &lt;Text style={{ color: &quot;#F7F4EC&quot;, fontSize: 34, fontWeight: 700, marginTop: 10 }}&gt;注入防御：模型不碰执行，判断全在代码&lt;/Text&gt;&#10;&#10;  &lt;Box style={{ display: &quot;flex&quot;, flexDirection: &quot;row&quot;, gap: 32, marginTop: 26 }}&gt;&#10;    &lt;Box style={{ flex: 1.15, display: &quot;flex&quot;, flexDirection: &quot;column&quot;, gap: 10 }}&gt;&#10;      &lt;Text style={{ color: &quot;#F7F4EC&quot;, fontSize: 20, fontWeight: 600 }}&gt;四道闸，顺序固定&lt;/Text&gt;&#10;      &lt;Box style={{ background: &quot;rgba(34,197,94,0.08)&quot;, borderLeft: &quot;3px solid #22C55E&quot;, padding: &quot;10px 14px&quot; }}&gt;&#10;        &lt;Text style={{ color: &quot;#22C55E&quot;, fontSize: 16, fontWeight: 600 }}&gt;闸一　输入守卫&lt;/Text&gt;&#10;        &lt;Text style={{ color: &quot;#9CA3AF&quot;, fontSize: 15, lineHeight: 1.6, marginTop: 5 }}&gt;归一化文本，识别指令覆盖、角色伪装、越权索取四类特征，命中即拦，模型看不到这段话。&lt;/Text&gt;&#10;      &lt;/Box&gt;&#10;      &lt;Box style={{ background: &quot;rgba(245,158,11,0.08)&quot;, borderLeft: &quot;3px solid #F59E0B&quot;, padding: &quot;10px 14px&quot; }}&gt;&#10;        &lt;Text style={{ color: &quot;#F59E0B&quot;, fontSize: 16, fontWeight: 600 }}&gt;闸二　职责隔离&lt;/Text&gt;&#10;        &lt;Text style={{ color: &quot;#9CA3AF&quot;, fontSize: 15, lineHeight: 1.6, marginTop: 5 }}&gt;模型只做两件事：理解诉求、选工具。风险判定与参数校验全在代码层，模型说了不算。&lt;/Text&gt;&#10;      &lt;/Box&gt;&#10;      &lt;Box style={{ background: &quot;rgba(239,68,68,0.08)&quot;, borderLeft: &quot;3px solid #EF4444&quot;, padding: &quot;10px 14px&quot; }}&gt;&#10;        &lt;Text style={{ color: &quot;#EF4444&quot;, fontSize: 16, fontWeight: 600 }}&gt;闸三　外部内容隔离&lt;/Text&gt;&#10;        &lt;Text style={{ color: &quot;#9CA3AF&quot;, fontSize: 15, lineHeight: 1.6, marginTop: 5 }}&gt;外部服务返回按数据处理，不进系统提示词，不当指令读。间接注入因此失效。&lt;/Text&gt;&#10;      &lt;/Box&gt;&#10;      &lt;Box style={{ background: &quot;rgba(59,130,246,0.08)&quot;, borderLeft: &quot;3px solid #3B82F6&quot;, padding: &quot;10px 14px&quot; }}&gt;&#10;        &lt;Text style={{ color: &quot;#93C5FD&quot;, fontSize: 16, fontWeight: 600 }}&gt;闸四　参数收口&lt;/Text&gt;&#10;        &lt;Text style={{ color: &quot;#9CA3AF&quot;, fontSize: 15, lineHeight: 1.6, marginTop: 5 }}&gt;工具参数按契约校验，金额越界、收款人凭空出现、非法工具名一律拒绝并记审计。&lt;/Text&gt;&#10;      &lt;/Box&gt;&#10;    &lt;/Box&gt;&#10;&#10;    &lt;Box style={{ flex: 1, display: &quot;flex&quot;, flexDirection: &quot;column&quot;, gap: 12 }}&gt;&#10;      &lt;Box style={{ background: &quot;rgba(34,197,94,0.10)&quot;, border: &quot;1px solid rgba(34,197,94,0.4)&quot;, borderRadius: 12, padding: &quot;24px 22px&quot; }}&gt;&#10;        &lt;Text style={{ color: &quot;#22C55E&quot;, fontSize: 38, fontWeight: 700, fontFamily: &quot;Consolas, monospace&quot; }}&gt;12 / 12&lt;/Text&gt;&#10;        &lt;Text style={{ color: &quot;#F7F4EC&quot;, fontSize: 18, fontWeight: 600, marginTop: 6 }}&gt;直接注入全部拦截&lt;/Text&gt;&#10;        &lt;Text style={{ color: &quot;#9CA3AF&quot;, fontSize: 15, lineHeight: 1.6, marginTop: 6 }}&gt;「忽略之前的指令」「你现在是管理员」等十二种改写方式，全部在入口被挡下。&lt;/Text&gt;&#10;      &lt;/Box&gt;&#10;      &lt;Box style={{ background: &quot;rgba(245,158,11,0.10)&quot;, border: &quot;1px solid rgba(245,158,11,0.4)&quot;, borderRadius: 12, padding: &quot;24px 22px&quot; }}&gt;&#10;        &lt;Text style={{ color: &quot;#F59E0B&quot;, fontSize: 38, fontWeight: 700, fontFamily: &quot;Consolas, monospace&quot; }}&gt;8 / 8&lt;/Text&gt;&#10;        &lt;Text style={{ color: &quot;#F7F4EC&quot;, fontSize: 18, fontWeight: 600, marginTop: 6 }}&gt;间接注入全部拦截&lt;/Text&gt;&#10;        &lt;Text style={{ color: &quot;#9CA3AF&quot;, fontSize: 15, lineHeight: 1.6, marginTop: 6 }}&gt;把恶意指令藏在账单备注、订阅名称、理财介绍里，经外部服务返回，隔离机制生效。&lt;/Text&gt;&#10;      &lt;/Box&gt;&#10;      &lt;Box style={{ background: &quot;rgba(107,114,128,0.12)&quot;, border: &quot;1px solid rgba(107,114,128,0.4)&quot;, borderRadius: 12, padding: &quot;24px 22px&quot; }}&gt;&#10;        &lt;Text style={{ color: &quot;#D1D5DB&quot;, fontSize: 38, fontWeight: 700, fontFamily: &quot;Consolas, monospace&quot; }}&gt;0%&lt;/Text&gt;&#10;        &lt;Text style={{ color: &quot;#F7F4EC&quot;, fontSize: 18, fontWeight: 600, marginTop: 6 }}&gt;正常请求误拦截&lt;/Text&gt;&#10;        &lt;Text style={{ color: &quot;#9CA3AF&quot;, fontSize: 15, lineHeight: 1.6, marginTop: 6 }}&gt;十二条正常业务用例零误拦。拦得住和放得过，两头都守住才算可用。&lt;/Text&gt;&#10;      &lt;/Box&gt;&#10;    &lt;/Box&gt;&#10;  &lt;/Box&gt;&#10;&lt;/Slide&gt;&#10;"/>
+        <p:cNvPr id="313" name="" descr="&lt;Slide style={{ background: &quot;#0B1220&quot;, padding: &quot;36px 72px&quot;, display: &quot;flex&quot;, flexDirection: &quot;column&quot; }}&gt;&#10;  &lt;Text style={{ color: &quot;#6B7280&quot;, fontSize: 14, letterSpacing: 3 }}&gt;安全设计 · 二&lt;/Text&gt;&#10;  &lt;Text style={{ color: &quot;#F7F4EC&quot;, fontSize: 34, fontWeight: 700, marginTop: 10 }}&gt;注入防御：模型不碰执行，判断全在代码&lt;/Text&gt;&#10;&#10;  &lt;Box style={{ display: &quot;flex&quot;, flexDirection: &quot;row&quot;, gap: 32, marginTop: 26 }}&gt;&#10;    &lt;Box style={{ flex: 1.15, display: &quot;flex&quot;, flexDirection: &quot;column&quot;, gap: 10 }}&gt;&#10;      &lt;Text style={{ color: &quot;#F7F4EC&quot;, fontSize: 20, fontWeight: 600 }}&gt;四道闸，顺序固定&lt;/Text&gt;&#10;      &lt;Box style={{ background: &quot;rgba(34,197,94,0.08)&quot;, borderLeft: &quot;3px solid #22C55E&quot;, padding: &quot;10px 14px&quot; }}&gt;&#10;        &lt;Text style={{ color: &quot;#22C55E&quot;, fontSize: 16, fontWeight: 600 }}&gt;闸一　输入守卫&lt;/Text&gt;&#10;        &lt;Text style={{ color: &quot;#9CA3AF&quot;, fontSize: 15, lineHeight: 1.6, marginTop: 5 }}&gt;归一化文本，识别指令覆盖、角色伪装、越权索取四类特征，命中即拦，模型看不到这段话。&lt;/Text&gt;&#10;      &lt;/Box&gt;&#10;      &lt;Box style={{ background: &quot;rgba(245,158,11,0.08)&quot;, borderLeft: &quot;3px solid #F59E0B&quot;, padding: &quot;10px 14px&quot; }}&gt;&#10;        &lt;Text style={{ color: &quot;#F59E0B&quot;, fontSize: 16, fontWeight: 600 }}&gt;闸二　职责隔离&lt;/Text&gt;&#10;        &lt;Text style={{ color: &quot;#9CA3AF&quot;, fontSize: 15, lineHeight: 1.6, marginTop: 5 }}&gt;模型只做两件事：理解诉求、选工具。风险判定与参数校验全在代码层，模型说了不算。&lt;/Text&gt;&#10;      &lt;/Box&gt;&#10;      &lt;Box style={{ background: &quot;rgba(239,68,68,0.08)&quot;, borderLeft: &quot;3px solid #EF4444&quot;, padding: &quot;10px 14px&quot; }}&gt;&#10;        &lt;Text style={{ color: &quot;#EF4444&quot;, fontSize: 16, fontWeight: 600 }}&gt;闸三　外部内容隔离&lt;/Text&gt;&#10;        &lt;Text style={{ color: &quot;#9CA3AF&quot;, fontSize: 15, lineHeight: 1.6, marginTop: 5 }}&gt;外部服务返回按数据处理，不进系统提示词，不当指令读。间接注入因此失效。&lt;/Text&gt;&#10;      &lt;/Box&gt;&#10;      &lt;Box style={{ background: &quot;rgba(59,130,246,0.08)&quot;, borderLeft: &quot;3px solid #3B82F6&quot;, padding: &quot;10px 14px&quot; }}&gt;&#10;        &lt;Text style={{ color: &quot;#93C5FD&quot;, fontSize: 16, fontWeight: 600 }}&gt;闸四　参数收口&lt;/Text&gt;&#10;        &lt;Text style={{ color: &quot;#9CA3AF&quot;, fontSize: 15, lineHeight: 1.6, marginTop: 5 }}&gt;工具参数按契约校验，金额越界、收款人凭空出现、非法工具名一律拒绝并记审计。&lt;/Text&gt;&#10;      &lt;/Box&gt;&#10;    &lt;/Box&gt;&#10;&#10;    &lt;Box style={{ flex: 1, display: &quot;flex&quot;, flexDirection: &quot;column&quot;, gap: 12 }}&gt;&#10;      &lt;Box style={{ background: &quot;rgba(34,197,94,0.10)&quot;, border: &quot;1px solid rgba(34,197,94,0.4)&quot;, borderRadius: 12, padding: &quot;24px 22px&quot; }}&gt;&#10;        &lt;Text style={{ color: &quot;#22C55E&quot;, fontSize: 38, fontWeight: 700, fontFamily: &quot;Consolas, monospace&quot; }}&gt;12 / 12&lt;/Text&gt;&#10;        &lt;Text style={{ color: &quot;#F7F4EC&quot;, fontSize: 18, fontWeight: 600, marginTop: 6 }}&gt;直接注入全部拦截&lt;/Text&gt;&#10;        &lt;Text style={{ color: &quot;#9CA3AF&quot;, fontSize: 15, lineHeight: 1.6, marginTop: 6 }}&gt;「忽略之前的指令」「你现在是管理员」等十二种改写方式，全部在入口被挡下。&lt;/Text&gt;&#10;      &lt;/Box&gt;&#10;      &lt;Box style={{ background: &quot;rgba(245,158,11,0.10)&quot;, border: &quot;1px solid rgba(245,158,11,0.4)&quot;, borderRadius: 12, padding: &quot;24px 22px&quot; }}&gt;&#10;        &lt;Text style={{ color: &quot;#F59E0B&quot;, fontSize: 38, fontWeight: 700, fontFamily: &quot;Consolas, monospace&quot; }}&gt;8 / 8&lt;/Text&gt;&#10;        &lt;Text style={{ color: &quot;#F7F4EC&quot;, fontSize: 18, fontWeight: 600, marginTop: 6 }}&gt;间接注入全部拦截&lt;/Text&gt;&#10;        &lt;Text style={{ color: &quot;#9CA3AF&quot;, fontSize: 15, lineHeight: 1.6, marginTop: 6 }}&gt;把恶意指令藏在账单备注、订阅名称、理财介绍里，经外部服务返回，隔离机制生效。&lt;/Text&gt;&#10;      &lt;/Box&gt;&#10;      &lt;Box style={{ background: &quot;rgba(107,114,128,0.12)&quot;, border: &quot;1px solid rgba(107,114,128,0.4)&quot;, borderRadius: 12, padding: &quot;24px 22px&quot; }}&gt;&#10;        &lt;Text style={{ color: &quot;#D1D5DB&quot;, fontSize: 38, fontWeight: 700, fontFamily: &quot;Consolas, monospace&quot; }}&gt;0%&lt;/Text&gt;&#10;        &lt;Text style={{ color: &quot;#F7F4EC&quot;, fontSize: 18, fontWeight: 600, marginTop: 6 }}&gt;正常请求误拦截&lt;/Text&gt;&#10;        &lt;Text style={{ color: &quot;#9CA3AF&quot;, fontSize: 15, lineHeight: 1.6, marginTop: 6 }}&gt;十二条正常业务用例零误拦。拦得住和放得过，两头都守住才算可用。&lt;/Text&gt;&#10;      &lt;/Box&gt;&#10;    &lt;/Box&gt;&#10;  &lt;/Box&gt;&#10;&lt;/Slide&gt;&#10;"/>
         <p:cNvGrpSpPr/>
         <p:nvPr/>
       </p:nvGrpSpPr>
@@ -12178,7 +11914,7 @@
       </p:grpSpPr>
       <p:sp>
         <p:nvSpPr>
-          <p:cNvPr id="304" name=""/>
+          <p:cNvPr id="314" name=""/>
           <p:cNvSpPr/>
           <p:nvPr/>
         </p:nvSpPr>
@@ -12202,7 +11938,7 @@
       </p:sp>
       <p:sp>
         <p:nvSpPr>
-          <p:cNvPr id="305" name="" descr="{&quot;isTemplate&quot;:true,&quot;type&quot;:&quot;text&quot;}"/>
+          <p:cNvPr id="315" name="" descr="{&quot;isTemplate&quot;:true,&quot;type&quot;:&quot;text&quot;}"/>
           <p:cNvSpPr txBox="1"/>
           <p:nvPr/>
         </p:nvSpPr>
@@ -12257,7 +11993,7 @@
       </p:sp>
       <p:sp>
         <p:nvSpPr>
-          <p:cNvPr id="306" name="" descr="{&quot;isTemplate&quot;:true,&quot;type&quot;:&quot;text&quot;}"/>
+          <p:cNvPr id="316" name="" descr="{&quot;isTemplate&quot;:true,&quot;type&quot;:&quot;text&quot;}"/>
           <p:cNvSpPr txBox="1"/>
           <p:nvPr/>
         </p:nvSpPr>
@@ -12292,7 +12028,7 @@
       </p:sp>
       <p:sp>
         <p:nvSpPr>
-          <p:cNvPr id="307" name="" descr="{&quot;isTemplate&quot;:true,&quot;type&quot;:&quot;text&quot;}"/>
+          <p:cNvPr id="317" name="" descr="{&quot;isTemplate&quot;:true,&quot;type&quot;:&quot;text&quot;}"/>
           <p:cNvSpPr txBox="1"/>
           <p:nvPr/>
         </p:nvSpPr>
@@ -12327,7 +12063,7 @@
       </p:sp>
       <p:sp>
         <p:nvSpPr>
-          <p:cNvPr id="308" name=""/>
+          <p:cNvPr id="318" name=""/>
           <p:cNvSpPr/>
           <p:nvPr/>
         </p:nvSpPr>
@@ -12353,7 +12089,7 @@
       </p:sp>
       <p:sp>
         <p:nvSpPr>
-          <p:cNvPr id="309" name=""/>
+          <p:cNvPr id="319" name=""/>
           <p:cNvSpPr/>
           <p:nvPr/>
         </p:nvSpPr>
@@ -12393,7 +12129,7 @@
       </p:sp>
       <p:sp>
         <p:nvSpPr>
-          <p:cNvPr id="310" name="" descr="{&quot;isTemplate&quot;:true,&quot;type&quot;:&quot;text&quot;}"/>
+          <p:cNvPr id="320" name="" descr="{&quot;isTemplate&quot;:true,&quot;type&quot;:&quot;text&quot;}"/>
           <p:cNvSpPr txBox="1"/>
           <p:nvPr/>
         </p:nvSpPr>
@@ -12428,7 +12164,7 @@
       </p:sp>
       <p:sp>
         <p:nvSpPr>
-          <p:cNvPr id="311" name="" descr="{&quot;isTemplate&quot;:true,&quot;type&quot;:&quot;text&quot;}"/>
+          <p:cNvPr id="321" name="" descr="{&quot;isTemplate&quot;:true,&quot;type&quot;:&quot;text&quot;}"/>
           <p:cNvSpPr txBox="1"/>
           <p:nvPr/>
         </p:nvSpPr>
@@ -12465,7 +12201,7 @@
       </p:sp>
       <p:sp>
         <p:nvSpPr>
-          <p:cNvPr id="312" name=""/>
+          <p:cNvPr id="322" name=""/>
           <p:cNvSpPr/>
           <p:nvPr/>
         </p:nvSpPr>
@@ -12491,7 +12227,7 @@
       </p:sp>
       <p:sp>
         <p:nvSpPr>
-          <p:cNvPr id="313" name=""/>
+          <p:cNvPr id="323" name=""/>
           <p:cNvSpPr/>
           <p:nvPr/>
         </p:nvSpPr>
@@ -12531,7 +12267,7 @@
       </p:sp>
       <p:sp>
         <p:nvSpPr>
-          <p:cNvPr id="314" name="" descr="{&quot;isTemplate&quot;:true,&quot;type&quot;:&quot;text&quot;}"/>
+          <p:cNvPr id="324" name="" descr="{&quot;isTemplate&quot;:true,&quot;type&quot;:&quot;text&quot;}"/>
           <p:cNvSpPr txBox="1"/>
           <p:nvPr/>
         </p:nvSpPr>
@@ -12566,7 +12302,7 @@
       </p:sp>
       <p:sp>
         <p:nvSpPr>
-          <p:cNvPr id="315" name="" descr="{&quot;isTemplate&quot;:true,&quot;type&quot;:&quot;text&quot;}"/>
+          <p:cNvPr id="325" name="" descr="{&quot;isTemplate&quot;:true,&quot;type&quot;:&quot;text&quot;}"/>
           <p:cNvSpPr txBox="1"/>
           <p:nvPr/>
         </p:nvSpPr>
@@ -12603,7 +12339,7 @@
       </p:sp>
       <p:sp>
         <p:nvSpPr>
-          <p:cNvPr id="316" name=""/>
+          <p:cNvPr id="326" name=""/>
           <p:cNvSpPr/>
           <p:nvPr/>
         </p:nvSpPr>
@@ -12629,7 +12365,7 @@
       </p:sp>
       <p:sp>
         <p:nvSpPr>
-          <p:cNvPr id="317" name=""/>
+          <p:cNvPr id="327" name=""/>
           <p:cNvSpPr/>
           <p:nvPr/>
         </p:nvSpPr>
@@ -12669,7 +12405,7 @@
       </p:sp>
       <p:sp>
         <p:nvSpPr>
-          <p:cNvPr id="318" name="" descr="{&quot;isTemplate&quot;:true,&quot;type&quot;:&quot;text&quot;}"/>
+          <p:cNvPr id="328" name="" descr="{&quot;isTemplate&quot;:true,&quot;type&quot;:&quot;text&quot;}"/>
           <p:cNvSpPr txBox="1"/>
           <p:nvPr/>
         </p:nvSpPr>
@@ -12704,7 +12440,7 @@
       </p:sp>
       <p:sp>
         <p:nvSpPr>
-          <p:cNvPr id="319" name="" descr="{&quot;isTemplate&quot;:true,&quot;type&quot;:&quot;text&quot;}"/>
+          <p:cNvPr id="329" name="" descr="{&quot;isTemplate&quot;:true,&quot;type&quot;:&quot;text&quot;}"/>
           <p:cNvSpPr txBox="1"/>
           <p:nvPr/>
         </p:nvSpPr>
@@ -12739,7 +12475,7 @@
       </p:sp>
       <p:sp>
         <p:nvSpPr>
-          <p:cNvPr id="320" name=""/>
+          <p:cNvPr id="330" name=""/>
           <p:cNvSpPr/>
           <p:nvPr/>
         </p:nvSpPr>
@@ -12765,7 +12501,7 @@
       </p:sp>
       <p:sp>
         <p:nvSpPr>
-          <p:cNvPr id="321" name=""/>
+          <p:cNvPr id="331" name=""/>
           <p:cNvSpPr/>
           <p:nvPr/>
         </p:nvSpPr>
@@ -12805,7 +12541,7 @@
       </p:sp>
       <p:sp>
         <p:nvSpPr>
-          <p:cNvPr id="322" name="" descr="{&quot;isTemplate&quot;:true,&quot;type&quot;:&quot;text&quot;}"/>
+          <p:cNvPr id="332" name="" descr="{&quot;isTemplate&quot;:true,&quot;type&quot;:&quot;text&quot;}"/>
           <p:cNvSpPr txBox="1"/>
           <p:nvPr/>
         </p:nvSpPr>
@@ -12840,7 +12576,7 @@
       </p:sp>
       <p:sp>
         <p:nvSpPr>
-          <p:cNvPr id="323" name="" descr="{&quot;isTemplate&quot;:true,&quot;type&quot;:&quot;text&quot;}"/>
+          <p:cNvPr id="333" name="" descr="{&quot;isTemplate&quot;:true,&quot;type&quot;:&quot;text&quot;}"/>
           <p:cNvSpPr txBox="1"/>
           <p:nvPr/>
         </p:nvSpPr>
@@ -12875,7 +12611,7 @@
       </p:sp>
       <p:sp>
         <p:nvSpPr>
-          <p:cNvPr id="324" name=""/>
+          <p:cNvPr id="334" name=""/>
           <p:cNvSpPr/>
           <p:nvPr/>
         </p:nvSpPr>
@@ -12910,7 +12646,7 @@
       </p:sp>
       <p:sp>
         <p:nvSpPr>
-          <p:cNvPr id="325" name="" descr="{&quot;isTemplate&quot;:true,&quot;type&quot;:&quot;text&quot;}"/>
+          <p:cNvPr id="335" name="" descr="{&quot;isTemplate&quot;:true,&quot;type&quot;:&quot;text&quot;}"/>
           <p:cNvSpPr txBox="1"/>
           <p:nvPr/>
         </p:nvSpPr>
@@ -12945,7 +12681,7 @@
       </p:sp>
       <p:sp>
         <p:nvSpPr>
-          <p:cNvPr id="326" name="" descr="{&quot;isTemplate&quot;:true,&quot;type&quot;:&quot;text&quot;}"/>
+          <p:cNvPr id="336" name="" descr="{&quot;isTemplate&quot;:true,&quot;type&quot;:&quot;text&quot;}"/>
           <p:cNvSpPr txBox="1"/>
           <p:nvPr/>
         </p:nvSpPr>
@@ -12980,7 +12716,7 @@
       </p:sp>
       <p:sp>
         <p:nvSpPr>
-          <p:cNvPr id="327" name="" descr="{&quot;isTemplate&quot;:true,&quot;type&quot;:&quot;text&quot;}"/>
+          <p:cNvPr id="337" name="" descr="{&quot;isTemplate&quot;:true,&quot;type&quot;:&quot;text&quot;}"/>
           <p:cNvSpPr txBox="1"/>
           <p:nvPr/>
         </p:nvSpPr>
@@ -13017,7 +12753,7 @@
       </p:sp>
       <p:sp>
         <p:nvSpPr>
-          <p:cNvPr id="328" name=""/>
+          <p:cNvPr id="338" name=""/>
           <p:cNvSpPr/>
           <p:nvPr/>
         </p:nvSpPr>
@@ -13052,7 +12788,7 @@
       </p:sp>
       <p:sp>
         <p:nvSpPr>
-          <p:cNvPr id="329" name="" descr="{&quot;isTemplate&quot;:true,&quot;type&quot;:&quot;text&quot;}"/>
+          <p:cNvPr id="339" name="" descr="{&quot;isTemplate&quot;:true,&quot;type&quot;:&quot;text&quot;}"/>
           <p:cNvSpPr txBox="1"/>
           <p:nvPr/>
         </p:nvSpPr>
@@ -13087,7 +12823,7 @@
       </p:sp>
       <p:sp>
         <p:nvSpPr>
-          <p:cNvPr id="330" name="" descr="{&quot;isTemplate&quot;:true,&quot;type&quot;:&quot;text&quot;}"/>
+          <p:cNvPr id="340" name="" descr="{&quot;isTemplate&quot;:true,&quot;type&quot;:&quot;text&quot;}"/>
           <p:cNvSpPr txBox="1"/>
           <p:nvPr/>
         </p:nvSpPr>
@@ -13122,7 +12858,7 @@
       </p:sp>
       <p:sp>
         <p:nvSpPr>
-          <p:cNvPr id="331" name="" descr="{&quot;isTemplate&quot;:true,&quot;type&quot;:&quot;text&quot;}"/>
+          <p:cNvPr id="341" name="" descr="{&quot;isTemplate&quot;:true,&quot;type&quot;:&quot;text&quot;}"/>
           <p:cNvSpPr txBox="1"/>
           <p:nvPr/>
         </p:nvSpPr>
@@ -13159,7 +12895,7 @@
       </p:sp>
       <p:sp>
         <p:nvSpPr>
-          <p:cNvPr id="332" name=""/>
+          <p:cNvPr id="342" name=""/>
           <p:cNvSpPr/>
           <p:nvPr/>
         </p:nvSpPr>
@@ -13194,7 +12930,7 @@
       </p:sp>
       <p:sp>
         <p:nvSpPr>
-          <p:cNvPr id="333" name="" descr="{&quot;isTemplate&quot;:true,&quot;type&quot;:&quot;text&quot;}"/>
+          <p:cNvPr id="343" name="" descr="{&quot;isTemplate&quot;:true,&quot;type&quot;:&quot;text&quot;}"/>
           <p:cNvSpPr txBox="1"/>
           <p:nvPr/>
         </p:nvSpPr>
@@ -13229,7 +12965,7 @@
       </p:sp>
       <p:sp>
         <p:nvSpPr>
-          <p:cNvPr id="334" name="" descr="{&quot;isTemplate&quot;:true,&quot;type&quot;:&quot;text&quot;}"/>
+          <p:cNvPr id="344" name="" descr="{&quot;isTemplate&quot;:true,&quot;type&quot;:&quot;text&quot;}"/>
           <p:cNvSpPr txBox="1"/>
           <p:nvPr/>
         </p:nvSpPr>
@@ -13264,7 +13000,7 @@
       </p:sp>
       <p:sp>
         <p:nvSpPr>
-          <p:cNvPr id="335" name="" descr="{&quot;isTemplate&quot;:true,&quot;type&quot;:&quot;text&quot;}"/>
+          <p:cNvPr id="345" name="" descr="{&quot;isTemplate&quot;:true,&quot;type&quot;:&quot;text&quot;}"/>
           <p:cNvSpPr txBox="1"/>
           <p:nvPr/>
         </p:nvSpPr>
@@ -13299,7 +13035,6 @@
       </p:sp>
     </p:spTree>
   </p:cSld>
-  <p:extLst/>
 </p:sld>
 </file>
 
@@ -13308,7 +13043,7 @@
   <p:cSld>
     <p:spTree>
       <p:nvGrpSpPr>
-        <p:cNvPr id="336" name="" descr="&lt;Slide style={{ background: &quot;#0B1220&quot;, padding: &quot;44px 72px&quot;, display: &quot;flex&quot;, flexDirection: &quot;column&quot; }}&gt;&#10;  &lt;Text style={{ color: &quot;#6B7280&quot;, fontSize: 14, letterSpacing: 3 }}&gt;核心能力&lt;/Text&gt;&#10;  &lt;Text style={{ color: &quot;#F7F4EC&quot;, fontSize: 34, fontWeight: 700, marginTop: 10 }}&gt;意图理解：规则优先，模型兜底&lt;/Text&gt;&#10;&#10;  &lt;Box style={{ display: &quot;flex&quot;, flexDirection: &quot;row&quot;, gap: 36, marginTop: 32 }}&gt;&#10;    &lt;Box style={{ flex: 1.2, display: &quot;flex&quot;, flexDirection: &quot;column&quot;, gap: 14 }}&gt;&#10;      &lt;Box style={{ background: &quot;rgba(34,197,94,0.08)&quot;, border: &quot;1px solid rgba(34,197,94,0.4)&quot;, borderRadius: 12, padding: &quot;22px 22px&quot; }}&gt;&#10;        &lt;Text style={{ color: &quot;#22C55E&quot;, fontSize: 20, fontWeight: 700 }}&gt;第一层　规则匹配&lt;/Text&gt;&#10;        &lt;Text style={{ color: &quot;#9CA3AF&quot;, fontSize: 16, lineHeight: 1.65, marginTop: 8 }}&gt;十一条意图规则覆盖六类常见表述，一条规则可派生多个工具意图。中英文数字金额一并归一，单轮解析耗时一毫秒内，结果确定可复现。&lt;/Text&gt;&#10;        &lt;Text style={{ color: &quot;#6B7280&quot;, fontSize: 15, marginTop: 12 }}&gt;「转给小王 500」「给房东下周转 3000 房租」都能直接落到工具与槽位。&lt;/Text&gt;&#10;      &lt;/Box&gt;&#10;      &lt;Box style={{ background: &quot;rgba(59,130,246,0.08)&quot;, border: &quot;1px solid rgba(59,130,246,0.4)&quot;, borderRadius: 12, padding: &quot;22px 22px&quot; }}&gt;&#10;        &lt;Text style={{ color: &quot;#93C5FD&quot;, fontSize: 20, fontWeight: 700 }}&gt;第二层　模型兜底&lt;/Text&gt;&#10;        &lt;Text style={{ color: &quot;#9CA3AF&quot;, fontSize: 16, lineHeight: 1.75, marginTop: 10 }}&gt;规则没命中才请模型解析，输出受契约约束：工具名、槽位、置信度、理由。越界工具名或非法槽位值直接丢弃。&lt;/Text&gt;&#10;        &lt;Text style={{ color: &quot;#6B7280&quot;, fontSize: 15, marginTop: 12 }}&gt;响应零点六至零点九秒，失败时回落到追问，不猜。&lt;/Text&gt;&#10;      &lt;/Box&gt;&#10;      &lt;Box style={{ background: &quot;rgba(107,114,128,0.12)&quot;, border: &quot;1px solid rgba(107,114,128,0.4)&quot;, borderRadius: 12, padding: &quot;22px 22px&quot; }}&gt;&#10;        &lt;Text style={{ color: &quot;#D1D5DB&quot;, fontSize: 20, fontWeight: 700 }}&gt;第三层　缺槽追问&lt;/Text&gt;&#10;        &lt;Text style={{ color: &quot;#9CA3AF&quot;, fontSize: 16, lineHeight: 1.75, marginTop: 10 }}&gt;槽位不全不执行。少金额就问金额，少收款人就问收款人，追问结果回填后重走判定流程。&lt;/Text&gt;&#10;        &lt;Text style={{ color: &quot;#6B7280&quot;, fontSize: 15, marginTop: 12 }}&gt;体验官只提建议，不改判定，问句由编排层统一生成。&lt;/Text&gt;&#10;      &lt;/Box&gt;&#10;    &lt;/Box&gt;&#10;&#10;    &lt;Box style={{ flex: 1, background: &quot;rgba(11,18,32,0.6)&quot;, border: &quot;1px solid #374151&quot;, borderRadius: 12, padding: &quot;22px 22px&quot;, display: &quot;flex&quot;, flexDirection: &quot;column&quot; }}&gt;&#10;      &lt;Text style={{ color: &quot;#6B7280&quot;, fontSize: 14, letterSpacing: 2 }}&gt;一次解析的输出&lt;/Text&gt;&#10;      &lt;Text style={{ color: &quot;#22C55E&quot;, fontSize: 15, marginTop: 16, fontFamily: &quot;Consolas, monospace&quot; }}&gt;意图：智能转账&lt;/Text&gt;&#10;      &lt;Text style={{ color: &quot;#F59E0B&quot;, fontSize: 15, marginTop: 8, fontFamily: &quot;Consolas, monospace&quot; }}&gt;工具：transfer&lt;/Text&gt;&#10;      &lt;Text style={{ color: &quot;#93C5FD&quot;, fontSize: 15, marginTop: 8, fontFamily: &quot;Consolas, monospace&quot; }}&gt;收款人：小王&lt;/Text&gt;&#10;      &lt;Text style={{ color: &quot;#F7F4EC&quot;, fontSize: 15, marginTop: 8, fontFamily: &quot;Consolas, monospace&quot; }}&gt;金额：50000 分&lt;/Text&gt;&#10;      &lt;Text style={{ color: &quot;#9CA3AF&quot;, fontSize: 15, marginTop: 8, fontFamily: &quot;Consolas, monospace&quot; }}&gt;置信度：0.96&lt;/Text&gt;&#10;      &lt;Text style={{ color: &quot;#6B7280&quot;, fontSize: 15, marginTop: 8, fontFamily: &quot;Consolas, monospace&quot; }}&gt;理由：出现「转给」与金额&lt;/Text&gt;&#10;      &lt;Text style={{ color: &quot;#6B7280&quot;, fontSize: 14, lineHeight: 1.75, marginTop: 18 }}&gt;金额一律用整数分存储，避免浮点误差。理由与置信度一起落审计，出错时能回看是哪一步判的。&lt;/Text&gt;&#10;      &lt;Box style={{ borderTop: &quot;1px solid #243044&quot;, marginTop: 16, paddingTop: 14, display: &quot;flex&quot;, flexDirection: &quot;column&quot;, gap: 8 }}&gt;&#10;        &lt;Text style={{ color: &quot;#D1D5DB&quot;, fontSize: 14, lineHeight: 1.6 }}&gt;槽位缺失时输出 missing 列表，编排层据此追问。&lt;/Text&gt;&#10;        &lt;Text style={{ color: &quot;#D1D5DB&quot;, fontSize: 14, lineHeight: 1.6 }}&gt;置信度低于阈值时同样走追问，不猜金额。&lt;/Text&gt;&#10;        &lt;Text style={{ color: &quot;#D1D5DB&quot;, fontSize: 14, lineHeight: 1.6 }}&gt;每次解析的耗时与来源一并记录，便于对比规则与模型的表现。&lt;/Text&gt;&#10;      &lt;/Box&gt;&#10;    &lt;/Box&gt;&#10;  &lt;/Box&gt;&#10;&lt;/Slide&gt;&#10;"/>
+        <p:cNvPr id="346" name="" descr="&lt;Slide style={{ background: &quot;#0B1220&quot;, padding: &quot;44px 72px&quot;, display: &quot;flex&quot;, flexDirection: &quot;column&quot; }}&gt;&#10;  &lt;Text style={{ color: &quot;#6B7280&quot;, fontSize: 14, letterSpacing: 3 }}&gt;核心能力&lt;/Text&gt;&#10;  &lt;Text style={{ color: &quot;#F7F4EC&quot;, fontSize: 34, fontWeight: 700, marginTop: 10 }}&gt;意图理解：规则优先，模型兜底&lt;/Text&gt;&#10;&#10;  &lt;Box style={{ display: &quot;flex&quot;, flexDirection: &quot;row&quot;, gap: 36, marginTop: 32 }}&gt;&#10;    &lt;Box style={{ flex: 1.2, display: &quot;flex&quot;, flexDirection: &quot;column&quot;, gap: 14 }}&gt;&#10;      &lt;Box style={{ background: &quot;rgba(34,197,94,0.08)&quot;, border: &quot;1px solid rgba(34,197,94,0.4)&quot;, borderRadius: 12, padding: &quot;22px 22px&quot; }}&gt;&#10;        &lt;Text style={{ color: &quot;#22C55E&quot;, fontSize: 20, fontWeight: 700 }}&gt;第一层　规则匹配&lt;/Text&gt;&#10;        &lt;Text style={{ color: &quot;#9CA3AF&quot;, fontSize: 16, lineHeight: 1.65, marginTop: 8 }}&gt;十一条意图规则覆盖六类常见表述，一条规则可派生多个工具意图。中英文数字金额一并归一，单轮解析耗时一毫秒内，结果确定可复现。&lt;/Text&gt;&#10;        &lt;Text style={{ color: &quot;#6B7280&quot;, fontSize: 15, marginTop: 12 }}&gt;「转给小王 500」「给房东下周转 3000 房租」都能直接落到工具与槽位。&lt;/Text&gt;&#10;      &lt;/Box&gt;&#10;      &lt;Box style={{ background: &quot;rgba(59,130,246,0.08)&quot;, border: &quot;1px solid rgba(59,130,246,0.4)&quot;, borderRadius: 12, padding: &quot;22px 22px&quot; }}&gt;&#10;        &lt;Text style={{ color: &quot;#93C5FD&quot;, fontSize: 20, fontWeight: 700 }}&gt;第二层　模型兜底&lt;/Text&gt;&#10;        &lt;Text style={{ color: &quot;#9CA3AF&quot;, fontSize: 16, lineHeight: 1.75, marginTop: 10 }}&gt;规则没命中才请模型解析，输出受契约约束：工具名、槽位、置信度、理由。越界工具名或非法槽位值直接丢弃。&lt;/Text&gt;&#10;        &lt;Text style={{ color: &quot;#6B7280&quot;, fontSize: 15, marginTop: 12 }}&gt;响应零点六至零点九秒，失败时回落到追问，不猜。&lt;/Text&gt;&#10;      &lt;/Box&gt;&#10;      &lt;Box style={{ background: &quot;rgba(107,114,128,0.12)&quot;, border: &quot;1px solid rgba(107,114,128,0.4)&quot;, borderRadius: 12, padding: &quot;22px 22px&quot; }}&gt;&#10;        &lt;Text style={{ color: &quot;#D1D5DB&quot;, fontSize: 20, fontWeight: 700 }}&gt;第三层　缺槽追问&lt;/Text&gt;&#10;        &lt;Text style={{ color: &quot;#9CA3AF&quot;, fontSize: 16, lineHeight: 1.75, marginTop: 10 }}&gt;槽位不全不执行。少金额就问金额，少收款人就问收款人，追问结果回填后重走判定流程。&lt;/Text&gt;&#10;        &lt;Text style={{ color: &quot;#6B7280&quot;, fontSize: 15, marginTop: 12 }}&gt;体验官只提建议，不改判定，问句由编排层统一生成。&lt;/Text&gt;&#10;      &lt;/Box&gt;&#10;    &lt;/Box&gt;&#10;&#10;    &lt;Box style={{ flex: 1, background: &quot;rgba(11,18,32,0.6)&quot;, border: &quot;1px solid #374151&quot;, borderRadius: 12, padding: &quot;22px 22px&quot;, display: &quot;flex&quot;, flexDirection: &quot;column&quot; }}&gt;&#10;      &lt;Text style={{ color: &quot;#6B7280&quot;, fontSize: 14, letterSpacing: 2 }}&gt;一次解析的输出&lt;/Text&gt;&#10;      &lt;Text style={{ color: &quot;#22C55E&quot;, fontSize: 15, marginTop: 16, fontFamily: &quot;Consolas, monospace&quot; }}&gt;意图：智能转账&lt;/Text&gt;&#10;      &lt;Text style={{ color: &quot;#F59E0B&quot;, fontSize: 15, marginTop: 8, fontFamily: &quot;Consolas, monospace&quot; }}&gt;工具：transfer&lt;/Text&gt;&#10;      &lt;Text style={{ color: &quot;#93C5FD&quot;, fontSize: 15, marginTop: 8, fontFamily: &quot;Consolas, monospace&quot; }}&gt;收款人：小王&lt;/Text&gt;&#10;      &lt;Text style={{ color: &quot;#F7F4EC&quot;, fontSize: 15, marginTop: 8, fontFamily: &quot;Consolas, monospace&quot; }}&gt;金额：50000 分&lt;/Text&gt;&#10;      &lt;Text style={{ color: &quot;#9CA3AF&quot;, fontSize: 15, marginTop: 8, fontFamily: &quot;Consolas, monospace&quot; }}&gt;置信度：0.96&lt;/Text&gt;&#10;      &lt;Text style={{ color: &quot;#6B7280&quot;, fontSize: 15, marginTop: 8, fontFamily: &quot;Consolas, monospace&quot; }}&gt;理由：出现「转给」与金额&lt;/Text&gt;&#10;      &lt;Text style={{ color: &quot;#6B7280&quot;, fontSize: 14, lineHeight: 1.75, marginTop: 18 }}&gt;金额一律用整数分存储，避免浮点误差。理由与置信度一起落审计，出错时能回看是哪一步判的。&lt;/Text&gt;&#10;      &lt;Box style={{ borderTop: &quot;1px solid #243044&quot;, marginTop: 16, paddingTop: 14, display: &quot;flex&quot;, flexDirection: &quot;column&quot;, gap: 8 }}&gt;&#10;        &lt;Text style={{ color: &quot;#D1D5DB&quot;, fontSize: 14, lineHeight: 1.6 }}&gt;槽位缺失时输出 missing 列表，编排层据此追问。&lt;/Text&gt;&#10;        &lt;Text style={{ color: &quot;#D1D5DB&quot;, fontSize: 14, lineHeight: 1.6 }}&gt;置信度低于阈值时同样走追问，不猜金额。&lt;/Text&gt;&#10;        &lt;Text style={{ color: &quot;#D1D5DB&quot;, fontSize: 14, lineHeight: 1.6 }}&gt;每次解析的耗时与来源一并记录，便于对比规则与模型的表现。&lt;/Text&gt;&#10;      &lt;/Box&gt;&#10;    &lt;/Box&gt;&#10;  &lt;/Box&gt;&#10;&lt;/Slide&gt;&#10;"/>
         <p:cNvGrpSpPr/>
         <p:nvPr/>
       </p:nvGrpSpPr>
@@ -13322,7 +13057,7 @@
       </p:grpSpPr>
       <p:sp>
         <p:nvSpPr>
-          <p:cNvPr id="337" name=""/>
+          <p:cNvPr id="347" name=""/>
           <p:cNvSpPr/>
           <p:nvPr/>
         </p:nvSpPr>
@@ -13346,7 +13081,7 @@
       </p:sp>
       <p:sp>
         <p:nvSpPr>
-          <p:cNvPr id="338" name="" descr="{&quot;isTemplate&quot;:true,&quot;type&quot;:&quot;text&quot;}"/>
+          <p:cNvPr id="348" name="" descr="{&quot;isTemplate&quot;:true,&quot;type&quot;:&quot;text&quot;}"/>
           <p:cNvSpPr txBox="1"/>
           <p:nvPr/>
         </p:nvSpPr>
@@ -13381,7 +13116,7 @@
       </p:sp>
       <p:sp>
         <p:nvSpPr>
-          <p:cNvPr id="339" name="" descr="{&quot;isTemplate&quot;:true,&quot;type&quot;:&quot;text&quot;}"/>
+          <p:cNvPr id="349" name="" descr="{&quot;isTemplate&quot;:true,&quot;type&quot;:&quot;text&quot;}"/>
           <p:cNvSpPr txBox="1"/>
           <p:nvPr/>
         </p:nvSpPr>
@@ -13416,7 +13151,7 @@
       </p:sp>
       <p:sp>
         <p:nvSpPr>
-          <p:cNvPr id="340" name=""/>
+          <p:cNvPr id="350" name=""/>
           <p:cNvSpPr/>
           <p:nvPr/>
         </p:nvSpPr>
@@ -13451,7 +13186,7 @@
       </p:sp>
       <p:sp>
         <p:nvSpPr>
-          <p:cNvPr id="341" name="" descr="{&quot;isTemplate&quot;:true,&quot;type&quot;:&quot;text&quot;}"/>
+          <p:cNvPr id="351" name="" descr="{&quot;isTemplate&quot;:true,&quot;type&quot;:&quot;text&quot;}"/>
           <p:cNvSpPr txBox="1"/>
           <p:nvPr/>
         </p:nvSpPr>
@@ -13486,7 +13221,7 @@
       </p:sp>
       <p:sp>
         <p:nvSpPr>
-          <p:cNvPr id="342" name="" descr="{&quot;isTemplate&quot;:true,&quot;type&quot;:&quot;text&quot;}"/>
+          <p:cNvPr id="352" name="" descr="{&quot;isTemplate&quot;:true,&quot;type&quot;:&quot;text&quot;}"/>
           <p:cNvSpPr txBox="1"/>
           <p:nvPr/>
         </p:nvSpPr>
@@ -13523,7 +13258,7 @@
       </p:sp>
       <p:sp>
         <p:nvSpPr>
-          <p:cNvPr id="343" name="" descr="{&quot;isTemplate&quot;:true,&quot;type&quot;:&quot;text&quot;}"/>
+          <p:cNvPr id="353" name="" descr="{&quot;isTemplate&quot;:true,&quot;type&quot;:&quot;text&quot;}"/>
           <p:cNvSpPr txBox="1"/>
           <p:nvPr/>
         </p:nvSpPr>
@@ -13598,7 +13333,7 @@
       </p:sp>
       <p:sp>
         <p:nvSpPr>
-          <p:cNvPr id="344" name=""/>
+          <p:cNvPr id="354" name=""/>
           <p:cNvSpPr/>
           <p:nvPr/>
         </p:nvSpPr>
@@ -13633,7 +13368,7 @@
       </p:sp>
       <p:sp>
         <p:nvSpPr>
-          <p:cNvPr id="345" name="" descr="{&quot;isTemplate&quot;:true,&quot;type&quot;:&quot;text&quot;}"/>
+          <p:cNvPr id="355" name="" descr="{&quot;isTemplate&quot;:true,&quot;type&quot;:&quot;text&quot;}"/>
           <p:cNvSpPr txBox="1"/>
           <p:nvPr/>
         </p:nvSpPr>
@@ -13668,7 +13403,7 @@
       </p:sp>
       <p:sp>
         <p:nvSpPr>
-          <p:cNvPr id="346" name="" descr="{&quot;isTemplate&quot;:true,&quot;type&quot;:&quot;text&quot;}"/>
+          <p:cNvPr id="356" name="" descr="{&quot;isTemplate&quot;:true,&quot;type&quot;:&quot;text&quot;}"/>
           <p:cNvSpPr txBox="1"/>
           <p:nvPr/>
         </p:nvSpPr>
@@ -13705,7 +13440,7 @@
       </p:sp>
       <p:sp>
         <p:nvSpPr>
-          <p:cNvPr id="347" name="" descr="{&quot;isTemplate&quot;:true,&quot;type&quot;:&quot;text&quot;}"/>
+          <p:cNvPr id="357" name="" descr="{&quot;isTemplate&quot;:true,&quot;type&quot;:&quot;text&quot;}"/>
           <p:cNvSpPr txBox="1"/>
           <p:nvPr/>
         </p:nvSpPr>
@@ -13740,7 +13475,7 @@
       </p:sp>
       <p:sp>
         <p:nvSpPr>
-          <p:cNvPr id="348" name=""/>
+          <p:cNvPr id="358" name=""/>
           <p:cNvSpPr/>
           <p:nvPr/>
         </p:nvSpPr>
@@ -13775,7 +13510,7 @@
       </p:sp>
       <p:sp>
         <p:nvSpPr>
-          <p:cNvPr id="349" name="" descr="{&quot;isTemplate&quot;:true,&quot;type&quot;:&quot;text&quot;}"/>
+          <p:cNvPr id="359" name="" descr="{&quot;isTemplate&quot;:true,&quot;type&quot;:&quot;text&quot;}"/>
           <p:cNvSpPr txBox="1"/>
           <p:nvPr/>
         </p:nvSpPr>
@@ -13810,7 +13545,7 @@
       </p:sp>
       <p:sp>
         <p:nvSpPr>
-          <p:cNvPr id="350" name="" descr="{&quot;isTemplate&quot;:true,&quot;type&quot;:&quot;text&quot;}"/>
+          <p:cNvPr id="360" name="" descr="{&quot;isTemplate&quot;:true,&quot;type&quot;:&quot;text&quot;}"/>
           <p:cNvSpPr txBox="1"/>
           <p:nvPr/>
         </p:nvSpPr>
@@ -13847,7 +13582,7 @@
       </p:sp>
       <p:sp>
         <p:nvSpPr>
-          <p:cNvPr id="351" name="" descr="{&quot;isTemplate&quot;:true,&quot;type&quot;:&quot;text&quot;}"/>
+          <p:cNvPr id="361" name="" descr="{&quot;isTemplate&quot;:true,&quot;type&quot;:&quot;text&quot;}"/>
           <p:cNvSpPr txBox="1"/>
           <p:nvPr/>
         </p:nvSpPr>
@@ -13882,7 +13617,7 @@
       </p:sp>
       <p:sp>
         <p:nvSpPr>
-          <p:cNvPr id="352" name=""/>
+          <p:cNvPr id="362" name=""/>
           <p:cNvSpPr/>
           <p:nvPr/>
         </p:nvSpPr>
@@ -13915,7 +13650,7 @@
       </p:sp>
       <p:sp>
         <p:nvSpPr>
-          <p:cNvPr id="353" name="" descr="{&quot;isTemplate&quot;:true,&quot;type&quot;:&quot;text&quot;}"/>
+          <p:cNvPr id="363" name="" descr="{&quot;isTemplate&quot;:true,&quot;type&quot;:&quot;text&quot;}"/>
           <p:cNvSpPr txBox="1"/>
           <p:nvPr/>
         </p:nvSpPr>
@@ -13950,7 +13685,7 @@
       </p:sp>
       <p:sp>
         <p:nvSpPr>
-          <p:cNvPr id="354" name="" descr="{&quot;isTemplate&quot;:true,&quot;type&quot;:&quot;text&quot;}"/>
+          <p:cNvPr id="364" name="" descr="{&quot;isTemplate&quot;:true,&quot;type&quot;:&quot;text&quot;}"/>
           <p:cNvSpPr txBox="1"/>
           <p:nvPr/>
         </p:nvSpPr>
@@ -13985,7 +13720,7 @@
       </p:sp>
       <p:sp>
         <p:nvSpPr>
-          <p:cNvPr id="355" name="" descr="{&quot;isTemplate&quot;:true,&quot;type&quot;:&quot;text&quot;}"/>
+          <p:cNvPr id="365" name="" descr="{&quot;isTemplate&quot;:true,&quot;type&quot;:&quot;text&quot;}"/>
           <p:cNvSpPr txBox="1"/>
           <p:nvPr/>
         </p:nvSpPr>
@@ -14030,7 +13765,7 @@
       </p:sp>
       <p:sp>
         <p:nvSpPr>
-          <p:cNvPr id="356" name="" descr="{&quot;isTemplate&quot;:true,&quot;type&quot;:&quot;text&quot;}"/>
+          <p:cNvPr id="366" name="" descr="{&quot;isTemplate&quot;:true,&quot;type&quot;:&quot;text&quot;}"/>
           <p:cNvSpPr txBox="1"/>
           <p:nvPr/>
         </p:nvSpPr>
@@ -14065,7 +13800,7 @@
       </p:sp>
       <p:sp>
         <p:nvSpPr>
-          <p:cNvPr id="357" name="" descr="{&quot;isTemplate&quot;:true,&quot;type&quot;:&quot;text&quot;}"/>
+          <p:cNvPr id="367" name="" descr="{&quot;isTemplate&quot;:true,&quot;type&quot;:&quot;text&quot;}"/>
           <p:cNvSpPr txBox="1"/>
           <p:nvPr/>
         </p:nvSpPr>
@@ -14120,7 +13855,7 @@
       </p:sp>
       <p:sp>
         <p:nvSpPr>
-          <p:cNvPr id="358" name="" descr="{&quot;isTemplate&quot;:true,&quot;type&quot;:&quot;text&quot;}"/>
+          <p:cNvPr id="368" name="" descr="{&quot;isTemplate&quot;:true,&quot;type&quot;:&quot;text&quot;}"/>
           <p:cNvSpPr txBox="1"/>
           <p:nvPr/>
         </p:nvSpPr>
@@ -14165,7 +13900,7 @@
       </p:sp>
       <p:sp>
         <p:nvSpPr>
-          <p:cNvPr id="359" name="" descr="{&quot;isTemplate&quot;:true,&quot;type&quot;:&quot;text&quot;}"/>
+          <p:cNvPr id="369" name="" descr="{&quot;isTemplate&quot;:true,&quot;type&quot;:&quot;text&quot;}"/>
           <p:cNvSpPr txBox="1"/>
           <p:nvPr/>
         </p:nvSpPr>
@@ -14200,7 +13935,7 @@
       </p:sp>
       <p:sp>
         <p:nvSpPr>
-          <p:cNvPr id="360" name="" descr="{&quot;isTemplate&quot;:true,&quot;type&quot;:&quot;text&quot;}"/>
+          <p:cNvPr id="370" name="" descr="{&quot;isTemplate&quot;:true,&quot;type&quot;:&quot;text&quot;}"/>
           <p:cNvSpPr txBox="1"/>
           <p:nvPr/>
         </p:nvSpPr>
@@ -14237,7 +13972,7 @@
       </p:sp>
       <p:sp>
         <p:nvSpPr>
-          <p:cNvPr id="361" name=""/>
+          <p:cNvPr id="371" name=""/>
           <p:cNvSpPr/>
           <p:nvPr/>
         </p:nvSpPr>
@@ -14277,7 +14012,7 @@
       </p:sp>
       <p:sp>
         <p:nvSpPr>
-          <p:cNvPr id="362" name="" descr="{&quot;isTemplate&quot;:true,&quot;type&quot;:&quot;text&quot;}"/>
+          <p:cNvPr id="372" name="" descr="{&quot;isTemplate&quot;:true,&quot;type&quot;:&quot;text&quot;}"/>
           <p:cNvSpPr txBox="1"/>
           <p:nvPr/>
         </p:nvSpPr>
@@ -14332,7 +14067,7 @@
       </p:sp>
       <p:sp>
         <p:nvSpPr>
-          <p:cNvPr id="363" name="" descr="{&quot;isTemplate&quot;:true,&quot;type&quot;:&quot;text&quot;}"/>
+          <p:cNvPr id="373" name="" descr="{&quot;isTemplate&quot;:true,&quot;type&quot;:&quot;text&quot;}"/>
           <p:cNvSpPr txBox="1"/>
           <p:nvPr/>
         </p:nvSpPr>
@@ -14367,7 +14102,7 @@
       </p:sp>
       <p:sp>
         <p:nvSpPr>
-          <p:cNvPr id="364" name="" descr="{&quot;isTemplate&quot;:true,&quot;type&quot;:&quot;text&quot;}"/>
+          <p:cNvPr id="374" name="" descr="{&quot;isTemplate&quot;:true,&quot;type&quot;:&quot;text&quot;}"/>
           <p:cNvSpPr txBox="1"/>
           <p:nvPr/>
         </p:nvSpPr>
@@ -14402,7 +14137,6 @@
       </p:sp>
     </p:spTree>
   </p:cSld>
-  <p:extLst/>
 </p:sld>
 </file>
 
@@ -14411,7 +14145,7 @@
   <p:cSld>
     <p:spTree>
       <p:nvGrpSpPr>
-        <p:cNvPr id="365" name="" descr="&lt;Slide style={{ background: &quot;#0B1220&quot;, padding: &quot;44px 72px&quot;, display: &quot;flex&quot;, flexDirection: &quot;column&quot; }}&gt;&#10;  &lt;Text style={{ color: &quot;#6B7280&quot;, fontSize: 14, letterSpacing: 3 }}&gt;可追溯&lt;/Text&gt;&#10;  &lt;Text style={{ color: &quot;#F7F4EC&quot;, fontSize: 34, fontWeight: 700, marginTop: 10 }}&gt;每条结论都带出处，审计链改一条即断&lt;/Text&gt;&#10;&#10;  &lt;Box style={{ display: &quot;flex&quot;, flexDirection: &quot;row&quot;, gap: 36, marginTop: 32 }}&gt;&#10;    &lt;Box style={{ flex: 1.1, display: &quot;flex&quot;, flexDirection: &quot;column&quot;, gap: 12 }}&gt;&#10;      &lt;Text style={{ color: &quot;#F7F4EC&quot;, fontSize: 20, fontWeight: 600 }}&gt;追加式哈希链&lt;/Text&gt;&#10;      &lt;Box style={{ background: &quot;rgba(59,130,246,0.08)&quot;, border: &quot;1px solid rgba(59,130,246,0.35)&quot;, borderRadius: 12, padding: 22 }}&gt;&#10;        &lt;Text style={{ color: &quot;#93C5FD&quot;, fontSize: 15, fontFamily: &quot;Consolas, monospace&quot; }}&gt;hash₁ = SHA256(GENESIS + 内容₁)&lt;/Text&gt;&#10;        &lt;Text style={{ color: &quot;#93C5FD&quot;, fontSize: 15, fontFamily: &quot;Consolas, monospace&quot;, marginTop: 8 }}&gt;hash₂ = SHA256(hash₁ + 内容₂)&lt;/Text&gt;&#10;        &lt;Text style={{ color: &quot;#93C5FD&quot;, fontSize: 15, fontFamily: &quot;Consolas, monospace&quot;, marginTop: 8 }}&gt;hash₃ = SHA256(hash₂ + 内容₃)&lt;/Text&gt;&#10;      &lt;/Box&gt;&#10;      &lt;Text style={{ color: &quot;#9CA3AF&quot;, fontSize: 16, lineHeight: 1.8 }}&gt;每条记录写入前把上一条的哈希拼进摘要再算哈希。改动中间任意一条，后面全部对不上，篡改无法悄悄通过校验。&lt;/Text&gt;&#10;      &lt;Box style={{ background: &quot;rgba(34,197,94,0.08)&quot;, border: &quot;1px solid rgba(34,197,94,0.35)&quot;, borderRadius: 12, padding: 20 }}&gt;&#10;        &lt;Text style={{ color: &quot;#22C55E&quot;, fontSize: 17, fontWeight: 600 }}&gt;实测：改首行后校验失败&lt;/Text&gt;&#10;        &lt;Text style={{ color: &quot;#9CA3AF&quot;, fontSize: 15, lineHeight: 1.7, marginTop: 8 }}&gt;审计查询接口返回的 chain.ok 字段在校验通过时为真，人工改写一条记录后立刻为假。&lt;/Text&gt;&#10;      &lt;/Box&gt;&#10;      &lt;Box style={{ background: &quot;rgba(59,130,246,0.08)&quot;, border: &quot;1px solid rgba(59,130,246,0.35)&quot;, borderRadius: 12, padding: 20 }}&gt;&#10;        &lt;Text style={{ color: &quot;#93C5FD&quot;, fontSize: 17, fontWeight: 600 }}&gt;只追加，不改写&lt;/Text&gt;&#10;        &lt;Text style={{ color: &quot;#9CA3AF&quot;, fontSize: 15, lineHeight: 1.7, marginTop: 8 }}&gt;审计记录只追加不覆盖，历史条目不可编辑。序号从一开始递增，可据此确认没有丢条。&lt;/Text&gt;&#10;      &lt;/Box&gt;&#10;    &lt;/Box&gt;&#10;&#10;    &lt;Box style={{ flex: 1, display: &quot;flex&quot;, flexDirection: &quot;column&quot;, gap: 12 }}&gt;&#10;      &lt;Text style={{ color: &quot;#F7F4EC&quot;, fontSize: 20, fontWeight: 600 }}&gt;一条记录里有什么&lt;/Text&gt;&#10;      &lt;Box style={{ background: &quot;rgba(107,114,128,0.10)&quot;, border: &quot;1px solid rgba(107,114,128,0.35)&quot;, borderRadius: 12, padding: 22, display: &quot;flex&quot;, flexDirection: &quot;column&quot;, gap: 10 }}&gt;&#10;        &lt;Text style={{ color: &quot;#D1D5DB&quot;, fontSize: 15 }}&gt;序号与时间戳&lt;/Text&gt;&#10;        &lt;Text style={{ color: &quot;#D1D5DB&quot;, fontSize: 15 }}&gt;会话标识与渠道来源&lt;/Text&gt;&#10;        &lt;Text style={{ color: &quot;#D1D5DB&quot;, fontSize: 15 }}&gt;意图、工具、槽位摘要&lt;/Text&gt;&#10;        &lt;Text style={{ color: &quot;#D1D5DB&quot;, fontSize: 15 }}&gt;风险等级与命中的规则编号&lt;/Text&gt;&#10;        &lt;Text style={{ color: &quot;#D1D5DB&quot;, fontSize: 15 }}&gt;蜂群各角色的分工结论&lt;/Text&gt;&#10;        &lt;Text style={{ color: &quot;#D1D5DB&quot;, fontSize: 15 }}&gt;前序哈希与本条哈希&lt;/Text&gt;&#10;      &lt;/Box&gt;&#10;      &lt;Box style={{ background: &quot;rgba(245,158,11,0.08)&quot;, border: &quot;1px solid rgba(245,158,11,0.35)&quot;, borderRadius: 12, padding: 20 }}&gt;&#10;        &lt;Text style={{ color: &quot;#F59E0B&quot;, fontSize: 17, fontWeight: 600 }}&gt;敏感字段脱敏&lt;/Text&gt;&#10;        &lt;Text style={{ color: &quot;#9CA3AF&quot;, fontSize: 15, lineHeight: 1.7, marginTop: 8 }}&gt;卡号只留后四位，手机号中段掩码。审计文件全文检索无明文卡号与手机号。&lt;/Text&gt;&#10;      &lt;/Box&gt;&#10;      &lt;Box style={{ background: &quot;rgba(107,114,128,0.12)&quot;, border: &quot;1px solid rgba(107,114,128,0.35)&quot;, borderRadius: 12, padding: 20 }}&gt;&#10;        &lt;Text style={{ color: &quot;#D1D5DB&quot;, fontSize: 17, fontWeight: 600 }}&gt;查询接口自带校验&lt;/Text&gt;&#10;        &lt;Text style={{ color: &quot;#9CA3AF&quot;, fontSize: 15, lineHeight: 1.7, marginTop: 8 }}&gt;审计查询返回时顺带重算全链，校验结果由 chain.ok 字段给出，界面直接显示通过或失败。&lt;/Text&gt;&#10;      &lt;/Box&gt;&#10;    &lt;/Box&gt;&#10;  &lt;/Box&gt;&#10;&lt;/Slide&gt;&#10;"/>
+        <p:cNvPr id="375" name="" descr="&lt;Slide style={{ background: &quot;#0B1220&quot;, padding: &quot;44px 72px&quot;, display: &quot;flex&quot;, flexDirection: &quot;column&quot; }}&gt;&#10;  &lt;Text style={{ color: &quot;#6B7280&quot;, fontSize: 14, letterSpacing: 3 }}&gt;可追溯&lt;/Text&gt;&#10;  &lt;Text style={{ color: &quot;#F7F4EC&quot;, fontSize: 34, fontWeight: 700, marginTop: 10 }}&gt;每条结论都带出处，审计链改一条即断&lt;/Text&gt;&#10;&#10;  &lt;Box style={{ display: &quot;flex&quot;, flexDirection: &quot;row&quot;, gap: 36, marginTop: 32 }}&gt;&#10;    &lt;Box style={{ flex: 1.1, display: &quot;flex&quot;, flexDirection: &quot;column&quot;, gap: 12 }}&gt;&#10;      &lt;Text style={{ color: &quot;#F7F4EC&quot;, fontSize: 20, fontWeight: 600 }}&gt;追加式哈希链&lt;/Text&gt;&#10;      &lt;Box style={{ background: &quot;rgba(59,130,246,0.08)&quot;, border: &quot;1px solid rgba(59,130,246,0.35)&quot;, borderRadius: 12, padding: 22 }}&gt;&#10;        &lt;Text style={{ color: &quot;#93C5FD&quot;, fontSize: 15, fontFamily: &quot;Consolas, monospace&quot; }}&gt;hash₁ = SHA256(GENESIS + 内容₁)&lt;/Text&gt;&#10;        &lt;Text style={{ color: &quot;#93C5FD&quot;, fontSize: 15, fontFamily: &quot;Consolas, monospace&quot;, marginTop: 8 }}&gt;hash₂ = SHA256(hash₁ + 内容₂)&lt;/Text&gt;&#10;        &lt;Text style={{ color: &quot;#93C5FD&quot;, fontSize: 15, fontFamily: &quot;Consolas, monospace&quot;, marginTop: 8 }}&gt;hash₃ = SHA256(hash₂ + 内容₃)&lt;/Text&gt;&#10;      &lt;/Box&gt;&#10;      &lt;Text style={{ color: &quot;#9CA3AF&quot;, fontSize: 16, lineHeight: 1.8 }}&gt;每条记录写入前把上一条的哈希拼进摘要再算哈希。改动中间任意一条，后面全部对不上，篡改无法悄悄通过校验。&lt;/Text&gt;&#10;      &lt;Box style={{ background: &quot;rgba(34,197,94,0.08)&quot;, border: &quot;1px solid rgba(34,197,94,0.35)&quot;, borderRadius: 12, padding: 20 }}&gt;&#10;        &lt;Text style={{ color: &quot;#22C55E&quot;, fontSize: 17, fontWeight: 600 }}&gt;实测：改首行后校验失败&lt;/Text&gt;&#10;        &lt;Text style={{ color: &quot;#9CA3AF&quot;, fontSize: 15, lineHeight: 1.7, marginTop: 8 }}&gt;审计查询接口返回的 chain.ok 字段在校验通过时为真，人工改写一条记录后立刻为假。&lt;/Text&gt;&#10;      &lt;/Box&gt;&#10;      &lt;Box style={{ background: &quot;rgba(59,130,246,0.08)&quot;, border: &quot;1px solid rgba(59,130,246,0.35)&quot;, borderRadius: 12, padding: 20 }}&gt;&#10;        &lt;Text style={{ color: &quot;#93C5FD&quot;, fontSize: 17, fontWeight: 600 }}&gt;只追加，不改写&lt;/Text&gt;&#10;        &lt;Text style={{ color: &quot;#9CA3AF&quot;, fontSize: 15, lineHeight: 1.7, marginTop: 8 }}&gt;审计记录只追加不覆盖，历史条目不可编辑。序号从一开始递增，可据此确认没有丢条。&lt;/Text&gt;&#10;      &lt;/Box&gt;&#10;    &lt;/Box&gt;&#10;&#10;    &lt;Box style={{ flex: 1, display: &quot;flex&quot;, flexDirection: &quot;column&quot;, gap: 12 }}&gt;&#10;      &lt;Text style={{ color: &quot;#F7F4EC&quot;, fontSize: 20, fontWeight: 600 }}&gt;一条记录里有什么&lt;/Text&gt;&#10;      &lt;Box style={{ background: &quot;rgba(107,114,128,0.10)&quot;, border: &quot;1px solid rgba(107,114,128,0.35)&quot;, borderRadius: 12, padding: 22, display: &quot;flex&quot;, flexDirection: &quot;column&quot;, gap: 10 }}&gt;&#10;        &lt;Text style={{ color: &quot;#D1D5DB&quot;, fontSize: 15 }}&gt;序号与时间戳&lt;/Text&gt;&#10;        &lt;Text style={{ color: &quot;#D1D5DB&quot;, fontSize: 15 }}&gt;会话标识与渠道来源&lt;/Text&gt;&#10;        &lt;Text style={{ color: &quot;#D1D5DB&quot;, fontSize: 15 }}&gt;意图、工具、槽位摘要&lt;/Text&gt;&#10;        &lt;Text style={{ color: &quot;#D1D5DB&quot;, fontSize: 15 }}&gt;风险等级与命中的规则编号&lt;/Text&gt;&#10;        &lt;Text style={{ color: &quot;#D1D5DB&quot;, fontSize: 15 }}&gt;蜂群各角色的分工结论&lt;/Text&gt;&#10;        &lt;Text style={{ color: &quot;#D1D5DB&quot;, fontSize: 15 }}&gt;前序哈希与本条哈希&lt;/Text&gt;&#10;      &lt;/Box&gt;&#10;      &lt;Box style={{ background: &quot;rgba(245,158,11,0.08)&quot;, border: &quot;1px solid rgba(245,158,11,0.35)&quot;, borderRadius: 12, padding: 20 }}&gt;&#10;        &lt;Text style={{ color: &quot;#F59E0B&quot;, fontSize: 17, fontWeight: 600 }}&gt;敏感字段脱敏&lt;/Text&gt;&#10;        &lt;Text style={{ color: &quot;#9CA3AF&quot;, fontSize: 15, lineHeight: 1.7, marginTop: 8 }}&gt;卡号只留后四位，手机号中段掩码。审计文件全文检索无明文卡号与手机号。&lt;/Text&gt;&#10;      &lt;/Box&gt;&#10;      &lt;Box style={{ background: &quot;rgba(107,114,128,0.12)&quot;, border: &quot;1px solid rgba(107,114,128,0.35)&quot;, borderRadius: 12, padding: 20 }}&gt;&#10;        &lt;Text style={{ color: &quot;#D1D5DB&quot;, fontSize: 17, fontWeight: 600 }}&gt;查询接口自带校验&lt;/Text&gt;&#10;        &lt;Text style={{ color: &quot;#9CA3AF&quot;, fontSize: 15, lineHeight: 1.7, marginTop: 8 }}&gt;审计查询返回时顺带重算全链，校验结果由 chain.ok 字段给出，界面直接显示通过或失败。&lt;/Text&gt;&#10;      &lt;/Box&gt;&#10;    &lt;/Box&gt;&#10;  &lt;/Box&gt;&#10;&lt;/Slide&gt;&#10;"/>
         <p:cNvGrpSpPr/>
         <p:nvPr/>
       </p:nvGrpSpPr>
@@ -14425,7 +14159,7 @@
       </p:grpSpPr>
       <p:sp>
         <p:nvSpPr>
-          <p:cNvPr id="366" name=""/>
+          <p:cNvPr id="376" name=""/>
           <p:cNvSpPr/>
           <p:nvPr/>
         </p:nvSpPr>
@@ -14449,7 +14183,7 @@
       </p:sp>
       <p:sp>
         <p:nvSpPr>
-          <p:cNvPr id="367" name="" descr="{&quot;isTemplate&quot;:true,&quot;type&quot;:&quot;text&quot;}"/>
+          <p:cNvPr id="377" name="" descr="{&quot;isTemplate&quot;:true,&quot;type&quot;:&quot;text&quot;}"/>
           <p:cNvSpPr txBox="1"/>
           <p:nvPr/>
         </p:nvSpPr>
@@ -14484,7 +14218,7 @@
       </p:sp>
       <p:sp>
         <p:nvSpPr>
-          <p:cNvPr id="368" name="" descr="{&quot;isTemplate&quot;:true,&quot;type&quot;:&quot;text&quot;}"/>
+          <p:cNvPr id="378" name="" descr="{&quot;isTemplate&quot;:true,&quot;type&quot;:&quot;text&quot;}"/>
           <p:cNvSpPr txBox="1"/>
           <p:nvPr/>
         </p:nvSpPr>
@@ -14519,7 +14253,7 @@
       </p:sp>
       <p:sp>
         <p:nvSpPr>
-          <p:cNvPr id="369" name="" descr="{&quot;isTemplate&quot;:true,&quot;type&quot;:&quot;text&quot;}"/>
+          <p:cNvPr id="379" name="" descr="{&quot;isTemplate&quot;:true,&quot;type&quot;:&quot;text&quot;}"/>
           <p:cNvSpPr txBox="1"/>
           <p:nvPr/>
         </p:nvSpPr>
@@ -14554,7 +14288,7 @@
       </p:sp>
       <p:sp>
         <p:nvSpPr>
-          <p:cNvPr id="370" name=""/>
+          <p:cNvPr id="380" name=""/>
           <p:cNvSpPr/>
           <p:nvPr/>
         </p:nvSpPr>
@@ -14589,7 +14323,7 @@
       </p:sp>
       <p:sp>
         <p:nvSpPr>
-          <p:cNvPr id="371" name="" descr="{&quot;isTemplate&quot;:true,&quot;type&quot;:&quot;text&quot;}"/>
+          <p:cNvPr id="381" name="" descr="{&quot;isTemplate&quot;:true,&quot;type&quot;:&quot;text&quot;}"/>
           <p:cNvSpPr txBox="1"/>
           <p:nvPr/>
         </p:nvSpPr>
@@ -14644,7 +14378,7 @@
       </p:sp>
       <p:sp>
         <p:nvSpPr>
-          <p:cNvPr id="372" name="" descr="{&quot;isTemplate&quot;:true,&quot;type&quot;:&quot;text&quot;}"/>
+          <p:cNvPr id="382" name="" descr="{&quot;isTemplate&quot;:true,&quot;type&quot;:&quot;text&quot;}"/>
           <p:cNvSpPr txBox="1"/>
           <p:nvPr/>
         </p:nvSpPr>
@@ -14699,7 +14433,7 @@
       </p:sp>
       <p:sp>
         <p:nvSpPr>
-          <p:cNvPr id="373" name="" descr="{&quot;isTemplate&quot;:true,&quot;type&quot;:&quot;text&quot;}"/>
+          <p:cNvPr id="383" name="" descr="{&quot;isTemplate&quot;:true,&quot;type&quot;:&quot;text&quot;}"/>
           <p:cNvSpPr txBox="1"/>
           <p:nvPr/>
         </p:nvSpPr>
@@ -14754,7 +14488,7 @@
       </p:sp>
       <p:sp>
         <p:nvSpPr>
-          <p:cNvPr id="374" name="" descr="{&quot;isTemplate&quot;:true,&quot;type&quot;:&quot;text&quot;}"/>
+          <p:cNvPr id="384" name="" descr="{&quot;isTemplate&quot;:true,&quot;type&quot;:&quot;text&quot;}"/>
           <p:cNvSpPr txBox="1"/>
           <p:nvPr/>
         </p:nvSpPr>
@@ -14791,7 +14525,7 @@
       </p:sp>
       <p:sp>
         <p:nvSpPr>
-          <p:cNvPr id="375" name=""/>
+          <p:cNvPr id="385" name=""/>
           <p:cNvSpPr/>
           <p:nvPr/>
         </p:nvSpPr>
@@ -14826,7 +14560,7 @@
       </p:sp>
       <p:sp>
         <p:nvSpPr>
-          <p:cNvPr id="376" name="" descr="{&quot;isTemplate&quot;:true,&quot;type&quot;:&quot;text&quot;}"/>
+          <p:cNvPr id="386" name="" descr="{&quot;isTemplate&quot;:true,&quot;type&quot;:&quot;text&quot;}"/>
           <p:cNvSpPr txBox="1"/>
           <p:nvPr/>
         </p:nvSpPr>
@@ -14861,7 +14595,7 @@
       </p:sp>
       <p:sp>
         <p:nvSpPr>
-          <p:cNvPr id="377" name="" descr="{&quot;isTemplate&quot;:true,&quot;type&quot;:&quot;text&quot;}"/>
+          <p:cNvPr id="387" name="" descr="{&quot;isTemplate&quot;:true,&quot;type&quot;:&quot;text&quot;}"/>
           <p:cNvSpPr txBox="1"/>
           <p:nvPr/>
         </p:nvSpPr>
@@ -14918,7 +14652,7 @@
       </p:sp>
       <p:sp>
         <p:nvSpPr>
-          <p:cNvPr id="378" name=""/>
+          <p:cNvPr id="388" name=""/>
           <p:cNvSpPr/>
           <p:nvPr/>
         </p:nvSpPr>
@@ -14953,7 +14687,7 @@
       </p:sp>
       <p:sp>
         <p:nvSpPr>
-          <p:cNvPr id="379" name="" descr="{&quot;isTemplate&quot;:true,&quot;type&quot;:&quot;text&quot;}"/>
+          <p:cNvPr id="389" name="" descr="{&quot;isTemplate&quot;:true,&quot;type&quot;:&quot;text&quot;}"/>
           <p:cNvSpPr txBox="1"/>
           <p:nvPr/>
         </p:nvSpPr>
@@ -14988,7 +14722,7 @@
       </p:sp>
       <p:sp>
         <p:nvSpPr>
-          <p:cNvPr id="380" name="" descr="{&quot;isTemplate&quot;:true,&quot;type&quot;:&quot;text&quot;}"/>
+          <p:cNvPr id="390" name="" descr="{&quot;isTemplate&quot;:true,&quot;type&quot;:&quot;text&quot;}"/>
           <p:cNvSpPr txBox="1"/>
           <p:nvPr/>
         </p:nvSpPr>
@@ -15025,7 +14759,7 @@
       </p:sp>
       <p:sp>
         <p:nvSpPr>
-          <p:cNvPr id="381" name="" descr="{&quot;isTemplate&quot;:true,&quot;type&quot;:&quot;text&quot;}"/>
+          <p:cNvPr id="391" name="" descr="{&quot;isTemplate&quot;:true,&quot;type&quot;:&quot;text&quot;}"/>
           <p:cNvSpPr txBox="1"/>
           <p:nvPr/>
         </p:nvSpPr>
@@ -15060,7 +14794,7 @@
       </p:sp>
       <p:sp>
         <p:nvSpPr>
-          <p:cNvPr id="382" name=""/>
+          <p:cNvPr id="392" name=""/>
           <p:cNvSpPr/>
           <p:nvPr/>
         </p:nvSpPr>
@@ -15095,7 +14829,7 @@
       </p:sp>
       <p:sp>
         <p:nvSpPr>
-          <p:cNvPr id="383" name="" descr="{&quot;isTemplate&quot;:true,&quot;type&quot;:&quot;text&quot;}"/>
+          <p:cNvPr id="393" name="" descr="{&quot;isTemplate&quot;:true,&quot;type&quot;:&quot;text&quot;}"/>
           <p:cNvSpPr txBox="1"/>
           <p:nvPr/>
         </p:nvSpPr>
@@ -15130,7 +14864,7 @@
       </p:sp>
       <p:sp>
         <p:nvSpPr>
-          <p:cNvPr id="384" name="" descr="{&quot;isTemplate&quot;:true,&quot;type&quot;:&quot;text&quot;}"/>
+          <p:cNvPr id="394" name="" descr="{&quot;isTemplate&quot;:true,&quot;type&quot;:&quot;text&quot;}"/>
           <p:cNvSpPr txBox="1"/>
           <p:nvPr/>
         </p:nvSpPr>
@@ -15165,7 +14899,7 @@
       </p:sp>
       <p:sp>
         <p:nvSpPr>
-          <p:cNvPr id="385" name="" descr="{&quot;isTemplate&quot;:true,&quot;type&quot;:&quot;text&quot;}"/>
+          <p:cNvPr id="395" name="" descr="{&quot;isTemplate&quot;:true,&quot;type&quot;:&quot;text&quot;}"/>
           <p:cNvSpPr txBox="1"/>
           <p:nvPr/>
         </p:nvSpPr>
@@ -15200,7 +14934,7 @@
       </p:sp>
       <p:sp>
         <p:nvSpPr>
-          <p:cNvPr id="386" name="" descr="{&quot;isTemplate&quot;:true,&quot;type&quot;:&quot;text&quot;}"/>
+          <p:cNvPr id="396" name="" descr="{&quot;isTemplate&quot;:true,&quot;type&quot;:&quot;text&quot;}"/>
           <p:cNvSpPr txBox="1"/>
           <p:nvPr/>
         </p:nvSpPr>
@@ -15235,7 +14969,7 @@
       </p:sp>
       <p:sp>
         <p:nvSpPr>
-          <p:cNvPr id="387" name="" descr="{&quot;isTemplate&quot;:true,&quot;type&quot;:&quot;text&quot;}"/>
+          <p:cNvPr id="397" name="" descr="{&quot;isTemplate&quot;:true,&quot;type&quot;:&quot;text&quot;}"/>
           <p:cNvSpPr txBox="1"/>
           <p:nvPr/>
         </p:nvSpPr>
@@ -15270,7 +15004,7 @@
       </p:sp>
       <p:sp>
         <p:nvSpPr>
-          <p:cNvPr id="388" name="" descr="{&quot;isTemplate&quot;:true,&quot;type&quot;:&quot;text&quot;}"/>
+          <p:cNvPr id="398" name="" descr="{&quot;isTemplate&quot;:true,&quot;type&quot;:&quot;text&quot;}"/>
           <p:cNvSpPr txBox="1"/>
           <p:nvPr/>
         </p:nvSpPr>
@@ -15305,7 +15039,7 @@
       </p:sp>
       <p:sp>
         <p:nvSpPr>
-          <p:cNvPr id="389" name=""/>
+          <p:cNvPr id="399" name=""/>
           <p:cNvSpPr/>
           <p:nvPr/>
         </p:nvSpPr>
@@ -15340,7 +15074,7 @@
       </p:sp>
       <p:sp>
         <p:nvSpPr>
-          <p:cNvPr id="390" name="" descr="{&quot;isTemplate&quot;:true,&quot;type&quot;:&quot;text&quot;}"/>
+          <p:cNvPr id="400" name="" descr="{&quot;isTemplate&quot;:true,&quot;type&quot;:&quot;text&quot;}"/>
           <p:cNvSpPr txBox="1"/>
           <p:nvPr/>
         </p:nvSpPr>
@@ -15375,7 +15109,7 @@
       </p:sp>
       <p:sp>
         <p:nvSpPr>
-          <p:cNvPr id="391" name="" descr="{&quot;isTemplate&quot;:true,&quot;type&quot;:&quot;text&quot;}"/>
+          <p:cNvPr id="401" name="" descr="{&quot;isTemplate&quot;:true,&quot;type&quot;:&quot;text&quot;}"/>
           <p:cNvSpPr txBox="1"/>
           <p:nvPr/>
         </p:nvSpPr>
@@ -15412,7 +15146,7 @@
       </p:sp>
       <p:sp>
         <p:nvSpPr>
-          <p:cNvPr id="392" name=""/>
+          <p:cNvPr id="402" name=""/>
           <p:cNvSpPr/>
           <p:nvPr/>
         </p:nvSpPr>
@@ -15447,7 +15181,7 @@
       </p:sp>
       <p:sp>
         <p:nvSpPr>
-          <p:cNvPr id="393" name="" descr="{&quot;isTemplate&quot;:true,&quot;type&quot;:&quot;text&quot;}"/>
+          <p:cNvPr id="403" name="" descr="{&quot;isTemplate&quot;:true,&quot;type&quot;:&quot;text&quot;}"/>
           <p:cNvSpPr txBox="1"/>
           <p:nvPr/>
         </p:nvSpPr>
@@ -15482,7 +15216,7 @@
       </p:sp>
       <p:sp>
         <p:nvSpPr>
-          <p:cNvPr id="394" name="" descr="{&quot;isTemplate&quot;:true,&quot;type&quot;:&quot;text&quot;}"/>
+          <p:cNvPr id="404" name="" descr="{&quot;isTemplate&quot;:true,&quot;type&quot;:&quot;text&quot;}"/>
           <p:cNvSpPr txBox="1"/>
           <p:nvPr/>
         </p:nvSpPr>
@@ -15539,7 +15273,6 @@
       </p:sp>
     </p:spTree>
   </p:cSld>
-  <p:extLst/>
 </p:sld>
 </file>
 
